--- a/lectures/week-12/index.pptx
+++ b/lectures/week-12/index.pptx
@@ -9,6 +9,7 @@
     <p:sldId id="257" r:id="rId3"/>
     <p:sldId id="258" r:id="rId4"/>
     <p:sldId id="259" r:id="rId5"/>
+    <p:sldId id="260" r:id="rId6"/>
   </p:sldIdLst>
   <p:sldSz cx="9144000" cy="5143500" type="screen16x9"/>
   <p:notesSz cx="6858000" cy="9144000"/>
@@ -3208,6 +3209,57 @@
       </p:grpSpPr>
       <p:sp>
         <p:nvSpPr>
+          <p:cNvPr id="3" name="Content Placeholder 2"/>
+          <p:cNvSpPr>
+            <a:spLocks noGrp="1"/>
+          </p:cNvSpPr>
+          <p:nvPr>
+            <p:ph idx="1"/>
+          </p:nvPr>
+        </p:nvSpPr>
+        <p:spPr/>
+        <p:txBody>
+          <a:bodyPr/>
+          <a:lstStyle/>
+          <a:p>
+            <a:pPr lvl="0" indent="0" marL="0">
+              <a:buNone/>
+            </a:pPr>
+            <a:r>
+              <a:rPr b="1"/>
+              <a:t>Draft Material:</a:t>
+            </a:r>
+            <a:r>
+              <a:rPr/>
+              <a:t> This content is under development and subject to change.</a:t>
+            </a:r>
+          </a:p>
+        </p:txBody>
+      </p:sp>
+    </p:spTree>
+  </p:cSld>
+</p:sld>
+</file>
+
+<file path=ppt/slides/slide3.xml><?xml version="1.0" encoding="utf-8"?>
+<p:sld xmlns:a="http://schemas.openxmlformats.org/drawingml/2006/main" xmlns:r="http://schemas.openxmlformats.org/officeDocument/2006/relationships" xmlns:p="http://schemas.openxmlformats.org/presentationml/2006/main">
+  <p:cSld>
+    <p:spTree>
+      <p:nvGrpSpPr>
+        <p:cNvPr id="1" name=""/>
+        <p:cNvGrpSpPr/>
+        <p:nvPr/>
+      </p:nvGrpSpPr>
+      <p:grpSpPr>
+        <a:xfrm>
+          <a:off x="0" y="0"/>
+          <a:ext cx="0" cy="0"/>
+          <a:chOff x="0" y="0"/>
+          <a:chExt cx="0" cy="0"/>
+        </a:xfrm>
+      </p:grpSpPr>
+      <p:sp>
+        <p:nvSpPr>
           <p:cNvPr id="2" name="Title 1"/>
           <p:cNvSpPr>
             <a:spLocks noGrp="1"/>
@@ -3425,7 +3477,7 @@
 </p:sld>
 </file>
 
-<file path=ppt/slides/slide3.xml><?xml version="1.0" encoding="utf-8"?>
+<file path=ppt/slides/slide4.xml><?xml version="1.0" encoding="utf-8"?>
 <p:sld xmlns:a="http://schemas.openxmlformats.org/drawingml/2006/main" xmlns:r="http://schemas.openxmlformats.org/officeDocument/2006/relationships" xmlns:p="http://schemas.openxmlformats.org/presentationml/2006/main">
   <p:cSld>
     <p:spTree>
@@ -3497,7 +3549,7 @@
 </p:sld>
 </file>
 
-<file path=ppt/slides/slide4.xml><?xml version="1.0" encoding="utf-8"?>
+<file path=ppt/slides/slide5.xml><?xml version="1.0" encoding="utf-8"?>
 <p:sld xmlns:a="http://schemas.openxmlformats.org/drawingml/2006/main" xmlns:r="http://schemas.openxmlformats.org/officeDocument/2006/relationships" xmlns:p="http://schemas.openxmlformats.org/presentationml/2006/main">
   <p:cSld>
     <p:spTree>

--- a/lectures/week-12/index.pptx
+++ b/lectures/week-12/index.pptx
@@ -9,7 +9,6 @@
     <p:sldId id="257" r:id="rId3"/>
     <p:sldId id="258" r:id="rId4"/>
     <p:sldId id="259" r:id="rId5"/>
-    <p:sldId id="260" r:id="rId6"/>
   </p:sldIdLst>
   <p:sldSz cx="9144000" cy="5143500" type="screen16x9"/>
   <p:notesSz cx="6858000" cy="9144000"/>
@@ -3119,7 +3118,7 @@
             </a:pPr>
             <a:r>
               <a:rPr/>
-              <a:t>Sequential Decision Making</a:t>
+              <a:t>Multi-Objective Optimization</a:t>
             </a:r>
           </a:p>
         </p:txBody>
@@ -3283,195 +3282,82 @@
           </a:p>
         </p:txBody>
       </p:sp>
-      <mc:AlternateContent xmlns:mc="http://schemas.openxmlformats.org/markup-compatibility/2006">
-        <mc:Choice xmlns:a14="http://schemas.microsoft.com/office/drawing/2010/main" Requires="a14">
-          <p:sp>
-            <p:nvSpPr>
-              <p:cNvPr id="3" name="Content Placeholder 2"/>
-              <p:cNvSpPr>
-                <a:spLocks noGrp="1"/>
-              </p:cNvSpPr>
-              <p:nvPr>
-                <p:ph idx="1"/>
-              </p:nvPr>
-            </p:nvSpPr>
-            <p:spPr/>
-            <p:txBody>
-              <a:bodyPr/>
-              <a:lstStyle/>
-              <a:p>
-                <a:pPr lvl="0" indent="0" marL="0">
-                  <a:buNone/>
-                </a:pPr>
-                <a:r>
-                  <a:rPr/>
-                  <a:t>This lecture is under development.</a:t>
-                </a:r>
-              </a:p>
-              <a:p>
-                <a:pPr lvl="0" indent="0" marL="0">
-                  <a:buNone/>
-                </a:pPr>
-                <a:r>
-                  <a:rPr/>
-                  <a:t>Content to adapt from previous course:</a:t>
-                </a:r>
-              </a:p>
-              <a:p>
-                <a:pPr lvl="0"/>
-                <a:r>
-                  <a:rPr/>
-                  <a:t>Static vs. sequential decision framing</a:t>
-                </a:r>
-              </a:p>
-              <a:p>
-                <a:pPr lvl="0"/>
-                <a:r>
-                  <a:rPr/>
-                  <a:t>State evolution: </a:t>
-                </a:r>
-                <a14:m>
-                  <m:oMath xmlns:m="http://schemas.openxmlformats.org/officeDocument/2006/math">
-                    <m:sSub>
-                      <m:e>
-                        <m:r>
-                          <m:rPr>
-                            <m:sty m:val="b"/>
-                          </m:rPr>
-                          <m:t>x</m:t>
-                        </m:r>
-                      </m:e>
-                      <m:sub>
-                        <m:r>
-                          <m:t>t</m:t>
-                        </m:r>
-                        <m:r>
-                          <m:rPr>
-                            <m:sty m:val="p"/>
-                          </m:rPr>
-                          <m:t>+</m:t>
-                        </m:r>
-                        <m:r>
-                          <m:t>1</m:t>
-                        </m:r>
-                      </m:sub>
-                    </m:sSub>
-                    <m:r>
-                      <m:rPr>
-                        <m:sty m:val="p"/>
-                      </m:rPr>
-                      <m:t>=</m:t>
-                    </m:r>
-                    <m:sSub>
-                      <m:e>
-                        <m:r>
-                          <m:t>f</m:t>
-                        </m:r>
-                      </m:e>
-                      <m:sub>
-                        <m:r>
-                          <m:t>t</m:t>
-                        </m:r>
-                      </m:sub>
-                    </m:sSub>
-                    <m:d>
-                      <m:dPr>
-                        <m:begChr m:val="("/>
-                        <m:sepChr m:val=""/>
-                        <m:endChr m:val=")"/>
-                        <m:grow/>
-                      </m:dPr>
-                      <m:e>
-                        <m:sSub>
-                          <m:e>
-                            <m:r>
-                              <m:rPr>
-                                <m:sty m:val="b"/>
-                              </m:rPr>
-                              <m:t>x</m:t>
-                            </m:r>
-                          </m:e>
-                          <m:sub>
-                            <m:r>
-                              <m:t>t</m:t>
-                            </m:r>
-                          </m:sub>
-                        </m:sSub>
-                        <m:r>
-                          <m:rPr>
-                            <m:sty m:val="p"/>
-                          </m:rPr>
-                          <m:t>,</m:t>
-                        </m:r>
-                        <m:sSub>
-                          <m:e>
-                            <m:r>
-                              <m:t>a</m:t>
-                            </m:r>
-                          </m:e>
-                          <m:sub>
-                            <m:r>
-                              <m:t>t</m:t>
-                            </m:r>
-                          </m:sub>
-                        </m:sSub>
-                        <m:r>
-                          <m:rPr>
-                            <m:sty m:val="p"/>
-                          </m:rPr>
-                          <m:t>,</m:t>
-                        </m:r>
-                        <m:sSub>
-                          <m:e>
-                            <m:r>
-                              <m:t>e</m:t>
-                            </m:r>
-                          </m:e>
-                          <m:sub>
-                            <m:r>
-                              <m:t>t</m:t>
-                            </m:r>
-                            <m:r>
-                              <m:rPr>
-                                <m:sty m:val="p"/>
-                              </m:rPr>
-                              <m:t>+</m:t>
-                            </m:r>
-                            <m:r>
-                              <m:t>1</m:t>
-                            </m:r>
-                          </m:sub>
-                        </m:sSub>
-                      </m:e>
-                    </m:d>
-                  </m:oMath>
-                </a14:m>
-              </a:p>
-              <a:p>
-                <a:pPr lvl="0"/>
-                <a:r>
-                  <a:rPr/>
-                  <a:t>Reward and value functions</a:t>
-                </a:r>
-              </a:p>
-              <a:p>
-                <a:pPr lvl="0"/>
-                <a:r>
-                  <a:rPr/>
-                  <a:t>Solution methods: open loop, dynamic programming, policy search</a:t>
-                </a:r>
-              </a:p>
-              <a:p>
-                <a:pPr lvl="0"/>
-                <a:r>
-                  <a:rPr/>
-                  <a:t>Real options and the value of flexibility</a:t>
-                </a:r>
-              </a:p>
-            </p:txBody>
-          </p:sp>
-        </mc:Choice>
-      </mc:AlternateContent>
+      <p:sp>
+        <p:nvSpPr>
+          <p:cNvPr id="3" name="Content Placeholder 2"/>
+          <p:cNvSpPr>
+            <a:spLocks noGrp="1"/>
+          </p:cNvSpPr>
+          <p:nvPr>
+            <p:ph idx="1"/>
+          </p:nvPr>
+        </p:nvSpPr>
+        <p:spPr/>
+        <p:txBody>
+          <a:bodyPr/>
+          <a:lstStyle/>
+          <a:p>
+            <a:pPr lvl="0" indent="0" marL="0">
+              <a:buNone/>
+            </a:pPr>
+            <a:r>
+              <a:rPr/>
+              <a:t>This lecture is under development.</a:t>
+            </a:r>
+          </a:p>
+          <a:p>
+            <a:pPr lvl="0" indent="0" marL="0">
+              <a:buNone/>
+            </a:pPr>
+            <a:r>
+              <a:rPr/>
+              <a:t>Content to adapt from previous course:</a:t>
+            </a:r>
+          </a:p>
+          <a:p>
+            <a:pPr lvl="0"/>
+            <a:r>
+              <a:rPr/>
+              <a:t>Enriched notation diagram</a:t>
+            </a:r>
+          </a:p>
+          <a:p>
+            <a:pPr lvl="0"/>
+            <a:r>
+              <a:rPr/>
+              <a:t>Dominance definition and examples</a:t>
+            </a:r>
+          </a:p>
+          <a:p>
+            <a:pPr lvl="0"/>
+            <a:r>
+              <a:rPr/>
+              <a:t>Pareto front visualization</a:t>
+            </a:r>
+          </a:p>
+          <a:p>
+            <a:pPr lvl="0"/>
+            <a:r>
+              <a:rPr/>
+              <a:t>Weighted sum approach and limitations</a:t>
+            </a:r>
+          </a:p>
+          <a:p>
+            <a:pPr lvl="0"/>
+            <a:r>
+              <a:rPr/>
+              <a:t>Genetic algorithms / MOEAs</a:t>
+            </a:r>
+          </a:p>
+          <a:p>
+            <a:pPr lvl="0"/>
+            <a:r>
+              <a:rPr/>
+              <a:t>Convergence diagnostics (hypervolume)</a:t>
+            </a:r>
+          </a:p>
+        </p:txBody>
+      </p:sp>
     </p:spTree>
   </p:cSld>
 </p:sld>
@@ -3514,122 +3400,7 @@
             </a:pPr>
             <a:r>
               <a:rPr/>
-              <a:t>Preparation</a:t>
-            </a:r>
-          </a:p>
-        </p:txBody>
-      </p:sp>
-      <p:sp>
-        <p:nvSpPr>
-          <p:cNvPr id="3" name="Content Placeholder 2"/>
-          <p:cNvSpPr>
-            <a:spLocks noGrp="1"/>
-          </p:cNvSpPr>
-          <p:nvPr>
-            <p:ph idx="1"/>
-          </p:nvPr>
-        </p:nvSpPr>
-        <p:spPr/>
-        <p:txBody>
-          <a:bodyPr/>
-          <a:lstStyle/>
-          <a:p>
-            <a:pPr lvl="0" indent="0" marL="0">
-              <a:buNone/>
-            </a:pPr>
-            <a:r>
-              <a:rPr/>
-              <a:t>Read Herman et al. (2020), in particular focusing on …</a:t>
-            </a:r>
-          </a:p>
-        </p:txBody>
-      </p:sp>
-    </p:spTree>
-  </p:cSld>
-</p:sld>
-</file>
-
-<file path=ppt/slides/slide5.xml><?xml version="1.0" encoding="utf-8"?>
-<p:sld xmlns:a="http://schemas.openxmlformats.org/drawingml/2006/main" xmlns:r="http://schemas.openxmlformats.org/officeDocument/2006/relationships" xmlns:p="http://schemas.openxmlformats.org/presentationml/2006/main">
-  <p:cSld>
-    <p:spTree>
-      <p:nvGrpSpPr>
-        <p:cNvPr id="1" name=""/>
-        <p:cNvGrpSpPr/>
-        <p:nvPr/>
-      </p:nvGrpSpPr>
-      <p:grpSpPr>
-        <a:xfrm>
-          <a:off x="0" y="0"/>
-          <a:ext cx="0" cy="0"/>
-          <a:chOff x="0" y="0"/>
-          <a:chExt cx="0" cy="0"/>
-        </a:xfrm>
-      </p:grpSpPr>
-      <p:sp>
-        <p:nvSpPr>
-          <p:cNvPr id="2" name="Title 1"/>
-          <p:cNvSpPr>
-            <a:spLocks noGrp="1"/>
-          </p:cNvSpPr>
-          <p:nvPr>
-            <p:ph type="title"/>
-          </p:nvPr>
-        </p:nvSpPr>
-        <p:spPr/>
-        <p:txBody>
-          <a:bodyPr/>
-          <a:lstStyle/>
-          <a:p>
-            <a:pPr lvl="0" indent="0" marL="0">
-              <a:buNone/>
-            </a:pPr>
-            <a:r>
-              <a:rPr/>
               <a:t>References</a:t>
-            </a:r>
-          </a:p>
-        </p:txBody>
-      </p:sp>
-      <p:sp>
-        <p:nvSpPr>
-          <p:cNvPr id="3" name="Content Placeholder 2"/>
-          <p:cNvSpPr>
-            <a:spLocks noGrp="1"/>
-          </p:cNvSpPr>
-          <p:nvPr>
-            <p:ph idx="1"/>
-          </p:nvPr>
-        </p:nvSpPr>
-        <p:spPr/>
-        <p:txBody>
-          <a:bodyPr/>
-          <a:lstStyle/>
-          <a:p>
-            <a:pPr lvl="0" indent="0" marL="0">
-              <a:buNone/>
-            </a:pPr>
-            <a:r>
-              <a:rPr/>
-              <a:t>Herman, Jonathan D., Julianne D. Quinn, Scott Steinschneider, Matteo Giuliani, and Sarah Fletcher. 2020. “Climate Adaptation as a Control Problem: Review and Perspectives on Dynamic Water Resources Planning Under Uncertainty.” </a:t>
-            </a:r>
-            <a:r>
-              <a:rPr i="1"/>
-              <a:t>Water Resources Research</a:t>
-            </a:r>
-            <a:r>
-              <a:rPr/>
-              <a:t>, January, e24389. </a:t>
-            </a:r>
-            <a:r>
-              <a:rPr>
-                <a:hlinkClick r:id="rId2"/>
-              </a:rPr>
-              <a:t>https://doi.org/10.1029/2019wr025502</a:t>
-            </a:r>
-            <a:r>
-              <a:rPr/>
-              <a:t>.</a:t>
             </a:r>
           </a:p>
         </p:txBody>

--- a/lectures/week-12/index.pptx
+++ b/lectures/week-12/index.pptx
@@ -4,11 +4,21 @@
   <p:sldMasterIdLst>
     <p:sldMasterId id="2147483648" r:id="rId1"/>
   </p:sldMasterIdLst>
+  <p:notesMasterIdLst>
+    <p:notesMasterId r:id="rId13"/>
+  </p:notesMasterIdLst>
   <p:sldIdLst>
     <p:sldId id="256" r:id="rId2"/>
     <p:sldId id="257" r:id="rId3"/>
     <p:sldId id="258" r:id="rId4"/>
     <p:sldId id="259" r:id="rId5"/>
+    <p:sldId id="260" r:id="rId6"/>
+    <p:sldId id="261" r:id="rId7"/>
+    <p:sldId id="262" r:id="rId8"/>
+    <p:sldId id="263" r:id="rId9"/>
+    <p:sldId id="264" r:id="rId10"/>
+    <p:sldId id="265" r:id="rId11"/>
+    <p:sldId id="266" r:id="rId12"/>
   </p:sldIdLst>
   <p:sldSz cx="9144000" cy="5143500" type="screen16x9"/>
   <p:notesSz cx="6858000" cy="9144000"/>
@@ -124,6 +134,1359 @@
     </p:ext>
   </p:extLst>
 </p:presentation>
+</file>
+
+<file path=ppt/notesMasters/notesMaster1.xml><?xml version="1.0" encoding="utf-8"?>
+<p:notesMaster xmlns:a="http://schemas.openxmlformats.org/drawingml/2006/main" xmlns:r="http://schemas.openxmlformats.org/officeDocument/2006/relationships" xmlns:p="http://schemas.openxmlformats.org/presentationml/2006/main">
+  <p:cSld>
+    <p:bg>
+      <p:bgRef idx="1001">
+        <a:schemeClr val="bg1"/>
+      </p:bgRef>
+    </p:bg>
+    <p:spTree>
+      <p:nvGrpSpPr>
+        <p:cNvPr id="1" name=""/>
+        <p:cNvGrpSpPr/>
+        <p:nvPr/>
+      </p:nvGrpSpPr>
+      <p:grpSpPr>
+        <a:xfrm>
+          <a:off x="0" y="0"/>
+          <a:ext cx="0" cy="0"/>
+          <a:chOff x="0" y="0"/>
+          <a:chExt cx="0" cy="0"/>
+        </a:xfrm>
+      </p:grpSpPr>
+      <p:sp>
+        <p:nvSpPr>
+          <p:cNvPr id="2" name="Header Placeholder 1"/>
+          <p:cNvSpPr>
+            <a:spLocks noGrp="1"/>
+          </p:cNvSpPr>
+          <p:nvPr>
+            <p:ph type="hdr" sz="quarter"/>
+          </p:nvPr>
+        </p:nvSpPr>
+        <p:spPr>
+          <a:xfrm>
+            <a:off x="0" y="0"/>
+            <a:ext cx="2971800" cy="458788"/>
+          </a:xfrm>
+          <a:prstGeom prst="rect">
+            <a:avLst/>
+          </a:prstGeom>
+        </p:spPr>
+        <p:txBody>
+          <a:bodyPr vert="horz" lIns="91440" tIns="45720" rIns="91440" bIns="45720" rtlCol="0"/>
+          <a:lstStyle>
+            <a:lvl1pPr algn="l">
+              <a:defRPr sz="1200"/>
+            </a:lvl1pPr>
+          </a:lstStyle>
+          <a:p>
+            <a:endParaRPr lang="en-US"/>
+          </a:p>
+        </p:txBody>
+      </p:sp>
+      <p:sp>
+        <p:nvSpPr>
+          <p:cNvPr id="3" name="Date Placeholder 2"/>
+          <p:cNvSpPr>
+            <a:spLocks noGrp="1"/>
+          </p:cNvSpPr>
+          <p:nvPr>
+            <p:ph type="dt" idx="1"/>
+          </p:nvPr>
+        </p:nvSpPr>
+        <p:spPr>
+          <a:xfrm>
+            <a:off x="3884613" y="0"/>
+            <a:ext cx="2971800" cy="458788"/>
+          </a:xfrm>
+          <a:prstGeom prst="rect">
+            <a:avLst/>
+          </a:prstGeom>
+        </p:spPr>
+        <p:txBody>
+          <a:bodyPr vert="horz" lIns="91440" tIns="45720" rIns="91440" bIns="45720" rtlCol="0"/>
+          <a:lstStyle>
+            <a:lvl1pPr algn="r">
+              <a:defRPr sz="1200"/>
+            </a:lvl1pPr>
+          </a:lstStyle>
+          <a:p>
+            <a:fld id="{0F9C1CCF-B725-44A7-AA57-5E433BD85C9F}" type="datetimeFigureOut">
+              <a:rPr lang="en-US" smtClean="0"/>
+              <a:t>1/2/22</a:t>
+            </a:fld>
+            <a:endParaRPr lang="en-US"/>
+          </a:p>
+        </p:txBody>
+      </p:sp>
+      <p:sp>
+        <p:nvSpPr>
+          <p:cNvPr id="4" name="Slide Image Placeholder 3"/>
+          <p:cNvSpPr>
+            <a:spLocks noGrp="1" noRot="1" noChangeAspect="1"/>
+          </p:cNvSpPr>
+          <p:nvPr>
+            <p:ph type="sldImg" idx="2"/>
+          </p:nvPr>
+        </p:nvSpPr>
+        <p:spPr>
+          <a:xfrm>
+            <a:off x="685800" y="1143000"/>
+            <a:ext cx="5486400" cy="3086100"/>
+          </a:xfrm>
+          <a:prstGeom prst="rect">
+            <a:avLst/>
+          </a:prstGeom>
+          <a:noFill/>
+          <a:ln w="12700">
+            <a:solidFill>
+              <a:prstClr val="black"/>
+            </a:solidFill>
+          </a:ln>
+        </p:spPr>
+        <p:txBody>
+          <a:bodyPr vert="horz" lIns="91440" tIns="45720" rIns="91440" bIns="45720" rtlCol="0" anchor="ctr"/>
+          <a:lstStyle/>
+          <a:p>
+            <a:endParaRPr lang="en-US"/>
+          </a:p>
+        </p:txBody>
+      </p:sp>
+      <p:sp>
+        <p:nvSpPr>
+          <p:cNvPr id="5" name="Notes Placeholder 4"/>
+          <p:cNvSpPr>
+            <a:spLocks noGrp="1"/>
+          </p:cNvSpPr>
+          <p:nvPr>
+            <p:ph type="body" sz="quarter" idx="3"/>
+          </p:nvPr>
+        </p:nvSpPr>
+        <p:spPr>
+          <a:xfrm>
+            <a:off x="685800" y="4400550"/>
+            <a:ext cx="5486400" cy="3600450"/>
+          </a:xfrm>
+          <a:prstGeom prst="rect">
+            <a:avLst/>
+          </a:prstGeom>
+        </p:spPr>
+        <p:txBody>
+          <a:bodyPr vert="horz" lIns="91440" tIns="45720" rIns="91440" bIns="45720" rtlCol="0"/>
+          <a:lstStyle/>
+          <a:p>
+            <a:pPr lvl="0"/>
+            <a:r>
+              <a:rPr lang="en-US"/>
+              <a:t>Click to edit Master text styles</a:t>
+            </a:r>
+          </a:p>
+          <a:p>
+            <a:pPr lvl="1"/>
+            <a:r>
+              <a:rPr lang="en-US"/>
+              <a:t>Second level</a:t>
+            </a:r>
+          </a:p>
+          <a:p>
+            <a:pPr lvl="2"/>
+            <a:r>
+              <a:rPr lang="en-US"/>
+              <a:t>Third level</a:t>
+            </a:r>
+          </a:p>
+          <a:p>
+            <a:pPr lvl="3"/>
+            <a:r>
+              <a:rPr lang="en-US"/>
+              <a:t>Fourth level</a:t>
+            </a:r>
+          </a:p>
+          <a:p>
+            <a:pPr lvl="4"/>
+            <a:r>
+              <a:rPr lang="en-US"/>
+              <a:t>Fifth level</a:t>
+            </a:r>
+          </a:p>
+        </p:txBody>
+      </p:sp>
+      <p:sp>
+        <p:nvSpPr>
+          <p:cNvPr id="6" name="Footer Placeholder 5"/>
+          <p:cNvSpPr>
+            <a:spLocks noGrp="1"/>
+          </p:cNvSpPr>
+          <p:nvPr>
+            <p:ph type="ftr" sz="quarter" idx="4"/>
+          </p:nvPr>
+        </p:nvSpPr>
+        <p:spPr>
+          <a:xfrm>
+            <a:off x="0" y="8685213"/>
+            <a:ext cx="2971800" cy="458787"/>
+          </a:xfrm>
+          <a:prstGeom prst="rect">
+            <a:avLst/>
+          </a:prstGeom>
+        </p:spPr>
+        <p:txBody>
+          <a:bodyPr vert="horz" lIns="91440" tIns="45720" rIns="91440" bIns="45720" rtlCol="0" anchor="b"/>
+          <a:lstStyle>
+            <a:lvl1pPr algn="l">
+              <a:defRPr sz="1200"/>
+            </a:lvl1pPr>
+          </a:lstStyle>
+          <a:p>
+            <a:endParaRPr lang="en-US"/>
+          </a:p>
+        </p:txBody>
+      </p:sp>
+      <p:sp>
+        <p:nvSpPr>
+          <p:cNvPr id="7" name="Slide Number Placeholder 6"/>
+          <p:cNvSpPr>
+            <a:spLocks noGrp="1"/>
+          </p:cNvSpPr>
+          <p:nvPr>
+            <p:ph type="sldNum" sz="quarter" idx="5"/>
+          </p:nvPr>
+        </p:nvSpPr>
+        <p:spPr>
+          <a:xfrm>
+            <a:off x="3884613" y="8685213"/>
+            <a:ext cx="2971800" cy="458787"/>
+          </a:xfrm>
+          <a:prstGeom prst="rect">
+            <a:avLst/>
+          </a:prstGeom>
+        </p:spPr>
+        <p:txBody>
+          <a:bodyPr vert="horz" lIns="91440" tIns="45720" rIns="91440" bIns="45720" rtlCol="0" anchor="b"/>
+          <a:lstStyle>
+            <a:lvl1pPr algn="r">
+              <a:defRPr sz="1200"/>
+            </a:lvl1pPr>
+          </a:lstStyle>
+          <a:p>
+            <a:fld id="{18BDFEC3-8487-43E8-A154-7C12CBC1FFF2}" type="slidenum">
+              <a:rPr lang="en-US" smtClean="0"/>
+              <a:t>‹#›</a:t>
+            </a:fld>
+            <a:endParaRPr lang="en-US"/>
+          </a:p>
+        </p:txBody>
+      </p:sp>
+    </p:spTree>
+    <p:extLst>
+      <p:ext uri="{BB962C8B-B14F-4D97-AF65-F5344CB8AC3E}">
+        <p14:creationId xmlns:p14="http://schemas.microsoft.com/office/powerpoint/2010/main" val="3782709779"/>
+      </p:ext>
+    </p:extLst>
+  </p:cSld>
+  <p:clrMap bg1="lt1" tx1="dk1" bg2="lt2" tx2="dk2" accent1="accent1" accent2="accent2" accent3="accent3" accent4="accent4" accent5="accent5" accent6="accent6" hlink="hlink" folHlink="folHlink"/>
+  <p:notesStyle>
+    <a:lvl1pPr marL="0" algn="l" defTabSz="914400" rtl="0" eaLnBrk="1" latinLnBrk="0" hangingPunct="1">
+      <a:defRPr sz="1200" kern="1200">
+        <a:solidFill>
+          <a:schemeClr val="tx1"/>
+        </a:solidFill>
+        <a:latin typeface="+mn-lt"/>
+        <a:ea typeface="+mn-ea"/>
+        <a:cs typeface="+mn-cs"/>
+      </a:defRPr>
+    </a:lvl1pPr>
+    <a:lvl2pPr marL="457200" algn="l" defTabSz="914400" rtl="0" eaLnBrk="1" latinLnBrk="0" hangingPunct="1">
+      <a:defRPr sz="1200" kern="1200">
+        <a:solidFill>
+          <a:schemeClr val="tx1"/>
+        </a:solidFill>
+        <a:latin typeface="+mn-lt"/>
+        <a:ea typeface="+mn-ea"/>
+        <a:cs typeface="+mn-cs"/>
+      </a:defRPr>
+    </a:lvl2pPr>
+    <a:lvl3pPr marL="914400" algn="l" defTabSz="914400" rtl="0" eaLnBrk="1" latinLnBrk="0" hangingPunct="1">
+      <a:defRPr sz="1200" kern="1200">
+        <a:solidFill>
+          <a:schemeClr val="tx1"/>
+        </a:solidFill>
+        <a:latin typeface="+mn-lt"/>
+        <a:ea typeface="+mn-ea"/>
+        <a:cs typeface="+mn-cs"/>
+      </a:defRPr>
+    </a:lvl3pPr>
+    <a:lvl4pPr marL="1371600" algn="l" defTabSz="914400" rtl="0" eaLnBrk="1" latinLnBrk="0" hangingPunct="1">
+      <a:defRPr sz="1200" kern="1200">
+        <a:solidFill>
+          <a:schemeClr val="tx1"/>
+        </a:solidFill>
+        <a:latin typeface="+mn-lt"/>
+        <a:ea typeface="+mn-ea"/>
+        <a:cs typeface="+mn-cs"/>
+      </a:defRPr>
+    </a:lvl4pPr>
+    <a:lvl5pPr marL="1828800" algn="l" defTabSz="914400" rtl="0" eaLnBrk="1" latinLnBrk="0" hangingPunct="1">
+      <a:defRPr sz="1200" kern="1200">
+        <a:solidFill>
+          <a:schemeClr val="tx1"/>
+        </a:solidFill>
+        <a:latin typeface="+mn-lt"/>
+        <a:ea typeface="+mn-ea"/>
+        <a:cs typeface="+mn-cs"/>
+      </a:defRPr>
+    </a:lvl5pPr>
+    <a:lvl6pPr marL="2286000" algn="l" defTabSz="914400" rtl="0" eaLnBrk="1" latinLnBrk="0" hangingPunct="1">
+      <a:defRPr sz="1200" kern="1200">
+        <a:solidFill>
+          <a:schemeClr val="tx1"/>
+        </a:solidFill>
+        <a:latin typeface="+mn-lt"/>
+        <a:ea typeface="+mn-ea"/>
+        <a:cs typeface="+mn-cs"/>
+      </a:defRPr>
+    </a:lvl6pPr>
+    <a:lvl7pPr marL="2743200" algn="l" defTabSz="914400" rtl="0" eaLnBrk="1" latinLnBrk="0" hangingPunct="1">
+      <a:defRPr sz="1200" kern="1200">
+        <a:solidFill>
+          <a:schemeClr val="tx1"/>
+        </a:solidFill>
+        <a:latin typeface="+mn-lt"/>
+        <a:ea typeface="+mn-ea"/>
+        <a:cs typeface="+mn-cs"/>
+      </a:defRPr>
+    </a:lvl7pPr>
+    <a:lvl8pPr marL="3200400" algn="l" defTabSz="914400" rtl="0" eaLnBrk="1" latinLnBrk="0" hangingPunct="1">
+      <a:defRPr sz="1200" kern="1200">
+        <a:solidFill>
+          <a:schemeClr val="tx1"/>
+        </a:solidFill>
+        <a:latin typeface="+mn-lt"/>
+        <a:ea typeface="+mn-ea"/>
+        <a:cs typeface="+mn-cs"/>
+      </a:defRPr>
+    </a:lvl8pPr>
+    <a:lvl9pPr marL="3657600" algn="l" defTabSz="914400" rtl="0" eaLnBrk="1" latinLnBrk="0" hangingPunct="1">
+      <a:defRPr sz="1200" kern="1200">
+        <a:solidFill>
+          <a:schemeClr val="tx1"/>
+        </a:solidFill>
+        <a:latin typeface="+mn-lt"/>
+        <a:ea typeface="+mn-ea"/>
+        <a:cs typeface="+mn-cs"/>
+      </a:defRPr>
+    </a:lvl9pPr>
+  </p:notesStyle>
+</p:notesMaster>
+</file>
+
+<file path=ppt/notesSlides/notesSlide1.xml><?xml version="1.0" encoding="utf-8"?>
+<p:notes xmlns:a="http://schemas.openxmlformats.org/drawingml/2006/main" xmlns:r="http://schemas.openxmlformats.org/officeDocument/2006/relationships" xmlns:p="http://schemas.openxmlformats.org/presentationml/2006/main">
+  <p:cSld>
+    <p:spTree>
+      <p:nvGrpSpPr>
+        <p:cNvPr id="1" name=""/>
+        <p:cNvGrpSpPr/>
+        <p:nvPr/>
+      </p:nvGrpSpPr>
+      <p:grpSpPr>
+        <a:xfrm>
+          <a:off x="0" y="0"/>
+          <a:ext cx="0" cy="0"/>
+          <a:chOff x="0" y="0"/>
+          <a:chExt cx="0" cy="0"/>
+        </a:xfrm>
+      </p:grpSpPr>
+      <p:sp>
+        <p:nvSpPr>
+          <p:cNvPr id="2" name="Slide Image Placeholder 1"/>
+          <p:cNvSpPr>
+            <a:spLocks noGrp="1" noRot="1" noChangeAspect="1"/>
+          </p:cNvSpPr>
+          <p:nvPr>
+            <p:ph type="sldImg"/>
+          </p:nvPr>
+        </p:nvSpPr>
+        <p:spPr/>
+      </p:sp>
+      <p:sp>
+        <p:nvSpPr>
+          <p:cNvPr id="3" name="Notes Placeholder 2"/>
+          <p:cNvSpPr>
+            <a:spLocks noGrp="1"/>
+          </p:cNvSpPr>
+          <p:nvPr>
+            <p:ph type="body" idx="1"/>
+          </p:nvPr>
+        </p:nvSpPr>
+        <p:spPr/>
+        <p:txBody>
+          <a:bodyPr/>
+          <a:lstStyle/>
+          <a:p>
+            <a:pPr lvl="0" indent="0" marL="0">
+              <a:buNone/>
+            </a:pPr>
+            <a:r>
+              <a:rPr/>
+              <a:t>Target: 1:05. Spend 5 min on this hook. The goal is to motivate multi-objective framing as a way to make value trade-offs explicit rather than hiding them in aggregation. Ask: “Raise your hand if you’d feel comfortable defending the choice of w₁ = 0.3 to a community that gets flooded.” Then pivot: “What if instead we showed decision-makers the full range of trade-offs and let them choose?”</a:t>
+            </a:r>
+          </a:p>
+        </p:txBody>
+      </p:sp>
+      <p:sp>
+        <p:nvSpPr>
+          <p:cNvPr id="4" name="Slide Number Placeholder 3"/>
+          <p:cNvSpPr>
+            <a:spLocks noGrp="1"/>
+          </p:cNvSpPr>
+          <p:nvPr>
+            <p:ph type="sldNum" sz="quarter" idx="10"/>
+          </p:nvPr>
+        </p:nvSpPr>
+        <p:spPr/>
+        <p:txBody>
+          <a:bodyPr/>
+          <a:lstStyle/>
+          <a:p>
+            <a:fld id="{18BDFEC3-8487-43E8-A154-7C12CBC1FFF2}" type="slidenum">
+              <a:rPr lang="en-US"/>
+              <a:t>2</a:t>
+            </a:fld>
+            <a:endParaRPr lang="en-US"/>
+          </a:p>
+        </p:txBody>
+      </p:sp>
+    </p:spTree>
+  </p:cSld>
+</p:notes>
+</file>
+
+<file path=ppt/notesSlides/notesSlide10.xml><?xml version="1.0" encoding="utf-8"?>
+<p:notes xmlns:a="http://schemas.openxmlformats.org/drawingml/2006/main" xmlns:r="http://schemas.openxmlformats.org/officeDocument/2006/relationships" xmlns:p="http://schemas.openxmlformats.org/presentationml/2006/main">
+  <p:cSld>
+    <p:spTree>
+      <p:nvGrpSpPr>
+        <p:cNvPr id="1" name=""/>
+        <p:cNvGrpSpPr/>
+        <p:nvPr/>
+      </p:nvGrpSpPr>
+      <p:grpSpPr>
+        <a:xfrm>
+          <a:off x="0" y="0"/>
+          <a:ext cx="0" cy="0"/>
+          <a:chOff x="0" y="0"/>
+          <a:chExt cx="0" cy="0"/>
+        </a:xfrm>
+      </p:grpSpPr>
+      <p:sp>
+        <p:nvSpPr>
+          <p:cNvPr id="2" name="Slide Image Placeholder 1"/>
+          <p:cNvSpPr>
+            <a:spLocks noGrp="1" noRot="1" noChangeAspect="1"/>
+          </p:cNvSpPr>
+          <p:nvPr>
+            <p:ph type="sldImg"/>
+          </p:nvPr>
+        </p:nvSpPr>
+        <p:spPr/>
+      </p:sp>
+      <p:sp>
+        <p:nvSpPr>
+          <p:cNvPr id="3" name="Notes Placeholder 2"/>
+          <p:cNvSpPr>
+            <a:spLocks noGrp="1"/>
+          </p:cNvSpPr>
+          <p:nvPr>
+            <p:ph type="body" idx="1"/>
+          </p:nvPr>
+        </p:nvSpPr>
+        <p:spPr/>
+        <p:txBody>
+          <a:bodyPr/>
+          <a:lstStyle/>
+          <a:p>
+            <a:pPr lvl="0" indent="0" marL="0">
+              <a:buNone/>
+            </a:pPr>
+            <a:r>
+              <a:rPr/>
+              <a:t>Target: 1:52. Very short section — 1 min.</a:t>
+            </a:r>
+          </a:p>
+          <a:p>
+            <a:pPr lvl="0" indent="0" marL="0">
+              <a:buNone/>
+            </a:pPr>
+          </a:p>
+          <a:p>
+            <a:pPr lvl="0" indent="0" marL="0">
+              <a:buNone/>
+            </a:pPr>
+            <a:r>
+              <a:rPr/>
+              <a:t>Target: 1:53. Connect to Memo 2: “Look at your project — does your system have conflicting objectives that BCA collapses? If so, multi-objective framing may give a more honest picture.” Don’t frame this as “multi-objective is always better” — it adds complexity and requires more from decision-makers.</a:t>
+            </a:r>
+          </a:p>
+          <a:p>
+            <a:pPr lvl="0" indent="0" marL="0">
+              <a:buNone/>
+            </a:pPr>
+          </a:p>
+          <a:p>
+            <a:pPr lvl="0" indent="0" marL="0">
+              <a:buNone/>
+            </a:pPr>
+            <a:r>
+              <a:rPr/>
+              <a:t>Target: 1:53. End class here. Remind students that Madison is leading discussion on Wednesday — they should read Yang et al. with attention to: (1) what are the objectives? (2) how is the Pareto front generated and interpreted? (3) how do the authors handle trade-offs with decision-makers?</a:t>
+            </a:r>
+          </a:p>
+        </p:txBody>
+      </p:sp>
+      <p:sp>
+        <p:nvSpPr>
+          <p:cNvPr id="4" name="Slide Number Placeholder 3"/>
+          <p:cNvSpPr>
+            <a:spLocks noGrp="1"/>
+          </p:cNvSpPr>
+          <p:nvPr>
+            <p:ph type="sldNum" sz="quarter" idx="10"/>
+          </p:nvPr>
+        </p:nvSpPr>
+        <p:spPr/>
+        <p:txBody>
+          <a:bodyPr/>
+          <a:lstStyle/>
+          <a:p>
+            <a:fld id="{18BDFEC3-8487-43E8-A154-7C12CBC1FFF2}" type="slidenum">
+              <a:rPr lang="en-US"/>
+              <a:t>11</a:t>
+            </a:fld>
+            <a:endParaRPr lang="en-US"/>
+          </a:p>
+        </p:txBody>
+      </p:sp>
+    </p:spTree>
+  </p:cSld>
+</p:notes>
+</file>
+
+<file path=ppt/notesSlides/notesSlide2.xml><?xml version="1.0" encoding="utf-8"?>
+<p:notes xmlns:a="http://schemas.openxmlformats.org/drawingml/2006/main" xmlns:r="http://schemas.openxmlformats.org/officeDocument/2006/relationships" xmlns:p="http://schemas.openxmlformats.org/presentationml/2006/main">
+  <p:cSld>
+    <p:spTree>
+      <p:nvGrpSpPr>
+        <p:cNvPr id="1" name=""/>
+        <p:cNvGrpSpPr/>
+        <p:nvPr/>
+      </p:nvGrpSpPr>
+      <p:grpSpPr>
+        <a:xfrm>
+          <a:off x="0" y="0"/>
+          <a:ext cx="0" cy="0"/>
+          <a:chOff x="0" y="0"/>
+          <a:chExt cx="0" cy="0"/>
+        </a:xfrm>
+      </p:grpSpPr>
+      <p:sp>
+        <p:nvSpPr>
+          <p:cNvPr id="2" name="Slide Image Placeholder 1"/>
+          <p:cNvSpPr>
+            <a:spLocks noGrp="1" noRot="1" noChangeAspect="1"/>
+          </p:cNvSpPr>
+          <p:nvPr>
+            <p:ph type="sldImg"/>
+          </p:nvPr>
+        </p:nvSpPr>
+        <p:spPr/>
+      </p:sp>
+      <p:sp>
+        <p:nvSpPr>
+          <p:cNvPr id="3" name="Notes Placeholder 2"/>
+          <p:cNvSpPr>
+            <a:spLocks noGrp="1"/>
+          </p:cNvSpPr>
+          <p:nvPr>
+            <p:ph type="body" idx="1"/>
+          </p:nvPr>
+        </p:nvSpPr>
+        <p:spPr/>
+        <p:txBody>
+          <a:bodyPr/>
+          <a:lstStyle/>
+          <a:p>
+            <a:pPr lvl="0" indent="0" marL="0">
+              <a:buNone/>
+            </a:pPr>
+            <a:r>
+              <a:rPr/>
+              <a:t>Target: 1:08. Transition into formal setup.</a:t>
+            </a:r>
+          </a:p>
+          <a:p>
+            <a:pPr lvl="0" indent="0" marL="0">
+              <a:buNone/>
+            </a:pPr>
+          </a:p>
+          <a:p>
+            <a:pPr lvl="0" indent="0" marL="0">
+              <a:buNone/>
+            </a:pPr>
+            <a:r>
+              <a:rPr/>
+              <a:t>Target: 1:11. Quick slide. Emphasize that BCA is not wrong — it’s a tool with assumptions. When those assumptions hold (everything can be monetized, one decision-maker, shared values), BCA is great. Multi-objective framing is for when they don’t.</a:t>
+            </a:r>
+          </a:p>
+          <a:p>
+            <a:pPr lvl="0" indent="0" marL="0">
+              <a:buNone/>
+            </a:pPr>
+          </a:p>
+          <a:p>
+            <a:pPr lvl="0" indent="0" marL="0">
+              <a:buNone/>
+            </a:pPr>
+            <a:r>
+              <a:rPr/>
+              <a:t>Target: 1:15. Spend about 4 min here. Draw on board if helpful: two axes, each a different objective. Ask students: “Can you think of another pair of objectives in climate adaptation that are in tension?” (e.g., speed of deployment vs. community buy-in; near-term cost vs. long-term resilience).</a:t>
+            </a:r>
+          </a:p>
+        </p:txBody>
+      </p:sp>
+      <p:sp>
+        <p:nvSpPr>
+          <p:cNvPr id="4" name="Slide Number Placeholder 3"/>
+          <p:cNvSpPr>
+            <a:spLocks noGrp="1"/>
+          </p:cNvSpPr>
+          <p:nvPr>
+            <p:ph type="sldNum" sz="quarter" idx="10"/>
+          </p:nvPr>
+        </p:nvSpPr>
+        <p:spPr/>
+        <p:txBody>
+          <a:bodyPr/>
+          <a:lstStyle/>
+          <a:p>
+            <a:fld id="{18BDFEC3-8487-43E8-A154-7C12CBC1FFF2}" type="slidenum">
+              <a:rPr lang="en-US"/>
+              <a:t>3</a:t>
+            </a:fld>
+            <a:endParaRPr lang="en-US"/>
+          </a:p>
+        </p:txBody>
+      </p:sp>
+    </p:spTree>
+  </p:cSld>
+</p:notes>
+</file>
+
+<file path=ppt/notesSlides/notesSlide3.xml><?xml version="1.0" encoding="utf-8"?>
+<p:notes xmlns:a="http://schemas.openxmlformats.org/drawingml/2006/main" xmlns:r="http://schemas.openxmlformats.org/officeDocument/2006/relationships" xmlns:p="http://schemas.openxmlformats.org/presentationml/2006/main">
+  <p:cSld>
+    <p:spTree>
+      <p:nvGrpSpPr>
+        <p:cNvPr id="1" name=""/>
+        <p:cNvGrpSpPr/>
+        <p:nvPr/>
+      </p:nvGrpSpPr>
+      <p:grpSpPr>
+        <a:xfrm>
+          <a:off x="0" y="0"/>
+          <a:ext cx="0" cy="0"/>
+          <a:chOff x="0" y="0"/>
+          <a:chExt cx="0" cy="0"/>
+        </a:xfrm>
+      </p:grpSpPr>
+      <p:sp>
+        <p:nvSpPr>
+          <p:cNvPr id="2" name="Slide Image Placeholder 1"/>
+          <p:cNvSpPr>
+            <a:spLocks noGrp="1" noRot="1" noChangeAspect="1"/>
+          </p:cNvSpPr>
+          <p:nvPr>
+            <p:ph type="sldImg"/>
+          </p:nvPr>
+        </p:nvSpPr>
+        <p:spPr/>
+      </p:sp>
+      <p:sp>
+        <p:nvSpPr>
+          <p:cNvPr id="3" name="Notes Placeholder 2"/>
+          <p:cNvSpPr>
+            <a:spLocks noGrp="1"/>
+          </p:cNvSpPr>
+          <p:nvPr>
+            <p:ph type="body" idx="1"/>
+          </p:nvPr>
+        </p:nvSpPr>
+        <p:spPr/>
+        <p:txBody>
+          <a:bodyPr/>
+          <a:lstStyle/>
+          <a:p>
+            <a:pPr lvl="0" indent="0" marL="0">
+              <a:buNone/>
+            </a:pPr>
+            <a:r>
+              <a:rPr/>
+              <a:t>Target: 1:18. This is the conceptual core. Take 10 min here.</a:t>
+            </a:r>
+          </a:p>
+          <a:p>
+            <a:pPr lvl="0" indent="0" marL="0">
+              <a:buNone/>
+            </a:pPr>
+          </a:p>
+          <a:p>
+            <a:pPr lvl="0" indent="0" marL="0">
+              <a:buNone/>
+            </a:pPr>
+            <a:r>
+              <a:rPr/>
+              <a:t>Target: 1:21. Walk through this carefully. Emphasize: “at least as good on ALL, strictly better on AT LEAST ONE.” This is a partial order — many solutions won’t be comparable (neither dominates the other).</a:t>
+            </a:r>
+          </a:p>
+        </p:txBody>
+      </p:sp>
+      <p:sp>
+        <p:nvSpPr>
+          <p:cNvPr id="4" name="Slide Number Placeholder 3"/>
+          <p:cNvSpPr>
+            <a:spLocks noGrp="1"/>
+          </p:cNvSpPr>
+          <p:nvPr>
+            <p:ph type="sldNum" sz="quarter" idx="10"/>
+          </p:nvPr>
+        </p:nvSpPr>
+        <p:spPr/>
+        <p:txBody>
+          <a:bodyPr/>
+          <a:lstStyle/>
+          <a:p>
+            <a:fld id="{18BDFEC3-8487-43E8-A154-7C12CBC1FFF2}" type="slidenum">
+              <a:rPr lang="en-US"/>
+              <a:t>4</a:t>
+            </a:fld>
+            <a:endParaRPr lang="en-US"/>
+          </a:p>
+        </p:txBody>
+      </p:sp>
+    </p:spTree>
+  </p:cSld>
+</p:notes>
+</file>
+
+<file path=ppt/notesSlides/notesSlide4.xml><?xml version="1.0" encoding="utf-8"?>
+<p:notes xmlns:a="http://schemas.openxmlformats.org/drawingml/2006/main" xmlns:r="http://schemas.openxmlformats.org/officeDocument/2006/relationships" xmlns:p="http://schemas.openxmlformats.org/presentationml/2006/main">
+  <p:cSld>
+    <p:spTree>
+      <p:nvGrpSpPr>
+        <p:cNvPr id="1" name=""/>
+        <p:cNvGrpSpPr/>
+        <p:nvPr/>
+      </p:nvGrpSpPr>
+      <p:grpSpPr>
+        <a:xfrm>
+          <a:off x="0" y="0"/>
+          <a:ext cx="0" cy="0"/>
+          <a:chOff x="0" y="0"/>
+          <a:chExt cx="0" cy="0"/>
+        </a:xfrm>
+      </p:grpSpPr>
+      <p:sp>
+        <p:nvSpPr>
+          <p:cNvPr id="2" name="Slide Image Placeholder 1"/>
+          <p:cNvSpPr>
+            <a:spLocks noGrp="1" noRot="1" noChangeAspect="1"/>
+          </p:cNvSpPr>
+          <p:nvPr>
+            <p:ph type="sldImg"/>
+          </p:nvPr>
+        </p:nvSpPr>
+        <p:spPr/>
+      </p:sp>
+      <p:sp>
+        <p:nvSpPr>
+          <p:cNvPr id="3" name="Notes Placeholder 2"/>
+          <p:cNvSpPr>
+            <a:spLocks noGrp="1"/>
+          </p:cNvSpPr>
+          <p:nvPr>
+            <p:ph type="body" idx="1"/>
+          </p:nvPr>
+        </p:nvSpPr>
+        <p:spPr/>
+        <p:txBody>
+          <a:bodyPr/>
+          <a:lstStyle/>
+          <a:p>
+            <a:pPr lvl="0" indent="0" marL="0">
+              <a:buNone/>
+            </a:pPr>
+            <a:r>
+              <a:rPr/>
+              <a:t>Target: 1:23. Walk through the table row by row. Let students work out the dominance comparisons before you reveal. The “wait” moment is intentional — students often jump to conclusions about dominance. Make them check both objectives carefully.</a:t>
+            </a:r>
+          </a:p>
+          <a:p>
+            <a:pPr lvl="0" indent="0" marL="0">
+              <a:buNone/>
+            </a:pPr>
+          </a:p>
+          <a:p>
+            <a:pPr lvl="0" indent="0" marL="0">
+              <a:buNone/>
+            </a:pPr>
+            <a:r>
+              <a:rPr/>
+              <a:t>Target: 1:25. Cold call 2-3 students before revealing. Key: 1 dominates 4 (better on both — higher </a:t>
+            </a:r>
+            <a:r>
+              <a:rPr/>
+              <a:t>f_1</a:t>
+            </a:r>
+            <a:r>
+              <a:rPr/>
+              <a:t>, lower </a:t>
+            </a:r>
+            <a:r>
+              <a:rPr/>
+              <a:t>f_2</a:t>
+            </a:r>
+            <a:r>
+              <a:rPr/>
+              <a:t>). No other dominance pairs among 1, 2, 3, 5. Point 4 (red) is dominated. Ask: “Which points form the Pareto front?” → {1, 2, 3, 5}.</a:t>
+            </a:r>
+          </a:p>
+        </p:txBody>
+      </p:sp>
+      <p:sp>
+        <p:nvSpPr>
+          <p:cNvPr id="4" name="Slide Number Placeholder 3"/>
+          <p:cNvSpPr>
+            <a:spLocks noGrp="1"/>
+          </p:cNvSpPr>
+          <p:nvPr>
+            <p:ph type="sldNum" sz="quarter" idx="10"/>
+          </p:nvPr>
+        </p:nvSpPr>
+        <p:spPr/>
+        <p:txBody>
+          <a:bodyPr/>
+          <a:lstStyle/>
+          <a:p>
+            <a:fld id="{18BDFEC3-8487-43E8-A154-7C12CBC1FFF2}" type="slidenum">
+              <a:rPr lang="en-US"/>
+              <a:t>5</a:t>
+            </a:fld>
+            <a:endParaRPr lang="en-US"/>
+          </a:p>
+        </p:txBody>
+      </p:sp>
+    </p:spTree>
+  </p:cSld>
+</p:notes>
+</file>
+
+<file path=ppt/notesSlides/notesSlide5.xml><?xml version="1.0" encoding="utf-8"?>
+<p:notes xmlns:a="http://schemas.openxmlformats.org/drawingml/2006/main" xmlns:r="http://schemas.openxmlformats.org/officeDocument/2006/relationships" xmlns:p="http://schemas.openxmlformats.org/presentationml/2006/main">
+  <p:cSld>
+    <p:spTree>
+      <p:nvGrpSpPr>
+        <p:cNvPr id="1" name=""/>
+        <p:cNvGrpSpPr/>
+        <p:nvPr/>
+      </p:nvGrpSpPr>
+      <p:grpSpPr>
+        <a:xfrm>
+          <a:off x="0" y="0"/>
+          <a:ext cx="0" cy="0"/>
+          <a:chOff x="0" y="0"/>
+          <a:chExt cx="0" cy="0"/>
+        </a:xfrm>
+      </p:grpSpPr>
+      <p:sp>
+        <p:nvSpPr>
+          <p:cNvPr id="2" name="Slide Image Placeholder 1"/>
+          <p:cNvSpPr>
+            <a:spLocks noGrp="1" noRot="1" noChangeAspect="1"/>
+          </p:cNvSpPr>
+          <p:nvPr>
+            <p:ph type="sldImg"/>
+          </p:nvPr>
+        </p:nvSpPr>
+        <p:spPr/>
+      </p:sp>
+      <p:sp>
+        <p:nvSpPr>
+          <p:cNvPr id="3" name="Notes Placeholder 2"/>
+          <p:cNvSpPr>
+            <a:spLocks noGrp="1"/>
+          </p:cNvSpPr>
+          <p:nvPr>
+            <p:ph type="body" idx="1"/>
+          </p:nvPr>
+        </p:nvSpPr>
+        <p:spPr/>
+        <p:txBody>
+          <a:bodyPr/>
+          <a:lstStyle/>
+          <a:p>
+            <a:pPr lvl="0" indent="0" marL="0">
+              <a:buNone/>
+            </a:pPr>
+            <a:r>
+              <a:rPr/>
+              <a:t>Target: 1:29. Analogy: the efficient frontier in portfolio theory (risk vs. return). Emphasize the division of labor: analysts find the front, decision-makers choose from it. This is a more honest process than embedding values in weights.</a:t>
+            </a:r>
+          </a:p>
+        </p:txBody>
+      </p:sp>
+      <p:sp>
+        <p:nvSpPr>
+          <p:cNvPr id="4" name="Slide Number Placeholder 3"/>
+          <p:cNvSpPr>
+            <a:spLocks noGrp="1"/>
+          </p:cNvSpPr>
+          <p:nvPr>
+            <p:ph type="sldNum" sz="quarter" idx="10"/>
+          </p:nvPr>
+        </p:nvSpPr>
+        <p:spPr/>
+        <p:txBody>
+          <a:bodyPr/>
+          <a:lstStyle/>
+          <a:p>
+            <a:fld id="{18BDFEC3-8487-43E8-A154-7C12CBC1FFF2}" type="slidenum">
+              <a:rPr lang="en-US"/>
+              <a:t>6</a:t>
+            </a:fld>
+            <a:endParaRPr lang="en-US"/>
+          </a:p>
+        </p:txBody>
+      </p:sp>
+    </p:spTree>
+  </p:cSld>
+</p:notes>
+</file>
+
+<file path=ppt/notesSlides/notesSlide6.xml><?xml version="1.0" encoding="utf-8"?>
+<p:notes xmlns:a="http://schemas.openxmlformats.org/drawingml/2006/main" xmlns:r="http://schemas.openxmlformats.org/officeDocument/2006/relationships" xmlns:p="http://schemas.openxmlformats.org/presentationml/2006/main">
+  <p:cSld>
+    <p:spTree>
+      <p:nvGrpSpPr>
+        <p:cNvPr id="1" name=""/>
+        <p:cNvGrpSpPr/>
+        <p:nvPr/>
+      </p:nvGrpSpPr>
+      <p:grpSpPr>
+        <a:xfrm>
+          <a:off x="0" y="0"/>
+          <a:ext cx="0" cy="0"/>
+          <a:chOff x="0" y="0"/>
+          <a:chExt cx="0" cy="0"/>
+        </a:xfrm>
+      </p:grpSpPr>
+      <p:sp>
+        <p:nvSpPr>
+          <p:cNvPr id="2" name="Slide Image Placeholder 1"/>
+          <p:cNvSpPr>
+            <a:spLocks noGrp="1" noRot="1" noChangeAspect="1"/>
+          </p:cNvSpPr>
+          <p:nvPr>
+            <p:ph type="sldImg"/>
+          </p:nvPr>
+        </p:nvSpPr>
+        <p:spPr/>
+      </p:sp>
+      <p:sp>
+        <p:nvSpPr>
+          <p:cNvPr id="3" name="Notes Placeholder 2"/>
+          <p:cNvSpPr>
+            <a:spLocks noGrp="1"/>
+          </p:cNvSpPr>
+          <p:nvPr>
+            <p:ph type="body" idx="1"/>
+          </p:nvPr>
+        </p:nvSpPr>
+        <p:spPr/>
+        <p:txBody>
+          <a:bodyPr/>
+          <a:lstStyle/>
+          <a:p>
+            <a:pPr lvl="0" indent="0" marL="0">
+              <a:buNone/>
+            </a:pPr>
+            <a:r>
+              <a:rPr/>
+              <a:t>Target: 1:31. Short section — 5 min.</a:t>
+            </a:r>
+          </a:p>
+          <a:p>
+            <a:pPr lvl="0" indent="0" marL="0">
+              <a:buNone/>
+            </a:pPr>
+          </a:p>
+          <a:p>
+            <a:pPr lvl="0" indent="0" marL="0">
+              <a:buNone/>
+            </a:pPr>
+            <a:r>
+              <a:rPr/>
+              <a:t>Target: 1:34. The key takeaway: weighted sum is a useful approximation but has fundamental limits. Multi-objective evolutionary algorithms avoid this problem.</a:t>
+            </a:r>
+          </a:p>
+          <a:p>
+            <a:pPr lvl="0" indent="0" marL="0">
+              <a:buNone/>
+            </a:pPr>
+          </a:p>
+          <a:p>
+            <a:pPr lvl="0" indent="0" marL="0">
+              <a:buNone/>
+            </a:pPr>
+            <a:r>
+              <a:rPr/>
+              <a:t>Target: 1:37. Walk through both panels. Left: any w₁/w₂ combination traces the full front. Right: the concave region (red) has no tangent weight vector — weighted sum can never find those solutions. Ask: which one do you think is more common in real engineering problems? (Non-convex, generally.)</a:t>
+            </a:r>
+          </a:p>
+        </p:txBody>
+      </p:sp>
+      <p:sp>
+        <p:nvSpPr>
+          <p:cNvPr id="4" name="Slide Number Placeholder 3"/>
+          <p:cNvSpPr>
+            <a:spLocks noGrp="1"/>
+          </p:cNvSpPr>
+          <p:nvPr>
+            <p:ph type="sldNum" sz="quarter" idx="10"/>
+          </p:nvPr>
+        </p:nvSpPr>
+        <p:spPr/>
+        <p:txBody>
+          <a:bodyPr/>
+          <a:lstStyle/>
+          <a:p>
+            <a:fld id="{18BDFEC3-8487-43E8-A154-7C12CBC1FFF2}" type="slidenum">
+              <a:rPr lang="en-US"/>
+              <a:t>7</a:t>
+            </a:fld>
+            <a:endParaRPr lang="en-US"/>
+          </a:p>
+        </p:txBody>
+      </p:sp>
+    </p:spTree>
+  </p:cSld>
+</p:notes>
+</file>
+
+<file path=ppt/notesSlides/notesSlide7.xml><?xml version="1.0" encoding="utf-8"?>
+<p:notes xmlns:a="http://schemas.openxmlformats.org/drawingml/2006/main" xmlns:r="http://schemas.openxmlformats.org/officeDocument/2006/relationships" xmlns:p="http://schemas.openxmlformats.org/presentationml/2006/main">
+  <p:cSld>
+    <p:spTree>
+      <p:nvGrpSpPr>
+        <p:cNvPr id="1" name=""/>
+        <p:cNvGrpSpPr/>
+        <p:nvPr/>
+      </p:nvGrpSpPr>
+      <p:grpSpPr>
+        <a:xfrm>
+          <a:off x="0" y="0"/>
+          <a:ext cx="0" cy="0"/>
+          <a:chOff x="0" y="0"/>
+          <a:chExt cx="0" cy="0"/>
+        </a:xfrm>
+      </p:grpSpPr>
+      <p:sp>
+        <p:nvSpPr>
+          <p:cNvPr id="2" name="Slide Image Placeholder 1"/>
+          <p:cNvSpPr>
+            <a:spLocks noGrp="1" noRot="1" noChangeAspect="1"/>
+          </p:cNvSpPr>
+          <p:nvPr>
+            <p:ph type="sldImg"/>
+          </p:nvPr>
+        </p:nvSpPr>
+        <p:spPr/>
+      </p:sp>
+      <p:sp>
+        <p:nvSpPr>
+          <p:cNvPr id="3" name="Notes Placeholder 2"/>
+          <p:cNvSpPr>
+            <a:spLocks noGrp="1"/>
+          </p:cNvSpPr>
+          <p:nvPr>
+            <p:ph type="body" idx="1"/>
+          </p:nvPr>
+        </p:nvSpPr>
+        <p:spPr/>
+        <p:txBody>
+          <a:bodyPr/>
+          <a:lstStyle/>
+          <a:p>
+            <a:pPr lvl="0" indent="0" marL="0">
+              <a:buNone/>
+            </a:pPr>
+            <a:r>
+              <a:rPr/>
+              <a:t>Target: 1:38. Students don’t need to implement MOEAs — just understand the conceptual machinery well enough to interpret results.</a:t>
+            </a:r>
+          </a:p>
+          <a:p>
+            <a:pPr lvl="0" indent="0" marL="0">
+              <a:buNone/>
+            </a:pPr>
+          </a:p>
+          <a:p>
+            <a:pPr lvl="0" indent="0" marL="0">
+              <a:buNone/>
+            </a:pPr>
+            <a:r>
+              <a:rPr/>
+              <a:t>Target: 1:42. Analogy: each solution is a “design.” The MOEA runs many designs in parallel and iteratively improves them. The diversity mechanism is key: without it, the algorithm collapses to one region of the front.</a:t>
+            </a:r>
+          </a:p>
+          <a:p>
+            <a:pPr lvl="0" indent="0" marL="0">
+              <a:buNone/>
+            </a:pPr>
+          </a:p>
+          <a:p>
+            <a:pPr lvl="0" indent="0" marL="0">
+              <a:buNone/>
+            </a:pPr>
+            <a:r>
+              <a:rPr/>
+              <a:t>Target: 1:45. These algorithms are heuristics — they don’t guarantee a global optimum. The diagnostics are how we build confidence. Hypervolume is the standard metric: larger = better coverage of the front.</a:t>
+            </a:r>
+          </a:p>
+        </p:txBody>
+      </p:sp>
+      <p:sp>
+        <p:nvSpPr>
+          <p:cNvPr id="4" name="Slide Number Placeholder 3"/>
+          <p:cNvSpPr>
+            <a:spLocks noGrp="1"/>
+          </p:cNvSpPr>
+          <p:nvPr>
+            <p:ph type="sldNum" sz="quarter" idx="10"/>
+          </p:nvPr>
+        </p:nvSpPr>
+        <p:spPr/>
+        <p:txBody>
+          <a:bodyPr/>
+          <a:lstStyle/>
+          <a:p>
+            <a:fld id="{18BDFEC3-8487-43E8-A154-7C12CBC1FFF2}" type="slidenum">
+              <a:rPr lang="en-US"/>
+              <a:t>8</a:t>
+            </a:fld>
+            <a:endParaRPr lang="en-US"/>
+          </a:p>
+        </p:txBody>
+      </p:sp>
+    </p:spTree>
+  </p:cSld>
+</p:notes>
+</file>
+
+<file path=ppt/notesSlides/notesSlide8.xml><?xml version="1.0" encoding="utf-8"?>
+<p:notes xmlns:a="http://schemas.openxmlformats.org/drawingml/2006/main" xmlns:r="http://schemas.openxmlformats.org/officeDocument/2006/relationships" xmlns:p="http://schemas.openxmlformats.org/presentationml/2006/main">
+  <p:cSld>
+    <p:spTree>
+      <p:nvGrpSpPr>
+        <p:cNvPr id="1" name=""/>
+        <p:cNvGrpSpPr/>
+        <p:nvPr/>
+      </p:nvGrpSpPr>
+      <p:grpSpPr>
+        <a:xfrm>
+          <a:off x="0" y="0"/>
+          <a:ext cx="0" cy="0"/>
+          <a:chOff x="0" y="0"/>
+          <a:chExt cx="0" cy="0"/>
+        </a:xfrm>
+      </p:grpSpPr>
+      <p:sp>
+        <p:nvSpPr>
+          <p:cNvPr id="2" name="Slide Image Placeholder 1"/>
+          <p:cNvSpPr>
+            <a:spLocks noGrp="1" noRot="1" noChangeAspect="1"/>
+          </p:cNvSpPr>
+          <p:nvPr>
+            <p:ph type="sldImg"/>
+          </p:nvPr>
+        </p:nvSpPr>
+        <p:spPr/>
+      </p:sp>
+      <p:sp>
+        <p:nvSpPr>
+          <p:cNvPr id="3" name="Notes Placeholder 2"/>
+          <p:cNvSpPr>
+            <a:spLocks noGrp="1"/>
+          </p:cNvSpPr>
+          <p:nvPr>
+            <p:ph type="body" idx="1"/>
+          </p:nvPr>
+        </p:nvSpPr>
+        <p:spPr/>
+        <p:txBody>
+          <a:bodyPr/>
+          <a:lstStyle/>
+          <a:p>
+            <a:pPr lvl="0" indent="0" marL="0">
+              <a:buNone/>
+            </a:pPr>
+            <a:r>
+              <a:rPr/>
+              <a:t>Target: 1:47. Walk through the parallel axis plot: each vertical axis is one objective (cost, reliability, market use), each colored line is a solution. Solutions that do well on reliability tend to do worse on cost — that’s the trade-off. Color = which model case. This is from a water portfolio problem in the Rio Grande Valley. Point out: 6 objectives, ~1000 non-dominated solutions.</a:t>
+            </a:r>
+          </a:p>
+        </p:txBody>
+      </p:sp>
+      <p:sp>
+        <p:nvSpPr>
+          <p:cNvPr id="4" name="Slide Number Placeholder 3"/>
+          <p:cNvSpPr>
+            <a:spLocks noGrp="1"/>
+          </p:cNvSpPr>
+          <p:nvPr>
+            <p:ph type="sldNum" sz="quarter" idx="10"/>
+          </p:nvPr>
+        </p:nvSpPr>
+        <p:spPr/>
+        <p:txBody>
+          <a:bodyPr/>
+          <a:lstStyle/>
+          <a:p>
+            <a:fld id="{18BDFEC3-8487-43E8-A154-7C12CBC1FFF2}" type="slidenum">
+              <a:rPr lang="en-US"/>
+              <a:t>9</a:t>
+            </a:fld>
+            <a:endParaRPr lang="en-US"/>
+          </a:p>
+        </p:txBody>
+      </p:sp>
+    </p:spTree>
+  </p:cSld>
+</p:notes>
+</file>
+
+<file path=ppt/notesSlides/notesSlide9.xml><?xml version="1.0" encoding="utf-8"?>
+<p:notes xmlns:a="http://schemas.openxmlformats.org/drawingml/2006/main" xmlns:r="http://schemas.openxmlformats.org/officeDocument/2006/relationships" xmlns:p="http://schemas.openxmlformats.org/presentationml/2006/main">
+  <p:cSld>
+    <p:spTree>
+      <p:nvGrpSpPr>
+        <p:cNvPr id="1" name=""/>
+        <p:cNvGrpSpPr/>
+        <p:nvPr/>
+      </p:nvGrpSpPr>
+      <p:grpSpPr>
+        <a:xfrm>
+          <a:off x="0" y="0"/>
+          <a:ext cx="0" cy="0"/>
+          <a:chOff x="0" y="0"/>
+          <a:chExt cx="0" cy="0"/>
+        </a:xfrm>
+      </p:grpSpPr>
+      <p:sp>
+        <p:nvSpPr>
+          <p:cNvPr id="2" name="Slide Image Placeholder 1"/>
+          <p:cNvSpPr>
+            <a:spLocks noGrp="1" noRot="1" noChangeAspect="1"/>
+          </p:cNvSpPr>
+          <p:nvPr>
+            <p:ph type="sldImg"/>
+          </p:nvPr>
+        </p:nvSpPr>
+        <p:spPr/>
+      </p:sp>
+      <p:sp>
+        <p:nvSpPr>
+          <p:cNvPr id="3" name="Notes Placeholder 2"/>
+          <p:cNvSpPr>
+            <a:spLocks noGrp="1"/>
+          </p:cNvSpPr>
+          <p:nvPr>
+            <p:ph type="body" idx="1"/>
+          </p:nvPr>
+        </p:nvSpPr>
+        <p:spPr/>
+        <p:txBody>
+          <a:bodyPr/>
+          <a:lstStyle/>
+          <a:p>
+            <a:pPr lvl="0" indent="0" marL="0">
+              <a:buNone/>
+            </a:pPr>
+            <a:r>
+              <a:rPr/>
+              <a:t>Target: 1:48. Quick section — 5 min.</a:t>
+            </a:r>
+          </a:p>
+          <a:p>
+            <a:pPr lvl="0" indent="0" marL="0">
+              <a:buNone/>
+            </a:pPr>
+          </a:p>
+          <a:p>
+            <a:pPr lvl="0" indent="0" marL="0">
+              <a:buNone/>
+            </a:pPr>
+            <a:r>
+              <a:rPr/>
+              <a:t>Target: 1:50. Preview Lab 10: students will generate a Pareto front for the house elevation problem (cost vs. expected damages) and identify the knee. This is directly connected to Memo 2 — does your project have multiple objectives that BCA collapses?</a:t>
+            </a:r>
+          </a:p>
+          <a:p>
+            <a:pPr lvl="0" indent="0" marL="0">
+              <a:buNone/>
+            </a:pPr>
+          </a:p>
+          <a:p>
+            <a:pPr lvl="0" indent="0" marL="0">
+              <a:buNone/>
+            </a:pPr>
+            <a:r>
+              <a:rPr/>
+              <a:t>Target: 1:52. This is the counterweight to the earlier motivation. Multi-objective framing is powerful but not free. The question is always: are the objectives genuinely incommensurable, or can they be reasonably combined? Connect to student projects: most have 2–3 meaningful objectives at most.</a:t>
+            </a:r>
+          </a:p>
+        </p:txBody>
+      </p:sp>
+      <p:sp>
+        <p:nvSpPr>
+          <p:cNvPr id="4" name="Slide Number Placeholder 3"/>
+          <p:cNvSpPr>
+            <a:spLocks noGrp="1"/>
+          </p:cNvSpPr>
+          <p:nvPr>
+            <p:ph type="sldNum" sz="quarter" idx="10"/>
+          </p:nvPr>
+        </p:nvSpPr>
+        <p:spPr/>
+        <p:txBody>
+          <a:bodyPr/>
+          <a:lstStyle/>
+          <a:p>
+            <a:fld id="{18BDFEC3-8487-43E8-A154-7C12CBC1FFF2}" type="slidenum">
+              <a:rPr lang="en-US"/>
+              <a:t>10</a:t>
+            </a:fld>
+            <a:endParaRPr lang="en-US"/>
+          </a:p>
+        </p:txBody>
+      </p:sp>
+    </p:spTree>
+  </p:cSld>
+</p:notes>
 </file>
 
 <file path=ppt/slideLayouts/slideLayout1.xml><?xml version="1.0" encoding="utf-8"?>
@@ -3154,7 +4517,7 @@
             <a:br/>
             <a:r>
               <a:rPr/>
-              <a:t>Dr. James Doss-Gollin</a:t>
+              <a:t>James Doss-Gollin</a:t>
             </a:r>
           </a:p>
         </p:txBody>
@@ -3186,6 +4549,1349 @@
       </p:sp>
     </p:spTree>
   </p:cSld>
+</p:sld>
+</file>
+
+<file path=ppt/slides/slide10.xml><?xml version="1.0" encoding="utf-8"?>
+<p:sld xmlns:a="http://schemas.openxmlformats.org/drawingml/2006/main" xmlns:r="http://schemas.openxmlformats.org/officeDocument/2006/relationships" xmlns:p="http://schemas.openxmlformats.org/presentationml/2006/main">
+  <p:cSld>
+    <p:spTree>
+      <p:nvGrpSpPr>
+        <p:cNvPr id="1" name=""/>
+        <p:cNvGrpSpPr/>
+        <p:nvPr/>
+      </p:nvGrpSpPr>
+      <p:grpSpPr>
+        <a:xfrm>
+          <a:off x="0" y="0"/>
+          <a:ext cx="0" cy="0"/>
+          <a:chOff x="0" y="0"/>
+          <a:chExt cx="0" cy="0"/>
+        </a:xfrm>
+      </p:grpSpPr>
+      <p:sp>
+        <p:nvSpPr>
+          <p:cNvPr id="2" name="Title 1"/>
+          <p:cNvSpPr>
+            <a:spLocks noGrp="1"/>
+          </p:cNvSpPr>
+          <p:nvPr>
+            <p:ph type="title"/>
+          </p:nvPr>
+        </p:nvSpPr>
+        <p:spPr/>
+        <p:txBody>
+          <a:bodyPr/>
+          <a:lstStyle/>
+          <a:p>
+            <a:pPr lvl="0" indent="0" marL="0">
+              <a:buNone/>
+            </a:pPr>
+            <a:r>
+              <a:rPr/>
+              <a:t>Reading and Using the Pareto Front</a:t>
+            </a:r>
+          </a:p>
+        </p:txBody>
+      </p:sp>
+      <p:sp>
+        <p:nvSpPr>
+          <p:cNvPr id="3" name="Content Placeholder 2"/>
+          <p:cNvSpPr>
+            <a:spLocks noGrp="1"/>
+          </p:cNvSpPr>
+          <p:nvPr>
+            <p:ph idx="1"/>
+          </p:nvPr>
+        </p:nvSpPr>
+        <p:spPr/>
+        <p:txBody>
+          <a:bodyPr/>
+          <a:lstStyle/>
+          <a:p>
+            <a:pPr lvl="0" indent="0" marL="0">
+              <a:spcBef>
+                <a:spcPts val="3000"/>
+              </a:spcBef>
+              <a:buNone/>
+            </a:pPr>
+            <a:r>
+              <a:rPr b="1"/>
+              <a:t>Reading a Pareto Front</a:t>
+            </a:r>
+          </a:p>
+          <a:p>
+            <a:pPr lvl="0" indent="0" marL="0">
+              <a:buNone/>
+            </a:pPr>
+            <a:r>
+              <a:rPr/>
+              <a:t>On a Pareto front plot, each axis is one objective and each point is a non-dominated solution.</a:t>
+            </a:r>
+          </a:p>
+          <a:p>
+            <a:pPr lvl="0" indent="0" marL="0">
+              <a:buNone/>
+            </a:pPr>
+            <a:r>
+              <a:rPr/>
+              <a:t>. . .</a:t>
+            </a:r>
+          </a:p>
+          <a:p>
+            <a:pPr lvl="0" indent="0" marL="0">
+              <a:buNone/>
+            </a:pPr>
+            <a:r>
+              <a:rPr b="1"/>
+              <a:t>The “knee” of the front:</a:t>
+            </a:r>
+          </a:p>
+          <a:p>
+            <a:pPr lvl="0"/>
+            <a:r>
+              <a:rPr/>
+              <a:t>Region of high curvature — large gains on one objective for small losses on another</a:t>
+            </a:r>
+          </a:p>
+          <a:p>
+            <a:pPr lvl="0"/>
+            <a:r>
+              <a:rPr/>
+              <a:t>Often a practical default if no strong preference exists</a:t>
+            </a:r>
+          </a:p>
+          <a:p>
+            <a:pPr lvl="0"/>
+            <a:r>
+              <a:rPr/>
+              <a:t>Not always present; depends on problem structure</a:t>
+            </a:r>
+          </a:p>
+          <a:p>
+            <a:pPr lvl="0" indent="0" marL="0">
+              <a:buNone/>
+            </a:pPr>
+            <a:r>
+              <a:rPr/>
+              <a:t>. . .</a:t>
+            </a:r>
+          </a:p>
+          <a:p>
+            <a:pPr lvl="0" indent="0" marL="0">
+              <a:buNone/>
+            </a:pPr>
+            <a:r>
+              <a:rPr/>
+              <a:t>The analyst generates the front; the decision-maker selects a solution from it.</a:t>
+            </a:r>
+          </a:p>
+          <a:p>
+            <a:pPr lvl="0" indent="0" marL="0">
+              <a:spcBef>
+                <a:spcPts val="3000"/>
+              </a:spcBef>
+              <a:buNone/>
+            </a:pPr>
+            <a:r>
+              <a:rPr b="1"/>
+              <a:t>How Many Objectives?</a:t>
+            </a:r>
+          </a:p>
+          <a:p>
+            <a:pPr lvl="0" indent="0" marL="0">
+              <a:buNone/>
+            </a:pPr>
+            <a:r>
+              <a:rPr/>
+              <a:t>More objectives → richer problem representation, but real costs:</a:t>
+            </a:r>
+          </a:p>
+          <a:p>
+            <a:pPr lvl="0"/>
+            <a:r>
+              <a:rPr b="1"/>
+              <a:t>Computational:</a:t>
+            </a:r>
+            <a:r>
+              <a:rPr/>
+              <a:t> exponentially more solutions needed to cover the front</a:t>
+            </a:r>
+          </a:p>
+          <a:p>
+            <a:pPr lvl="0"/>
+            <a:r>
+              <a:rPr b="1"/>
+              <a:t>Conceptual:</a:t>
+            </a:r>
+            <a:r>
+              <a:rPr/>
+              <a:t> harder to reason about trade-offs in high dimensions</a:t>
+            </a:r>
+          </a:p>
+          <a:p>
+            <a:pPr lvl="0"/>
+            <a:r>
+              <a:rPr b="1"/>
+              <a:t>Communication:</a:t>
+            </a:r>
+            <a:r>
+              <a:rPr/>
+              <a:t> harder to show decision-makers and stakeholders</a:t>
+            </a:r>
+          </a:p>
+          <a:p>
+            <a:pPr lvl="0" indent="0" marL="0">
+              <a:buNone/>
+            </a:pPr>
+            <a:r>
+              <a:rPr/>
+              <a:t>. . .</a:t>
+            </a:r>
+          </a:p>
+          <a:p>
+            <a:pPr lvl="0" indent="0" marL="0">
+              <a:buNone/>
+            </a:pPr>
+            <a:r>
+              <a:rPr b="1"/>
+              <a:t>Rule of thumb:</a:t>
+            </a:r>
+            <a:r>
+              <a:rPr/>
+              <a:t> use as few objectives as possible. Combining objectives into a scalar is often a good idea — </a:t>
+            </a:r>
+            <a:r>
+              <a:rPr i="1"/>
+              <a:t>when the assumptions hold</a:t>
+            </a:r>
+            <a:r>
+              <a:rPr/>
+              <a:t>.</a:t>
+            </a:r>
+          </a:p>
+        </p:txBody>
+      </p:sp>
+    </p:spTree>
+  </p:cSld>
+  <p:timing>
+    <p:tnLst>
+      <p:par>
+        <p:cTn id="1" dur="indefinite" restart="never" nodeType="tmRoot">
+          <p:childTnLst>
+            <p:seq concurrent="1" nextAc="seek">
+              <p:cTn id="2" dur="indefinite" nodeType="mainSeq">
+                <p:childTnLst>
+                  <p:par>
+                    <p:cTn id="3" fill="hold">
+                      <p:stCondLst>
+                        <p:cond delay="indefinite"/>
+                      </p:stCondLst>
+                      <p:childTnLst>
+                        <p:par>
+                          <p:cTn id="4" fill="hold">
+                            <p:stCondLst>
+                              <p:cond delay="0"/>
+                            </p:stCondLst>
+                            <p:childTnLst>
+                              <p:par>
+                                <p:cTn id="5" presetID="1" presetClass="entr" presetSubtype="0" fill="hold" grpId="0" nodeType="clickEffect">
+                                  <p:stCondLst>
+                                    <p:cond delay="0"/>
+                                  </p:stCondLst>
+                                  <p:childTnLst>
+                                    <p:set>
+                                      <p:cBhvr>
+                                        <p:cTn id="6" dur="1" fill="hold">
+                                          <p:stCondLst>
+                                            <p:cond delay="0"/>
+                                          </p:stCondLst>
+                                        </p:cTn>
+                                        <p:tgtEl>
+                                          <p:spTgt spid="3">
+                                            <p:txEl>
+                                              <p:pRg st="4" end="4"/>
+                                            </p:txEl>
+                                          </p:spTgt>
+                                        </p:tgtEl>
+                                        <p:attrNameLst>
+                                          <p:attrName>style.visibility</p:attrName>
+                                        </p:attrNameLst>
+                                      </p:cBhvr>
+                                      <p:to>
+                                        <p:strVal val="visible"/>
+                                      </p:to>
+                                    </p:set>
+                                  </p:childTnLst>
+                                </p:cTn>
+                              </p:par>
+                            </p:childTnLst>
+                          </p:cTn>
+                        </p:par>
+                      </p:childTnLst>
+                    </p:cTn>
+                  </p:par>
+                  <p:par>
+                    <p:cTn id="7" fill="hold">
+                      <p:stCondLst>
+                        <p:cond delay="indefinite"/>
+                      </p:stCondLst>
+                      <p:childTnLst>
+                        <p:par>
+                          <p:cTn id="8" fill="hold">
+                            <p:stCondLst>
+                              <p:cond delay="0"/>
+                            </p:stCondLst>
+                            <p:childTnLst>
+                              <p:par>
+                                <p:cTn id="9" presetID="1" presetClass="entr" presetSubtype="0" fill="hold" grpId="0" nodeType="clickEffect">
+                                  <p:stCondLst>
+                                    <p:cond delay="0"/>
+                                  </p:stCondLst>
+                                  <p:childTnLst>
+                                    <p:set>
+                                      <p:cBhvr>
+                                        <p:cTn id="10" dur="1" fill="hold">
+                                          <p:stCondLst>
+                                            <p:cond delay="0"/>
+                                          </p:stCondLst>
+                                        </p:cTn>
+                                        <p:tgtEl>
+                                          <p:spTgt spid="3">
+                                            <p:txEl>
+                                              <p:pRg st="5" end="5"/>
+                                            </p:txEl>
+                                          </p:spTgt>
+                                        </p:tgtEl>
+                                        <p:attrNameLst>
+                                          <p:attrName>style.visibility</p:attrName>
+                                        </p:attrNameLst>
+                                      </p:cBhvr>
+                                      <p:to>
+                                        <p:strVal val="visible"/>
+                                      </p:to>
+                                    </p:set>
+                                  </p:childTnLst>
+                                </p:cTn>
+                              </p:par>
+                            </p:childTnLst>
+                          </p:cTn>
+                        </p:par>
+                      </p:childTnLst>
+                    </p:cTn>
+                  </p:par>
+                  <p:par>
+                    <p:cTn id="11" fill="hold">
+                      <p:stCondLst>
+                        <p:cond delay="indefinite"/>
+                      </p:stCondLst>
+                      <p:childTnLst>
+                        <p:par>
+                          <p:cTn id="12" fill="hold">
+                            <p:stCondLst>
+                              <p:cond delay="0"/>
+                            </p:stCondLst>
+                            <p:childTnLst>
+                              <p:par>
+                                <p:cTn id="13" presetID="1" presetClass="entr" presetSubtype="0" fill="hold" grpId="0" nodeType="clickEffect">
+                                  <p:stCondLst>
+                                    <p:cond delay="0"/>
+                                  </p:stCondLst>
+                                  <p:childTnLst>
+                                    <p:set>
+                                      <p:cBhvr>
+                                        <p:cTn id="14" dur="1" fill="hold">
+                                          <p:stCondLst>
+                                            <p:cond delay="0"/>
+                                          </p:stCondLst>
+                                        </p:cTn>
+                                        <p:tgtEl>
+                                          <p:spTgt spid="3">
+                                            <p:txEl>
+                                              <p:pRg st="6" end="6"/>
+                                            </p:txEl>
+                                          </p:spTgt>
+                                        </p:tgtEl>
+                                        <p:attrNameLst>
+                                          <p:attrName>style.visibility</p:attrName>
+                                        </p:attrNameLst>
+                                      </p:cBhvr>
+                                      <p:to>
+                                        <p:strVal val="visible"/>
+                                      </p:to>
+                                    </p:set>
+                                  </p:childTnLst>
+                                </p:cTn>
+                              </p:par>
+                            </p:childTnLst>
+                          </p:cTn>
+                        </p:par>
+                      </p:childTnLst>
+                    </p:cTn>
+                  </p:par>
+                  <p:par>
+                    <p:cTn id="15" fill="hold">
+                      <p:stCondLst>
+                        <p:cond delay="indefinite"/>
+                      </p:stCondLst>
+                      <p:childTnLst>
+                        <p:par>
+                          <p:cTn id="16" fill="hold">
+                            <p:stCondLst>
+                              <p:cond delay="0"/>
+                            </p:stCondLst>
+                            <p:childTnLst>
+                              <p:par>
+                                <p:cTn id="17" presetID="1" presetClass="entr" presetSubtype="0" fill="hold" grpId="0" nodeType="clickEffect">
+                                  <p:stCondLst>
+                                    <p:cond delay="0"/>
+                                  </p:stCondLst>
+                                  <p:childTnLst>
+                                    <p:set>
+                                      <p:cBhvr>
+                                        <p:cTn id="18" dur="1" fill="hold">
+                                          <p:stCondLst>
+                                            <p:cond delay="0"/>
+                                          </p:stCondLst>
+                                        </p:cTn>
+                                        <p:tgtEl>
+                                          <p:spTgt spid="3">
+                                            <p:txEl>
+                                              <p:pRg st="11" end="11"/>
+                                            </p:txEl>
+                                          </p:spTgt>
+                                        </p:tgtEl>
+                                        <p:attrNameLst>
+                                          <p:attrName>style.visibility</p:attrName>
+                                        </p:attrNameLst>
+                                      </p:cBhvr>
+                                      <p:to>
+                                        <p:strVal val="visible"/>
+                                      </p:to>
+                                    </p:set>
+                                  </p:childTnLst>
+                                </p:cTn>
+                              </p:par>
+                            </p:childTnLst>
+                          </p:cTn>
+                        </p:par>
+                      </p:childTnLst>
+                    </p:cTn>
+                  </p:par>
+                  <p:par>
+                    <p:cTn id="19" fill="hold">
+                      <p:stCondLst>
+                        <p:cond delay="indefinite"/>
+                      </p:stCondLst>
+                      <p:childTnLst>
+                        <p:par>
+                          <p:cTn id="20" fill="hold">
+                            <p:stCondLst>
+                              <p:cond delay="0"/>
+                            </p:stCondLst>
+                            <p:childTnLst>
+                              <p:par>
+                                <p:cTn id="21" presetID="1" presetClass="entr" presetSubtype="0" fill="hold" grpId="0" nodeType="clickEffect">
+                                  <p:stCondLst>
+                                    <p:cond delay="0"/>
+                                  </p:stCondLst>
+                                  <p:childTnLst>
+                                    <p:set>
+                                      <p:cBhvr>
+                                        <p:cTn id="22" dur="1" fill="hold">
+                                          <p:stCondLst>
+                                            <p:cond delay="0"/>
+                                          </p:stCondLst>
+                                        </p:cTn>
+                                        <p:tgtEl>
+                                          <p:spTgt spid="3">
+                                            <p:txEl>
+                                              <p:pRg st="12" end="12"/>
+                                            </p:txEl>
+                                          </p:spTgt>
+                                        </p:tgtEl>
+                                        <p:attrNameLst>
+                                          <p:attrName>style.visibility</p:attrName>
+                                        </p:attrNameLst>
+                                      </p:cBhvr>
+                                      <p:to>
+                                        <p:strVal val="visible"/>
+                                      </p:to>
+                                    </p:set>
+                                  </p:childTnLst>
+                                </p:cTn>
+                              </p:par>
+                            </p:childTnLst>
+                          </p:cTn>
+                        </p:par>
+                      </p:childTnLst>
+                    </p:cTn>
+                  </p:par>
+                  <p:par>
+                    <p:cTn id="23" fill="hold">
+                      <p:stCondLst>
+                        <p:cond delay="indefinite"/>
+                      </p:stCondLst>
+                      <p:childTnLst>
+                        <p:par>
+                          <p:cTn id="24" fill="hold">
+                            <p:stCondLst>
+                              <p:cond delay="0"/>
+                            </p:stCondLst>
+                            <p:childTnLst>
+                              <p:par>
+                                <p:cTn id="25" presetID="1" presetClass="entr" presetSubtype="0" fill="hold" grpId="0" nodeType="clickEffect">
+                                  <p:stCondLst>
+                                    <p:cond delay="0"/>
+                                  </p:stCondLst>
+                                  <p:childTnLst>
+                                    <p:set>
+                                      <p:cBhvr>
+                                        <p:cTn id="26" dur="1" fill="hold">
+                                          <p:stCondLst>
+                                            <p:cond delay="0"/>
+                                          </p:stCondLst>
+                                        </p:cTn>
+                                        <p:tgtEl>
+                                          <p:spTgt spid="3">
+                                            <p:txEl>
+                                              <p:pRg st="13" end="13"/>
+                                            </p:txEl>
+                                          </p:spTgt>
+                                        </p:tgtEl>
+                                        <p:attrNameLst>
+                                          <p:attrName>style.visibility</p:attrName>
+                                        </p:attrNameLst>
+                                      </p:cBhvr>
+                                      <p:to>
+                                        <p:strVal val="visible"/>
+                                      </p:to>
+                                    </p:set>
+                                  </p:childTnLst>
+                                </p:cTn>
+                              </p:par>
+                            </p:childTnLst>
+                          </p:cTn>
+                        </p:par>
+                      </p:childTnLst>
+                    </p:cTn>
+                  </p:par>
+                </p:childTnLst>
+              </p:cTn>
+              <p:prevCondLst>
+                <p:cond evt="onPrev" delay="0">
+                  <p:tgtEl>
+                    <p:sldTgt/>
+                  </p:tgtEl>
+                </p:cond>
+              </p:prevCondLst>
+              <p:nextCondLst>
+                <p:cond evt="onNext" delay="0">
+                  <p:tgtEl>
+                    <p:sldTgt/>
+                  </p:tgtEl>
+                </p:cond>
+              </p:nextCondLst>
+            </p:seq>
+          </p:childTnLst>
+        </p:cTn>
+      </p:par>
+    </p:tnLst>
+    <p:bldLst>
+      <p:bldP spid="3" grpId="0" uiExpand="1" build="p"/>
+    </p:bldLst>
+  </p:timing>
+</p:sld>
+</file>
+
+<file path=ppt/slides/slide11.xml><?xml version="1.0" encoding="utf-8"?>
+<p:sld xmlns:a="http://schemas.openxmlformats.org/drawingml/2006/main" xmlns:r="http://schemas.openxmlformats.org/officeDocument/2006/relationships" xmlns:p="http://schemas.openxmlformats.org/presentationml/2006/main">
+  <p:cSld>
+    <p:spTree>
+      <p:nvGrpSpPr>
+        <p:cNvPr id="1" name=""/>
+        <p:cNvGrpSpPr/>
+        <p:nvPr/>
+      </p:nvGrpSpPr>
+      <p:grpSpPr>
+        <a:xfrm>
+          <a:off x="0" y="0"/>
+          <a:ext cx="0" cy="0"/>
+          <a:chOff x="0" y="0"/>
+          <a:chExt cx="0" cy="0"/>
+        </a:xfrm>
+      </p:grpSpPr>
+      <p:sp>
+        <p:nvSpPr>
+          <p:cNvPr id="2" name="Title 1"/>
+          <p:cNvSpPr>
+            <a:spLocks noGrp="1"/>
+          </p:cNvSpPr>
+          <p:nvPr>
+            <p:ph type="title"/>
+          </p:nvPr>
+        </p:nvSpPr>
+        <p:spPr/>
+        <p:txBody>
+          <a:bodyPr/>
+          <a:lstStyle/>
+          <a:p>
+            <a:pPr lvl="0" indent="0" marL="0">
+              <a:buNone/>
+            </a:pPr>
+            <a:r>
+              <a:rPr/>
+              <a:t>When to Use Multi-Objective Framing</a:t>
+            </a:r>
+          </a:p>
+        </p:txBody>
+      </p:sp>
+      <p:sp>
+        <p:nvSpPr>
+          <p:cNvPr id="3" name="Content Placeholder 2"/>
+          <p:cNvSpPr>
+            <a:spLocks noGrp="1"/>
+          </p:cNvSpPr>
+          <p:nvPr>
+            <p:ph idx="1"/>
+          </p:nvPr>
+        </p:nvSpPr>
+        <p:spPr/>
+        <p:txBody>
+          <a:bodyPr/>
+          <a:lstStyle/>
+          <a:p>
+            <a:pPr lvl="0" indent="0" marL="0">
+              <a:spcBef>
+                <a:spcPts val="3000"/>
+              </a:spcBef>
+              <a:buNone/>
+            </a:pPr>
+            <a:r>
+              <a:rPr b="1"/>
+              <a:t>Choosing the Right Tool</a:t>
+            </a:r>
+          </a:p>
+          <a:p>
+            <a:pPr lvl="0" indent="0" marL="0">
+              <a:buNone/>
+            </a:pPr>
+            <a:r>
+              <a:rPr b="1"/>
+              <a:t>Use multi-objective framing when:</a:t>
+            </a:r>
+          </a:p>
+          <a:p>
+            <a:pPr lvl="0"/>
+            <a:r>
+              <a:rPr/>
+              <a:t>Stakeholders genuinely disagree on how to weight objectives</a:t>
+            </a:r>
+          </a:p>
+          <a:p>
+            <a:pPr lvl="0"/>
+            <a:r>
+              <a:rPr/>
+              <a:t>Objectives are incommensurable — not easily reduced to dollars</a:t>
+            </a:r>
+          </a:p>
+          <a:p>
+            <a:pPr lvl="0"/>
+            <a:r>
+              <a:rPr/>
+              <a:t>You want to make trade-offs </a:t>
+            </a:r>
+            <a:r>
+              <a:rPr b="1"/>
+              <a:t>explicit and visible</a:t>
+            </a:r>
+            <a:r>
+              <a:rPr/>
+              <a:t> to decision-makers</a:t>
+            </a:r>
+          </a:p>
+          <a:p>
+            <a:pPr lvl="0" indent="0" marL="0">
+              <a:buNone/>
+            </a:pPr>
+            <a:r>
+              <a:rPr/>
+              <a:t>. . .</a:t>
+            </a:r>
+          </a:p>
+          <a:p>
+            <a:pPr lvl="0" indent="0" marL="0">
+              <a:buNone/>
+            </a:pPr>
+            <a:r>
+              <a:rPr b="1"/>
+              <a:t>Stick with single-objective (BCA) when:</a:t>
+            </a:r>
+          </a:p>
+          <a:p>
+            <a:pPr lvl="0"/>
+            <a:r>
+              <a:rPr/>
+              <a:t>One objective clearly dominates</a:t>
+            </a:r>
+          </a:p>
+          <a:p>
+            <a:pPr lvl="0"/>
+            <a:r>
+              <a:rPr/>
+              <a:t>Stakeholders agree on how to aggregate</a:t>
+            </a:r>
+          </a:p>
+          <a:p>
+            <a:pPr lvl="0"/>
+            <a:r>
+              <a:rPr/>
+              <a:t>Speed and simplicity matter more than exploring trade-offs</a:t>
+            </a:r>
+          </a:p>
+          <a:p>
+            <a:pPr lvl="0" indent="0" marL="0">
+              <a:spcBef>
+                <a:spcPts val="3000"/>
+              </a:spcBef>
+              <a:buNone/>
+            </a:pPr>
+            <a:r>
+              <a:rPr b="1"/>
+              <a:t>Looking Ahead</a:t>
+            </a:r>
+          </a:p>
+          <a:p>
+            <a:pPr lvl="0" indent="0" marL="0">
+              <a:buNone/>
+            </a:pPr>
+            <a:r>
+              <a:rPr b="1"/>
+              <a:t>This week:</a:t>
+            </a:r>
+          </a:p>
+          <a:p>
+            <a:pPr lvl="0"/>
+            <a:r>
+              <a:rPr/>
+              <a:t>Wednesday: Madison leads discussion of Yang et al. (2023) — come prepared to discuss objectives, algorithm choice, and how results inform decisions</a:t>
+            </a:r>
+          </a:p>
+          <a:p>
+            <a:pPr lvl="0"/>
+            <a:r>
+              <a:rPr/>
+              <a:t>Friday: Lab 10 — generate and visualize Pareto fronts for the house elevation problem</a:t>
+            </a:r>
+          </a:p>
+          <a:p>
+            <a:pPr lvl="0"/>
+            <a:r>
+              <a:rPr/>
+              <a:t>Friday: </a:t>
+            </a:r>
+            <a:r>
+              <a:rPr b="1"/>
+              <a:t>Memo 2 due</a:t>
+            </a:r>
+            <a:r>
+              <a:rPr/>
+              <a:t> (Evidence &amp; Robustness)</a:t>
+            </a:r>
+          </a:p>
+          <a:p>
+            <a:pPr lvl="0" indent="0" marL="0">
+              <a:buNone/>
+            </a:pPr>
+            <a:r>
+              <a:rPr/>
+              <a:t>. . .</a:t>
+            </a:r>
+          </a:p>
+          <a:p>
+            <a:pPr lvl="0" indent="0" marL="0">
+              <a:buNone/>
+            </a:pPr>
+            <a:r>
+              <a:rPr b="1"/>
+              <a:t>Week 13 (Monday):</a:t>
+            </a:r>
+            <a:r>
+              <a:rPr/>
+              <a:t> Putting it all together — how robustness, scenario discovery, sequential decisions, and multi-objective optimization connect in real projects.</a:t>
+            </a:r>
+          </a:p>
+          <a:p>
+            <a:pPr lvl="0" indent="0" marL="0">
+              <a:spcBef>
+                <a:spcPts val="3000"/>
+              </a:spcBef>
+              <a:buNone/>
+            </a:pPr>
+            <a:r>
+              <a:rPr b="1"/>
+              <a:t>References</a:t>
+            </a:r>
+          </a:p>
+          <a:p>
+            <a:pPr lvl="0" indent="0" marL="0">
+              <a:buNone/>
+            </a:pPr>
+            <a:r>
+              <a:rPr/>
+              <a:t>Kasprzyk, Joseph R., Shanthi Nataraj, Patrick M. Reed, and Robert J. Lempert. 2013. “Many Objective Robust Decision Making for Complex Environmental Systems Undergoing Change.” </a:t>
+            </a:r>
+            <a:r>
+              <a:rPr i="1"/>
+              <a:t>Environmental Modelling &amp; Software</a:t>
+            </a:r>
+            <a:r>
+              <a:rPr/>
+              <a:t> 42 (April): 55–71. </a:t>
+            </a:r>
+            <a:r>
+              <a:rPr>
+                <a:hlinkClick r:id="rId3"/>
+              </a:rPr>
+              <a:t>https://doi.org/10.1016/j.envsoft.2012.12.007</a:t>
+            </a:r>
+            <a:r>
+              <a:rPr/>
+              <a:t>.</a:t>
+            </a:r>
+          </a:p>
+          <a:p>
+            <a:pPr lvl="0" indent="0" marL="0">
+              <a:buNone/>
+            </a:pPr>
+            <a:r>
+              <a:rPr/>
+              <a:t>Smith, S., M. Southerby, S. Setiniyaz, R. Apsimon, and G. Burt. 2022. “Multiobjective Optimization and Pareto Front Visualization Techniques Applied to Normal Conducting Rf Accelerating Structures.” </a:t>
+            </a:r>
+            <a:r>
+              <a:rPr i="1"/>
+              <a:t>Physical Review Accelerators and Beams</a:t>
+            </a:r>
+            <a:r>
+              <a:rPr/>
+              <a:t> 25 (6): 062002. </a:t>
+            </a:r>
+            <a:r>
+              <a:rPr>
+                <a:hlinkClick r:id="rId4"/>
+              </a:rPr>
+              <a:t>https://doi.org/10.1103/PhysRevAccelBeams.25.062002</a:t>
+            </a:r>
+            <a:r>
+              <a:rPr/>
+              <a:t>.</a:t>
+            </a:r>
+          </a:p>
+          <a:p>
+            <a:pPr lvl="0" indent="0" marL="0">
+              <a:buNone/>
+            </a:pPr>
+            <a:r>
+              <a:rPr/>
+              <a:t>Yang, Shengnan, Laddaporn Ruangpan, Arlex Sanchez Torres, and Zoran Vojinovic. 2023. “Multi-Objective Optimisation Framework for Assessment of Trade-Offs Between Benefits and Co-benefits of Nature-based Solutions.” </a:t>
+            </a:r>
+            <a:r>
+              <a:rPr i="1"/>
+              <a:t>Water Resources Management</a:t>
+            </a:r>
+            <a:r>
+              <a:rPr/>
+              <a:t> 37 (6–7): 2325–45. </a:t>
+            </a:r>
+            <a:r>
+              <a:rPr>
+                <a:hlinkClick r:id="rId5"/>
+              </a:rPr>
+              <a:t>https://doi.org/10.1007/s11269-023-03470-8</a:t>
+            </a:r>
+            <a:r>
+              <a:rPr/>
+              <a:t>.</a:t>
+            </a:r>
+          </a:p>
+        </p:txBody>
+      </p:sp>
+    </p:spTree>
+  </p:cSld>
+  <p:timing>
+    <p:tnLst>
+      <p:par>
+        <p:cTn id="1" dur="indefinite" restart="never" nodeType="tmRoot">
+          <p:childTnLst>
+            <p:seq concurrent="1" nextAc="seek">
+              <p:cTn id="2" dur="indefinite" nodeType="mainSeq">
+                <p:childTnLst>
+                  <p:par>
+                    <p:cTn id="3" fill="hold">
+                      <p:stCondLst>
+                        <p:cond delay="indefinite"/>
+                      </p:stCondLst>
+                      <p:childTnLst>
+                        <p:par>
+                          <p:cTn id="4" fill="hold">
+                            <p:stCondLst>
+                              <p:cond delay="0"/>
+                            </p:stCondLst>
+                            <p:childTnLst>
+                              <p:par>
+                                <p:cTn id="5" presetID="1" presetClass="entr" presetSubtype="0" fill="hold" grpId="0" nodeType="clickEffect">
+                                  <p:stCondLst>
+                                    <p:cond delay="0"/>
+                                  </p:stCondLst>
+                                  <p:childTnLst>
+                                    <p:set>
+                                      <p:cBhvr>
+                                        <p:cTn id="6" dur="1" fill="hold">
+                                          <p:stCondLst>
+                                            <p:cond delay="0"/>
+                                          </p:stCondLst>
+                                        </p:cTn>
+                                        <p:tgtEl>
+                                          <p:spTgt spid="3">
+                                            <p:txEl>
+                                              <p:pRg st="2" end="2"/>
+                                            </p:txEl>
+                                          </p:spTgt>
+                                        </p:tgtEl>
+                                        <p:attrNameLst>
+                                          <p:attrName>style.visibility</p:attrName>
+                                        </p:attrNameLst>
+                                      </p:cBhvr>
+                                      <p:to>
+                                        <p:strVal val="visible"/>
+                                      </p:to>
+                                    </p:set>
+                                  </p:childTnLst>
+                                </p:cTn>
+                              </p:par>
+                            </p:childTnLst>
+                          </p:cTn>
+                        </p:par>
+                      </p:childTnLst>
+                    </p:cTn>
+                  </p:par>
+                  <p:par>
+                    <p:cTn id="7" fill="hold">
+                      <p:stCondLst>
+                        <p:cond delay="indefinite"/>
+                      </p:stCondLst>
+                      <p:childTnLst>
+                        <p:par>
+                          <p:cTn id="8" fill="hold">
+                            <p:stCondLst>
+                              <p:cond delay="0"/>
+                            </p:stCondLst>
+                            <p:childTnLst>
+                              <p:par>
+                                <p:cTn id="9" presetID="1" presetClass="entr" presetSubtype="0" fill="hold" grpId="0" nodeType="clickEffect">
+                                  <p:stCondLst>
+                                    <p:cond delay="0"/>
+                                  </p:stCondLst>
+                                  <p:childTnLst>
+                                    <p:set>
+                                      <p:cBhvr>
+                                        <p:cTn id="10" dur="1" fill="hold">
+                                          <p:stCondLst>
+                                            <p:cond delay="0"/>
+                                          </p:stCondLst>
+                                        </p:cTn>
+                                        <p:tgtEl>
+                                          <p:spTgt spid="3">
+                                            <p:txEl>
+                                              <p:pRg st="3" end="3"/>
+                                            </p:txEl>
+                                          </p:spTgt>
+                                        </p:tgtEl>
+                                        <p:attrNameLst>
+                                          <p:attrName>style.visibility</p:attrName>
+                                        </p:attrNameLst>
+                                      </p:cBhvr>
+                                      <p:to>
+                                        <p:strVal val="visible"/>
+                                      </p:to>
+                                    </p:set>
+                                  </p:childTnLst>
+                                </p:cTn>
+                              </p:par>
+                            </p:childTnLst>
+                          </p:cTn>
+                        </p:par>
+                      </p:childTnLst>
+                    </p:cTn>
+                  </p:par>
+                  <p:par>
+                    <p:cTn id="11" fill="hold">
+                      <p:stCondLst>
+                        <p:cond delay="indefinite"/>
+                      </p:stCondLst>
+                      <p:childTnLst>
+                        <p:par>
+                          <p:cTn id="12" fill="hold">
+                            <p:stCondLst>
+                              <p:cond delay="0"/>
+                            </p:stCondLst>
+                            <p:childTnLst>
+                              <p:par>
+                                <p:cTn id="13" presetID="1" presetClass="entr" presetSubtype="0" fill="hold" grpId="0" nodeType="clickEffect">
+                                  <p:stCondLst>
+                                    <p:cond delay="0"/>
+                                  </p:stCondLst>
+                                  <p:childTnLst>
+                                    <p:set>
+                                      <p:cBhvr>
+                                        <p:cTn id="14" dur="1" fill="hold">
+                                          <p:stCondLst>
+                                            <p:cond delay="0"/>
+                                          </p:stCondLst>
+                                        </p:cTn>
+                                        <p:tgtEl>
+                                          <p:spTgt spid="3">
+                                            <p:txEl>
+                                              <p:pRg st="4" end="4"/>
+                                            </p:txEl>
+                                          </p:spTgt>
+                                        </p:tgtEl>
+                                        <p:attrNameLst>
+                                          <p:attrName>style.visibility</p:attrName>
+                                        </p:attrNameLst>
+                                      </p:cBhvr>
+                                      <p:to>
+                                        <p:strVal val="visible"/>
+                                      </p:to>
+                                    </p:set>
+                                  </p:childTnLst>
+                                </p:cTn>
+                              </p:par>
+                            </p:childTnLst>
+                          </p:cTn>
+                        </p:par>
+                      </p:childTnLst>
+                    </p:cTn>
+                  </p:par>
+                  <p:par>
+                    <p:cTn id="15" fill="hold">
+                      <p:stCondLst>
+                        <p:cond delay="indefinite"/>
+                      </p:stCondLst>
+                      <p:childTnLst>
+                        <p:par>
+                          <p:cTn id="16" fill="hold">
+                            <p:stCondLst>
+                              <p:cond delay="0"/>
+                            </p:stCondLst>
+                            <p:childTnLst>
+                              <p:par>
+                                <p:cTn id="17" presetID="1" presetClass="entr" presetSubtype="0" fill="hold" grpId="0" nodeType="clickEffect">
+                                  <p:stCondLst>
+                                    <p:cond delay="0"/>
+                                  </p:stCondLst>
+                                  <p:childTnLst>
+                                    <p:set>
+                                      <p:cBhvr>
+                                        <p:cTn id="18" dur="1" fill="hold">
+                                          <p:stCondLst>
+                                            <p:cond delay="0"/>
+                                          </p:stCondLst>
+                                        </p:cTn>
+                                        <p:tgtEl>
+                                          <p:spTgt spid="3">
+                                            <p:txEl>
+                                              <p:pRg st="7" end="7"/>
+                                            </p:txEl>
+                                          </p:spTgt>
+                                        </p:tgtEl>
+                                        <p:attrNameLst>
+                                          <p:attrName>style.visibility</p:attrName>
+                                        </p:attrNameLst>
+                                      </p:cBhvr>
+                                      <p:to>
+                                        <p:strVal val="visible"/>
+                                      </p:to>
+                                    </p:set>
+                                  </p:childTnLst>
+                                </p:cTn>
+                              </p:par>
+                            </p:childTnLst>
+                          </p:cTn>
+                        </p:par>
+                      </p:childTnLst>
+                    </p:cTn>
+                  </p:par>
+                  <p:par>
+                    <p:cTn id="19" fill="hold">
+                      <p:stCondLst>
+                        <p:cond delay="indefinite"/>
+                      </p:stCondLst>
+                      <p:childTnLst>
+                        <p:par>
+                          <p:cTn id="20" fill="hold">
+                            <p:stCondLst>
+                              <p:cond delay="0"/>
+                            </p:stCondLst>
+                            <p:childTnLst>
+                              <p:par>
+                                <p:cTn id="21" presetID="1" presetClass="entr" presetSubtype="0" fill="hold" grpId="0" nodeType="clickEffect">
+                                  <p:stCondLst>
+                                    <p:cond delay="0"/>
+                                  </p:stCondLst>
+                                  <p:childTnLst>
+                                    <p:set>
+                                      <p:cBhvr>
+                                        <p:cTn id="22" dur="1" fill="hold">
+                                          <p:stCondLst>
+                                            <p:cond delay="0"/>
+                                          </p:stCondLst>
+                                        </p:cTn>
+                                        <p:tgtEl>
+                                          <p:spTgt spid="3">
+                                            <p:txEl>
+                                              <p:pRg st="8" end="8"/>
+                                            </p:txEl>
+                                          </p:spTgt>
+                                        </p:tgtEl>
+                                        <p:attrNameLst>
+                                          <p:attrName>style.visibility</p:attrName>
+                                        </p:attrNameLst>
+                                      </p:cBhvr>
+                                      <p:to>
+                                        <p:strVal val="visible"/>
+                                      </p:to>
+                                    </p:set>
+                                  </p:childTnLst>
+                                </p:cTn>
+                              </p:par>
+                            </p:childTnLst>
+                          </p:cTn>
+                        </p:par>
+                      </p:childTnLst>
+                    </p:cTn>
+                  </p:par>
+                  <p:par>
+                    <p:cTn id="23" fill="hold">
+                      <p:stCondLst>
+                        <p:cond delay="indefinite"/>
+                      </p:stCondLst>
+                      <p:childTnLst>
+                        <p:par>
+                          <p:cTn id="24" fill="hold">
+                            <p:stCondLst>
+                              <p:cond delay="0"/>
+                            </p:stCondLst>
+                            <p:childTnLst>
+                              <p:par>
+                                <p:cTn id="25" presetID="1" presetClass="entr" presetSubtype="0" fill="hold" grpId="0" nodeType="clickEffect">
+                                  <p:stCondLst>
+                                    <p:cond delay="0"/>
+                                  </p:stCondLst>
+                                  <p:childTnLst>
+                                    <p:set>
+                                      <p:cBhvr>
+                                        <p:cTn id="26" dur="1" fill="hold">
+                                          <p:stCondLst>
+                                            <p:cond delay="0"/>
+                                          </p:stCondLst>
+                                        </p:cTn>
+                                        <p:tgtEl>
+                                          <p:spTgt spid="3">
+                                            <p:txEl>
+                                              <p:pRg st="9" end="9"/>
+                                            </p:txEl>
+                                          </p:spTgt>
+                                        </p:tgtEl>
+                                        <p:attrNameLst>
+                                          <p:attrName>style.visibility</p:attrName>
+                                        </p:attrNameLst>
+                                      </p:cBhvr>
+                                      <p:to>
+                                        <p:strVal val="visible"/>
+                                      </p:to>
+                                    </p:set>
+                                  </p:childTnLst>
+                                </p:cTn>
+                              </p:par>
+                            </p:childTnLst>
+                          </p:cTn>
+                        </p:par>
+                      </p:childTnLst>
+                    </p:cTn>
+                  </p:par>
+                  <p:par>
+                    <p:cTn id="27" fill="hold">
+                      <p:stCondLst>
+                        <p:cond delay="indefinite"/>
+                      </p:stCondLst>
+                      <p:childTnLst>
+                        <p:par>
+                          <p:cTn id="28" fill="hold">
+                            <p:stCondLst>
+                              <p:cond delay="0"/>
+                            </p:stCondLst>
+                            <p:childTnLst>
+                              <p:par>
+                                <p:cTn id="29" presetID="1" presetClass="entr" presetSubtype="0" fill="hold" grpId="0" nodeType="clickEffect">
+                                  <p:stCondLst>
+                                    <p:cond delay="0"/>
+                                  </p:stCondLst>
+                                  <p:childTnLst>
+                                    <p:set>
+                                      <p:cBhvr>
+                                        <p:cTn id="30" dur="1" fill="hold">
+                                          <p:stCondLst>
+                                            <p:cond delay="0"/>
+                                          </p:stCondLst>
+                                        </p:cTn>
+                                        <p:tgtEl>
+                                          <p:spTgt spid="3">
+                                            <p:txEl>
+                                              <p:pRg st="12" end="12"/>
+                                            </p:txEl>
+                                          </p:spTgt>
+                                        </p:tgtEl>
+                                        <p:attrNameLst>
+                                          <p:attrName>style.visibility</p:attrName>
+                                        </p:attrNameLst>
+                                      </p:cBhvr>
+                                      <p:to>
+                                        <p:strVal val="visible"/>
+                                      </p:to>
+                                    </p:set>
+                                  </p:childTnLst>
+                                </p:cTn>
+                              </p:par>
+                            </p:childTnLst>
+                          </p:cTn>
+                        </p:par>
+                      </p:childTnLst>
+                    </p:cTn>
+                  </p:par>
+                  <p:par>
+                    <p:cTn id="31" fill="hold">
+                      <p:stCondLst>
+                        <p:cond delay="indefinite"/>
+                      </p:stCondLst>
+                      <p:childTnLst>
+                        <p:par>
+                          <p:cTn id="32" fill="hold">
+                            <p:stCondLst>
+                              <p:cond delay="0"/>
+                            </p:stCondLst>
+                            <p:childTnLst>
+                              <p:par>
+                                <p:cTn id="33" presetID="1" presetClass="entr" presetSubtype="0" fill="hold" grpId="0" nodeType="clickEffect">
+                                  <p:stCondLst>
+                                    <p:cond delay="0"/>
+                                  </p:stCondLst>
+                                  <p:childTnLst>
+                                    <p:set>
+                                      <p:cBhvr>
+                                        <p:cTn id="34" dur="1" fill="hold">
+                                          <p:stCondLst>
+                                            <p:cond delay="0"/>
+                                          </p:stCondLst>
+                                        </p:cTn>
+                                        <p:tgtEl>
+                                          <p:spTgt spid="3">
+                                            <p:txEl>
+                                              <p:pRg st="13" end="13"/>
+                                            </p:txEl>
+                                          </p:spTgt>
+                                        </p:tgtEl>
+                                        <p:attrNameLst>
+                                          <p:attrName>style.visibility</p:attrName>
+                                        </p:attrNameLst>
+                                      </p:cBhvr>
+                                      <p:to>
+                                        <p:strVal val="visible"/>
+                                      </p:to>
+                                    </p:set>
+                                  </p:childTnLst>
+                                </p:cTn>
+                              </p:par>
+                            </p:childTnLst>
+                          </p:cTn>
+                        </p:par>
+                      </p:childTnLst>
+                    </p:cTn>
+                  </p:par>
+                  <p:par>
+                    <p:cTn id="35" fill="hold">
+                      <p:stCondLst>
+                        <p:cond delay="indefinite"/>
+                      </p:stCondLst>
+                      <p:childTnLst>
+                        <p:par>
+                          <p:cTn id="36" fill="hold">
+                            <p:stCondLst>
+                              <p:cond delay="0"/>
+                            </p:stCondLst>
+                            <p:childTnLst>
+                              <p:par>
+                                <p:cTn id="37" presetID="1" presetClass="entr" presetSubtype="0" fill="hold" grpId="0" nodeType="clickEffect">
+                                  <p:stCondLst>
+                                    <p:cond delay="0"/>
+                                  </p:stCondLst>
+                                  <p:childTnLst>
+                                    <p:set>
+                                      <p:cBhvr>
+                                        <p:cTn id="38" dur="1" fill="hold">
+                                          <p:stCondLst>
+                                            <p:cond delay="0"/>
+                                          </p:stCondLst>
+                                        </p:cTn>
+                                        <p:tgtEl>
+                                          <p:spTgt spid="3">
+                                            <p:txEl>
+                                              <p:pRg st="14" end="14"/>
+                                            </p:txEl>
+                                          </p:spTgt>
+                                        </p:tgtEl>
+                                        <p:attrNameLst>
+                                          <p:attrName>style.visibility</p:attrName>
+                                        </p:attrNameLst>
+                                      </p:cBhvr>
+                                      <p:to>
+                                        <p:strVal val="visible"/>
+                                      </p:to>
+                                    </p:set>
+                                  </p:childTnLst>
+                                </p:cTn>
+                              </p:par>
+                            </p:childTnLst>
+                          </p:cTn>
+                        </p:par>
+                      </p:childTnLst>
+                    </p:cTn>
+                  </p:par>
+                </p:childTnLst>
+              </p:cTn>
+              <p:prevCondLst>
+                <p:cond evt="onPrev" delay="0">
+                  <p:tgtEl>
+                    <p:sldTgt/>
+                  </p:tgtEl>
+                </p:cond>
+              </p:prevCondLst>
+              <p:nextCondLst>
+                <p:cond evt="onNext" delay="0">
+                  <p:tgtEl>
+                    <p:sldTgt/>
+                  </p:tgtEl>
+                </p:cond>
+              </p:nextCondLst>
+            </p:seq>
+          </p:childTnLst>
+        </p:cTn>
+      </p:par>
+    </p:tnLst>
+    <p:bldLst>
+      <p:bldP spid="3" grpId="0" uiExpand="1" build="p"/>
+    </p:bldLst>
+  </p:timing>
 </p:sld>
 </file>
 
@@ -3233,10 +5939,259 @@
               <a:t> This content is under development and subject to change.</a:t>
             </a:r>
           </a:p>
+          <a:p>
+            <a:pPr lvl="0" indent="0" marL="0">
+              <a:spcBef>
+                <a:spcPts val="3000"/>
+              </a:spcBef>
+              <a:buNone/>
+            </a:pPr>
+            <a:r>
+              <a:rPr b="1"/>
+              <a:t>The Problem with Weights</a:t>
+            </a:r>
+          </a:p>
+          <a:p>
+            <a:pPr lvl="0" indent="0" marL="0">
+              <a:buNone/>
+            </a:pPr>
+            <a:r>
+              <a:rPr/>
+              <a:t>In Week 9, HCFCD evaluated flood control projects across 7 criteria using weighted scores.</a:t>
+            </a:r>
+          </a:p>
+          <a:p>
+            <a:pPr lvl="0" indent="0" marL="0">
+              <a:buNone/>
+            </a:pPr>
+            <a:r>
+              <a:rPr/>
+              <a:t>. . .</a:t>
+            </a:r>
+          </a:p>
+          <a:p>
+            <a:pPr lvl="0" indent="0" marL="0">
+              <a:buNone/>
+            </a:pPr>
+            <a:r>
+              <a:rPr/>
+              <a:t>Where do the weights come from?</a:t>
+            </a:r>
+          </a:p>
+          <a:p>
+            <a:pPr lvl="0" indent="0" marL="0">
+              <a:buNone/>
+            </a:pPr>
+            <a:r>
+              <a:rPr/>
+              <a:t>. . .</a:t>
+            </a:r>
+          </a:p>
+          <a:p>
+            <a:pPr lvl="0"/>
+            <a:r>
+              <a:rPr/>
+              <a:t>Weights reflect values — whose values?</a:t>
+            </a:r>
+          </a:p>
+          <a:p>
+            <a:pPr lvl="0"/>
+            <a:r>
+              <a:rPr/>
+              <a:t>Different stakeholders have different priorities</a:t>
+            </a:r>
+          </a:p>
+          <a:p>
+            <a:pPr lvl="0"/>
+            <a:r>
+              <a:rPr/>
+              <a:t>Aggregation requires weights whether they are stated explicitly or embedded in a formula</a:t>
+            </a:r>
+          </a:p>
         </p:txBody>
       </p:sp>
     </p:spTree>
   </p:cSld>
+  <p:timing>
+    <p:tnLst>
+      <p:par>
+        <p:cTn id="1" dur="indefinite" restart="never" nodeType="tmRoot">
+          <p:childTnLst>
+            <p:seq concurrent="1" nextAc="seek">
+              <p:cTn id="2" dur="indefinite" nodeType="mainSeq">
+                <p:childTnLst>
+                  <p:par>
+                    <p:cTn id="3" fill="hold">
+                      <p:stCondLst>
+                        <p:cond delay="indefinite"/>
+                      </p:stCondLst>
+                      <p:childTnLst>
+                        <p:par>
+                          <p:cTn id="4" fill="hold">
+                            <p:stCondLst>
+                              <p:cond delay="0"/>
+                            </p:stCondLst>
+                            <p:childTnLst>
+                              <p:par>
+                                <p:cTn id="5" presetID="1" presetClass="entr" presetSubtype="0" fill="hold" grpId="0" nodeType="clickEffect">
+                                  <p:stCondLst>
+                                    <p:cond delay="0"/>
+                                  </p:stCondLst>
+                                  <p:childTnLst>
+                                    <p:set>
+                                      <p:cBhvr>
+                                        <p:cTn id="6" dur="1" fill="hold">
+                                          <p:stCondLst>
+                                            <p:cond delay="0"/>
+                                          </p:stCondLst>
+                                        </p:cTn>
+                                        <p:tgtEl>
+                                          <p:spTgt spid="3">
+                                            <p:txEl>
+                                              <p:pRg st="6" end="6"/>
+                                            </p:txEl>
+                                          </p:spTgt>
+                                        </p:tgtEl>
+                                        <p:attrNameLst>
+                                          <p:attrName>style.visibility</p:attrName>
+                                        </p:attrNameLst>
+                                      </p:cBhvr>
+                                      <p:to>
+                                        <p:strVal val="visible"/>
+                                      </p:to>
+                                    </p:set>
+                                  </p:childTnLst>
+                                </p:cTn>
+                              </p:par>
+                            </p:childTnLst>
+                          </p:cTn>
+                        </p:par>
+                      </p:childTnLst>
+                    </p:cTn>
+                  </p:par>
+                  <p:par>
+                    <p:cTn id="7" fill="hold">
+                      <p:stCondLst>
+                        <p:cond delay="indefinite"/>
+                      </p:stCondLst>
+                      <p:childTnLst>
+                        <p:par>
+                          <p:cTn id="8" fill="hold">
+                            <p:stCondLst>
+                              <p:cond delay="0"/>
+                            </p:stCondLst>
+                            <p:childTnLst>
+                              <p:par>
+                                <p:cTn id="9" presetID="1" presetClass="entr" presetSubtype="0" fill="hold" grpId="0" nodeType="clickEffect">
+                                  <p:stCondLst>
+                                    <p:cond delay="0"/>
+                                  </p:stCondLst>
+                                  <p:childTnLst>
+                                    <p:set>
+                                      <p:cBhvr>
+                                        <p:cTn id="10" dur="1" fill="hold">
+                                          <p:stCondLst>
+                                            <p:cond delay="0"/>
+                                          </p:stCondLst>
+                                        </p:cTn>
+                                        <p:tgtEl>
+                                          <p:spTgt spid="3">
+                                            <p:txEl>
+                                              <p:pRg st="7" end="7"/>
+                                            </p:txEl>
+                                          </p:spTgt>
+                                        </p:tgtEl>
+                                        <p:attrNameLst>
+                                          <p:attrName>style.visibility</p:attrName>
+                                        </p:attrNameLst>
+                                      </p:cBhvr>
+                                      <p:to>
+                                        <p:strVal val="visible"/>
+                                      </p:to>
+                                    </p:set>
+                                  </p:childTnLst>
+                                </p:cTn>
+                              </p:par>
+                            </p:childTnLst>
+                          </p:cTn>
+                        </p:par>
+                      </p:childTnLst>
+                    </p:cTn>
+                  </p:par>
+                  <p:par>
+                    <p:cTn id="11" fill="hold">
+                      <p:stCondLst>
+                        <p:cond delay="indefinite"/>
+                      </p:stCondLst>
+                      <p:childTnLst>
+                        <p:par>
+                          <p:cTn id="12" fill="hold">
+                            <p:stCondLst>
+                              <p:cond delay="0"/>
+                            </p:stCondLst>
+                            <p:childTnLst>
+                              <p:par>
+                                <p:cTn id="13" presetID="1" presetClass="entr" presetSubtype="0" fill="hold" grpId="0" nodeType="clickEffect">
+                                  <p:stCondLst>
+                                    <p:cond delay="0"/>
+                                  </p:stCondLst>
+                                  <p:childTnLst>
+                                    <p:set>
+                                      <p:cBhvr>
+                                        <p:cTn id="14" dur="1" fill="hold">
+                                          <p:stCondLst>
+                                            <p:cond delay="0"/>
+                                          </p:stCondLst>
+                                        </p:cTn>
+                                        <p:tgtEl>
+                                          <p:spTgt spid="3">
+                                            <p:txEl>
+                                              <p:pRg st="8" end="8"/>
+                                            </p:txEl>
+                                          </p:spTgt>
+                                        </p:tgtEl>
+                                        <p:attrNameLst>
+                                          <p:attrName>style.visibility</p:attrName>
+                                        </p:attrNameLst>
+                                      </p:cBhvr>
+                                      <p:to>
+                                        <p:strVal val="visible"/>
+                                      </p:to>
+                                    </p:set>
+                                  </p:childTnLst>
+                                </p:cTn>
+                              </p:par>
+                            </p:childTnLst>
+                          </p:cTn>
+                        </p:par>
+                      </p:childTnLst>
+                    </p:cTn>
+                  </p:par>
+                </p:childTnLst>
+              </p:cTn>
+              <p:prevCondLst>
+                <p:cond evt="onPrev" delay="0">
+                  <p:tgtEl>
+                    <p:sldTgt/>
+                  </p:tgtEl>
+                </p:cond>
+              </p:prevCondLst>
+              <p:nextCondLst>
+                <p:cond evt="onNext" delay="0">
+                  <p:tgtEl>
+                    <p:sldTgt/>
+                  </p:tgtEl>
+                </p:cond>
+              </p:nextCondLst>
+            </p:seq>
+          </p:childTnLst>
+        </p:cTn>
+      </p:par>
+    </p:tnLst>
+    <p:bldLst>
+      <p:bldP spid="3" grpId="0" uiExpand="1" build="p"/>
+    </p:bldLst>
+  </p:timing>
 </p:sld>
 </file>
 
@@ -3277,93 +6232,758 @@
             </a:pPr>
             <a:r>
               <a:rPr/>
-              <a:t>Coming Soon</a:t>
+              <a:t>From Single to Multiple Objectives</a:t>
             </a:r>
           </a:p>
         </p:txBody>
       </p:sp>
-      <p:sp>
-        <p:nvSpPr>
-          <p:cNvPr id="3" name="Content Placeholder 2"/>
-          <p:cNvSpPr>
-            <a:spLocks noGrp="1"/>
-          </p:cNvSpPr>
-          <p:nvPr>
-            <p:ph idx="1"/>
-          </p:nvPr>
-        </p:nvSpPr>
-        <p:spPr/>
-        <p:txBody>
-          <a:bodyPr/>
-          <a:lstStyle/>
-          <a:p>
-            <a:pPr lvl="0" indent="0" marL="0">
-              <a:buNone/>
-            </a:pPr>
-            <a:r>
-              <a:rPr/>
-              <a:t>This lecture is under development.</a:t>
-            </a:r>
-          </a:p>
-          <a:p>
-            <a:pPr lvl="0" indent="0" marL="0">
-              <a:buNone/>
-            </a:pPr>
-            <a:r>
-              <a:rPr/>
-              <a:t>Content to adapt from previous course:</a:t>
-            </a:r>
-          </a:p>
-          <a:p>
-            <a:pPr lvl="0"/>
-            <a:r>
-              <a:rPr/>
-              <a:t>Enriched notation diagram</a:t>
-            </a:r>
-          </a:p>
-          <a:p>
-            <a:pPr lvl="0"/>
-            <a:r>
-              <a:rPr/>
-              <a:t>Dominance definition and examples</a:t>
-            </a:r>
-          </a:p>
-          <a:p>
-            <a:pPr lvl="0"/>
-            <a:r>
-              <a:rPr/>
-              <a:t>Pareto front visualization</a:t>
-            </a:r>
-          </a:p>
-          <a:p>
-            <a:pPr lvl="0"/>
-            <a:r>
-              <a:rPr/>
-              <a:t>Weighted sum approach and limitations</a:t>
-            </a:r>
-          </a:p>
-          <a:p>
-            <a:pPr lvl="0"/>
-            <a:r>
-              <a:rPr/>
-              <a:t>Genetic algorithms / MOEAs</a:t>
-            </a:r>
-          </a:p>
-          <a:p>
-            <a:pPr lvl="0"/>
-            <a:r>
-              <a:rPr/>
-              <a:t>Convergence diagnostics (hypervolume)</a:t>
-            </a:r>
-          </a:p>
-        </p:txBody>
-      </p:sp>
+      <mc:AlternateContent xmlns:mc="http://schemas.openxmlformats.org/markup-compatibility/2006">
+        <mc:Choice xmlns:a14="http://schemas.microsoft.com/office/drawing/2010/main" Requires="a14">
+          <p:sp>
+            <p:nvSpPr>
+              <p:cNvPr id="3" name="Content Placeholder 2"/>
+              <p:cNvSpPr>
+                <a:spLocks noGrp="1"/>
+              </p:cNvSpPr>
+              <p:nvPr>
+                <p:ph idx="1"/>
+              </p:nvPr>
+            </p:nvSpPr>
+            <p:spPr/>
+            <p:txBody>
+              <a:bodyPr/>
+              <a:lstStyle/>
+              <a:p>
+                <a:pPr lvl="0" indent="0" marL="0">
+                  <a:spcBef>
+                    <a:spcPts val="3000"/>
+                  </a:spcBef>
+                  <a:buNone/>
+                </a:pPr>
+                <a:r>
+                  <a:rPr b="1"/>
+                  <a:t>Single-Objective Optimization</a:t>
+                </a:r>
+              </a:p>
+              <a:p>
+                <a:pPr lvl="0" indent="0" marL="0">
+                  <a:buNone/>
+                </a:pPr>
+                <a:r>
+                  <a:rPr/>
+                  <a:t>Benefit-cost analysis frames adaptation as a single-objective problem:</a:t>
+                </a:r>
+              </a:p>
+              <a:p>
+                <a:pPr lvl="0" indent="0" marL="0">
+                  <a:buNone/>
+                </a:pPr>
+                <a14:m>
+                  <m:oMathPara xmlns:m="http://schemas.openxmlformats.org/officeDocument/2006/math">
+                    <m:oMathParaPr>
+                      <m:jc m:val="center"/>
+                    </m:oMathParaPr>
+                    <m:oMath>
+                      <m:sSup>
+                        <m:e>
+                          <m:r>
+                            <m:t>a</m:t>
+                          </m:r>
+                        </m:e>
+                        <m:sup>
+                          <m:r>
+                            <m:rPr>
+                              <m:sty m:val="p"/>
+                            </m:rPr>
+                            <m:t>*</m:t>
+                          </m:r>
+                        </m:sup>
+                      </m:sSup>
+                      <m:r>
+                        <m:rPr>
+                          <m:sty m:val="p"/>
+                        </m:rPr>
+                        <m:t>=</m:t>
+                      </m:r>
+                      <m:r>
+                        <m:rPr>
+                          <m:sty m:val="p"/>
+                        </m:rPr>
+                        <m:t>arg</m:t>
+                      </m:r>
+                      <m:limLow>
+                        <m:e>
+                          <m:r>
+                            <m:rPr>
+                              <m:sty m:val="p"/>
+                            </m:rPr>
+                            <m:t>max</m:t>
+                          </m:r>
+                        </m:e>
+                        <m:lim>
+                          <m:r>
+                            <m:t>a</m:t>
+                          </m:r>
+                        </m:lim>
+                      </m:limLow>
+                      <m:r>
+                        <m:t> </m:t>
+                      </m:r>
+                      <m:r>
+                        <m:rPr>
+                          <m:sty m:val="p"/>
+                          <m:scr m:val="double-struck"/>
+                        </m:rPr>
+                        <m:t>E</m:t>
+                      </m:r>
+                      <m:d>
+                        <m:dPr>
+                          <m:begChr m:val="["/>
+                          <m:sepChr m:val=""/>
+                          <m:endChr m:val="]"/>
+                          <m:grow/>
+                        </m:dPr>
+                        <m:e>
+                          <m:r>
+                            <m:rPr>
+                              <m:nor/>
+                              <m:sty m:val="p"/>
+                            </m:rPr>
+                            <m:t>NPV</m:t>
+                          </m:r>
+                          <m:d>
+                            <m:dPr>
+                              <m:begChr m:val="("/>
+                              <m:sepChr m:val=""/>
+                              <m:endChr m:val=")"/>
+                              <m:grow/>
+                            </m:dPr>
+                            <m:e>
+                              <m:r>
+                                <m:t>a</m:t>
+                              </m:r>
+                              <m:r>
+                                <m:rPr>
+                                  <m:sty m:val="p"/>
+                                </m:rPr>
+                                <m:t>,</m:t>
+                              </m:r>
+                              <m:r>
+                                <m:rPr>
+                                  <m:sty m:val="b"/>
+                                </m:rPr>
+                                <m:t>s</m:t>
+                              </m:r>
+                            </m:e>
+                          </m:d>
+                        </m:e>
+                      </m:d>
+                    </m:oMath>
+                  </m:oMathPara>
+                </a14:m>
+              </a:p>
+              <a:p>
+                <a:pPr lvl="0" indent="0" marL="0">
+                  <a:buNone/>
+                </a:pPr>
+                <a:r>
+                  <a:rPr/>
+                  <a:t>. . .</a:t>
+                </a:r>
+              </a:p>
+              <a:p>
+                <a:pPr lvl="0" indent="0" marL="0">
+                  <a:buNone/>
+                </a:pPr>
+                <a:r>
+                  <a:rPr/>
+                  <a:t>This requires that </a:t>
+                </a:r>
+                <a:r>
+                  <a:rPr b="1"/>
+                  <a:t>all values can be monetized and aggregated</a:t>
+                </a:r>
+                <a:r>
+                  <a:rPr/>
+                  <a:t>.</a:t>
+                </a:r>
+              </a:p>
+              <a:p>
+                <a:pPr lvl="0" indent="0" marL="0">
+                  <a:buNone/>
+                </a:pPr>
+                <a:r>
+                  <a:rPr/>
+                  <a:t>. . .</a:t>
+                </a:r>
+              </a:p>
+              <a:p>
+                <a:pPr lvl="0" indent="0" marL="0">
+                  <a:buNone/>
+                </a:pPr>
+                <a:r>
+                  <a:rPr/>
+                  <a:t>Many adaptation objectives — equity, ecosystem health, cultural preservation — resist monetization.</a:t>
+                </a:r>
+              </a:p>
+              <a:p>
+                <a:pPr lvl="0" indent="0" marL="0">
+                  <a:spcBef>
+                    <a:spcPts val="3000"/>
+                  </a:spcBef>
+                  <a:buNone/>
+                </a:pPr>
+                <a:r>
+                  <a:rPr b="1"/>
+                  <a:t>Multiple Conflicting Objectives</a:t>
+                </a:r>
+              </a:p>
+              <a:p>
+                <a:pPr lvl="0" indent="0" marL="0">
+                  <a:buNone/>
+                </a:pPr>
+                <a:r>
+                  <a:rPr/>
+                  <a:t>A multi-objective problem has several objectives that </a:t>
+                </a:r>
+                <a:r>
+                  <a:rPr b="1"/>
+                  <a:t>cannot all be maximized simultaneously</a:t>
+                </a:r>
+                <a:r>
+                  <a:rPr/>
+                  <a:t>:</a:t>
+                </a:r>
+              </a:p>
+              <a:p>
+                <a:pPr lvl="0" indent="0" marL="0">
+                  <a:buNone/>
+                </a:pPr>
+                <a14:m>
+                  <m:oMathPara xmlns:m="http://schemas.openxmlformats.org/officeDocument/2006/math">
+                    <m:oMathParaPr>
+                      <m:jc m:val="center"/>
+                    </m:oMathParaPr>
+                    <m:oMath>
+                      <m:limLow>
+                        <m:e>
+                          <m:r>
+                            <m:rPr>
+                              <m:sty m:val="p"/>
+                            </m:rPr>
+                            <m:t>max</m:t>
+                          </m:r>
+                        </m:e>
+                        <m:lim>
+                          <m:r>
+                            <m:t>a</m:t>
+                          </m:r>
+                        </m:lim>
+                      </m:limLow>
+                      <m:r>
+                        <m:t> </m:t>
+                      </m:r>
+                      <m:r>
+                        <m:rPr>
+                          <m:sty m:val="p"/>
+                        </m:rPr>
+                        <m:t>{</m:t>
+                      </m:r>
+                      <m:sSub>
+                        <m:e>
+                          <m:r>
+                            <m:t>f</m:t>
+                          </m:r>
+                        </m:e>
+                        <m:sub>
+                          <m:r>
+                            <m:t>1</m:t>
+                          </m:r>
+                        </m:sub>
+                      </m:sSub>
+                      <m:d>
+                        <m:dPr>
+                          <m:begChr m:val="("/>
+                          <m:sepChr m:val=""/>
+                          <m:endChr m:val=")"/>
+                          <m:grow/>
+                        </m:dPr>
+                        <m:e>
+                          <m:r>
+                            <m:t>a</m:t>
+                          </m:r>
+                        </m:e>
+                      </m:d>
+                      <m:r>
+                        <m:rPr>
+                          <m:sty m:val="p"/>
+                        </m:rPr>
+                        <m:t>,</m:t>
+                      </m:r>
+                      <m:r>
+                        <m:t> </m:t>
+                      </m:r>
+                      <m:sSub>
+                        <m:e>
+                          <m:r>
+                            <m:t>f</m:t>
+                          </m:r>
+                        </m:e>
+                        <m:sub>
+                          <m:r>
+                            <m:t>2</m:t>
+                          </m:r>
+                        </m:sub>
+                      </m:sSub>
+                      <m:d>
+                        <m:dPr>
+                          <m:begChr m:val="("/>
+                          <m:sepChr m:val=""/>
+                          <m:endChr m:val=")"/>
+                          <m:grow/>
+                        </m:dPr>
+                        <m:e>
+                          <m:r>
+                            <m:t>a</m:t>
+                          </m:r>
+                        </m:e>
+                      </m:d>
+                      <m:r>
+                        <m:rPr>
+                          <m:sty m:val="p"/>
+                        </m:rPr>
+                        <m:t>,</m:t>
+                      </m:r>
+                      <m:r>
+                        <m:t> </m:t>
+                      </m:r>
+                      <m:r>
+                        <m:rPr>
+                          <m:sty m:val="p"/>
+                        </m:rPr>
+                        <m:t>…</m:t>
+                      </m:r>
+                      <m:r>
+                        <m:rPr>
+                          <m:sty m:val="p"/>
+                        </m:rPr>
+                        <m:t>,</m:t>
+                      </m:r>
+                      <m:r>
+                        <m:t> </m:t>
+                      </m:r>
+                      <m:sSub>
+                        <m:e>
+                          <m:r>
+                            <m:t>f</m:t>
+                          </m:r>
+                        </m:e>
+                        <m:sub>
+                          <m:r>
+                            <m:t>k</m:t>
+                          </m:r>
+                        </m:sub>
+                      </m:sSub>
+                      <m:d>
+                        <m:dPr>
+                          <m:begChr m:val="("/>
+                          <m:sepChr m:val=""/>
+                          <m:endChr m:val=")"/>
+                          <m:grow/>
+                        </m:dPr>
+                        <m:e>
+                          <m:r>
+                            <m:t>a</m:t>
+                          </m:r>
+                        </m:e>
+                      </m:d>
+                      <m:r>
+                        <m:rPr>
+                          <m:sty m:val="p"/>
+                        </m:rPr>
+                        <m:t>}</m:t>
+                      </m:r>
+                    </m:oMath>
+                  </m:oMathPara>
+                </a14:m>
+              </a:p>
+              <a:p>
+                <a:pPr lvl="0" indent="0" marL="0">
+                  <a:buNone/>
+                </a:pPr>
+                <a:r>
+                  <a:rPr/>
+                  <a:t>. . .</a:t>
+                </a:r>
+              </a:p>
+              <a:p>
+                <a:pPr lvl="0" indent="0" marL="0">
+                  <a:buNone/>
+                </a:pPr>
+                <a:r>
+                  <a:rPr b="1"/>
+                  <a:t>Coastal adaptation example:</a:t>
+                </a:r>
+              </a:p>
+              <a:p>
+                <a:pPr lvl="0"/>
+                <a14:m>
+                  <m:oMath xmlns:m="http://schemas.openxmlformats.org/officeDocument/2006/math">
+                    <m:sSub>
+                      <m:e>
+                        <m:r>
+                          <m:t>f</m:t>
+                        </m:r>
+                      </m:e>
+                      <m:sub>
+                        <m:r>
+                          <m:t>1</m:t>
+                        </m:r>
+                      </m:sub>
+                    </m:sSub>
+                    <m:d>
+                      <m:dPr>
+                        <m:begChr m:val="("/>
+                        <m:sepChr m:val=""/>
+                        <m:endChr m:val=")"/>
+                        <m:grow/>
+                      </m:dPr>
+                      <m:e>
+                        <m:r>
+                          <m:t>a</m:t>
+                        </m:r>
+                      </m:e>
+                    </m:d>
+                  </m:oMath>
+                </a14:m>
+                <a:r>
+                  <a:rPr/>
+                  <a:t>: minimize expected flood damages</a:t>
+                </a:r>
+              </a:p>
+              <a:p>
+                <a:pPr lvl="0"/>
+                <a14:m>
+                  <m:oMath xmlns:m="http://schemas.openxmlformats.org/officeDocument/2006/math">
+                    <m:sSub>
+                      <m:e>
+                        <m:r>
+                          <m:t>f</m:t>
+                        </m:r>
+                      </m:e>
+                      <m:sub>
+                        <m:r>
+                          <m:t>2</m:t>
+                        </m:r>
+                      </m:sub>
+                    </m:sSub>
+                    <m:d>
+                      <m:dPr>
+                        <m:begChr m:val="("/>
+                        <m:sepChr m:val=""/>
+                        <m:endChr m:val=")"/>
+                        <m:grow/>
+                      </m:dPr>
+                      <m:e>
+                        <m:r>
+                          <m:t>a</m:t>
+                        </m:r>
+                      </m:e>
+                    </m:d>
+                  </m:oMath>
+                </a14:m>
+                <a:r>
+                  <a:rPr/>
+                  <a:t>: minimize construction cost</a:t>
+                </a:r>
+              </a:p>
+              <a:p>
+                <a:pPr lvl="0"/>
+                <a14:m>
+                  <m:oMath xmlns:m="http://schemas.openxmlformats.org/officeDocument/2006/math">
+                    <m:sSub>
+                      <m:e>
+                        <m:r>
+                          <m:t>f</m:t>
+                        </m:r>
+                      </m:e>
+                      <m:sub>
+                        <m:r>
+                          <m:t>3</m:t>
+                        </m:r>
+                      </m:sub>
+                    </m:sSub>
+                    <m:d>
+                      <m:dPr>
+                        <m:begChr m:val="("/>
+                        <m:sepChr m:val=""/>
+                        <m:endChr m:val=")"/>
+                        <m:grow/>
+                      </m:dPr>
+                      <m:e>
+                        <m:r>
+                          <m:t>a</m:t>
+                        </m:r>
+                      </m:e>
+                    </m:d>
+                  </m:oMath>
+                </a14:m>
+                <a:r>
+                  <a:rPr/>
+                  <a:t>: maximize equity — benefits to vulnerable communities</a:t>
+                </a:r>
+              </a:p>
+              <a:p>
+                <a:pPr lvl="0" indent="0" marL="0">
+                  <a:buNone/>
+                </a:pPr>
+                <a:r>
+                  <a:rPr/>
+                  <a:t>. . .</a:t>
+                </a:r>
+              </a:p>
+              <a:p>
+                <a:pPr lvl="0" indent="0" marL="0">
+                  <a:buNone/>
+                </a:pPr>
+                <a:r>
+                  <a:rPr/>
+                  <a:t>Improving on </a:t>
+                </a:r>
+                <a14:m>
+                  <m:oMath xmlns:m="http://schemas.openxmlformats.org/officeDocument/2006/math">
+                    <m:sSub>
+                      <m:e>
+                        <m:r>
+                          <m:t>f</m:t>
+                        </m:r>
+                      </m:e>
+                      <m:sub>
+                        <m:r>
+                          <m:t>1</m:t>
+                        </m:r>
+                      </m:sub>
+                    </m:sSub>
+                  </m:oMath>
+                </a14:m>
+                <a:r>
+                  <a:rPr/>
+                  <a:t> generally requires accepting worse </a:t>
+                </a:r>
+                <a14:m>
+                  <m:oMath xmlns:m="http://schemas.openxmlformats.org/officeDocument/2006/math">
+                    <m:sSub>
+                      <m:e>
+                        <m:r>
+                          <m:t>f</m:t>
+                        </m:r>
+                      </m:e>
+                      <m:sub>
+                        <m:r>
+                          <m:t>2</m:t>
+                        </m:r>
+                      </m:sub>
+                    </m:sSub>
+                  </m:oMath>
+                </a14:m>
+                <a:r>
+                  <a:rPr/>
+                  <a:t>. There is no single “best” solution.</a:t>
+                </a:r>
+              </a:p>
+            </p:txBody>
+          </p:sp>
+        </mc:Choice>
+      </mc:AlternateContent>
     </p:spTree>
   </p:cSld>
+  <p:timing>
+    <p:tnLst>
+      <p:par>
+        <p:cTn id="1" dur="indefinite" restart="never" nodeType="tmRoot">
+          <p:childTnLst>
+            <p:seq concurrent="1" nextAc="seek">
+              <p:cTn id="2" dur="indefinite" nodeType="mainSeq">
+                <p:childTnLst>
+                  <p:par>
+                    <p:cTn id="3" fill="hold">
+                      <p:stCondLst>
+                        <p:cond delay="indefinite"/>
+                      </p:stCondLst>
+                      <p:childTnLst>
+                        <p:par>
+                          <p:cTn id="4" fill="hold">
+                            <p:stCondLst>
+                              <p:cond delay="0"/>
+                            </p:stCondLst>
+                            <p:childTnLst>
+                              <p:par>
+                                <p:cTn id="5" presetID="1" presetClass="entr" presetSubtype="0" fill="hold" grpId="0" nodeType="clickEffect">
+                                  <p:stCondLst>
+                                    <p:cond delay="0"/>
+                                  </p:stCondLst>
+                                  <p:childTnLst>
+                                    <p:set>
+                                      <p:cBhvr>
+                                        <p:cTn id="6" dur="1" fill="hold">
+                                          <p:stCondLst>
+                                            <p:cond delay="0"/>
+                                          </p:stCondLst>
+                                        </p:cTn>
+                                        <p:tgtEl>
+                                          <p:spTgt spid="3">
+                                            <p:txEl>
+                                              <p:pRg st="12" end="12"/>
+                                            </p:txEl>
+                                          </p:spTgt>
+                                        </p:tgtEl>
+                                        <p:attrNameLst>
+                                          <p:attrName>style.visibility</p:attrName>
+                                        </p:attrNameLst>
+                                      </p:cBhvr>
+                                      <p:to>
+                                        <p:strVal val="visible"/>
+                                      </p:to>
+                                    </p:set>
+                                  </p:childTnLst>
+                                </p:cTn>
+                              </p:par>
+                            </p:childTnLst>
+                          </p:cTn>
+                        </p:par>
+                      </p:childTnLst>
+                    </p:cTn>
+                  </p:par>
+                  <p:par>
+                    <p:cTn id="7" fill="hold">
+                      <p:stCondLst>
+                        <p:cond delay="indefinite"/>
+                      </p:stCondLst>
+                      <p:childTnLst>
+                        <p:par>
+                          <p:cTn id="8" fill="hold">
+                            <p:stCondLst>
+                              <p:cond delay="0"/>
+                            </p:stCondLst>
+                            <p:childTnLst>
+                              <p:par>
+                                <p:cTn id="9" presetID="1" presetClass="entr" presetSubtype="0" fill="hold" grpId="0" nodeType="clickEffect">
+                                  <p:stCondLst>
+                                    <p:cond delay="0"/>
+                                  </p:stCondLst>
+                                  <p:childTnLst>
+                                    <p:set>
+                                      <p:cBhvr>
+                                        <p:cTn id="10" dur="1" fill="hold">
+                                          <p:stCondLst>
+                                            <p:cond delay="0"/>
+                                          </p:stCondLst>
+                                        </p:cTn>
+                                        <p:tgtEl>
+                                          <p:spTgt spid="3">
+                                            <p:txEl>
+                                              <p:pRg st="13" end="13"/>
+                                            </p:txEl>
+                                          </p:spTgt>
+                                        </p:tgtEl>
+                                        <p:attrNameLst>
+                                          <p:attrName>style.visibility</p:attrName>
+                                        </p:attrNameLst>
+                                      </p:cBhvr>
+                                      <p:to>
+                                        <p:strVal val="visible"/>
+                                      </p:to>
+                                    </p:set>
+                                  </p:childTnLst>
+                                </p:cTn>
+                              </p:par>
+                            </p:childTnLst>
+                          </p:cTn>
+                        </p:par>
+                      </p:childTnLst>
+                    </p:cTn>
+                  </p:par>
+                  <p:par>
+                    <p:cTn id="11" fill="hold">
+                      <p:stCondLst>
+                        <p:cond delay="indefinite"/>
+                      </p:stCondLst>
+                      <p:childTnLst>
+                        <p:par>
+                          <p:cTn id="12" fill="hold">
+                            <p:stCondLst>
+                              <p:cond delay="0"/>
+                            </p:stCondLst>
+                            <p:childTnLst>
+                              <p:par>
+                                <p:cTn id="13" presetID="1" presetClass="entr" presetSubtype="0" fill="hold" grpId="0" nodeType="clickEffect">
+                                  <p:stCondLst>
+                                    <p:cond delay="0"/>
+                                  </p:stCondLst>
+                                  <p:childTnLst>
+                                    <p:set>
+                                      <p:cBhvr>
+                                        <p:cTn id="14" dur="1" fill="hold">
+                                          <p:stCondLst>
+                                            <p:cond delay="0"/>
+                                          </p:stCondLst>
+                                        </p:cTn>
+                                        <p:tgtEl>
+                                          <p:spTgt spid="3">
+                                            <p:txEl>
+                                              <p:pRg st="14" end="14"/>
+                                            </p:txEl>
+                                          </p:spTgt>
+                                        </p:tgtEl>
+                                        <p:attrNameLst>
+                                          <p:attrName>style.visibility</p:attrName>
+                                        </p:attrNameLst>
+                                      </p:cBhvr>
+                                      <p:to>
+                                        <p:strVal val="visible"/>
+                                      </p:to>
+                                    </p:set>
+                                  </p:childTnLst>
+                                </p:cTn>
+                              </p:par>
+                            </p:childTnLst>
+                          </p:cTn>
+                        </p:par>
+                      </p:childTnLst>
+                    </p:cTn>
+                  </p:par>
+                </p:childTnLst>
+              </p:cTn>
+              <p:prevCondLst>
+                <p:cond evt="onPrev" delay="0">
+                  <p:tgtEl>
+                    <p:sldTgt/>
+                  </p:tgtEl>
+                </p:cond>
+              </p:prevCondLst>
+              <p:nextCondLst>
+                <p:cond evt="onNext" delay="0">
+                  <p:tgtEl>
+                    <p:sldTgt/>
+                  </p:tgtEl>
+                </p:cond>
+              </p:nextCondLst>
+            </p:seq>
+          </p:childTnLst>
+        </p:cTn>
+      </p:par>
+    </p:tnLst>
+    <p:bldLst>
+      <p:bldP spid="3" grpId="0" uiExpand="1" build="p"/>
+    </p:bldLst>
+  </p:timing>
 </p:sld>
 </file>
 
-<file path=ppt/slides/slide4.xml><?xml version="1.0" encoding="utf-8"?>
+<file path=ppt/slides/slide4.xml><?xml version="1.0" encoding="UTF-8"?><p:sld xmlns:a="http://schemas.openxmlformats.org/drawingml/2006/main" xmlns:r="http://schemas.openxmlformats.org/officeDocument/2006/relationships" xmlns:p="http://schemas.openxmlformats.org/presentationml/2006/main"><p:cSld><p:spTree><p:nvGrpSpPr><p:cNvPr id="1" name="" /><p:cNvGrpSpPr /><p:nvPr /></p:nvGrpSpPr><p:grpSpPr><a:xfrm><a:off x="0" y="0" /><a:ext cx="0" cy="0" /><a:chOff x="0" y="0" /><a:chExt cx="0" cy="0" /></a:xfrm></p:grpSpPr><p:sp><p:nvSpPr><p:cNvPr id="2" name="Title 1" /><p:cNvSpPr><a:spLocks noGrp="1" /></p:cNvSpPr><p:nvPr><p:ph type="title" /></p:nvPr></p:nvSpPr><p:spPr><a:xfrm><a:off x="457201" y="204787" /><a:ext cx="3008313" cy="871538" /></a:xfrm></p:spPr><p:txBody><a:bodyPr /><a:lstStyle /><a:p><a:pPr lvl="0" indent="0" marL="0"><a:buNone /></a:pPr><a:r><a:rPr /><a:t>Dominance and Pareto Optimality</a:t></a:r></a:p></p:txBody></p:sp><mc:AlternateContent xmlns:mc="http://schemas.openxmlformats.org/markup-compatibility/2006"><mc:Choice xmlns:a14="http://schemas.microsoft.com/office/drawing/2010/main" Requires="a14"><p:sp><p:nvSpPr><p:cNvPr id="4" name="Text Placeholder 3" /><p:cNvSpPr><a:spLocks noGrp="1" /></p:cNvSpPr><p:nvPr><p:ph idx="2" sz="half" type="body" /></p:nvPr></p:nvSpPr><p:spPr /><p:txBody><a:bodyPr /><a:lstStyle /><a:p><a:pPr lvl="0" indent="0" marL="0"><a:spcBef><a:spcPts val="3000" /></a:spcBef><a:buNone /></a:pPr><a:r><a:rPr b="1" /><a:t>What Does “Better” Mean?</a:t></a:r></a:p><a:p><a:pPr lvl="0" indent="0" marL="0"><a:buNone /></a:pPr><a:r><a:rPr /><a:t>With multiple objectives we need a new comparison rule.</a:t></a:r></a:p><a:p><a:pPr lvl="0" indent="0" marL="0"><a:buNone /></a:pPr><a:r><a:rPr b="1" /><a:t>Dominance:</a:t></a:r><a:r><a:rPr /><a:t> Solution </a:t></a:r><a14:m><m:oMath xmlns:m="http://schemas.openxmlformats.org/officeDocument/2006/math"><m:r><m:t>a</m:t></m:r></m:oMath></a14:m><a:r><a:rPr /><a:t> </a:t></a:r><a:r><a:rPr b="1" /><a:t>dominates</a:t></a:r><a:r><a:rPr /><a:t> solution </a:t></a:r><a14:m><m:oMath xmlns:m="http://schemas.openxmlformats.org/officeDocument/2006/math"><m:r><m:t>b</m:t></m:r></m:oMath></a14:m><a:r><a:rPr /><a:t> if:</a:t></a:r></a:p><a:p><a:pPr lvl="0" /><a14:m><m:oMath xmlns:m="http://schemas.openxmlformats.org/officeDocument/2006/math"><m:r><m:t>a</m:t></m:r></m:oMath></a14:m><a:r><a:rPr /><a:t> is </a:t></a:r><a:r><a:rPr b="1" /><a:t>at least as good</a:t></a:r><a:r><a:rPr /><a:t> as </a:t></a:r><a14:m><m:oMath xmlns:m="http://schemas.openxmlformats.org/officeDocument/2006/math"><m:r><m:t>b</m:t></m:r></m:oMath></a14:m><a:r><a:rPr /><a:t> on every objective</a:t></a:r></a:p><a:p><a:pPr lvl="0" /><a14:m><m:oMath xmlns:m="http://schemas.openxmlformats.org/officeDocument/2006/math"><m:r><m:t>a</m:t></m:r></m:oMath></a14:m><a:r><a:rPr /><a:t> is </a:t></a:r><a:r><a:rPr b="1" /><a:t>strictly better</a:t></a:r><a:r><a:rPr /><a:t> than </a:t></a:r><a14:m><m:oMath xmlns:m="http://schemas.openxmlformats.org/officeDocument/2006/math"><m:r><m:t>b</m:t></m:r></m:oMath></a14:m><a:r><a:rPr /><a:t> on at least one objective</a:t></a:r></a:p><a:p><a:pPr lvl="0" indent="0" marL="0"><a:buNone /></a:pPr><a:r><a:rPr /><a:t>. . .</a:t></a:r></a:p><a:p><a:pPr lvl="0" indent="0" marL="0"><a:buNone /></a:pPr><a:r><a:rPr /><a:t>If </a:t></a:r><a14:m><m:oMath xmlns:m="http://schemas.openxmlformats.org/officeDocument/2006/math"><m:r><m:t>a</m:t></m:r></m:oMath></a14:m><a:r><a:rPr /><a:t> dominates </a:t></a:r><a14:m><m:oMath xmlns:m="http://schemas.openxmlformats.org/officeDocument/2006/math"><m:r><m:t>b</m:t></m:r></m:oMath></a14:m><a:r><a:rPr /><a:t>, there is no reason to choose </a:t></a:r><a14:m><m:oMath xmlns:m="http://schemas.openxmlformats.org/officeDocument/2006/math"><m:r><m:t>b</m:t></m:r></m:oMath></a14:m><a:r><a:rPr /><a:t> — you can do better.</a:t></a:r></a:p><a:p><a:pPr lvl="0" indent="0" marL="0"><a:spcBef><a:spcPts val="3000" /></a:spcBef><a:buNone /></a:pPr><a:r><a:rPr b="1" /><a:t>Dominance: Example</a:t></a:r></a:p><a:p><a:pPr lvl="0" indent="0" marL="0"><a:buNone /></a:pPr><a:r><a:rPr /><a:t>Three house elevation strategies, two objectives (minimize both):</a:t></a:r></a:p></p:txBody></p:sp></mc:Choice></mc:AlternateContent><p:graphicFrame><p:nvGraphicFramePr><p:cNvPr id="6" name="Content Placeholder 5" /><p:cNvGraphicFramePr><a:graphicFrameLocks noGrp="1" /></p:cNvGraphicFramePr><p:nvPr><p:ph idx="1" /></p:nvPr></p:nvGraphicFramePr><p:xfrm><a:off x="3568700" y="203200" /><a:ext cx="5105400" cy="4381500" /></p:xfrm><a:graphic><a:graphicData uri="http://schemas.openxmlformats.org/drawingml/2006/table"><a:tbl><a:tblPr firstRow="1" bandRow="1"><a:tableStyleId>{5C22544A-7EE6-4342-B048-85BDC9FD1C3A}</a:tableStyleId></a:tblPr><a:tblGrid><a:gridCol w="1701800" /><a:gridCol w="1701800" /><a:gridCol w="1701800" /></a:tblGrid><a:tr h="0"><a:tc><a:txBody><a:bodyPr /><a:lstStyle /><a:p><a:pPr lvl="0" indent="0" marL="0" algn="l"><a:buNone /></a:pPr><a:r><a:rPr /><a:t>Strategy</a:t></a:r></a:p></a:txBody><a:tcPr /></a:tc><a:tc><a:txBody><a:bodyPr /><a:lstStyle /><a:p><a:pPr lvl="0" indent="0" marL="0" algn="ctr"><a:buNone /></a:pPr><a:r><a:rPr /><a:t>Expected Damages (</a:t></a:r><a14:m><m:oMath xmlns:m="http://schemas.openxmlformats.org/officeDocument/2006/math"><m:r><m:t>M</m:t></m:r><m:r><m:rPr><m:sty m:val="p" /></m:rPr><m:t>)</m:t></m:r><m:r><m:rPr><m:sty m:val="p" /></m:rPr><m:t>|</m:t></m:r><m:r><m:t>C</m:t></m:r><m:r><m:t>o</m:t></m:r><m:r><m:t>n</m:t></m:r><m:r><m:t>s</m:t></m:r><m:r><m:t>t</m:t></m:r><m:r><m:t>r</m:t></m:r><m:r><m:t>u</m:t></m:r><m:r><m:t>c</m:t></m:r><m:r><m:t>t</m:t></m:r><m:r><m:t>i</m:t></m:r><m:r><m:t>o</m:t></m:r><m:r><m:t>n</m:t></m:r><m:r><m:t>C</m:t></m:r><m:r><m:t>o</m:t></m:r><m:r><m:t>s</m:t></m:r><m:r><m:t>t</m:t></m:r><m:r><m:rPr><m:sty m:val="p" /></m:rPr><m:t>(</m:t></m:r></m:oMath></a14:m><a:r><a:rPr /><a:t>M)</a:t></a:r></a:p></a:txBody><a:tcPr /></a:tc><a:tc><a:txBody><a:bodyPr /><a:lstStyle /><a:p><a:endParaRPr /></a:p></a:txBody><a:tcPr /></a:tc></a:tr><a:tr h="0"><a:tc><a:txBody><a:bodyPr /><a:lstStyle /><a:p><a:pPr lvl="0" indent="0" marL="0" algn="l"><a:buNone /></a:pPr><a:r><a:rPr /><a:t>A: Elevate 1 ft</a:t></a:r></a:p></a:txBody></a:tc><a:tc><a:txBody><a:bodyPr /><a:lstStyle /><a:p><a:pPr lvl="0" indent="0" marL="0" algn="ctr"><a:buNone /></a:pPr><a:r><a:rPr /><a:t>4.0</a:t></a:r></a:p></a:txBody></a:tc><a:tc><a:txBody><a:bodyPr /><a:lstStyle /><a:p><a:pPr lvl="0" indent="0" marL="0" algn="ctr"><a:buNone /></a:pPr><a:r><a:rPr /><a:t>0.5</a:t></a:r></a:p></a:txBody></a:tc></a:tr><a:tr h="0"><a:tc><a:txBody><a:bodyPr /><a:lstStyle /><a:p><a:pPr lvl="0" indent="0" marL="0" algn="l"><a:buNone /></a:pPr><a:r><a:rPr /><a:t>B: Elevate 3 ft</a:t></a:r></a:p></a:txBody></a:tc><a:tc><a:txBody><a:bodyPr /><a:lstStyle /><a:p><a:pPr lvl="0" indent="0" marL="0" algn="ctr"><a:buNone /></a:pPr><a:r><a:rPr /><a:t>2.0</a:t></a:r></a:p></a:txBody></a:tc><a:tc><a:txBody><a:bodyPr /><a:lstStyle /><a:p><a:pPr lvl="0" indent="0" marL="0" algn="ctr"><a:buNone /></a:pPr><a:r><a:rPr /><a:t>1.5</a:t></a:r></a:p></a:txBody></a:tc></a:tr><a:tr h="0"><a:tc><a:txBody><a:bodyPr /><a:lstStyle /><a:p><a:pPr lvl="0" indent="0" marL="0" algn="l"><a:buNone /></a:pPr><a:r><a:rPr /><a:t>C: Elevate 5 ft</a:t></a:r></a:p></a:txBody></a:tc><a:tc><a:txBody><a:bodyPr /><a:lstStyle /><a:p><a:pPr lvl="0" indent="0" marL="0" algn="ctr"><a:buNone /></a:pPr><a:r><a:rPr /><a:t>1.8</a:t></a:r></a:p></a:txBody></a:tc><a:tc><a:txBody><a:bodyPr /><a:lstStyle /><a:p><a:pPr lvl="0" indent="0" marL="0" algn="ctr"><a:buNone /></a:pPr><a:r><a:rPr /><a:t>3.0</a:t></a:r></a:p></a:txBody></a:tc></a:tr></a:tbl></a:graphicData></a:graphic></p:graphicFrame></p:spTree></p:cSld><p:timing><p:tnLst><p:par><p:cTn id="1" dur="indefinite" restart="never" nodeType="tmRoot"><p:childTnLst><p:seq concurrent="1" nextAc="seek"><p:cTn id="2" dur="indefinite" nodeType="mainSeq"><p:childTnLst><p:par><p:cTn id="3" fill="hold"><p:stCondLst><p:cond delay="indefinite" /></p:stCondLst><p:childTnLst><p:par><p:cTn id="4" fill="hold"><p:stCondLst><p:cond delay="0" /></p:stCondLst><p:childTnLst><p:par><p:cTn id="5" presetID="1" presetClass="entr" presetSubtype="0" fill="hold" grpId="0" nodeType="clickEffect"><p:stCondLst><p:cond delay="0" /></p:stCondLst><p:childTnLst><p:set><p:cBhvr><p:cTn id="6" dur="1" fill="hold"><p:stCondLst><p:cond delay="0" /></p:stCondLst></p:cTn><p:tgtEl><p:spTgt spid="4"><p:txEl><p:pRg st="3" end="3" /></p:txEl></p:spTgt></p:tgtEl><p:attrNameLst><p:attrName>style.visibility</p:attrName></p:attrNameLst></p:cBhvr><p:to><p:strVal val="visible" /></p:to></p:set></p:childTnLst></p:cTn></p:par></p:childTnLst></p:cTn></p:par></p:childTnLst></p:cTn></p:par><p:par><p:cTn id="7" fill="hold"><p:stCondLst><p:cond delay="indefinite" /></p:stCondLst><p:childTnLst><p:par><p:cTn id="8" fill="hold"><p:stCondLst><p:cond delay="0" /></p:stCondLst><p:childTnLst><p:par><p:cTn id="9" presetID="1" presetClass="entr" presetSubtype="0" fill="hold" grpId="0" nodeType="clickEffect"><p:stCondLst><p:cond delay="0" /></p:stCondLst><p:childTnLst><p:set><p:cBhvr><p:cTn id="10" dur="1" fill="hold"><p:stCondLst><p:cond delay="0" /></p:stCondLst></p:cTn><p:tgtEl><p:spTgt spid="4"><p:txEl><p:pRg st="4" end="4" /></p:txEl></p:spTgt></p:tgtEl><p:attrNameLst><p:attrName>style.visibility</p:attrName></p:attrNameLst></p:cBhvr><p:to><p:strVal val="visible" /></p:to></p:set></p:childTnLst></p:cTn></p:par></p:childTnLst></p:cTn></p:par></p:childTnLst></p:cTn></p:par></p:childTnLst></p:cTn><p:prevCondLst><p:cond evt="onPrev" delay="0"><p:tgtEl><p:sldTgt /></p:tgtEl></p:cond></p:prevCondLst><p:nextCondLst><p:cond evt="onNext" delay="0"><p:tgtEl><p:sldTgt /></p:tgtEl></p:cond></p:nextCondLst></p:seq></p:childTnLst></p:cTn></p:par></p:tnLst><p:bldLst><p:bldP spid="4" grpId="0" uiExpand="1" build="p" /></p:bldLst></p:timing></p:sld>
+</file>
+
+<file path=ppt/slides/slide5.xml><?xml version="1.0" encoding="utf-8"?>
 <p:sld xmlns:a="http://schemas.openxmlformats.org/drawingml/2006/main" xmlns:r="http://schemas.openxmlformats.org/officeDocument/2006/relationships" xmlns:p="http://schemas.openxmlformats.org/presentationml/2006/main">
   <p:cSld>
     <p:spTree>
@@ -3382,12 +7002,12 @@
       </p:grpSpPr>
       <p:sp>
         <p:nvSpPr>
-          <p:cNvPr id="2" name="Title 1"/>
+          <p:cNvPr id="4" name="Text Placeholder 3"/>
           <p:cNvSpPr>
             <a:spLocks noGrp="1"/>
           </p:cNvSpPr>
           <p:nvPr>
-            <p:ph type="title"/>
+            <p:ph idx="2" sz="half" type="body"/>
           </p:nvPr>
         </p:nvSpPr>
         <p:spPr/>
@@ -3400,7 +7020,3664 @@
             </a:pPr>
             <a:r>
               <a:rPr/>
-              <a:t>References</a:t>
+              <a:t>. . .</a:t>
+            </a:r>
+          </a:p>
+          <a:p>
+            <a:pPr lvl="0"/>
+            <a:r>
+              <a:rPr/>
+              <a:t>Does A dominate B? No — A is cheaper but has higher damages.</a:t>
+            </a:r>
+          </a:p>
+          <a:p>
+            <a:pPr lvl="0"/>
+            <a:r>
+              <a:rPr/>
+              <a:t>Does B dominate C? </a:t>
+            </a:r>
+            <a:r>
+              <a:rPr b="1"/>
+              <a:t>Yes</a:t>
+            </a:r>
+            <a:r>
+              <a:rPr/>
+              <a:t> — B is better on cost (1.5 &lt; 3.0) and nearly as good on damages (2.0 vs 1.8)… wait, 2.0 &gt; 1.8, so B is </a:t>
+            </a:r>
+            <a:r>
+              <a:rPr i="1"/>
+              <a:t>worse</a:t>
+            </a:r>
+            <a:r>
+              <a:rPr/>
+              <a:t> on damages. </a:t>
+            </a:r>
+            <a:r>
+              <a:rPr b="1"/>
+              <a:t>No</a:t>
+            </a:r>
+            <a:r>
+              <a:rPr/>
+              <a:t> — neither dominates.</a:t>
+            </a:r>
+          </a:p>
+          <a:p>
+            <a:pPr lvl="0"/>
+            <a:r>
+              <a:rPr/>
+              <a:t>The Pareto front is {A, B, C} — all three are non-dominated.</a:t>
+            </a:r>
+          </a:p>
+          <a:p>
+            <a:pPr lvl="0" indent="0" marL="0">
+              <a:spcBef>
+                <a:spcPts val="3000"/>
+              </a:spcBef>
+              <a:buNone/>
+            </a:pPr>
+            <a:r>
+              <a:rPr b="1"/>
+              <a:t>Dominance: Visualized</a:t>
+            </a:r>
+          </a:p>
+          <a:p>
+            <a:pPr lvl="0" indent="0">
+              <a:buNone/>
+            </a:pPr>
+            <a:r>
+              <a:rPr b="1">
+                <a:solidFill>
+                  <a:srgbClr val="003B4F"/>
+                </a:solidFill>
+                <a:latin typeface="Courier"/>
+              </a:rPr>
+              <a:t>let</a:t>
+            </a:r>
+            <a:br/>
+            <a:r>
+              <a:rPr>
+                <a:solidFill>
+                  <a:srgbClr val="003B4F"/>
+                </a:solidFill>
+                <a:latin typeface="Courier"/>
+              </a:rPr>
+              <a:t>    points </a:t>
+            </a:r>
+            <a:r>
+              <a:rPr>
+                <a:solidFill>
+                  <a:srgbClr val="5E5E5E"/>
+                </a:solidFill>
+                <a:latin typeface="Courier"/>
+              </a:rPr>
+              <a:t>=</a:t>
+            </a:r>
+            <a:r>
+              <a:rPr>
+                <a:solidFill>
+                  <a:srgbClr val="003B4F"/>
+                </a:solidFill>
+                <a:latin typeface="Courier"/>
+              </a:rPr>
+              <a:t> [(</a:t>
+            </a:r>
+            <a:r>
+              <a:rPr>
+                <a:solidFill>
+                  <a:srgbClr val="AD0000"/>
+                </a:solidFill>
+                <a:latin typeface="Courier"/>
+              </a:rPr>
+              <a:t>2</a:t>
+            </a:r>
+            <a:r>
+              <a:rPr>
+                <a:solidFill>
+                  <a:srgbClr val="003B4F"/>
+                </a:solidFill>
+                <a:latin typeface="Courier"/>
+              </a:rPr>
+              <a:t>, </a:t>
+            </a:r>
+            <a:r>
+              <a:rPr>
+                <a:solidFill>
+                  <a:srgbClr val="AD0000"/>
+                </a:solidFill>
+                <a:latin typeface="Courier"/>
+              </a:rPr>
+              <a:t>2</a:t>
+            </a:r>
+            <a:r>
+              <a:rPr>
+                <a:solidFill>
+                  <a:srgbClr val="003B4F"/>
+                </a:solidFill>
+                <a:latin typeface="Courier"/>
+              </a:rPr>
+              <a:t>), (</a:t>
+            </a:r>
+            <a:r>
+              <a:rPr>
+                <a:solidFill>
+                  <a:srgbClr val="AD0000"/>
+                </a:solidFill>
+                <a:latin typeface="Courier"/>
+              </a:rPr>
+              <a:t>1</a:t>
+            </a:r>
+            <a:r>
+              <a:rPr>
+                <a:solidFill>
+                  <a:srgbClr val="003B4F"/>
+                </a:solidFill>
+                <a:latin typeface="Courier"/>
+              </a:rPr>
+              <a:t>, </a:t>
+            </a:r>
+            <a:r>
+              <a:rPr>
+                <a:solidFill>
+                  <a:srgbClr val="AD0000"/>
+                </a:solidFill>
+                <a:latin typeface="Courier"/>
+              </a:rPr>
+              <a:t>4</a:t>
+            </a:r>
+            <a:r>
+              <a:rPr>
+                <a:solidFill>
+                  <a:srgbClr val="003B4F"/>
+                </a:solidFill>
+                <a:latin typeface="Courier"/>
+              </a:rPr>
+              <a:t>), (</a:t>
+            </a:r>
+            <a:r>
+              <a:rPr>
+                <a:solidFill>
+                  <a:srgbClr val="AD0000"/>
+                </a:solidFill>
+                <a:latin typeface="Courier"/>
+              </a:rPr>
+              <a:t>4</a:t>
+            </a:r>
+            <a:r>
+              <a:rPr>
+                <a:solidFill>
+                  <a:srgbClr val="003B4F"/>
+                </a:solidFill>
+                <a:latin typeface="Courier"/>
+              </a:rPr>
+              <a:t>, </a:t>
+            </a:r>
+            <a:r>
+              <a:rPr>
+                <a:solidFill>
+                  <a:srgbClr val="AD0000"/>
+                </a:solidFill>
+                <a:latin typeface="Courier"/>
+              </a:rPr>
+              <a:t>1</a:t>
+            </a:r>
+            <a:r>
+              <a:rPr>
+                <a:solidFill>
+                  <a:srgbClr val="003B4F"/>
+                </a:solidFill>
+                <a:latin typeface="Courier"/>
+              </a:rPr>
+              <a:t>), (</a:t>
+            </a:r>
+            <a:r>
+              <a:rPr>
+                <a:solidFill>
+                  <a:srgbClr val="AD0000"/>
+                </a:solidFill>
+                <a:latin typeface="Courier"/>
+              </a:rPr>
+              <a:t>3</a:t>
+            </a:r>
+            <a:r>
+              <a:rPr>
+                <a:solidFill>
+                  <a:srgbClr val="003B4F"/>
+                </a:solidFill>
+                <a:latin typeface="Courier"/>
+              </a:rPr>
+              <a:t>, </a:t>
+            </a:r>
+            <a:r>
+              <a:rPr>
+                <a:solidFill>
+                  <a:srgbClr val="AD0000"/>
+                </a:solidFill>
+                <a:latin typeface="Courier"/>
+              </a:rPr>
+              <a:t>3</a:t>
+            </a:r>
+            <a:r>
+              <a:rPr>
+                <a:solidFill>
+                  <a:srgbClr val="003B4F"/>
+                </a:solidFill>
+                <a:latin typeface="Courier"/>
+              </a:rPr>
+              <a:t>), (</a:t>
+            </a:r>
+            <a:r>
+              <a:rPr>
+                <a:solidFill>
+                  <a:srgbClr val="AD0000"/>
+                </a:solidFill>
+                <a:latin typeface="Courier"/>
+              </a:rPr>
+              <a:t>5</a:t>
+            </a:r>
+            <a:r>
+              <a:rPr>
+                <a:solidFill>
+                  <a:srgbClr val="003B4F"/>
+                </a:solidFill>
+                <a:latin typeface="Courier"/>
+              </a:rPr>
+              <a:t>, </a:t>
+            </a:r>
+            <a:r>
+              <a:rPr>
+                <a:solidFill>
+                  <a:srgbClr val="AD0000"/>
+                </a:solidFill>
+                <a:latin typeface="Courier"/>
+              </a:rPr>
+              <a:t>2</a:t>
+            </a:r>
+            <a:r>
+              <a:rPr>
+                <a:solidFill>
+                  <a:srgbClr val="003B4F"/>
+                </a:solidFill>
+                <a:latin typeface="Courier"/>
+              </a:rPr>
+              <a:t>)]</a:t>
+            </a:r>
+            <a:br/>
+            <a:r>
+              <a:rPr>
+                <a:solidFill>
+                  <a:srgbClr val="003B4F"/>
+                </a:solidFill>
+                <a:latin typeface="Courier"/>
+              </a:rPr>
+              <a:t>    labels </a:t>
+            </a:r>
+            <a:r>
+              <a:rPr>
+                <a:solidFill>
+                  <a:srgbClr val="5E5E5E"/>
+                </a:solidFill>
+                <a:latin typeface="Courier"/>
+              </a:rPr>
+              <a:t>=</a:t>
+            </a:r>
+            <a:r>
+              <a:rPr>
+                <a:solidFill>
+                  <a:srgbClr val="003B4F"/>
+                </a:solidFill>
+                <a:latin typeface="Courier"/>
+              </a:rPr>
+              <a:t> [</a:t>
+            </a:r>
+            <a:r>
+              <a:rPr>
+                <a:solidFill>
+                  <a:srgbClr val="20794D"/>
+                </a:solidFill>
+                <a:latin typeface="Courier"/>
+              </a:rPr>
+              <a:t>"1"</a:t>
+            </a:r>
+            <a:r>
+              <a:rPr>
+                <a:solidFill>
+                  <a:srgbClr val="003B4F"/>
+                </a:solidFill>
+                <a:latin typeface="Courier"/>
+              </a:rPr>
+              <a:t>, </a:t>
+            </a:r>
+            <a:r>
+              <a:rPr>
+                <a:solidFill>
+                  <a:srgbClr val="20794D"/>
+                </a:solidFill>
+                <a:latin typeface="Courier"/>
+              </a:rPr>
+              <a:t>"2"</a:t>
+            </a:r>
+            <a:r>
+              <a:rPr>
+                <a:solidFill>
+                  <a:srgbClr val="003B4F"/>
+                </a:solidFill>
+                <a:latin typeface="Courier"/>
+              </a:rPr>
+              <a:t>, </a:t>
+            </a:r>
+            <a:r>
+              <a:rPr>
+                <a:solidFill>
+                  <a:srgbClr val="20794D"/>
+                </a:solidFill>
+                <a:latin typeface="Courier"/>
+              </a:rPr>
+              <a:t>"3"</a:t>
+            </a:r>
+            <a:r>
+              <a:rPr>
+                <a:solidFill>
+                  <a:srgbClr val="003B4F"/>
+                </a:solidFill>
+                <a:latin typeface="Courier"/>
+              </a:rPr>
+              <a:t>, </a:t>
+            </a:r>
+            <a:r>
+              <a:rPr>
+                <a:solidFill>
+                  <a:srgbClr val="20794D"/>
+                </a:solidFill>
+                <a:latin typeface="Courier"/>
+              </a:rPr>
+              <a:t>"4"</a:t>
+            </a:r>
+            <a:r>
+              <a:rPr>
+                <a:solidFill>
+                  <a:srgbClr val="003B4F"/>
+                </a:solidFill>
+                <a:latin typeface="Courier"/>
+              </a:rPr>
+              <a:t>, </a:t>
+            </a:r>
+            <a:r>
+              <a:rPr>
+                <a:solidFill>
+                  <a:srgbClr val="20794D"/>
+                </a:solidFill>
+                <a:latin typeface="Courier"/>
+              </a:rPr>
+              <a:t>"5"</a:t>
+            </a:r>
+            <a:r>
+              <a:rPr>
+                <a:solidFill>
+                  <a:srgbClr val="003B4F"/>
+                </a:solidFill>
+                <a:latin typeface="Courier"/>
+              </a:rPr>
+              <a:t>]</a:t>
+            </a:r>
+            <a:br/>
+            <a:r>
+              <a:rPr>
+                <a:solidFill>
+                  <a:srgbClr val="003B4F"/>
+                </a:solidFill>
+                <a:latin typeface="Courier"/>
+              </a:rPr>
+              <a:t>    colors </a:t>
+            </a:r>
+            <a:r>
+              <a:rPr>
+                <a:solidFill>
+                  <a:srgbClr val="5E5E5E"/>
+                </a:solidFill>
+                <a:latin typeface="Courier"/>
+              </a:rPr>
+              <a:t>=</a:t>
+            </a:r>
+            <a:r>
+              <a:rPr>
+                <a:solidFill>
+                  <a:srgbClr val="003B4F"/>
+                </a:solidFill>
+                <a:latin typeface="Courier"/>
+              </a:rPr>
+              <a:t> [</a:t>
+            </a:r>
+            <a:r>
+              <a:rPr>
+                <a:solidFill>
+                  <a:srgbClr val="5E5E5E"/>
+                </a:solidFill>
+                <a:latin typeface="Courier"/>
+              </a:rPr>
+              <a:t>:</a:t>
+            </a:r>
+            <a:r>
+              <a:rPr>
+                <a:solidFill>
+                  <a:srgbClr val="003B4F"/>
+                </a:solidFill>
+                <a:latin typeface="Courier"/>
+              </a:rPr>
+              <a:t>steelblue, </a:t>
+            </a:r>
+            <a:r>
+              <a:rPr>
+                <a:solidFill>
+                  <a:srgbClr val="5E5E5E"/>
+                </a:solidFill>
+                <a:latin typeface="Courier"/>
+              </a:rPr>
+              <a:t>:</a:t>
+            </a:r>
+            <a:r>
+              <a:rPr>
+                <a:solidFill>
+                  <a:srgbClr val="003B4F"/>
+                </a:solidFill>
+                <a:latin typeface="Courier"/>
+              </a:rPr>
+              <a:t>steelblue, </a:t>
+            </a:r>
+            <a:r>
+              <a:rPr>
+                <a:solidFill>
+                  <a:srgbClr val="5E5E5E"/>
+                </a:solidFill>
+                <a:latin typeface="Courier"/>
+              </a:rPr>
+              <a:t>:</a:t>
+            </a:r>
+            <a:r>
+              <a:rPr>
+                <a:solidFill>
+                  <a:srgbClr val="003B4F"/>
+                </a:solidFill>
+                <a:latin typeface="Courier"/>
+              </a:rPr>
+              <a:t>steelblue, </a:t>
+            </a:r>
+            <a:r>
+              <a:rPr>
+                <a:solidFill>
+                  <a:srgbClr val="5E5E5E"/>
+                </a:solidFill>
+                <a:latin typeface="Courier"/>
+              </a:rPr>
+              <a:t>:</a:t>
+            </a:r>
+            <a:r>
+              <a:rPr>
+                <a:solidFill>
+                  <a:srgbClr val="003B4F"/>
+                </a:solidFill>
+                <a:latin typeface="Courier"/>
+              </a:rPr>
+              <a:t>tomato, </a:t>
+            </a:r>
+            <a:r>
+              <a:rPr>
+                <a:solidFill>
+                  <a:srgbClr val="5E5E5E"/>
+                </a:solidFill>
+                <a:latin typeface="Courier"/>
+              </a:rPr>
+              <a:t>:</a:t>
+            </a:r>
+            <a:r>
+              <a:rPr>
+                <a:solidFill>
+                  <a:srgbClr val="003B4F"/>
+                </a:solidFill>
+                <a:latin typeface="Courier"/>
+              </a:rPr>
+              <a:t>steelblue]</a:t>
+            </a:r>
+            <a:br/>
+            <a:br/>
+            <a:r>
+              <a:rPr>
+                <a:solidFill>
+                  <a:srgbClr val="003B4F"/>
+                </a:solidFill>
+                <a:latin typeface="Courier"/>
+              </a:rPr>
+              <a:t>    fig </a:t>
+            </a:r>
+            <a:r>
+              <a:rPr>
+                <a:solidFill>
+                  <a:srgbClr val="5E5E5E"/>
+                </a:solidFill>
+                <a:latin typeface="Courier"/>
+              </a:rPr>
+              <a:t>=</a:t>
+            </a:r>
+            <a:r>
+              <a:rPr>
+                <a:solidFill>
+                  <a:srgbClr val="003B4F"/>
+                </a:solidFill>
+                <a:latin typeface="Courier"/>
+              </a:rPr>
+              <a:t> </a:t>
+            </a:r>
+            <a:r>
+              <a:rPr>
+                <a:solidFill>
+                  <a:srgbClr val="4758AB"/>
+                </a:solidFill>
+                <a:latin typeface="Courier"/>
+              </a:rPr>
+              <a:t>Figure</a:t>
+            </a:r>
+            <a:r>
+              <a:rPr>
+                <a:solidFill>
+                  <a:srgbClr val="003B4F"/>
+                </a:solidFill>
+                <a:latin typeface="Courier"/>
+              </a:rPr>
+              <a:t>(; size</a:t>
+            </a:r>
+            <a:r>
+              <a:rPr>
+                <a:solidFill>
+                  <a:srgbClr val="5E5E5E"/>
+                </a:solidFill>
+                <a:latin typeface="Courier"/>
+              </a:rPr>
+              <a:t>=</a:t>
+            </a:r>
+            <a:r>
+              <a:rPr>
+                <a:solidFill>
+                  <a:srgbClr val="003B4F"/>
+                </a:solidFill>
+                <a:latin typeface="Courier"/>
+              </a:rPr>
+              <a:t>(</a:t>
+            </a:r>
+            <a:r>
+              <a:rPr>
+                <a:solidFill>
+                  <a:srgbClr val="AD0000"/>
+                </a:solidFill>
+                <a:latin typeface="Courier"/>
+              </a:rPr>
+              <a:t>500</a:t>
+            </a:r>
+            <a:r>
+              <a:rPr>
+                <a:solidFill>
+                  <a:srgbClr val="003B4F"/>
+                </a:solidFill>
+                <a:latin typeface="Courier"/>
+              </a:rPr>
+              <a:t>, </a:t>
+            </a:r>
+            <a:r>
+              <a:rPr>
+                <a:solidFill>
+                  <a:srgbClr val="AD0000"/>
+                </a:solidFill>
+                <a:latin typeface="Courier"/>
+              </a:rPr>
+              <a:t>450</a:t>
+            </a:r>
+            <a:r>
+              <a:rPr>
+                <a:solidFill>
+                  <a:srgbClr val="003B4F"/>
+                </a:solidFill>
+                <a:latin typeface="Courier"/>
+              </a:rPr>
+              <a:t>))</a:t>
+            </a:r>
+            <a:br/>
+            <a:r>
+              <a:rPr>
+                <a:solidFill>
+                  <a:srgbClr val="003B4F"/>
+                </a:solidFill>
+                <a:latin typeface="Courier"/>
+              </a:rPr>
+              <a:t>    ax </a:t>
+            </a:r>
+            <a:r>
+              <a:rPr>
+                <a:solidFill>
+                  <a:srgbClr val="5E5E5E"/>
+                </a:solidFill>
+                <a:latin typeface="Courier"/>
+              </a:rPr>
+              <a:t>=</a:t>
+            </a:r>
+            <a:r>
+              <a:rPr>
+                <a:solidFill>
+                  <a:srgbClr val="003B4F"/>
+                </a:solidFill>
+                <a:latin typeface="Courier"/>
+              </a:rPr>
+              <a:t> </a:t>
+            </a:r>
+            <a:r>
+              <a:rPr>
+                <a:solidFill>
+                  <a:srgbClr val="4758AB"/>
+                </a:solidFill>
+                <a:latin typeface="Courier"/>
+              </a:rPr>
+              <a:t>Axis</a:t>
+            </a:r>
+            <a:r>
+              <a:rPr>
+                <a:solidFill>
+                  <a:srgbClr val="003B4F"/>
+                </a:solidFill>
+                <a:latin typeface="Courier"/>
+              </a:rPr>
+              <a:t>(</a:t>
+            </a:r>
+            <a:br/>
+            <a:r>
+              <a:rPr>
+                <a:solidFill>
+                  <a:srgbClr val="003B4F"/>
+                </a:solidFill>
+                <a:latin typeface="Courier"/>
+              </a:rPr>
+              <a:t>        fig[</a:t>
+            </a:r>
+            <a:r>
+              <a:rPr>
+                <a:solidFill>
+                  <a:srgbClr val="AD0000"/>
+                </a:solidFill>
+                <a:latin typeface="Courier"/>
+              </a:rPr>
+              <a:t>1</a:t>
+            </a:r>
+            <a:r>
+              <a:rPr>
+                <a:solidFill>
+                  <a:srgbClr val="003B4F"/>
+                </a:solidFill>
+                <a:latin typeface="Courier"/>
+              </a:rPr>
+              <a:t>, </a:t>
+            </a:r>
+            <a:r>
+              <a:rPr>
+                <a:solidFill>
+                  <a:srgbClr val="AD0000"/>
+                </a:solidFill>
+                <a:latin typeface="Courier"/>
+              </a:rPr>
+              <a:t>1</a:t>
+            </a:r>
+            <a:r>
+              <a:rPr>
+                <a:solidFill>
+                  <a:srgbClr val="003B4F"/>
+                </a:solidFill>
+                <a:latin typeface="Courier"/>
+              </a:rPr>
+              <a:t>];</a:t>
+            </a:r>
+            <a:br/>
+            <a:r>
+              <a:rPr>
+                <a:solidFill>
+                  <a:srgbClr val="003B4F"/>
+                </a:solidFill>
+                <a:latin typeface="Courier"/>
+              </a:rPr>
+              <a:t>        xlabel</a:t>
+            </a:r>
+            <a:r>
+              <a:rPr>
+                <a:solidFill>
+                  <a:srgbClr val="5E5E5E"/>
+                </a:solidFill>
+                <a:latin typeface="Courier"/>
+              </a:rPr>
+              <a:t>=</a:t>
+            </a:r>
+            <a:r>
+              <a:rPr>
+                <a:solidFill>
+                  <a:srgbClr val="003B4F"/>
+                </a:solidFill>
+                <a:latin typeface="Courier"/>
+              </a:rPr>
+              <a:t>L</a:t>
+            </a:r>
+            <a:r>
+              <a:rPr>
+                <a:solidFill>
+                  <a:srgbClr val="20794D"/>
+                </a:solidFill>
+                <a:latin typeface="Courier"/>
+              </a:rPr>
+              <a:t>"</a:t>
+            </a:r>
+            <a:r>
+              <a:rPr>
+                <a:solidFill>
+                  <a:srgbClr val="5E5E5E"/>
+                </a:solidFill>
+                <a:latin typeface="Courier"/>
+              </a:rPr>
+              <a:t>$</a:t>
+            </a:r>
+            <a:r>
+              <a:rPr>
+                <a:solidFill>
+                  <a:srgbClr val="003B4F"/>
+                </a:solidFill>
+                <a:latin typeface="Courier"/>
+              </a:rPr>
+              <a:t>f_1</a:t>
+            </a:r>
+            <a:r>
+              <a:rPr>
+                <a:solidFill>
+                  <a:srgbClr val="20794D"/>
+                </a:solidFill>
+                <a:latin typeface="Courier"/>
+              </a:rPr>
+              <a:t>$ (maximize)"</a:t>
+            </a:r>
+            <a:r>
+              <a:rPr>
+                <a:solidFill>
+                  <a:srgbClr val="003B4F"/>
+                </a:solidFill>
+                <a:latin typeface="Courier"/>
+              </a:rPr>
+              <a:t>,</a:t>
+            </a:r>
+            <a:br/>
+            <a:r>
+              <a:rPr>
+                <a:solidFill>
+                  <a:srgbClr val="003B4F"/>
+                </a:solidFill>
+                <a:latin typeface="Courier"/>
+              </a:rPr>
+              <a:t>        ylabel</a:t>
+            </a:r>
+            <a:r>
+              <a:rPr>
+                <a:solidFill>
+                  <a:srgbClr val="5E5E5E"/>
+                </a:solidFill>
+                <a:latin typeface="Courier"/>
+              </a:rPr>
+              <a:t>=</a:t>
+            </a:r>
+            <a:r>
+              <a:rPr>
+                <a:solidFill>
+                  <a:srgbClr val="003B4F"/>
+                </a:solidFill>
+                <a:latin typeface="Courier"/>
+              </a:rPr>
+              <a:t>L</a:t>
+            </a:r>
+            <a:r>
+              <a:rPr>
+                <a:solidFill>
+                  <a:srgbClr val="20794D"/>
+                </a:solidFill>
+                <a:latin typeface="Courier"/>
+              </a:rPr>
+              <a:t>"</a:t>
+            </a:r>
+            <a:r>
+              <a:rPr>
+                <a:solidFill>
+                  <a:srgbClr val="5E5E5E"/>
+                </a:solidFill>
+                <a:latin typeface="Courier"/>
+              </a:rPr>
+              <a:t>$</a:t>
+            </a:r>
+            <a:r>
+              <a:rPr>
+                <a:solidFill>
+                  <a:srgbClr val="003B4F"/>
+                </a:solidFill>
+                <a:latin typeface="Courier"/>
+              </a:rPr>
+              <a:t>f_2</a:t>
+            </a:r>
+            <a:r>
+              <a:rPr>
+                <a:solidFill>
+                  <a:srgbClr val="20794D"/>
+                </a:solidFill>
+                <a:latin typeface="Courier"/>
+              </a:rPr>
+              <a:t>$ (minimize)"</a:t>
+            </a:r>
+            <a:r>
+              <a:rPr>
+                <a:solidFill>
+                  <a:srgbClr val="003B4F"/>
+                </a:solidFill>
+                <a:latin typeface="Courier"/>
+              </a:rPr>
+              <a:t>,</a:t>
+            </a:r>
+            <a:br/>
+            <a:r>
+              <a:rPr>
+                <a:solidFill>
+                  <a:srgbClr val="003B4F"/>
+                </a:solidFill>
+                <a:latin typeface="Courier"/>
+              </a:rPr>
+              <a:t>        xticksvisible</a:t>
+            </a:r>
+            <a:r>
+              <a:rPr>
+                <a:solidFill>
+                  <a:srgbClr val="5E5E5E"/>
+                </a:solidFill>
+                <a:latin typeface="Courier"/>
+              </a:rPr>
+              <a:t>=</a:t>
+            </a:r>
+            <a:r>
+              <a:rPr>
+                <a:solidFill>
+                  <a:srgbClr val="8F5902"/>
+                </a:solidFill>
+                <a:latin typeface="Courier"/>
+              </a:rPr>
+              <a:t>false</a:t>
+            </a:r>
+            <a:r>
+              <a:rPr>
+                <a:solidFill>
+                  <a:srgbClr val="003B4F"/>
+                </a:solidFill>
+                <a:latin typeface="Courier"/>
+              </a:rPr>
+              <a:t>,</a:t>
+            </a:r>
+            <a:br/>
+            <a:r>
+              <a:rPr>
+                <a:solidFill>
+                  <a:srgbClr val="003B4F"/>
+                </a:solidFill>
+                <a:latin typeface="Courier"/>
+              </a:rPr>
+              <a:t>        xticklabelsvisible</a:t>
+            </a:r>
+            <a:r>
+              <a:rPr>
+                <a:solidFill>
+                  <a:srgbClr val="5E5E5E"/>
+                </a:solidFill>
+                <a:latin typeface="Courier"/>
+              </a:rPr>
+              <a:t>=</a:t>
+            </a:r>
+            <a:r>
+              <a:rPr>
+                <a:solidFill>
+                  <a:srgbClr val="8F5902"/>
+                </a:solidFill>
+                <a:latin typeface="Courier"/>
+              </a:rPr>
+              <a:t>false</a:t>
+            </a:r>
+            <a:r>
+              <a:rPr>
+                <a:solidFill>
+                  <a:srgbClr val="003B4F"/>
+                </a:solidFill>
+                <a:latin typeface="Courier"/>
+              </a:rPr>
+              <a:t>,</a:t>
+            </a:r>
+            <a:br/>
+            <a:r>
+              <a:rPr>
+                <a:solidFill>
+                  <a:srgbClr val="003B4F"/>
+                </a:solidFill>
+                <a:latin typeface="Courier"/>
+              </a:rPr>
+              <a:t>        yticksvisible</a:t>
+            </a:r>
+            <a:r>
+              <a:rPr>
+                <a:solidFill>
+                  <a:srgbClr val="5E5E5E"/>
+                </a:solidFill>
+                <a:latin typeface="Courier"/>
+              </a:rPr>
+              <a:t>=</a:t>
+            </a:r>
+            <a:r>
+              <a:rPr>
+                <a:solidFill>
+                  <a:srgbClr val="8F5902"/>
+                </a:solidFill>
+                <a:latin typeface="Courier"/>
+              </a:rPr>
+              <a:t>false</a:t>
+            </a:r>
+            <a:r>
+              <a:rPr>
+                <a:solidFill>
+                  <a:srgbClr val="003B4F"/>
+                </a:solidFill>
+                <a:latin typeface="Courier"/>
+              </a:rPr>
+              <a:t>,</a:t>
+            </a:r>
+            <a:br/>
+            <a:r>
+              <a:rPr>
+                <a:solidFill>
+                  <a:srgbClr val="003B4F"/>
+                </a:solidFill>
+                <a:latin typeface="Courier"/>
+              </a:rPr>
+              <a:t>        yticklabelsvisible</a:t>
+            </a:r>
+            <a:r>
+              <a:rPr>
+                <a:solidFill>
+                  <a:srgbClr val="5E5E5E"/>
+                </a:solidFill>
+                <a:latin typeface="Courier"/>
+              </a:rPr>
+              <a:t>=</a:t>
+            </a:r>
+            <a:r>
+              <a:rPr>
+                <a:solidFill>
+                  <a:srgbClr val="8F5902"/>
+                </a:solidFill>
+                <a:latin typeface="Courier"/>
+              </a:rPr>
+              <a:t>false</a:t>
+            </a:r>
+            <a:r>
+              <a:rPr>
+                <a:solidFill>
+                  <a:srgbClr val="003B4F"/>
+                </a:solidFill>
+                <a:latin typeface="Courier"/>
+              </a:rPr>
+              <a:t>,</a:t>
+            </a:r>
+            <a:br/>
+            <a:r>
+              <a:rPr>
+                <a:solidFill>
+                  <a:srgbClr val="003B4F"/>
+                </a:solidFill>
+                <a:latin typeface="Courier"/>
+              </a:rPr>
+              <a:t>        limits</a:t>
+            </a:r>
+            <a:r>
+              <a:rPr>
+                <a:solidFill>
+                  <a:srgbClr val="5E5E5E"/>
+                </a:solidFill>
+                <a:latin typeface="Courier"/>
+              </a:rPr>
+              <a:t>=</a:t>
+            </a:r>
+            <a:r>
+              <a:rPr>
+                <a:solidFill>
+                  <a:srgbClr val="003B4F"/>
+                </a:solidFill>
+                <a:latin typeface="Courier"/>
+              </a:rPr>
+              <a:t>(</a:t>
+            </a:r>
+            <a:r>
+              <a:rPr>
+                <a:solidFill>
+                  <a:srgbClr val="AD0000"/>
+                </a:solidFill>
+                <a:latin typeface="Courier"/>
+              </a:rPr>
+              <a:t>0</a:t>
+            </a:r>
+            <a:r>
+              <a:rPr>
+                <a:solidFill>
+                  <a:srgbClr val="003B4F"/>
+                </a:solidFill>
+                <a:latin typeface="Courier"/>
+              </a:rPr>
+              <a:t>, </a:t>
+            </a:r>
+            <a:r>
+              <a:rPr>
+                <a:solidFill>
+                  <a:srgbClr val="AD0000"/>
+                </a:solidFill>
+                <a:latin typeface="Courier"/>
+              </a:rPr>
+              <a:t>6</a:t>
+            </a:r>
+            <a:r>
+              <a:rPr>
+                <a:solidFill>
+                  <a:srgbClr val="003B4F"/>
+                </a:solidFill>
+                <a:latin typeface="Courier"/>
+              </a:rPr>
+              <a:t>, </a:t>
+            </a:r>
+            <a:r>
+              <a:rPr>
+                <a:solidFill>
+                  <a:srgbClr val="AD0000"/>
+                </a:solidFill>
+                <a:latin typeface="Courier"/>
+              </a:rPr>
+              <a:t>0</a:t>
+            </a:r>
+            <a:r>
+              <a:rPr>
+                <a:solidFill>
+                  <a:srgbClr val="003B4F"/>
+                </a:solidFill>
+                <a:latin typeface="Courier"/>
+              </a:rPr>
+              <a:t>, </a:t>
+            </a:r>
+            <a:r>
+              <a:rPr>
+                <a:solidFill>
+                  <a:srgbClr val="AD0000"/>
+                </a:solidFill>
+                <a:latin typeface="Courier"/>
+              </a:rPr>
+              <a:t>5.5</a:t>
+            </a:r>
+            <a:r>
+              <a:rPr>
+                <a:solidFill>
+                  <a:srgbClr val="003B4F"/>
+                </a:solidFill>
+                <a:latin typeface="Courier"/>
+              </a:rPr>
+              <a:t>),</a:t>
+            </a:r>
+            <a:br/>
+            <a:r>
+              <a:rPr>
+                <a:solidFill>
+                  <a:srgbClr val="003B4F"/>
+                </a:solidFill>
+                <a:latin typeface="Courier"/>
+              </a:rPr>
+              <a:t>    )</a:t>
+            </a:r>
+            <a:br/>
+            <a:r>
+              <a:rPr>
+                <a:solidFill>
+                  <a:srgbClr val="003B4F"/>
+                </a:solidFill>
+                <a:latin typeface="Courier"/>
+              </a:rPr>
+              <a:t>    </a:t>
+            </a:r>
+            <a:r>
+              <a:rPr b="1">
+                <a:solidFill>
+                  <a:srgbClr val="003B4F"/>
+                </a:solidFill>
+                <a:latin typeface="Courier"/>
+              </a:rPr>
+              <a:t>for</a:t>
+            </a:r>
+            <a:r>
+              <a:rPr>
+                <a:solidFill>
+                  <a:srgbClr val="003B4F"/>
+                </a:solidFill>
+                <a:latin typeface="Courier"/>
+              </a:rPr>
+              <a:t> (i, (x, y)) </a:t>
+            </a:r>
+            <a:r>
+              <a:rPr b="1">
+                <a:solidFill>
+                  <a:srgbClr val="003B4F"/>
+                </a:solidFill>
+                <a:latin typeface="Courier"/>
+              </a:rPr>
+              <a:t>in</a:t>
+            </a:r>
+            <a:r>
+              <a:rPr>
+                <a:solidFill>
+                  <a:srgbClr val="003B4F"/>
+                </a:solidFill>
+                <a:latin typeface="Courier"/>
+              </a:rPr>
+              <a:t> </a:t>
+            </a:r>
+            <a:r>
+              <a:rPr>
+                <a:solidFill>
+                  <a:srgbClr val="4758AB"/>
+                </a:solidFill>
+                <a:latin typeface="Courier"/>
+              </a:rPr>
+              <a:t>enumerate</a:t>
+            </a:r>
+            <a:r>
+              <a:rPr>
+                <a:solidFill>
+                  <a:srgbClr val="003B4F"/>
+                </a:solidFill>
+                <a:latin typeface="Courier"/>
+              </a:rPr>
+              <a:t>(points)</a:t>
+            </a:r>
+            <a:br/>
+            <a:r>
+              <a:rPr>
+                <a:solidFill>
+                  <a:srgbClr val="003B4F"/>
+                </a:solidFill>
+                <a:latin typeface="Courier"/>
+              </a:rPr>
+              <a:t>        </a:t>
+            </a:r>
+            <a:r>
+              <a:rPr>
+                <a:solidFill>
+                  <a:srgbClr val="4758AB"/>
+                </a:solidFill>
+                <a:latin typeface="Courier"/>
+              </a:rPr>
+              <a:t>scatter!</a:t>
+            </a:r>
+            <a:r>
+              <a:rPr>
+                <a:solidFill>
+                  <a:srgbClr val="003B4F"/>
+                </a:solidFill>
+                <a:latin typeface="Courier"/>
+              </a:rPr>
+              <a:t>(ax, [x], [y]; markersize</a:t>
+            </a:r>
+            <a:r>
+              <a:rPr>
+                <a:solidFill>
+                  <a:srgbClr val="5E5E5E"/>
+                </a:solidFill>
+                <a:latin typeface="Courier"/>
+              </a:rPr>
+              <a:t>=</a:t>
+            </a:r>
+            <a:r>
+              <a:rPr>
+                <a:solidFill>
+                  <a:srgbClr val="AD0000"/>
+                </a:solidFill>
+                <a:latin typeface="Courier"/>
+              </a:rPr>
+              <a:t>22</a:t>
+            </a:r>
+            <a:r>
+              <a:rPr>
+                <a:solidFill>
+                  <a:srgbClr val="003B4F"/>
+                </a:solidFill>
+                <a:latin typeface="Courier"/>
+              </a:rPr>
+              <a:t>, color</a:t>
+            </a:r>
+            <a:r>
+              <a:rPr>
+                <a:solidFill>
+                  <a:srgbClr val="5E5E5E"/>
+                </a:solidFill>
+                <a:latin typeface="Courier"/>
+              </a:rPr>
+              <a:t>=</a:t>
+            </a:r>
+            <a:r>
+              <a:rPr>
+                <a:solidFill>
+                  <a:srgbClr val="003B4F"/>
+                </a:solidFill>
+                <a:latin typeface="Courier"/>
+              </a:rPr>
+              <a:t>colors[i])</a:t>
+            </a:r>
+            <a:br/>
+            <a:r>
+              <a:rPr>
+                <a:solidFill>
+                  <a:srgbClr val="003B4F"/>
+                </a:solidFill>
+                <a:latin typeface="Courier"/>
+              </a:rPr>
+              <a:t>        </a:t>
+            </a:r>
+            <a:r>
+              <a:rPr>
+                <a:solidFill>
+                  <a:srgbClr val="4758AB"/>
+                </a:solidFill>
+                <a:latin typeface="Courier"/>
+              </a:rPr>
+              <a:t>text!</a:t>
+            </a:r>
+            <a:r>
+              <a:rPr>
+                <a:solidFill>
+                  <a:srgbClr val="003B4F"/>
+                </a:solidFill>
+                <a:latin typeface="Courier"/>
+              </a:rPr>
+              <a:t>(ax, x </a:t>
+            </a:r>
+            <a:r>
+              <a:rPr>
+                <a:solidFill>
+                  <a:srgbClr val="5E5E5E"/>
+                </a:solidFill>
+                <a:latin typeface="Courier"/>
+              </a:rPr>
+              <a:t>-</a:t>
+            </a:r>
+            <a:r>
+              <a:rPr>
+                <a:solidFill>
+                  <a:srgbClr val="003B4F"/>
+                </a:solidFill>
+                <a:latin typeface="Courier"/>
+              </a:rPr>
+              <a:t> </a:t>
+            </a:r>
+            <a:r>
+              <a:rPr>
+                <a:solidFill>
+                  <a:srgbClr val="AD0000"/>
+                </a:solidFill>
+                <a:latin typeface="Courier"/>
+              </a:rPr>
+              <a:t>0.2</a:t>
+            </a:r>
+            <a:r>
+              <a:rPr>
+                <a:solidFill>
+                  <a:srgbClr val="003B4F"/>
+                </a:solidFill>
+                <a:latin typeface="Courier"/>
+              </a:rPr>
+              <a:t>, y </a:t>
+            </a:r>
+            <a:r>
+              <a:rPr>
+                <a:solidFill>
+                  <a:srgbClr val="5E5E5E"/>
+                </a:solidFill>
+                <a:latin typeface="Courier"/>
+              </a:rPr>
+              <a:t>+</a:t>
+            </a:r>
+            <a:r>
+              <a:rPr>
+                <a:solidFill>
+                  <a:srgbClr val="003B4F"/>
+                </a:solidFill>
+                <a:latin typeface="Courier"/>
+              </a:rPr>
+              <a:t> </a:t>
+            </a:r>
+            <a:r>
+              <a:rPr>
+                <a:solidFill>
+                  <a:srgbClr val="AD0000"/>
+                </a:solidFill>
+                <a:latin typeface="Courier"/>
+              </a:rPr>
+              <a:t>0.25</a:t>
+            </a:r>
+            <a:r>
+              <a:rPr>
+                <a:solidFill>
+                  <a:srgbClr val="003B4F"/>
+                </a:solidFill>
+                <a:latin typeface="Courier"/>
+              </a:rPr>
+              <a:t>; text</a:t>
+            </a:r>
+            <a:r>
+              <a:rPr>
+                <a:solidFill>
+                  <a:srgbClr val="5E5E5E"/>
+                </a:solidFill>
+                <a:latin typeface="Courier"/>
+              </a:rPr>
+              <a:t>=</a:t>
+            </a:r>
+            <a:r>
+              <a:rPr>
+                <a:solidFill>
+                  <a:srgbClr val="003B4F"/>
+                </a:solidFill>
+                <a:latin typeface="Courier"/>
+              </a:rPr>
+              <a:t>labels[i], fontsize</a:t>
+            </a:r>
+            <a:r>
+              <a:rPr>
+                <a:solidFill>
+                  <a:srgbClr val="5E5E5E"/>
+                </a:solidFill>
+                <a:latin typeface="Courier"/>
+              </a:rPr>
+              <a:t>=</a:t>
+            </a:r>
+            <a:r>
+              <a:rPr>
+                <a:solidFill>
+                  <a:srgbClr val="AD0000"/>
+                </a:solidFill>
+                <a:latin typeface="Courier"/>
+              </a:rPr>
+              <a:t>18</a:t>
+            </a:r>
+            <a:r>
+              <a:rPr>
+                <a:solidFill>
+                  <a:srgbClr val="003B4F"/>
+                </a:solidFill>
+                <a:latin typeface="Courier"/>
+              </a:rPr>
+              <a:t>, font</a:t>
+            </a:r>
+            <a:r>
+              <a:rPr>
+                <a:solidFill>
+                  <a:srgbClr val="5E5E5E"/>
+                </a:solidFill>
+                <a:latin typeface="Courier"/>
+              </a:rPr>
+              <a:t>=:</a:t>
+            </a:r>
+            <a:r>
+              <a:rPr>
+                <a:solidFill>
+                  <a:srgbClr val="003B4F"/>
+                </a:solidFill>
+                <a:latin typeface="Courier"/>
+              </a:rPr>
+              <a:t>bold)</a:t>
+            </a:r>
+            <a:br/>
+            <a:r>
+              <a:rPr>
+                <a:solidFill>
+                  <a:srgbClr val="003B4F"/>
+                </a:solidFill>
+                <a:latin typeface="Courier"/>
+              </a:rPr>
+              <a:t>    </a:t>
+            </a:r>
+            <a:r>
+              <a:rPr b="1">
+                <a:solidFill>
+                  <a:srgbClr val="003B4F"/>
+                </a:solidFill>
+                <a:latin typeface="Courier"/>
+              </a:rPr>
+              <a:t>end</a:t>
+            </a:r>
+            <a:br/>
+            <a:br/>
+            <a:r>
+              <a:rPr>
+                <a:solidFill>
+                  <a:srgbClr val="003B4F"/>
+                </a:solidFill>
+                <a:latin typeface="Courier"/>
+              </a:rPr>
+              <a:t>    </a:t>
+            </a:r>
+            <a:r>
+              <a:rPr>
+                <a:solidFill>
+                  <a:srgbClr val="5E5E5E"/>
+                </a:solidFill>
+                <a:latin typeface="Courier"/>
+              </a:rPr>
+              <a:t># Arrow from 1 to 4 showing dominance</a:t>
+            </a:r>
+            <a:br/>
+            <a:r>
+              <a:rPr>
+                <a:solidFill>
+                  <a:srgbClr val="003B4F"/>
+                </a:solidFill>
+                <a:latin typeface="Courier"/>
+              </a:rPr>
+              <a:t>    </a:t>
+            </a:r>
+            <a:r>
+              <a:rPr>
+                <a:solidFill>
+                  <a:srgbClr val="4758AB"/>
+                </a:solidFill>
+                <a:latin typeface="Courier"/>
+              </a:rPr>
+              <a:t>arrows!</a:t>
+            </a:r>
+            <a:r>
+              <a:rPr>
+                <a:solidFill>
+                  <a:srgbClr val="003B4F"/>
+                </a:solidFill>
+                <a:latin typeface="Courier"/>
+              </a:rPr>
+              <a:t>(ax, [</a:t>
+            </a:r>
+            <a:r>
+              <a:rPr>
+                <a:solidFill>
+                  <a:srgbClr val="AD0000"/>
+                </a:solidFill>
+                <a:latin typeface="Courier"/>
+              </a:rPr>
+              <a:t>2.15</a:t>
+            </a:r>
+            <a:r>
+              <a:rPr>
+                <a:solidFill>
+                  <a:srgbClr val="003B4F"/>
+                </a:solidFill>
+                <a:latin typeface="Courier"/>
+              </a:rPr>
+              <a:t>], [</a:t>
+            </a:r>
+            <a:r>
+              <a:rPr>
+                <a:solidFill>
+                  <a:srgbClr val="AD0000"/>
+                </a:solidFill>
+                <a:latin typeface="Courier"/>
+              </a:rPr>
+              <a:t>2.15</a:t>
+            </a:r>
+            <a:r>
+              <a:rPr>
+                <a:solidFill>
+                  <a:srgbClr val="003B4F"/>
+                </a:solidFill>
+                <a:latin typeface="Courier"/>
+              </a:rPr>
+              <a:t>], [</a:t>
+            </a:r>
+            <a:r>
+              <a:rPr>
+                <a:solidFill>
+                  <a:srgbClr val="AD0000"/>
+                </a:solidFill>
+                <a:latin typeface="Courier"/>
+              </a:rPr>
+              <a:t>0.65</a:t>
+            </a:r>
+            <a:r>
+              <a:rPr>
+                <a:solidFill>
+                  <a:srgbClr val="003B4F"/>
+                </a:solidFill>
+                <a:latin typeface="Courier"/>
+              </a:rPr>
+              <a:t>], [</a:t>
+            </a:r>
+            <a:r>
+              <a:rPr>
+                <a:solidFill>
+                  <a:srgbClr val="AD0000"/>
+                </a:solidFill>
+                <a:latin typeface="Courier"/>
+              </a:rPr>
+              <a:t>0.65</a:t>
+            </a:r>
+            <a:r>
+              <a:rPr>
+                <a:solidFill>
+                  <a:srgbClr val="003B4F"/>
+                </a:solidFill>
+                <a:latin typeface="Courier"/>
+              </a:rPr>
+              <a:t>]; linewidth</a:t>
+            </a:r>
+            <a:r>
+              <a:rPr>
+                <a:solidFill>
+                  <a:srgbClr val="5E5E5E"/>
+                </a:solidFill>
+                <a:latin typeface="Courier"/>
+              </a:rPr>
+              <a:t>=</a:t>
+            </a:r>
+            <a:r>
+              <a:rPr>
+                <a:solidFill>
+                  <a:srgbClr val="AD0000"/>
+                </a:solidFill>
+                <a:latin typeface="Courier"/>
+              </a:rPr>
+              <a:t>1.5</a:t>
+            </a:r>
+            <a:r>
+              <a:rPr>
+                <a:solidFill>
+                  <a:srgbClr val="003B4F"/>
+                </a:solidFill>
+                <a:latin typeface="Courier"/>
+              </a:rPr>
+              <a:t>, color</a:t>
+            </a:r>
+            <a:r>
+              <a:rPr>
+                <a:solidFill>
+                  <a:srgbClr val="5E5E5E"/>
+                </a:solidFill>
+                <a:latin typeface="Courier"/>
+              </a:rPr>
+              <a:t>=:</a:t>
+            </a:r>
+            <a:r>
+              <a:rPr>
+                <a:solidFill>
+                  <a:srgbClr val="003B4F"/>
+                </a:solidFill>
+                <a:latin typeface="Courier"/>
+              </a:rPr>
+              <a:t>gray50)</a:t>
+            </a:r>
+            <a:br/>
+            <a:r>
+              <a:rPr>
+                <a:solidFill>
+                  <a:srgbClr val="003B4F"/>
+                </a:solidFill>
+                <a:latin typeface="Courier"/>
+              </a:rPr>
+              <a:t>    </a:t>
+            </a:r>
+            <a:r>
+              <a:rPr>
+                <a:solidFill>
+                  <a:srgbClr val="4758AB"/>
+                </a:solidFill>
+                <a:latin typeface="Courier"/>
+              </a:rPr>
+              <a:t>text!</a:t>
+            </a:r>
+            <a:r>
+              <a:rPr>
+                <a:solidFill>
+                  <a:srgbClr val="003B4F"/>
+                </a:solidFill>
+                <a:latin typeface="Courier"/>
+              </a:rPr>
+              <a:t>(ax, </a:t>
+            </a:r>
+            <a:r>
+              <a:rPr>
+                <a:solidFill>
+                  <a:srgbClr val="AD0000"/>
+                </a:solidFill>
+                <a:latin typeface="Courier"/>
+              </a:rPr>
+              <a:t>2.7</a:t>
+            </a:r>
+            <a:r>
+              <a:rPr>
+                <a:solidFill>
+                  <a:srgbClr val="003B4F"/>
+                </a:solidFill>
+                <a:latin typeface="Courier"/>
+              </a:rPr>
+              <a:t>, </a:t>
+            </a:r>
+            <a:r>
+              <a:rPr>
+                <a:solidFill>
+                  <a:srgbClr val="AD0000"/>
+                </a:solidFill>
+                <a:latin typeface="Courier"/>
+              </a:rPr>
+              <a:t>2.85</a:t>
+            </a:r>
+            <a:r>
+              <a:rPr>
+                <a:solidFill>
+                  <a:srgbClr val="003B4F"/>
+                </a:solidFill>
+                <a:latin typeface="Courier"/>
+              </a:rPr>
+              <a:t>; text</a:t>
+            </a:r>
+            <a:r>
+              <a:rPr>
+                <a:solidFill>
+                  <a:srgbClr val="5E5E5E"/>
+                </a:solidFill>
+                <a:latin typeface="Courier"/>
+              </a:rPr>
+              <a:t>=</a:t>
+            </a:r>
+            <a:r>
+              <a:rPr>
+                <a:solidFill>
+                  <a:srgbClr val="20794D"/>
+                </a:solidFill>
+                <a:latin typeface="Courier"/>
+              </a:rPr>
+              <a:t>"dominates"</a:t>
+            </a:r>
+            <a:r>
+              <a:rPr>
+                <a:solidFill>
+                  <a:srgbClr val="003B4F"/>
+                </a:solidFill>
+                <a:latin typeface="Courier"/>
+              </a:rPr>
+              <a:t>, fontsize</a:t>
+            </a:r>
+            <a:r>
+              <a:rPr>
+                <a:solidFill>
+                  <a:srgbClr val="5E5E5E"/>
+                </a:solidFill>
+                <a:latin typeface="Courier"/>
+              </a:rPr>
+              <a:t>=</a:t>
+            </a:r>
+            <a:r>
+              <a:rPr>
+                <a:solidFill>
+                  <a:srgbClr val="AD0000"/>
+                </a:solidFill>
+                <a:latin typeface="Courier"/>
+              </a:rPr>
+              <a:t>12</a:t>
+            </a:r>
+            <a:r>
+              <a:rPr>
+                <a:solidFill>
+                  <a:srgbClr val="003B4F"/>
+                </a:solidFill>
+                <a:latin typeface="Courier"/>
+              </a:rPr>
+              <a:t>, color</a:t>
+            </a:r>
+            <a:r>
+              <a:rPr>
+                <a:solidFill>
+                  <a:srgbClr val="5E5E5E"/>
+                </a:solidFill>
+                <a:latin typeface="Courier"/>
+              </a:rPr>
+              <a:t>=:</a:t>
+            </a:r>
+            <a:r>
+              <a:rPr>
+                <a:solidFill>
+                  <a:srgbClr val="003B4F"/>
+                </a:solidFill>
+                <a:latin typeface="Courier"/>
+              </a:rPr>
+              <a:t>gray50, rotation</a:t>
+            </a:r>
+            <a:r>
+              <a:rPr>
+                <a:solidFill>
+                  <a:srgbClr val="5E5E5E"/>
+                </a:solidFill>
+                <a:latin typeface="Courier"/>
+              </a:rPr>
+              <a:t>=</a:t>
+            </a:r>
+            <a:r>
+              <a:rPr>
+                <a:solidFill>
+                  <a:srgbClr val="8F5902"/>
+                </a:solidFill>
+                <a:latin typeface="Courier"/>
+              </a:rPr>
+              <a:t>π</a:t>
+            </a:r>
+            <a:r>
+              <a:rPr>
+                <a:solidFill>
+                  <a:srgbClr val="003B4F"/>
+                </a:solidFill>
+                <a:latin typeface="Courier"/>
+              </a:rPr>
+              <a:t> </a:t>
+            </a:r>
+            <a:r>
+              <a:rPr>
+                <a:solidFill>
+                  <a:srgbClr val="5E5E5E"/>
+                </a:solidFill>
+                <a:latin typeface="Courier"/>
+              </a:rPr>
+              <a:t>/</a:t>
+            </a:r>
+            <a:r>
+              <a:rPr>
+                <a:solidFill>
+                  <a:srgbClr val="003B4F"/>
+                </a:solidFill>
+                <a:latin typeface="Courier"/>
+              </a:rPr>
+              <a:t> </a:t>
+            </a:r>
+            <a:r>
+              <a:rPr>
+                <a:solidFill>
+                  <a:srgbClr val="AD0000"/>
+                </a:solidFill>
+                <a:latin typeface="Courier"/>
+              </a:rPr>
+              <a:t>4</a:t>
+            </a:r>
+            <a:r>
+              <a:rPr>
+                <a:solidFill>
+                  <a:srgbClr val="003B4F"/>
+                </a:solidFill>
+                <a:latin typeface="Courier"/>
+              </a:rPr>
+              <a:t>)</a:t>
+            </a:r>
+            <a:br/>
+            <a:br/>
+            <a:r>
+              <a:rPr>
+                <a:solidFill>
+                  <a:srgbClr val="003B4F"/>
+                </a:solidFill>
+                <a:latin typeface="Courier"/>
+              </a:rPr>
+              <a:t>    fig</a:t>
+            </a:r>
+            <a:br/>
+            <a:r>
+              <a:rPr b="1">
+                <a:solidFill>
+                  <a:srgbClr val="003B4F"/>
+                </a:solidFill>
+                <a:latin typeface="Courier"/>
+              </a:rPr>
+              <a:t>end</a:t>
+            </a:r>
+          </a:p>
+          <a:p>
+            <a:pPr lvl="0" indent="0">
+              <a:buNone/>
+            </a:pPr>
+            <a:r>
+              <a:rPr>
+                <a:latin typeface="Courier"/>
+              </a:rPr>
+              <a:t>┌ Warning: `arrows` are deprecated in favor of `arrows2d` and `arrows3d`.
+└ @ Makie ~/.julia/packages/Makie/kJl0u/src/basic_recipes/arrows.jl:166</a:t>
+            </a:r>
+          </a:p>
+        </p:txBody>
+      </p:sp>
+      <p:pic>
+        <p:nvPicPr>
+          <p:cNvPr descr="index_files/figure-pptx/cell-3-output-2.png" id="0" name="Picture 1"/>
+          <p:cNvPicPr>
+            <a:picLocks noGrp="1" noChangeAspect="1"/>
+          </p:cNvPicPr>
+          <p:nvPr/>
+        </p:nvPicPr>
+        <p:blipFill>
+          <a:blip r:embed="rId3"/>
+          <a:stretch>
+            <a:fillRect/>
+          </a:stretch>
+        </p:blipFill>
+        <p:spPr bwMode="auto">
+          <a:xfrm>
+            <a:off x="3975100" y="203200"/>
+            <a:ext cx="4305300" cy="3873500"/>
+          </a:xfrm>
+          <a:prstGeom prst="rect">
+            <a:avLst/>
+          </a:prstGeom>
+          <a:noFill/>
+          <a:ln w="9525">
+            <a:noFill/>
+            <a:headEnd/>
+            <a:tailEnd/>
+          </a:ln>
+        </p:spPr>
+      </p:pic>
+      <p:sp>
+        <p:nvSpPr>
+          <p:cNvPr id="1" name="TextBox 3"/>
+          <p:cNvSpPr txBox="1"/>
+          <p:nvPr/>
+        </p:nvSpPr>
+        <p:spPr>
+          <a:xfrm>
+            <a:off x="3568700" y="4076700"/>
+            <a:ext cx="5105400" cy="508000"/>
+          </a:xfrm>
+          <a:prstGeom prst="rect">
+            <a:avLst/>
+          </a:prstGeom>
+          <a:noFill/>
+        </p:spPr>
+        <p:txBody>
+          <a:bodyPr/>
+          <a:lstStyle/>
+          <a:p>
+            <a:pPr lvl="0" indent="0" marL="0" algn="ctr">
+              <a:buNone/>
+            </a:pPr>
+            <a:r>
+              <a:rPr/>
+              <a:t>Five candidate solutions. Point 4 (red) is dominated by point 1: worse on both objectives. Points 1, 2, 3, 5 are mutually non-dominated.</a:t>
+            </a:r>
+          </a:p>
+        </p:txBody>
+      </p:sp>
+      <p:sp>
+        <p:nvSpPr>
+          <p:cNvPr id="3" name="Content Placeholder 2"/>
+          <p:cNvSpPr>
+            <a:spLocks noGrp="1"/>
+          </p:cNvSpPr>
+          <p:nvPr>
+            <p:ph idx="1"/>
+          </p:nvPr>
+        </p:nvSpPr>
+        <p:spPr/>
+        <p:txBody>
+          <a:bodyPr/>
+          <a:lstStyle/>
+          <a:p>
+            <a:pPr lvl="0" indent="0" marL="0">
+              <a:spcBef>
+                <a:spcPts val="3000"/>
+              </a:spcBef>
+              <a:buNone/>
+            </a:pPr>
+            <a:r>
+              <a:rPr b="1"/>
+              <a:t>The Pareto Front</a:t>
+            </a:r>
+          </a:p>
+        </p:txBody>
+      </p:sp>
+    </p:spTree>
+  </p:cSld>
+</p:sld>
+</file>
+
+<file path=ppt/slides/slide6.xml><?xml version="1.0" encoding="utf-8"?>
+<p:sld xmlns:a="http://schemas.openxmlformats.org/drawingml/2006/main" xmlns:r="http://schemas.openxmlformats.org/officeDocument/2006/relationships" xmlns:p="http://schemas.openxmlformats.org/presentationml/2006/main">
+  <p:cSld>
+    <p:spTree>
+      <p:nvGrpSpPr>
+        <p:cNvPr id="1" name=""/>
+        <p:cNvGrpSpPr/>
+        <p:nvPr/>
+      </p:nvGrpSpPr>
+      <p:grpSpPr>
+        <a:xfrm>
+          <a:off x="0" y="0"/>
+          <a:ext cx="0" cy="0"/>
+          <a:chOff x="0" y="0"/>
+          <a:chExt cx="0" cy="0"/>
+        </a:xfrm>
+      </p:grpSpPr>
+      <p:sp>
+        <p:nvSpPr>
+          <p:cNvPr id="3" name="Content Placeholder 2"/>
+          <p:cNvSpPr>
+            <a:spLocks noGrp="1"/>
+          </p:cNvSpPr>
+          <p:nvPr>
+            <p:ph idx="1" sz="half"/>
+          </p:nvPr>
+        </p:nvSpPr>
+        <p:spPr/>
+        <p:txBody>
+          <a:bodyPr/>
+          <a:lstStyle/>
+          <a:p>
+            <a:pPr lvl="0" indent="0" marL="0">
+              <a:buNone/>
+            </a:pPr>
+            <a:r>
+              <a:rPr/>
+              <a:t>The </a:t>
+            </a:r>
+            <a:r>
+              <a:rPr b="1"/>
+              <a:t>Pareto front</a:t>
+            </a:r>
+            <a:r>
+              <a:rPr/>
+              <a:t> is the set of all non-dominated solutions.</a:t>
+            </a:r>
+          </a:p>
+          <a:p>
+            <a:pPr lvl="0"/>
+            <a:r>
+              <a:rPr/>
+              <a:t>No solution on the front can be improved on one objective without worsening another</a:t>
+            </a:r>
+          </a:p>
+          <a:p>
+            <a:pPr lvl="0"/>
+            <a:r>
+              <a:rPr/>
+              <a:t>Reveals </a:t>
+            </a:r>
+            <a:r>
+              <a:rPr b="1"/>
+              <a:t>trade-offs</a:t>
+            </a:r>
+            <a:r>
+              <a:rPr/>
+              <a:t> without requiring weights</a:t>
+            </a:r>
+          </a:p>
+          <a:p>
+            <a:pPr lvl="0"/>
+            <a:r>
+              <a:rPr/>
+              <a:t>The “efficient frontier” of feasible performance</a:t>
+            </a:r>
+          </a:p>
+          <a:p>
+            <a:pPr lvl="0" indent="0" marL="0">
+              <a:buNone/>
+            </a:pPr>
+            <a:r>
+              <a:rPr/>
+              <a:t>. . .</a:t>
+            </a:r>
+          </a:p>
+          <a:p>
+            <a:pPr lvl="0" indent="0" marL="0">
+              <a:buNone/>
+            </a:pPr>
+            <a:r>
+              <a:rPr/>
+              <a:t>The Pareto front identifies </a:t>
+            </a:r>
+            <a:r>
+              <a:rPr b="1"/>
+              <a:t>which solutions are worth considering</a:t>
+            </a:r>
+            <a:r>
+              <a:rPr/>
+              <a:t>. Choosing among them is a separate decision that requires values.</a:t>
+            </a:r>
+          </a:p>
+        </p:txBody>
+      </p:sp>
+      <p:pic>
+        <p:nvPicPr>
+          <p:cNvPr descr="smith_pareto_2022_fig1.png" id="0" name="Picture 1"/>
+          <p:cNvPicPr>
+            <a:picLocks noGrp="1" noChangeAspect="1"/>
+          </p:cNvPicPr>
+          <p:nvPr/>
+        </p:nvPicPr>
+        <p:blipFill>
+          <a:blip r:embed="rId3"/>
+          <a:stretch>
+            <a:fillRect/>
+          </a:stretch>
+        </p:blipFill>
+        <p:spPr bwMode="auto">
+          <a:xfrm>
+            <a:off x="4648200" y="1625600"/>
+            <a:ext cx="4038600" cy="2019300"/>
+          </a:xfrm>
+          <a:prstGeom prst="rect">
+            <a:avLst/>
+          </a:prstGeom>
+          <a:noFill/>
+          <a:ln w="9525">
+            <a:noFill/>
+            <a:headEnd/>
+            <a:tailEnd/>
+          </a:ln>
+        </p:spPr>
+      </p:pic>
+      <p:sp>
+        <p:nvSpPr>
+          <p:cNvPr id="1" name="TextBox 3"/>
+          <p:cNvSpPr txBox="1"/>
+          <p:nvPr/>
+        </p:nvSpPr>
+        <p:spPr>
+          <a:xfrm>
+            <a:off x="4648200" y="4076700"/>
+            <a:ext cx="4038600" cy="508000"/>
+          </a:xfrm>
+          <a:prstGeom prst="rect">
+            <a:avLst/>
+          </a:prstGeom>
+          <a:noFill/>
+        </p:spPr>
+        <p:txBody>
+          <a:bodyPr/>
+          <a:lstStyle/>
+          <a:p>
+            <a:pPr lvl="0" indent="0" marL="0" algn="ctr">
+              <a:buNone/>
+            </a:pPr>
+            <a:r>
+              <a:rPr/>
+              <a:t>Figure 1: A Pareto front in two objectives. Source: Smith et al. (2022)</a:t>
+            </a:r>
+          </a:p>
+        </p:txBody>
+      </p:sp>
+    </p:spTree>
+  </p:cSld>
+  <p:timing>
+    <p:tnLst>
+      <p:par>
+        <p:cTn id="1" dur="indefinite" restart="never" nodeType="tmRoot">
+          <p:childTnLst>
+            <p:seq concurrent="1" nextAc="seek">
+              <p:cTn id="2" dur="indefinite" nodeType="mainSeq">
+                <p:childTnLst>
+                  <p:par>
+                    <p:cTn id="3" fill="hold">
+                      <p:stCondLst>
+                        <p:cond delay="indefinite"/>
+                      </p:stCondLst>
+                      <p:childTnLst>
+                        <p:par>
+                          <p:cTn id="4" fill="hold">
+                            <p:stCondLst>
+                              <p:cond delay="0"/>
+                            </p:stCondLst>
+                            <p:childTnLst>
+                              <p:par>
+                                <p:cTn id="5" presetID="1" presetClass="entr" presetSubtype="0" fill="hold" grpId="0" nodeType="clickEffect">
+                                  <p:stCondLst>
+                                    <p:cond delay="0"/>
+                                  </p:stCondLst>
+                                  <p:childTnLst>
+                                    <p:set>
+                                      <p:cBhvr>
+                                        <p:cTn id="6" dur="1" fill="hold">
+                                          <p:stCondLst>
+                                            <p:cond delay="0"/>
+                                          </p:stCondLst>
+                                        </p:cTn>
+                                        <p:tgtEl>
+                                          <p:spTgt spid="3">
+                                            <p:txEl>
+                                              <p:pRg st="1" end="1"/>
+                                            </p:txEl>
+                                          </p:spTgt>
+                                        </p:tgtEl>
+                                        <p:attrNameLst>
+                                          <p:attrName>style.visibility</p:attrName>
+                                        </p:attrNameLst>
+                                      </p:cBhvr>
+                                      <p:to>
+                                        <p:strVal val="visible"/>
+                                      </p:to>
+                                    </p:set>
+                                  </p:childTnLst>
+                                </p:cTn>
+                              </p:par>
+                            </p:childTnLst>
+                          </p:cTn>
+                        </p:par>
+                      </p:childTnLst>
+                    </p:cTn>
+                  </p:par>
+                  <p:par>
+                    <p:cTn id="7" fill="hold">
+                      <p:stCondLst>
+                        <p:cond delay="indefinite"/>
+                      </p:stCondLst>
+                      <p:childTnLst>
+                        <p:par>
+                          <p:cTn id="8" fill="hold">
+                            <p:stCondLst>
+                              <p:cond delay="0"/>
+                            </p:stCondLst>
+                            <p:childTnLst>
+                              <p:par>
+                                <p:cTn id="9" presetID="1" presetClass="entr" presetSubtype="0" fill="hold" grpId="0" nodeType="clickEffect">
+                                  <p:stCondLst>
+                                    <p:cond delay="0"/>
+                                  </p:stCondLst>
+                                  <p:childTnLst>
+                                    <p:set>
+                                      <p:cBhvr>
+                                        <p:cTn id="10" dur="1" fill="hold">
+                                          <p:stCondLst>
+                                            <p:cond delay="0"/>
+                                          </p:stCondLst>
+                                        </p:cTn>
+                                        <p:tgtEl>
+                                          <p:spTgt spid="3">
+                                            <p:txEl>
+                                              <p:pRg st="2" end="2"/>
+                                            </p:txEl>
+                                          </p:spTgt>
+                                        </p:tgtEl>
+                                        <p:attrNameLst>
+                                          <p:attrName>style.visibility</p:attrName>
+                                        </p:attrNameLst>
+                                      </p:cBhvr>
+                                      <p:to>
+                                        <p:strVal val="visible"/>
+                                      </p:to>
+                                    </p:set>
+                                  </p:childTnLst>
+                                </p:cTn>
+                              </p:par>
+                            </p:childTnLst>
+                          </p:cTn>
+                        </p:par>
+                      </p:childTnLst>
+                    </p:cTn>
+                  </p:par>
+                  <p:par>
+                    <p:cTn id="11" fill="hold">
+                      <p:stCondLst>
+                        <p:cond delay="indefinite"/>
+                      </p:stCondLst>
+                      <p:childTnLst>
+                        <p:par>
+                          <p:cTn id="12" fill="hold">
+                            <p:stCondLst>
+                              <p:cond delay="0"/>
+                            </p:stCondLst>
+                            <p:childTnLst>
+                              <p:par>
+                                <p:cTn id="13" presetID="1" presetClass="entr" presetSubtype="0" fill="hold" grpId="0" nodeType="clickEffect">
+                                  <p:stCondLst>
+                                    <p:cond delay="0"/>
+                                  </p:stCondLst>
+                                  <p:childTnLst>
+                                    <p:set>
+                                      <p:cBhvr>
+                                        <p:cTn id="14" dur="1" fill="hold">
+                                          <p:stCondLst>
+                                            <p:cond delay="0"/>
+                                          </p:stCondLst>
+                                        </p:cTn>
+                                        <p:tgtEl>
+                                          <p:spTgt spid="3">
+                                            <p:txEl>
+                                              <p:pRg st="3" end="3"/>
+                                            </p:txEl>
+                                          </p:spTgt>
+                                        </p:tgtEl>
+                                        <p:attrNameLst>
+                                          <p:attrName>style.visibility</p:attrName>
+                                        </p:attrNameLst>
+                                      </p:cBhvr>
+                                      <p:to>
+                                        <p:strVal val="visible"/>
+                                      </p:to>
+                                    </p:set>
+                                  </p:childTnLst>
+                                </p:cTn>
+                              </p:par>
+                            </p:childTnLst>
+                          </p:cTn>
+                        </p:par>
+                      </p:childTnLst>
+                    </p:cTn>
+                  </p:par>
+                </p:childTnLst>
+              </p:cTn>
+              <p:prevCondLst>
+                <p:cond evt="onPrev" delay="0">
+                  <p:tgtEl>
+                    <p:sldTgt/>
+                  </p:tgtEl>
+                </p:cond>
+              </p:prevCondLst>
+              <p:nextCondLst>
+                <p:cond evt="onNext" delay="0">
+                  <p:tgtEl>
+                    <p:sldTgt/>
+                  </p:tgtEl>
+                </p:cond>
+              </p:nextCondLst>
+            </p:seq>
+          </p:childTnLst>
+        </p:cTn>
+      </p:par>
+    </p:tnLst>
+    <p:bldLst>
+      <p:bldP spid="3" grpId="0" uiExpand="1" build="p"/>
+    </p:bldLst>
+  </p:timing>
+</p:sld>
+</file>
+
+<file path=ppt/slides/slide7.xml><?xml version="1.0" encoding="utf-8"?>
+<p:sld xmlns:a="http://schemas.openxmlformats.org/drawingml/2006/main" xmlns:r="http://schemas.openxmlformats.org/officeDocument/2006/relationships" xmlns:p="http://schemas.openxmlformats.org/presentationml/2006/main">
+  <p:cSld>
+    <p:spTree>
+      <p:nvGrpSpPr>
+        <p:cNvPr id="1" name=""/>
+        <p:cNvGrpSpPr/>
+        <p:nvPr/>
+      </p:nvGrpSpPr>
+      <p:grpSpPr>
+        <a:xfrm>
+          <a:off x="0" y="0"/>
+          <a:ext cx="0" cy="0"/>
+          <a:chOff x="0" y="0"/>
+          <a:chExt cx="0" cy="0"/>
+        </a:xfrm>
+      </p:grpSpPr>
+      <p:sp>
+        <p:nvSpPr>
+          <p:cNvPr id="2" name="Title 1"/>
+          <p:cNvSpPr>
+            <a:spLocks noGrp="1"/>
+          </p:cNvSpPr>
+          <p:nvPr>
+            <p:ph type="title"/>
+          </p:nvPr>
+        </p:nvSpPr>
+        <p:spPr/>
+        <p:txBody>
+          <a:bodyPr/>
+          <a:lstStyle/>
+          <a:p>
+            <a:pPr lvl="0" indent="0" marL="0">
+              <a:buNone/>
+            </a:pPr>
+            <a:r>
+              <a:rPr/>
+              <a:t>Weighted Sum and Its Limits</a:t>
+            </a:r>
+          </a:p>
+        </p:txBody>
+      </p:sp>
+      <mc:AlternateContent xmlns:mc="http://schemas.openxmlformats.org/markup-compatibility/2006">
+        <mc:Choice xmlns:a14="http://schemas.microsoft.com/office/drawing/2010/main" Requires="a14">
+          <p:sp>
+            <p:nvSpPr>
+              <p:cNvPr id="3" name="Content Placeholder 2"/>
+              <p:cNvSpPr>
+                <a:spLocks noGrp="1"/>
+              </p:cNvSpPr>
+              <p:nvPr>
+                <p:ph idx="1"/>
+              </p:nvPr>
+            </p:nvSpPr>
+            <p:spPr/>
+            <p:txBody>
+              <a:bodyPr/>
+              <a:lstStyle/>
+              <a:p>
+                <a:pPr lvl="0" indent="0" marL="0">
+                  <a:spcBef>
+                    <a:spcPts val="3000"/>
+                  </a:spcBef>
+                  <a:buNone/>
+                </a:pPr>
+                <a:r>
+                  <a:rPr b="1"/>
+                  <a:t>Can Weighted Sum Find the Pareto Front?</a:t>
+                </a:r>
+              </a:p>
+              <a:p>
+                <a:pPr lvl="0" indent="0" marL="0">
+                  <a:buNone/>
+                </a:pPr>
+                <a:r>
+                  <a:rPr/>
+                  <a:t>We can </a:t>
+                </a:r>
+                <a:r>
+                  <a:rPr i="1"/>
+                  <a:t>scalarize</a:t>
+                </a:r>
+                <a:r>
+                  <a:rPr/>
+                  <a:t> the problem:</a:t>
+                </a:r>
+              </a:p>
+              <a:p>
+                <a:pPr lvl="0" indent="0" marL="0">
+                  <a:buNone/>
+                </a:pPr>
+                <a14:m>
+                  <m:oMathPara xmlns:m="http://schemas.openxmlformats.org/officeDocument/2006/math">
+                    <m:oMathParaPr>
+                      <m:jc m:val="center"/>
+                    </m:oMathParaPr>
+                    <m:oMath>
+                      <m:r>
+                        <m:rPr>
+                          <m:sty m:val="p"/>
+                        </m:rPr>
+                        <m:t>min</m:t>
+                      </m:r>
+                      <m:r>
+                        <m:t>F</m:t>
+                      </m:r>
+                      <m:d>
+                        <m:dPr>
+                          <m:begChr m:val="("/>
+                          <m:sepChr m:val=""/>
+                          <m:endChr m:val=")"/>
+                          <m:grow/>
+                        </m:dPr>
+                        <m:e>
+                          <m:r>
+                            <m:t>a</m:t>
+                          </m:r>
+                        </m:e>
+                      </m:d>
+                      <m:r>
+                        <m:rPr>
+                          <m:sty m:val="p"/>
+                        </m:rPr>
+                        <m:t>=</m:t>
+                      </m:r>
+                      <m:nary>
+                        <m:naryPr>
+                          <m:chr m:val="∑"/>
+                          <m:limLoc m:val="undOvr"/>
+                          <m:subHide m:val="off"/>
+                          <m:supHide m:val="on"/>
+                        </m:naryPr>
+                        <m:sub>
+                          <m:r>
+                            <m:t>i</m:t>
+                          </m:r>
+                        </m:sub>
+                        <m:sup>
+                          <m:r>
+                            <m:t>​</m:t>
+                          </m:r>
+                        </m:sup>
+                        <m:e>
+                          <m:sSub>
+                            <m:e>
+                              <m:r>
+                                <m:t>w</m:t>
+                              </m:r>
+                            </m:e>
+                            <m:sub>
+                              <m:r>
+                                <m:t>i</m:t>
+                              </m:r>
+                            </m:sub>
+                          </m:sSub>
+                        </m:e>
+                      </m:nary>
+                      <m:sSub>
+                        <m:e>
+                          <m:r>
+                            <m:t>f</m:t>
+                          </m:r>
+                        </m:e>
+                        <m:sub>
+                          <m:r>
+                            <m:t>i</m:t>
+                          </m:r>
+                        </m:sub>
+                      </m:sSub>
+                      <m:d>
+                        <m:dPr>
+                          <m:begChr m:val="("/>
+                          <m:sepChr m:val=""/>
+                          <m:endChr m:val=")"/>
+                          <m:grow/>
+                        </m:dPr>
+                        <m:e>
+                          <m:r>
+                            <m:t>a</m:t>
+                          </m:r>
+                        </m:e>
+                      </m:d>
+                    </m:oMath>
+                  </m:oMathPara>
+                </a14:m>
+              </a:p>
+              <a:p>
+                <a:pPr lvl="0" indent="0" marL="0">
+                  <a:buNone/>
+                </a:pPr>
+                <a:r>
+                  <a:rPr/>
+                  <a:t>. . .</a:t>
+                </a:r>
+              </a:p>
+              <a:p>
+                <a:pPr lvl="0" indent="0" marL="0">
+                  <a:buNone/>
+                </a:pPr>
+                <a:r>
+                  <a:rPr/>
+                  <a:t>Sweeping weights </a:t>
+                </a:r>
+                <a14:m>
+                  <m:oMath xmlns:m="http://schemas.openxmlformats.org/officeDocument/2006/math">
+                    <m:sSub>
+                      <m:e>
+                        <m:r>
+                          <m:t>w</m:t>
+                        </m:r>
+                      </m:e>
+                      <m:sub>
+                        <m:r>
+                          <m:t>i</m:t>
+                        </m:r>
+                      </m:sub>
+                    </m:sSub>
+                  </m:oMath>
+                </a14:m>
+                <a:r>
+                  <a:rPr/>
+                  <a:t> can recover parts of the Pareto front — but not all of it.</a:t>
+                </a:r>
+              </a:p>
+              <a:p>
+                <a:pPr lvl="0"/>
+                <a:r>
+                  <a:rPr/>
+                  <a:t>Weighted sum only finds solutions on the </a:t>
+                </a:r>
+                <a:r>
+                  <a:rPr b="1"/>
+                  <a:t>convex hull</a:t>
+                </a:r>
+                <a:r>
+                  <a:rPr/>
+                  <a:t> of the front</a:t>
+                </a:r>
+              </a:p>
+              <a:p>
+                <a:pPr lvl="0"/>
+                <a:r>
+                  <a:rPr/>
+                  <a:t>Non-convex regions (common in engineering problems) are </a:t>
+                </a:r>
+                <a:r>
+                  <a:rPr b="1"/>
+                  <a:t>unreachable</a:t>
+                </a:r>
+                <a:r>
+                  <a:rPr/>
+                  <a:t> by any weighting</a:t>
+                </a:r>
+              </a:p>
+              <a:p>
+                <a:pPr lvl="0"/>
+                <a:r>
+                  <a:rPr/>
+                  <a:t>You can miss important solutions entirely</a:t>
+                </a:r>
+              </a:p>
+              <a:p>
+                <a:pPr lvl="0" indent="0" marL="0">
+                  <a:spcBef>
+                    <a:spcPts val="3000"/>
+                  </a:spcBef>
+                  <a:buNone/>
+                </a:pPr>
+                <a:r>
+                  <a:rPr b="1"/>
+                  <a:t>Convex vs. Non-Convex Fronts</a:t>
+                </a:r>
+              </a:p>
+            </p:txBody>
+          </p:sp>
+        </mc:Choice>
+      </mc:AlternateContent>
+    </p:spTree>
+  </p:cSld>
+  <p:timing>
+    <p:tnLst>
+      <p:par>
+        <p:cTn id="1" dur="indefinite" restart="never" nodeType="tmRoot">
+          <p:childTnLst>
+            <p:seq concurrent="1" nextAc="seek">
+              <p:cTn id="2" dur="indefinite" nodeType="mainSeq">
+                <p:childTnLst>
+                  <p:par>
+                    <p:cTn id="3" fill="hold">
+                      <p:stCondLst>
+                        <p:cond delay="indefinite"/>
+                      </p:stCondLst>
+                      <p:childTnLst>
+                        <p:par>
+                          <p:cTn id="4" fill="hold">
+                            <p:stCondLst>
+                              <p:cond delay="0"/>
+                            </p:stCondLst>
+                            <p:childTnLst>
+                              <p:par>
+                                <p:cTn id="5" presetID="1" presetClass="entr" presetSubtype="0" fill="hold" grpId="0" nodeType="clickEffect">
+                                  <p:stCondLst>
+                                    <p:cond delay="0"/>
+                                  </p:stCondLst>
+                                  <p:childTnLst>
+                                    <p:set>
+                                      <p:cBhvr>
+                                        <p:cTn id="6" dur="1" fill="hold">
+                                          <p:stCondLst>
+                                            <p:cond delay="0"/>
+                                          </p:stCondLst>
+                                        </p:cTn>
+                                        <p:tgtEl>
+                                          <p:spTgt spid="3">
+                                            <p:txEl>
+                                              <p:pRg st="5" end="5"/>
+                                            </p:txEl>
+                                          </p:spTgt>
+                                        </p:tgtEl>
+                                        <p:attrNameLst>
+                                          <p:attrName>style.visibility</p:attrName>
+                                        </p:attrNameLst>
+                                      </p:cBhvr>
+                                      <p:to>
+                                        <p:strVal val="visible"/>
+                                      </p:to>
+                                    </p:set>
+                                  </p:childTnLst>
+                                </p:cTn>
+                              </p:par>
+                            </p:childTnLst>
+                          </p:cTn>
+                        </p:par>
+                      </p:childTnLst>
+                    </p:cTn>
+                  </p:par>
+                  <p:par>
+                    <p:cTn id="7" fill="hold">
+                      <p:stCondLst>
+                        <p:cond delay="indefinite"/>
+                      </p:stCondLst>
+                      <p:childTnLst>
+                        <p:par>
+                          <p:cTn id="8" fill="hold">
+                            <p:stCondLst>
+                              <p:cond delay="0"/>
+                            </p:stCondLst>
+                            <p:childTnLst>
+                              <p:par>
+                                <p:cTn id="9" presetID="1" presetClass="entr" presetSubtype="0" fill="hold" grpId="0" nodeType="clickEffect">
+                                  <p:stCondLst>
+                                    <p:cond delay="0"/>
+                                  </p:stCondLst>
+                                  <p:childTnLst>
+                                    <p:set>
+                                      <p:cBhvr>
+                                        <p:cTn id="10" dur="1" fill="hold">
+                                          <p:stCondLst>
+                                            <p:cond delay="0"/>
+                                          </p:stCondLst>
+                                        </p:cTn>
+                                        <p:tgtEl>
+                                          <p:spTgt spid="3">
+                                            <p:txEl>
+                                              <p:pRg st="6" end="6"/>
+                                            </p:txEl>
+                                          </p:spTgt>
+                                        </p:tgtEl>
+                                        <p:attrNameLst>
+                                          <p:attrName>style.visibility</p:attrName>
+                                        </p:attrNameLst>
+                                      </p:cBhvr>
+                                      <p:to>
+                                        <p:strVal val="visible"/>
+                                      </p:to>
+                                    </p:set>
+                                  </p:childTnLst>
+                                </p:cTn>
+                              </p:par>
+                            </p:childTnLst>
+                          </p:cTn>
+                        </p:par>
+                      </p:childTnLst>
+                    </p:cTn>
+                  </p:par>
+                  <p:par>
+                    <p:cTn id="11" fill="hold">
+                      <p:stCondLst>
+                        <p:cond delay="indefinite"/>
+                      </p:stCondLst>
+                      <p:childTnLst>
+                        <p:par>
+                          <p:cTn id="12" fill="hold">
+                            <p:stCondLst>
+                              <p:cond delay="0"/>
+                            </p:stCondLst>
+                            <p:childTnLst>
+                              <p:par>
+                                <p:cTn id="13" presetID="1" presetClass="entr" presetSubtype="0" fill="hold" grpId="0" nodeType="clickEffect">
+                                  <p:stCondLst>
+                                    <p:cond delay="0"/>
+                                  </p:stCondLst>
+                                  <p:childTnLst>
+                                    <p:set>
+                                      <p:cBhvr>
+                                        <p:cTn id="14" dur="1" fill="hold">
+                                          <p:stCondLst>
+                                            <p:cond delay="0"/>
+                                          </p:stCondLst>
+                                        </p:cTn>
+                                        <p:tgtEl>
+                                          <p:spTgt spid="3">
+                                            <p:txEl>
+                                              <p:pRg st="7" end="7"/>
+                                            </p:txEl>
+                                          </p:spTgt>
+                                        </p:tgtEl>
+                                        <p:attrNameLst>
+                                          <p:attrName>style.visibility</p:attrName>
+                                        </p:attrNameLst>
+                                      </p:cBhvr>
+                                      <p:to>
+                                        <p:strVal val="visible"/>
+                                      </p:to>
+                                    </p:set>
+                                  </p:childTnLst>
+                                </p:cTn>
+                              </p:par>
+                            </p:childTnLst>
+                          </p:cTn>
+                        </p:par>
+                      </p:childTnLst>
+                    </p:cTn>
+                  </p:par>
+                </p:childTnLst>
+              </p:cTn>
+              <p:prevCondLst>
+                <p:cond evt="onPrev" delay="0">
+                  <p:tgtEl>
+                    <p:sldTgt/>
+                  </p:tgtEl>
+                </p:cond>
+              </p:prevCondLst>
+              <p:nextCondLst>
+                <p:cond evt="onNext" delay="0">
+                  <p:tgtEl>
+                    <p:sldTgt/>
+                  </p:tgtEl>
+                </p:cond>
+              </p:nextCondLst>
+            </p:seq>
+          </p:childTnLst>
+        </p:cTn>
+      </p:par>
+    </p:tnLst>
+    <p:bldLst>
+      <p:bldP spid="3" grpId="0" uiExpand="1" build="p"/>
+    </p:bldLst>
+  </p:timing>
+</p:sld>
+</file>
+
+<file path=ppt/slides/slide8.xml><?xml version="1.0" encoding="utf-8"?>
+<p:sld xmlns:a="http://schemas.openxmlformats.org/drawingml/2006/main" xmlns:r="http://schemas.openxmlformats.org/officeDocument/2006/relationships" xmlns:p="http://schemas.openxmlformats.org/presentationml/2006/main">
+  <p:cSld>
+    <p:spTree>
+      <p:nvGrpSpPr>
+        <p:cNvPr id="1" name=""/>
+        <p:cNvGrpSpPr/>
+        <p:nvPr/>
+      </p:nvGrpSpPr>
+      <p:grpSpPr>
+        <a:xfrm>
+          <a:off x="0" y="0"/>
+          <a:ext cx="0" cy="0"/>
+          <a:chOff x="0" y="0"/>
+          <a:chExt cx="0" cy="0"/>
+        </a:xfrm>
+      </p:grpSpPr>
+      <p:sp>
+        <p:nvSpPr>
+          <p:cNvPr id="2" name="Title 1"/>
+          <p:cNvSpPr>
+            <a:spLocks noGrp="1"/>
+          </p:cNvSpPr>
+          <p:nvPr>
+            <p:ph type="title"/>
+          </p:nvPr>
+        </p:nvSpPr>
+        <p:spPr/>
+        <p:txBody>
+          <a:bodyPr/>
+          <a:lstStyle/>
+          <a:p>
+            <a:pPr lvl="0" indent="0" marL="0">
+              <a:buNone/>
+            </a:pPr>
+            <a:r>
+              <a:rPr/>
+              <a:t>Multi-Objective Evolutionary Algorithms</a:t>
+            </a:r>
+          </a:p>
+        </p:txBody>
+      </p:sp>
+      <p:sp>
+        <p:nvSpPr>
+          <p:cNvPr id="3" name="Content Placeholder 2"/>
+          <p:cNvSpPr>
+            <a:spLocks noGrp="1"/>
+          </p:cNvSpPr>
+          <p:nvPr>
+            <p:ph idx="1"/>
+          </p:nvPr>
+        </p:nvSpPr>
+        <p:spPr/>
+        <p:txBody>
+          <a:bodyPr/>
+          <a:lstStyle/>
+          <a:p>
+            <a:pPr lvl="0" indent="0" marL="0">
+              <a:spcBef>
+                <a:spcPts val="3000"/>
+              </a:spcBef>
+              <a:buNone/>
+            </a:pPr>
+            <a:r>
+              <a:rPr b="1"/>
+              <a:t>How MOEAs Work</a:t>
+            </a:r>
+          </a:p>
+          <a:p>
+            <a:pPr lvl="0" indent="0" marL="0">
+              <a:buNone/>
+            </a:pPr>
+            <a:r>
+              <a:rPr/>
+              <a:t>Multi-objective evolutionary algorithms (MOEAs) search for an </a:t>
+            </a:r>
+            <a:r>
+              <a:rPr b="1"/>
+              <a:t>approximation of the full Pareto front simultaneously</a:t>
+            </a:r>
+            <a:r>
+              <a:rPr/>
+              <a:t>.</a:t>
+            </a:r>
+          </a:p>
+          <a:p>
+            <a:pPr lvl="0" indent="0" marL="0">
+              <a:buNone/>
+            </a:pPr>
+            <a:r>
+              <a:rPr/>
+              <a:t>. . .</a:t>
+            </a:r>
+          </a:p>
+          <a:p>
+            <a:pPr lvl="0" indent="0" marL="0">
+              <a:buNone/>
+            </a:pPr>
+            <a:r>
+              <a:rPr/>
+              <a:t>Core ideas:</a:t>
+            </a:r>
+          </a:p>
+          <a:p>
+            <a:pPr lvl="0"/>
+            <a:r>
+              <a:rPr/>
+              <a:t>Maintain a </a:t>
+            </a:r>
+            <a:r>
+              <a:rPr b="1"/>
+              <a:t>population</a:t>
+            </a:r>
+            <a:r>
+              <a:rPr/>
+              <a:t> of candidate solutions that evolves over generations</a:t>
+            </a:r>
+          </a:p>
+          <a:p>
+            <a:pPr lvl="0"/>
+            <a:r>
+              <a:rPr b="1"/>
+              <a:t>Selection</a:t>
+            </a:r>
+            <a:r>
+              <a:rPr/>
+              <a:t> favors non-dominated solutions (dominance-based ranking)</a:t>
+            </a:r>
+          </a:p>
+          <a:p>
+            <a:pPr lvl="0"/>
+            <a:r>
+              <a:rPr b="1"/>
+              <a:t>Diversity preservation</a:t>
+            </a:r>
+            <a:r>
+              <a:rPr/>
+              <a:t> spreads solutions across the front — not just one cluster</a:t>
+            </a:r>
+          </a:p>
+          <a:p>
+            <a:pPr lvl="0"/>
+            <a:r>
+              <a:rPr/>
+              <a:t>Repeat until convergence</a:t>
+            </a:r>
+          </a:p>
+          <a:p>
+            <a:pPr lvl="0" indent="0" marL="0">
+              <a:buNone/>
+            </a:pPr>
+            <a:r>
+              <a:rPr/>
+              <a:t>. . .</a:t>
+            </a:r>
+          </a:p>
+          <a:p>
+            <a:pPr lvl="0" indent="0" marL="0">
+              <a:buNone/>
+            </a:pPr>
+            <a:r>
+              <a:rPr/>
+              <a:t>Result: a set of solutions approximating the full trade-off curve — including non-convex regions.</a:t>
+            </a:r>
+          </a:p>
+          <a:p>
+            <a:pPr lvl="0" indent="0" marL="0">
+              <a:spcBef>
+                <a:spcPts val="3000"/>
+              </a:spcBef>
+              <a:buNone/>
+            </a:pPr>
+            <a:r>
+              <a:rPr b="1"/>
+              <a:t>Common MOEAs in Climate/Water Work</a:t>
+            </a:r>
+          </a:p>
+          <a:p>
+            <a:pPr lvl="0"/>
+            <a:r>
+              <a:rPr b="1"/>
+              <a:t>NSGA-II</a:t>
+            </a:r>
+            <a:r>
+              <a:rPr/>
+              <a:t>: Classic; uses crowding distance for diversity</a:t>
+            </a:r>
+          </a:p>
+          <a:p>
+            <a:pPr lvl="0"/>
+            <a:r>
+              <a:rPr b="1"/>
+              <a:t>Borg</a:t>
+            </a:r>
+            <a:r>
+              <a:rPr/>
+              <a:t>: Widely used in water resources; adaptive population, epsilon-dominance archiving</a:t>
+            </a:r>
+          </a:p>
+          <a:p>
+            <a:pPr lvl="0"/>
+            <a:r>
+              <a:rPr/>
+              <a:t>Both widely used; Borg tends to perform better on complex, many-objective problems</a:t>
+            </a:r>
+          </a:p>
+          <a:p>
+            <a:pPr lvl="0" indent="0" marL="0">
+              <a:buNone/>
+            </a:pPr>
+            <a:r>
+              <a:rPr/>
+              <a:t>. . .</a:t>
+            </a:r>
+          </a:p>
+          <a:p>
+            <a:pPr lvl="0" indent="0" marL="0">
+              <a:buNone/>
+            </a:pPr>
+            <a:r>
+              <a:rPr b="1"/>
+              <a:t>Convergence diagnostics:</a:t>
+            </a:r>
+          </a:p>
+          <a:p>
+            <a:pPr lvl="0"/>
+            <a:r>
+              <a:rPr/>
+              <a:t>Repeat with different random seeds — do results change significantly?</a:t>
+            </a:r>
+          </a:p>
+          <a:p>
+            <a:pPr lvl="0"/>
+            <a:r>
+              <a:rPr i="1"/>
+              <a:t>Hypervolume indicator</a:t>
+            </a:r>
+            <a:r>
+              <a:rPr/>
+              <a:t>: measures how much of the objective space the front covers</a:t>
+            </a:r>
+          </a:p>
+          <a:p>
+            <a:pPr lvl="0"/>
+            <a:r>
+              <a:rPr/>
+              <a:t>Compare to weighted-sum benchmarks to detect missed regions</a:t>
+            </a:r>
+          </a:p>
+          <a:p>
+            <a:pPr lvl="0" indent="0" marL="0">
+              <a:spcBef>
+                <a:spcPts val="3000"/>
+              </a:spcBef>
+              <a:buNone/>
+            </a:pPr>
+            <a:r>
+              <a:rPr b="1"/>
+              <a:t>What Does Many-Objective Look Like?</a:t>
+            </a:r>
+          </a:p>
+        </p:txBody>
+      </p:sp>
+    </p:spTree>
+  </p:cSld>
+  <p:timing>
+    <p:tnLst>
+      <p:par>
+        <p:cTn id="1" dur="indefinite" restart="never" nodeType="tmRoot">
+          <p:childTnLst>
+            <p:seq concurrent="1" nextAc="seek">
+              <p:cTn id="2" dur="indefinite" nodeType="mainSeq">
+                <p:childTnLst>
+                  <p:par>
+                    <p:cTn id="3" fill="hold">
+                      <p:stCondLst>
+                        <p:cond delay="indefinite"/>
+                      </p:stCondLst>
+                      <p:childTnLst>
+                        <p:par>
+                          <p:cTn id="4" fill="hold">
+                            <p:stCondLst>
+                              <p:cond delay="0"/>
+                            </p:stCondLst>
+                            <p:childTnLst>
+                              <p:par>
+                                <p:cTn id="5" presetID="1" presetClass="entr" presetSubtype="0" fill="hold" grpId="0" nodeType="clickEffect">
+                                  <p:stCondLst>
+                                    <p:cond delay="0"/>
+                                  </p:stCondLst>
+                                  <p:childTnLst>
+                                    <p:set>
+                                      <p:cBhvr>
+                                        <p:cTn id="6" dur="1" fill="hold">
+                                          <p:stCondLst>
+                                            <p:cond delay="0"/>
+                                          </p:stCondLst>
+                                        </p:cTn>
+                                        <p:tgtEl>
+                                          <p:spTgt spid="3">
+                                            <p:txEl>
+                                              <p:pRg st="4" end="4"/>
+                                            </p:txEl>
+                                          </p:spTgt>
+                                        </p:tgtEl>
+                                        <p:attrNameLst>
+                                          <p:attrName>style.visibility</p:attrName>
+                                        </p:attrNameLst>
+                                      </p:cBhvr>
+                                      <p:to>
+                                        <p:strVal val="visible"/>
+                                      </p:to>
+                                    </p:set>
+                                  </p:childTnLst>
+                                </p:cTn>
+                              </p:par>
+                            </p:childTnLst>
+                          </p:cTn>
+                        </p:par>
+                      </p:childTnLst>
+                    </p:cTn>
+                  </p:par>
+                  <p:par>
+                    <p:cTn id="7" fill="hold">
+                      <p:stCondLst>
+                        <p:cond delay="indefinite"/>
+                      </p:stCondLst>
+                      <p:childTnLst>
+                        <p:par>
+                          <p:cTn id="8" fill="hold">
+                            <p:stCondLst>
+                              <p:cond delay="0"/>
+                            </p:stCondLst>
+                            <p:childTnLst>
+                              <p:par>
+                                <p:cTn id="9" presetID="1" presetClass="entr" presetSubtype="0" fill="hold" grpId="0" nodeType="clickEffect">
+                                  <p:stCondLst>
+                                    <p:cond delay="0"/>
+                                  </p:stCondLst>
+                                  <p:childTnLst>
+                                    <p:set>
+                                      <p:cBhvr>
+                                        <p:cTn id="10" dur="1" fill="hold">
+                                          <p:stCondLst>
+                                            <p:cond delay="0"/>
+                                          </p:stCondLst>
+                                        </p:cTn>
+                                        <p:tgtEl>
+                                          <p:spTgt spid="3">
+                                            <p:txEl>
+                                              <p:pRg st="5" end="5"/>
+                                            </p:txEl>
+                                          </p:spTgt>
+                                        </p:tgtEl>
+                                        <p:attrNameLst>
+                                          <p:attrName>style.visibility</p:attrName>
+                                        </p:attrNameLst>
+                                      </p:cBhvr>
+                                      <p:to>
+                                        <p:strVal val="visible"/>
+                                      </p:to>
+                                    </p:set>
+                                  </p:childTnLst>
+                                </p:cTn>
+                              </p:par>
+                            </p:childTnLst>
+                          </p:cTn>
+                        </p:par>
+                      </p:childTnLst>
+                    </p:cTn>
+                  </p:par>
+                  <p:par>
+                    <p:cTn id="11" fill="hold">
+                      <p:stCondLst>
+                        <p:cond delay="indefinite"/>
+                      </p:stCondLst>
+                      <p:childTnLst>
+                        <p:par>
+                          <p:cTn id="12" fill="hold">
+                            <p:stCondLst>
+                              <p:cond delay="0"/>
+                            </p:stCondLst>
+                            <p:childTnLst>
+                              <p:par>
+                                <p:cTn id="13" presetID="1" presetClass="entr" presetSubtype="0" fill="hold" grpId="0" nodeType="clickEffect">
+                                  <p:stCondLst>
+                                    <p:cond delay="0"/>
+                                  </p:stCondLst>
+                                  <p:childTnLst>
+                                    <p:set>
+                                      <p:cBhvr>
+                                        <p:cTn id="14" dur="1" fill="hold">
+                                          <p:stCondLst>
+                                            <p:cond delay="0"/>
+                                          </p:stCondLst>
+                                        </p:cTn>
+                                        <p:tgtEl>
+                                          <p:spTgt spid="3">
+                                            <p:txEl>
+                                              <p:pRg st="6" end="6"/>
+                                            </p:txEl>
+                                          </p:spTgt>
+                                        </p:tgtEl>
+                                        <p:attrNameLst>
+                                          <p:attrName>style.visibility</p:attrName>
+                                        </p:attrNameLst>
+                                      </p:cBhvr>
+                                      <p:to>
+                                        <p:strVal val="visible"/>
+                                      </p:to>
+                                    </p:set>
+                                  </p:childTnLst>
+                                </p:cTn>
+                              </p:par>
+                            </p:childTnLst>
+                          </p:cTn>
+                        </p:par>
+                      </p:childTnLst>
+                    </p:cTn>
+                  </p:par>
+                  <p:par>
+                    <p:cTn id="15" fill="hold">
+                      <p:stCondLst>
+                        <p:cond delay="indefinite"/>
+                      </p:stCondLst>
+                      <p:childTnLst>
+                        <p:par>
+                          <p:cTn id="16" fill="hold">
+                            <p:stCondLst>
+                              <p:cond delay="0"/>
+                            </p:stCondLst>
+                            <p:childTnLst>
+                              <p:par>
+                                <p:cTn id="17" presetID="1" presetClass="entr" presetSubtype="0" fill="hold" grpId="0" nodeType="clickEffect">
+                                  <p:stCondLst>
+                                    <p:cond delay="0"/>
+                                  </p:stCondLst>
+                                  <p:childTnLst>
+                                    <p:set>
+                                      <p:cBhvr>
+                                        <p:cTn id="18" dur="1" fill="hold">
+                                          <p:stCondLst>
+                                            <p:cond delay="0"/>
+                                          </p:stCondLst>
+                                        </p:cTn>
+                                        <p:tgtEl>
+                                          <p:spTgt spid="3">
+                                            <p:txEl>
+                                              <p:pRg st="7" end="7"/>
+                                            </p:txEl>
+                                          </p:spTgt>
+                                        </p:tgtEl>
+                                        <p:attrNameLst>
+                                          <p:attrName>style.visibility</p:attrName>
+                                        </p:attrNameLst>
+                                      </p:cBhvr>
+                                      <p:to>
+                                        <p:strVal val="visible"/>
+                                      </p:to>
+                                    </p:set>
+                                  </p:childTnLst>
+                                </p:cTn>
+                              </p:par>
+                            </p:childTnLst>
+                          </p:cTn>
+                        </p:par>
+                      </p:childTnLst>
+                    </p:cTn>
+                  </p:par>
+                  <p:par>
+                    <p:cTn id="19" fill="hold">
+                      <p:stCondLst>
+                        <p:cond delay="indefinite"/>
+                      </p:stCondLst>
+                      <p:childTnLst>
+                        <p:par>
+                          <p:cTn id="20" fill="hold">
+                            <p:stCondLst>
+                              <p:cond delay="0"/>
+                            </p:stCondLst>
+                            <p:childTnLst>
+                              <p:par>
+                                <p:cTn id="21" presetID="1" presetClass="entr" presetSubtype="0" fill="hold" grpId="0" nodeType="clickEffect">
+                                  <p:stCondLst>
+                                    <p:cond delay="0"/>
+                                  </p:stCondLst>
+                                  <p:childTnLst>
+                                    <p:set>
+                                      <p:cBhvr>
+                                        <p:cTn id="22" dur="1" fill="hold">
+                                          <p:stCondLst>
+                                            <p:cond delay="0"/>
+                                          </p:stCondLst>
+                                        </p:cTn>
+                                        <p:tgtEl>
+                                          <p:spTgt spid="3">
+                                            <p:txEl>
+                                              <p:pRg st="11" end="11"/>
+                                            </p:txEl>
+                                          </p:spTgt>
+                                        </p:tgtEl>
+                                        <p:attrNameLst>
+                                          <p:attrName>style.visibility</p:attrName>
+                                        </p:attrNameLst>
+                                      </p:cBhvr>
+                                      <p:to>
+                                        <p:strVal val="visible"/>
+                                      </p:to>
+                                    </p:set>
+                                  </p:childTnLst>
+                                </p:cTn>
+                              </p:par>
+                            </p:childTnLst>
+                          </p:cTn>
+                        </p:par>
+                      </p:childTnLst>
+                    </p:cTn>
+                  </p:par>
+                  <p:par>
+                    <p:cTn id="23" fill="hold">
+                      <p:stCondLst>
+                        <p:cond delay="indefinite"/>
+                      </p:stCondLst>
+                      <p:childTnLst>
+                        <p:par>
+                          <p:cTn id="24" fill="hold">
+                            <p:stCondLst>
+                              <p:cond delay="0"/>
+                            </p:stCondLst>
+                            <p:childTnLst>
+                              <p:par>
+                                <p:cTn id="25" presetID="1" presetClass="entr" presetSubtype="0" fill="hold" grpId="0" nodeType="clickEffect">
+                                  <p:stCondLst>
+                                    <p:cond delay="0"/>
+                                  </p:stCondLst>
+                                  <p:childTnLst>
+                                    <p:set>
+                                      <p:cBhvr>
+                                        <p:cTn id="26" dur="1" fill="hold">
+                                          <p:stCondLst>
+                                            <p:cond delay="0"/>
+                                          </p:stCondLst>
+                                        </p:cTn>
+                                        <p:tgtEl>
+                                          <p:spTgt spid="3">
+                                            <p:txEl>
+                                              <p:pRg st="12" end="12"/>
+                                            </p:txEl>
+                                          </p:spTgt>
+                                        </p:tgtEl>
+                                        <p:attrNameLst>
+                                          <p:attrName>style.visibility</p:attrName>
+                                        </p:attrNameLst>
+                                      </p:cBhvr>
+                                      <p:to>
+                                        <p:strVal val="visible"/>
+                                      </p:to>
+                                    </p:set>
+                                  </p:childTnLst>
+                                </p:cTn>
+                              </p:par>
+                            </p:childTnLst>
+                          </p:cTn>
+                        </p:par>
+                      </p:childTnLst>
+                    </p:cTn>
+                  </p:par>
+                  <p:par>
+                    <p:cTn id="27" fill="hold">
+                      <p:stCondLst>
+                        <p:cond delay="indefinite"/>
+                      </p:stCondLst>
+                      <p:childTnLst>
+                        <p:par>
+                          <p:cTn id="28" fill="hold">
+                            <p:stCondLst>
+                              <p:cond delay="0"/>
+                            </p:stCondLst>
+                            <p:childTnLst>
+                              <p:par>
+                                <p:cTn id="29" presetID="1" presetClass="entr" presetSubtype="0" fill="hold" grpId="0" nodeType="clickEffect">
+                                  <p:stCondLst>
+                                    <p:cond delay="0"/>
+                                  </p:stCondLst>
+                                  <p:childTnLst>
+                                    <p:set>
+                                      <p:cBhvr>
+                                        <p:cTn id="30" dur="1" fill="hold">
+                                          <p:stCondLst>
+                                            <p:cond delay="0"/>
+                                          </p:stCondLst>
+                                        </p:cTn>
+                                        <p:tgtEl>
+                                          <p:spTgt spid="3">
+                                            <p:txEl>
+                                              <p:pRg st="13" end="13"/>
+                                            </p:txEl>
+                                          </p:spTgt>
+                                        </p:tgtEl>
+                                        <p:attrNameLst>
+                                          <p:attrName>style.visibility</p:attrName>
+                                        </p:attrNameLst>
+                                      </p:cBhvr>
+                                      <p:to>
+                                        <p:strVal val="visible"/>
+                                      </p:to>
+                                    </p:set>
+                                  </p:childTnLst>
+                                </p:cTn>
+                              </p:par>
+                            </p:childTnLst>
+                          </p:cTn>
+                        </p:par>
+                      </p:childTnLst>
+                    </p:cTn>
+                  </p:par>
+                  <p:par>
+                    <p:cTn id="31" fill="hold">
+                      <p:stCondLst>
+                        <p:cond delay="indefinite"/>
+                      </p:stCondLst>
+                      <p:childTnLst>
+                        <p:par>
+                          <p:cTn id="32" fill="hold">
+                            <p:stCondLst>
+                              <p:cond delay="0"/>
+                            </p:stCondLst>
+                            <p:childTnLst>
+                              <p:par>
+                                <p:cTn id="33" presetID="1" presetClass="entr" presetSubtype="0" fill="hold" grpId="0" nodeType="clickEffect">
+                                  <p:stCondLst>
+                                    <p:cond delay="0"/>
+                                  </p:stCondLst>
+                                  <p:childTnLst>
+                                    <p:set>
+                                      <p:cBhvr>
+                                        <p:cTn id="34" dur="1" fill="hold">
+                                          <p:stCondLst>
+                                            <p:cond delay="0"/>
+                                          </p:stCondLst>
+                                        </p:cTn>
+                                        <p:tgtEl>
+                                          <p:spTgt spid="3">
+                                            <p:txEl>
+                                              <p:pRg st="16" end="16"/>
+                                            </p:txEl>
+                                          </p:spTgt>
+                                        </p:tgtEl>
+                                        <p:attrNameLst>
+                                          <p:attrName>style.visibility</p:attrName>
+                                        </p:attrNameLst>
+                                      </p:cBhvr>
+                                      <p:to>
+                                        <p:strVal val="visible"/>
+                                      </p:to>
+                                    </p:set>
+                                  </p:childTnLst>
+                                </p:cTn>
+                              </p:par>
+                            </p:childTnLst>
+                          </p:cTn>
+                        </p:par>
+                      </p:childTnLst>
+                    </p:cTn>
+                  </p:par>
+                  <p:par>
+                    <p:cTn id="35" fill="hold">
+                      <p:stCondLst>
+                        <p:cond delay="indefinite"/>
+                      </p:stCondLst>
+                      <p:childTnLst>
+                        <p:par>
+                          <p:cTn id="36" fill="hold">
+                            <p:stCondLst>
+                              <p:cond delay="0"/>
+                            </p:stCondLst>
+                            <p:childTnLst>
+                              <p:par>
+                                <p:cTn id="37" presetID="1" presetClass="entr" presetSubtype="0" fill="hold" grpId="0" nodeType="clickEffect">
+                                  <p:stCondLst>
+                                    <p:cond delay="0"/>
+                                  </p:stCondLst>
+                                  <p:childTnLst>
+                                    <p:set>
+                                      <p:cBhvr>
+                                        <p:cTn id="38" dur="1" fill="hold">
+                                          <p:stCondLst>
+                                            <p:cond delay="0"/>
+                                          </p:stCondLst>
+                                        </p:cTn>
+                                        <p:tgtEl>
+                                          <p:spTgt spid="3">
+                                            <p:txEl>
+                                              <p:pRg st="17" end="17"/>
+                                            </p:txEl>
+                                          </p:spTgt>
+                                        </p:tgtEl>
+                                        <p:attrNameLst>
+                                          <p:attrName>style.visibility</p:attrName>
+                                        </p:attrNameLst>
+                                      </p:cBhvr>
+                                      <p:to>
+                                        <p:strVal val="visible"/>
+                                      </p:to>
+                                    </p:set>
+                                  </p:childTnLst>
+                                </p:cTn>
+                              </p:par>
+                            </p:childTnLst>
+                          </p:cTn>
+                        </p:par>
+                      </p:childTnLst>
+                    </p:cTn>
+                  </p:par>
+                  <p:par>
+                    <p:cTn id="39" fill="hold">
+                      <p:stCondLst>
+                        <p:cond delay="indefinite"/>
+                      </p:stCondLst>
+                      <p:childTnLst>
+                        <p:par>
+                          <p:cTn id="40" fill="hold">
+                            <p:stCondLst>
+                              <p:cond delay="0"/>
+                            </p:stCondLst>
+                            <p:childTnLst>
+                              <p:par>
+                                <p:cTn id="41" presetID="1" presetClass="entr" presetSubtype="0" fill="hold" grpId="0" nodeType="clickEffect">
+                                  <p:stCondLst>
+                                    <p:cond delay="0"/>
+                                  </p:stCondLst>
+                                  <p:childTnLst>
+                                    <p:set>
+                                      <p:cBhvr>
+                                        <p:cTn id="42" dur="1" fill="hold">
+                                          <p:stCondLst>
+                                            <p:cond delay="0"/>
+                                          </p:stCondLst>
+                                        </p:cTn>
+                                        <p:tgtEl>
+                                          <p:spTgt spid="3">
+                                            <p:txEl>
+                                              <p:pRg st="18" end="18"/>
+                                            </p:txEl>
+                                          </p:spTgt>
+                                        </p:tgtEl>
+                                        <p:attrNameLst>
+                                          <p:attrName>style.visibility</p:attrName>
+                                        </p:attrNameLst>
+                                      </p:cBhvr>
+                                      <p:to>
+                                        <p:strVal val="visible"/>
+                                      </p:to>
+                                    </p:set>
+                                  </p:childTnLst>
+                                </p:cTn>
+                              </p:par>
+                            </p:childTnLst>
+                          </p:cTn>
+                        </p:par>
+                      </p:childTnLst>
+                    </p:cTn>
+                  </p:par>
+                </p:childTnLst>
+              </p:cTn>
+              <p:prevCondLst>
+                <p:cond evt="onPrev" delay="0">
+                  <p:tgtEl>
+                    <p:sldTgt/>
+                  </p:tgtEl>
+                </p:cond>
+              </p:prevCondLst>
+              <p:nextCondLst>
+                <p:cond evt="onNext" delay="0">
+                  <p:tgtEl>
+                    <p:sldTgt/>
+                  </p:tgtEl>
+                </p:cond>
+              </p:nextCondLst>
+            </p:seq>
+          </p:childTnLst>
+        </p:cTn>
+      </p:par>
+    </p:tnLst>
+    <p:bldLst>
+      <p:bldP spid="3" grpId="0" uiExpand="1" build="p"/>
+    </p:bldLst>
+  </p:timing>
+</p:sld>
+</file>
+
+<file path=ppt/slides/slide9.xml><?xml version="1.0" encoding="utf-8"?>
+<p:sld xmlns:a="http://schemas.openxmlformats.org/drawingml/2006/main" xmlns:r="http://schemas.openxmlformats.org/officeDocument/2006/relationships" xmlns:p="http://schemas.openxmlformats.org/presentationml/2006/main">
+  <p:cSld>
+    <p:spTree>
+      <p:nvGrpSpPr>
+        <p:cNvPr id="1" name=""/>
+        <p:cNvGrpSpPr/>
+        <p:nvPr/>
+      </p:nvGrpSpPr>
+      <p:grpSpPr>
+        <a:xfrm>
+          <a:off x="0" y="0"/>
+          <a:ext cx="0" cy="0"/>
+          <a:chOff x="0" y="0"/>
+          <a:chExt cx="0" cy="0"/>
+        </a:xfrm>
+      </p:grpSpPr>
+      <p:sp>
+        <p:nvSpPr>
+          <p:cNvPr id="3" name="Content Placeholder 2"/>
+          <p:cNvSpPr>
+            <a:spLocks noGrp="1"/>
+          </p:cNvSpPr>
+          <p:nvPr>
+            <p:ph idx="1" sz="half"/>
+          </p:nvPr>
+        </p:nvSpPr>
+        <p:spPr/>
+        <p:txBody>
+          <a:bodyPr/>
+          <a:lstStyle/>
+          <a:p>
+            <a:pPr lvl="0" indent="0" marL="0">
+              <a:buNone/>
+            </a:pPr>
+            <a:r>
+              <a:rPr/>
+              <a:t>With 2 objectives: a curve.</a:t>
+            </a:r>
+          </a:p>
+          <a:p>
+            <a:pPr lvl="0" indent="0" marL="0">
+              <a:buNone/>
+            </a:pPr>
+            <a:r>
+              <a:rPr/>
+              <a:t>With 3+ objectives: a surface — impossible to visualize directly.</a:t>
+            </a:r>
+          </a:p>
+          <a:p>
+            <a:pPr lvl="0" indent="0" marL="0">
+              <a:buNone/>
+            </a:pPr>
+            <a:r>
+              <a:rPr b="1"/>
+              <a:t>Parallel axis plots</a:t>
+            </a:r>
+            <a:r>
+              <a:rPr/>
+              <a:t> show all objectives simultaneously.</a:t>
+            </a:r>
+          </a:p>
+          <a:p>
+            <a:pPr lvl="0" indent="0" marL="0">
+              <a:buNone/>
+            </a:pPr>
+            <a:r>
+              <a:rPr/>
+              <a:t>Each line = one non-dominated solution.</a:t>
+            </a:r>
+          </a:p>
+        </p:txBody>
+      </p:sp>
+      <p:pic>
+        <p:nvPicPr>
+          <p:cNvPr descr="kasprzyk_mordm_2013_fig5.png" id="0" name="Picture 1"/>
+          <p:cNvPicPr>
+            <a:picLocks noGrp="1" noChangeAspect="1"/>
+          </p:cNvPicPr>
+          <p:nvPr/>
+        </p:nvPicPr>
+        <p:blipFill>
+          <a:blip r:embed="rId3"/>
+          <a:stretch>
+            <a:fillRect/>
+          </a:stretch>
+        </p:blipFill>
+        <p:spPr bwMode="auto">
+          <a:xfrm>
+            <a:off x="5372100" y="1193800"/>
+            <a:ext cx="2590800" cy="2882900"/>
+          </a:xfrm>
+          <a:prstGeom prst="rect">
+            <a:avLst/>
+          </a:prstGeom>
+          <a:noFill/>
+          <a:ln w="9525">
+            <a:noFill/>
+            <a:headEnd/>
+            <a:tailEnd/>
+          </a:ln>
+        </p:spPr>
+      </p:pic>
+      <p:sp>
+        <p:nvSpPr>
+          <p:cNvPr id="1" name="TextBox 3"/>
+          <p:cNvSpPr txBox="1"/>
+          <p:nvPr/>
+        </p:nvSpPr>
+        <p:spPr>
+          <a:xfrm>
+            <a:off x="4648200" y="4076700"/>
+            <a:ext cx="4038600" cy="508000"/>
+          </a:xfrm>
+          <a:prstGeom prst="rect">
+            <a:avLst/>
+          </a:prstGeom>
+          <a:noFill/>
+        </p:spPr>
+        <p:txBody>
+          <a:bodyPr/>
+          <a:lstStyle/>
+          <a:p>
+            <a:pPr lvl="0" indent="0" marL="0" algn="ctr">
+              <a:buNone/>
+            </a:pPr>
+            <a:r>
+              <a:rPr/>
+              <a:t>Figure 3: Parallel axis plot of non-dominated solutions across six objectives. Source: Kasprzyk et al. (2013)</a:t>
             </a:r>
           </a:p>
         </p:txBody>

--- a/lectures/week-12/index.pptx
+++ b/lectures/week-12/index.pptx
@@ -6331,53 +6331,57 @@
                       </m:r>
                       <m:r>
                         <m:rPr>
+                          <m:scr m:val="double-struck"/>
                           <m:sty m:val="p"/>
-                          <m:scr m:val="double-struck"/>
                         </m:rPr>
                         <m:t>E</m:t>
                       </m:r>
-                      <m:d>
-                        <m:dPr>
-                          <m:begChr m:val="["/>
-                          <m:sepChr m:val=""/>
-                          <m:endChr m:val="]"/>
-                          <m:grow/>
-                        </m:dPr>
-                        <m:e>
-                          <m:r>
-                            <m:rPr>
-                              <m:nor/>
-                              <m:sty m:val="p"/>
-                            </m:rPr>
-                            <m:t>NPV</m:t>
-                          </m:r>
-                          <m:d>
-                            <m:dPr>
-                              <m:begChr m:val="("/>
-                              <m:sepChr m:val=""/>
-                              <m:endChr m:val=")"/>
-                              <m:grow/>
-                            </m:dPr>
-                            <m:e>
-                              <m:r>
-                                <m:t>a</m:t>
-                              </m:r>
-                              <m:r>
-                                <m:rPr>
-                                  <m:sty m:val="p"/>
-                                </m:rPr>
-                                <m:t>,</m:t>
-                              </m:r>
-                              <m:r>
-                                <m:rPr>
-                                  <m:sty m:val="b"/>
-                                </m:rPr>
-                                <m:t>s</m:t>
-                              </m:r>
-                            </m:e>
-                          </m:d>
-                        </m:e>
-                      </m:d>
+                      <m:r>
+                        <m:rPr>
+                          <m:sty m:val="p"/>
+                        </m:rPr>
+                        <m:t>[</m:t>
+                      </m:r>
+                      <m:r>
+                        <m:rPr>
+                          <m:nor/>
+                          <m:sty m:val="p"/>
+                        </m:rPr>
+                        <m:t>NPV</m:t>
+                      </m:r>
+                      <m:r>
+                        <m:rPr>
+                          <m:sty m:val="p"/>
+                        </m:rPr>
+                        <m:t>(</m:t>
+                      </m:r>
+                      <m:r>
+                        <m:t>a</m:t>
+                      </m:r>
+                      <m:r>
+                        <m:rPr>
+                          <m:sty m:val="p"/>
+                        </m:rPr>
+                        <m:t>,</m:t>
+                      </m:r>
+                      <m:r>
+                        <m:rPr>
+                          <m:sty m:val="b"/>
+                        </m:rPr>
+                        <m:t>s</m:t>
+                      </m:r>
+                      <m:r>
+                        <m:rPr>
+                          <m:sty m:val="p"/>
+                        </m:rPr>
+                        <m:t>)</m:t>
+                      </m:r>
+                      <m:r>
+                        <m:rPr>
+                          <m:sty m:val="p"/>
+                        </m:rPr>
+                        <m:t>]</m:t>
+                      </m:r>
                     </m:oMath>
                   </m:oMathPara>
                 </a14:m>
@@ -6501,19 +6505,21 @@
                           </m:r>
                         </m:sub>
                       </m:sSub>
-                      <m:d>
-                        <m:dPr>
-                          <m:begChr m:val="("/>
-                          <m:sepChr m:val=""/>
-                          <m:endChr m:val=")"/>
-                          <m:grow/>
-                        </m:dPr>
-                        <m:e>
-                          <m:r>
-                            <m:t>a</m:t>
-                          </m:r>
-                        </m:e>
-                      </m:d>
+                      <m:r>
+                        <m:rPr>
+                          <m:sty m:val="p"/>
+                        </m:rPr>
+                        <m:t>(</m:t>
+                      </m:r>
+                      <m:r>
+                        <m:t>a</m:t>
+                      </m:r>
+                      <m:r>
+                        <m:rPr>
+                          <m:sty m:val="p"/>
+                        </m:rPr>
+                        <m:t>)</m:t>
+                      </m:r>
                       <m:r>
                         <m:rPr>
                           <m:sty m:val="p"/>
@@ -6535,19 +6541,21 @@
                           </m:r>
                         </m:sub>
                       </m:sSub>
-                      <m:d>
-                        <m:dPr>
-                          <m:begChr m:val="("/>
-                          <m:sepChr m:val=""/>
-                          <m:endChr m:val=")"/>
-                          <m:grow/>
-                        </m:dPr>
-                        <m:e>
-                          <m:r>
-                            <m:t>a</m:t>
-                          </m:r>
-                        </m:e>
-                      </m:d>
+                      <m:r>
+                        <m:rPr>
+                          <m:sty m:val="p"/>
+                        </m:rPr>
+                        <m:t>(</m:t>
+                      </m:r>
+                      <m:r>
+                        <m:t>a</m:t>
+                      </m:r>
+                      <m:r>
+                        <m:rPr>
+                          <m:sty m:val="p"/>
+                        </m:rPr>
+                        <m:t>)</m:t>
+                      </m:r>
                       <m:r>
                         <m:rPr>
                           <m:sty m:val="p"/>
@@ -6584,19 +6592,21 @@
                           </m:r>
                         </m:sub>
                       </m:sSub>
-                      <m:d>
-                        <m:dPr>
-                          <m:begChr m:val="("/>
-                          <m:sepChr m:val=""/>
-                          <m:endChr m:val=")"/>
-                          <m:grow/>
-                        </m:dPr>
-                        <m:e>
-                          <m:r>
-                            <m:t>a</m:t>
-                          </m:r>
-                        </m:e>
-                      </m:d>
+                      <m:r>
+                        <m:rPr>
+                          <m:sty m:val="p"/>
+                        </m:rPr>
+                        <m:t>(</m:t>
+                      </m:r>
+                      <m:r>
+                        <m:t>a</m:t>
+                      </m:r>
+                      <m:r>
+                        <m:rPr>
+                          <m:sty m:val="p"/>
+                        </m:rPr>
+                        <m:t>)</m:t>
+                      </m:r>
                       <m:r>
                         <m:rPr>
                           <m:sty m:val="p"/>
@@ -6641,19 +6651,21 @@
                         </m:r>
                       </m:sub>
                     </m:sSub>
-                    <m:d>
-                      <m:dPr>
-                        <m:begChr m:val="("/>
-                        <m:sepChr m:val=""/>
-                        <m:endChr m:val=")"/>
-                        <m:grow/>
-                      </m:dPr>
-                      <m:e>
-                        <m:r>
-                          <m:t>a</m:t>
-                        </m:r>
-                      </m:e>
-                    </m:d>
+                    <m:r>
+                      <m:rPr>
+                        <m:sty m:val="p"/>
+                      </m:rPr>
+                      <m:t>(</m:t>
+                    </m:r>
+                    <m:r>
+                      <m:t>a</m:t>
+                    </m:r>
+                    <m:r>
+                      <m:rPr>
+                        <m:sty m:val="p"/>
+                      </m:rPr>
+                      <m:t>)</m:t>
+                    </m:r>
                   </m:oMath>
                 </a14:m>
                 <a:r>
@@ -6677,19 +6689,21 @@
                         </m:r>
                       </m:sub>
                     </m:sSub>
-                    <m:d>
-                      <m:dPr>
-                        <m:begChr m:val="("/>
-                        <m:sepChr m:val=""/>
-                        <m:endChr m:val=")"/>
-                        <m:grow/>
-                      </m:dPr>
-                      <m:e>
-                        <m:r>
-                          <m:t>a</m:t>
-                        </m:r>
-                      </m:e>
-                    </m:d>
+                    <m:r>
+                      <m:rPr>
+                        <m:sty m:val="p"/>
+                      </m:rPr>
+                      <m:t>(</m:t>
+                    </m:r>
+                    <m:r>
+                      <m:t>a</m:t>
+                    </m:r>
+                    <m:r>
+                      <m:rPr>
+                        <m:sty m:val="p"/>
+                      </m:rPr>
+                      <m:t>)</m:t>
+                    </m:r>
                   </m:oMath>
                 </a14:m>
                 <a:r>
@@ -6713,19 +6727,21 @@
                         </m:r>
                       </m:sub>
                     </m:sSub>
-                    <m:d>
-                      <m:dPr>
-                        <m:begChr m:val="("/>
-                        <m:sepChr m:val=""/>
-                        <m:endChr m:val=")"/>
-                        <m:grow/>
-                      </m:dPr>
-                      <m:e>
-                        <m:r>
-                          <m:t>a</m:t>
-                        </m:r>
-                      </m:e>
-                    </m:d>
+                    <m:r>
+                      <m:rPr>
+                        <m:sty m:val="p"/>
+                      </m:rPr>
+                      <m:t>(</m:t>
+                    </m:r>
+                    <m:r>
+                      <m:t>a</m:t>
+                    </m:r>
+                    <m:r>
+                      <m:rPr>
+                        <m:sty m:val="p"/>
+                      </m:rPr>
+                      <m:t>)</m:t>
+                    </m:r>
                   </m:oMath>
                 </a14:m>
                 <a:r>
@@ -8887,7 +8903,9 @@
         <p:nvSpPr>
           <p:cNvPr id="1" name="TextBox 3"/>
           <p:cNvSpPr txBox="1"/>
-          <p:nvPr/>
+          <p:nvPr>
+            <p:ph idx="1"/>
+          </p:nvPr>
         </p:nvSpPr>
         <p:spPr>
           <a:xfrm>
@@ -9085,7 +9103,9 @@
         <p:nvSpPr>
           <p:cNvPr id="1" name="TextBox 3"/>
           <p:cNvSpPr txBox="1"/>
-          <p:nvPr/>
+          <p:nvPr>
+            <p:ph idx="1"/>
+          </p:nvPr>
         </p:nvSpPr>
         <p:spPr>
           <a:xfrm>
@@ -9402,19 +9422,21 @@
                       <m:r>
                         <m:t>F</m:t>
                       </m:r>
-                      <m:d>
-                        <m:dPr>
-                          <m:begChr m:val="("/>
-                          <m:sepChr m:val=""/>
-                          <m:endChr m:val=")"/>
-                          <m:grow/>
-                        </m:dPr>
-                        <m:e>
-                          <m:r>
-                            <m:t>a</m:t>
-                          </m:r>
-                        </m:e>
-                      </m:d>
+                      <m:r>
+                        <m:rPr>
+                          <m:sty m:val="p"/>
+                        </m:rPr>
+                        <m:t>(</m:t>
+                      </m:r>
+                      <m:r>
+                        <m:t>a</m:t>
+                      </m:r>
+                      <m:r>
+                        <m:rPr>
+                          <m:sty m:val="p"/>
+                        </m:rPr>
+                        <m:t>)</m:t>
+                      </m:r>
                       <m:r>
                         <m:rPr>
                           <m:sty m:val="p"/>
@@ -9465,19 +9487,21 @@
                           </m:r>
                         </m:sub>
                       </m:sSub>
-                      <m:d>
-                        <m:dPr>
-                          <m:begChr m:val="("/>
-                          <m:sepChr m:val=""/>
-                          <m:endChr m:val=")"/>
-                          <m:grow/>
-                        </m:dPr>
-                        <m:e>
-                          <m:r>
-                            <m:t>a</m:t>
-                          </m:r>
-                        </m:e>
-                      </m:d>
+                      <m:r>
+                        <m:rPr>
+                          <m:sty m:val="p"/>
+                        </m:rPr>
+                        <m:t>(</m:t>
+                      </m:r>
+                      <m:r>
+                        <m:t>a</m:t>
+                      </m:r>
+                      <m:r>
+                        <m:rPr>
+                          <m:sty m:val="p"/>
+                        </m:rPr>
+                        <m:t>)</m:t>
+                      </m:r>
                     </m:oMath>
                   </m:oMathPara>
                 </a14:m>
@@ -10656,7 +10680,9 @@
         <p:nvSpPr>
           <p:cNvPr id="1" name="TextBox 3"/>
           <p:cNvSpPr txBox="1"/>
-          <p:nvPr/>
+          <p:nvPr>
+            <p:ph idx="1"/>
+          </p:nvPr>
         </p:nvSpPr>
         <p:spPr>
           <a:xfrm>

--- a/lectures/week-12/index.pptx
+++ b/lectures/week-12/index.pptx
@@ -5,7 +5,7 @@
     <p:sldMasterId id="2147483648" r:id="rId1"/>
   </p:sldMasterIdLst>
   <p:notesMasterIdLst>
-    <p:notesMasterId r:id="rId18"/>
+    <p:notesMasterId r:id="rId19"/>
   </p:notesMasterIdLst>
   <p:sldIdLst>
     <p:sldId id="256" r:id="rId2"/>
@@ -24,6 +24,7 @@
     <p:sldId id="269" r:id="rId15"/>
     <p:sldId id="270" r:id="rId16"/>
     <p:sldId id="271" r:id="rId17"/>
+    <p:sldId id="272" r:id="rId18"/>
   </p:sldIdLst>
   <p:sldSz cx="9144000" cy="5143500" type="screen16x9"/>
   <p:notesSz cx="6858000" cy="9144000"/>
@@ -621,7 +622,35 @@
             </a:pPr>
             <a:r>
               <a:rPr/>
-              <a:t>Target: 1:50. 40 random points scattered all over objective space. Archive starts as whatever subset is mutually non-dominated under the ε-grid.</a:t>
+              <a:t>Target: 1:46. Real MOEAs use polynomial mutation and simulated binary crossover. Gaussian + clamp is the simplest thing that works and makes the mechanism transparent. Step size 0.1 is small enough to refine, large enough to escape local clusters.</a:t>
+            </a:r>
+          </a:p>
+          <a:p>
+            <a:pPr lvl="0" indent="0" marL="0">
+              <a:buNone/>
+            </a:pPr>
+          </a:p>
+          <a:p>
+            <a:pPr lvl="0" indent="0" marL="0">
+              <a:buNone/>
+            </a:pPr>
+            <a:r>
+              <a:rPr/>
+              <a:t>Target: 1:48. The trick: ε-dominance reduces to ordinary dominance on rounded coordinates. Two short functions.</a:t>
+            </a:r>
+          </a:p>
+          <a:p>
+            <a:pPr lvl="0" indent="0" marL="0">
+              <a:buNone/>
+            </a:pPr>
+          </a:p>
+          <a:p>
+            <a:pPr lvl="0" indent="0" marL="0">
+              <a:buNone/>
+            </a:pPr>
+            <a:r>
+              <a:rPr/>
+              <a:t>Target: 1:50. Three cases: same box → keep the one closer to the corner; existing member dominates candidate → reject; candidate dominates existing → mark for removal. Tie-breaking by corner distance gives clean coverage.</a:t>
             </a:r>
           </a:p>
         </p:txBody>
@@ -703,21 +732,7 @@
             </a:pPr>
             <a:r>
               <a:rPr/>
-              <a:t>Target: 1:52. The mix of (a) parents from archive and (b) parents from current pop, plus (c) occasional fresh random samples, prevents premature collapse and keeps the corners reachable. Saving snapshots lets us animate the run.</a:t>
-            </a:r>
-          </a:p>
-          <a:p>
-            <a:pPr lvl="0" indent="0" marL="0">
-              <a:buNone/>
-            </a:pPr>
-          </a:p>
-          <a:p>
-            <a:pPr lvl="0" indent="0" marL="0">
-              <a:buNone/>
-            </a:pPr>
-            <a:r>
-              <a:rPr/>
-              <a:t>Target: 1:55. Random scatter → quick collapse onto the front → progressive filling-in along the curve, including the corners. Nothing in the algorithm knows the analytical front exists — just dominance + mutation + ε-bookkeeping. Real MOEAs (NSGA-II, Borg) add smarter recombination, but the conceptual machinery is identical.</a:t>
+              <a:t>Target: 1:50. 40 random points scattered all over objective space. Archive starts as whatever subset is mutually non-dominated under the ε-grid.</a:t>
             </a:r>
           </a:p>
         </p:txBody>
@@ -799,7 +814,21 @@
             </a:pPr>
             <a:r>
               <a:rPr/>
-              <a:t>Target: 1:56. Quick section — 5 min.</a:t>
+              <a:t>Target: 1:52. The mix of (a) parents from archive and (b) parents from current pop, plus (c) occasional fresh random samples, prevents premature collapse and keeps the corners reachable. Saving snapshots lets us animate the run.</a:t>
+            </a:r>
+          </a:p>
+          <a:p>
+            <a:pPr lvl="0" indent="0" marL="0">
+              <a:buNone/>
+            </a:pPr>
+          </a:p>
+          <a:p>
+            <a:pPr lvl="0" indent="0" marL="0">
+              <a:buNone/>
+            </a:pPr>
+            <a:r>
+              <a:rPr/>
+              <a:t>Target: 1:55. Random scatter → quick collapse onto the front → progressive filling-in along the curve, including the corners. Nothing in the algorithm knows the analytical front exists — just dominance + mutation + ε-bookkeeping. Real MOEAs (NSGA-II, Borg) add smarter recombination, but the conceptual machinery is identical.</a:t>
             </a:r>
           </a:p>
         </p:txBody>
@@ -881,7 +910,7 @@
             </a:pPr>
             <a:r>
               <a:rPr/>
-              <a:t>Target: 1:58. Each vertical axis is one objective; each colored line is a solution. Solutions good on reliability tend to be worse on cost. Color = model case. Water portfolio problem in the Rio Grande Valley. ~1000 non-dominated solutions across 6 objectives.</a:t>
+              <a:t>Target: 1:56. Quick section — 5 min.</a:t>
             </a:r>
           </a:p>
         </p:txBody>
@@ -963,21 +992,7 @@
             </a:pPr>
             <a:r>
               <a:rPr/>
-              <a:t>Target: 1:50. Preview Lab 10: students will generate a Pareto front for the house elevation problem.</a:t>
-            </a:r>
-          </a:p>
-          <a:p>
-            <a:pPr lvl="0" indent="0" marL="0">
-              <a:buNone/>
-            </a:pPr>
-          </a:p>
-          <a:p>
-            <a:pPr lvl="0" indent="0" marL="0">
-              <a:buNone/>
-            </a:pPr>
-            <a:r>
-              <a:rPr/>
-              <a:t>Target: 1:52. Counterweight to the motivation. MOO is powerful but not free. Most student projects have 2–3 meaningful objectives at most.</a:t>
+              <a:t>Target: 1:58. Each vertical axis is one objective; each colored line is a solution. Solutions good on reliability tend to be worse on cost. Color = model case. Water portfolio problem in the Rio Grande Valley. ~1000 non-dominated solutions across 6 objectives.</a:t>
             </a:r>
           </a:p>
         </p:txBody>
@@ -1059,7 +1074,7 @@
             </a:pPr>
             <a:r>
               <a:rPr/>
-              <a:t>Target: 1:53. Recap before Looking Ahead. Emphasize the division of labor — that is the key conceptual takeaway distinguishing MOO from BCA.</a:t>
+              <a:t>Target: 1:50. Preview Lab 10: students will generate a Pareto front for the house elevation problem.</a:t>
             </a:r>
           </a:p>
           <a:p>
@@ -1073,7 +1088,7 @@
             </a:pPr>
             <a:r>
               <a:rPr/>
-              <a:t>Target: 1:53. End class here. Madison leads Wednesday — students should read Yang et al. with attention to: (1) what are the objectives? (2) how is the Pareto front generated and interpreted? (3) how do the authors handle trade-offs with decision-makers?</a:t>
+              <a:t>Target: 1:52. Counterweight to the motivation. MOO is powerful but not free. Most student projects have 2–3 meaningful objectives at most.</a:t>
             </a:r>
           </a:p>
         </p:txBody>
@@ -1096,6 +1111,102 @@
             <a:fld id="{18BDFEC3-8487-43E8-A154-7C12CBC1FFF2}" type="slidenum">
               <a:rPr lang="en-US"/>
               <a:t>16</a:t>
+            </a:fld>
+            <a:endParaRPr lang="en-US"/>
+          </a:p>
+        </p:txBody>
+      </p:sp>
+    </p:spTree>
+  </p:cSld>
+</p:notes>
+</file>
+
+<file path=ppt/notesSlides/notesSlide16.xml><?xml version="1.0" encoding="utf-8"?>
+<p:notes xmlns:a="http://schemas.openxmlformats.org/drawingml/2006/main" xmlns:r="http://schemas.openxmlformats.org/officeDocument/2006/relationships" xmlns:p="http://schemas.openxmlformats.org/presentationml/2006/main">
+  <p:cSld>
+    <p:spTree>
+      <p:nvGrpSpPr>
+        <p:cNvPr id="1" name=""/>
+        <p:cNvGrpSpPr/>
+        <p:nvPr/>
+      </p:nvGrpSpPr>
+      <p:grpSpPr>
+        <a:xfrm>
+          <a:off x="0" y="0"/>
+          <a:ext cx="0" cy="0"/>
+          <a:chOff x="0" y="0"/>
+          <a:chExt cx="0" cy="0"/>
+        </a:xfrm>
+      </p:grpSpPr>
+      <p:sp>
+        <p:nvSpPr>
+          <p:cNvPr id="2" name="Slide Image Placeholder 1"/>
+          <p:cNvSpPr>
+            <a:spLocks noGrp="1" noRot="1" noChangeAspect="1"/>
+          </p:cNvSpPr>
+          <p:nvPr>
+            <p:ph type="sldImg"/>
+          </p:nvPr>
+        </p:nvSpPr>
+        <p:spPr/>
+      </p:sp>
+      <p:sp>
+        <p:nvSpPr>
+          <p:cNvPr id="3" name="Notes Placeholder 2"/>
+          <p:cNvSpPr>
+            <a:spLocks noGrp="1"/>
+          </p:cNvSpPr>
+          <p:nvPr>
+            <p:ph type="body" idx="1"/>
+          </p:nvPr>
+        </p:nvSpPr>
+        <p:spPr/>
+        <p:txBody>
+          <a:bodyPr/>
+          <a:lstStyle/>
+          <a:p>
+            <a:pPr lvl="0" indent="0" marL="0">
+              <a:buNone/>
+            </a:pPr>
+            <a:r>
+              <a:rPr/>
+              <a:t>Target: 1:53. Recap before Looking Ahead. Emphasize the division of labor — that is the key conceptual takeaway distinguishing MOO from BCA.</a:t>
+            </a:r>
+          </a:p>
+          <a:p>
+            <a:pPr lvl="0" indent="0" marL="0">
+              <a:buNone/>
+            </a:pPr>
+          </a:p>
+          <a:p>
+            <a:pPr lvl="0" indent="0" marL="0">
+              <a:buNone/>
+            </a:pPr>
+            <a:r>
+              <a:rPr/>
+              <a:t>Target: 1:53. End class here. Madison leads Wednesday — students should read Yang et al. with attention to: (1) what are the objectives? (2) how is the Pareto front generated and interpreted? (3) how do the authors handle trade-offs with decision-makers?</a:t>
+            </a:r>
+          </a:p>
+        </p:txBody>
+      </p:sp>
+      <p:sp>
+        <p:nvSpPr>
+          <p:cNvPr id="4" name="Slide Number Placeholder 3"/>
+          <p:cNvSpPr>
+            <a:spLocks noGrp="1"/>
+          </p:cNvSpPr>
+          <p:nvPr>
+            <p:ph type="sldNum" sz="quarter" idx="10"/>
+          </p:nvPr>
+        </p:nvSpPr>
+        <p:spPr/>
+        <p:txBody>
+          <a:bodyPr/>
+          <a:lstStyle/>
+          <a:p>
+            <a:fld id="{18BDFEC3-8487-43E8-A154-7C12CBC1FFF2}" type="slidenum">
+              <a:rPr lang="en-US"/>
+              <a:t>17</a:t>
             </a:fld>
             <a:endParaRPr lang="en-US"/>
           </a:p>
@@ -1744,44 +1855,6 @@
               <a:t> the machinery.</a:t>
             </a:r>
           </a:p>
-          <a:p>
-            <a:pPr lvl="0" indent="0" marL="0">
-              <a:buNone/>
-            </a:pPr>
-          </a:p>
-          <a:p>
-            <a:pPr lvl="0" indent="0" marL="0">
-              <a:buNone/>
-            </a:pPr>
-            <a:r>
-              <a:rPr/>
-              <a:t>Target: 1:45. ZDT1 is one of the Zitzler–Deb–Thiele benchmark problems. The front is convex; algorithms have to find the whole thin red curve from </a:t>
-            </a:r>
-            <a:r>
-              <a:rPr/>
-              <a:t>(0,1)</a:t>
-            </a:r>
-            <a:r>
-              <a:rPr/>
-              <a:t> to </a:t>
-            </a:r>
-            <a:r>
-              <a:rPr/>
-              <a:t>(1,0)</a:t>
-            </a:r>
-            <a:r>
-              <a:rPr/>
-              <a:t>. Off the front, </a:t>
-            </a:r>
-            <a:r>
-              <a:rPr/>
-              <a:t>f_2</a:t>
-            </a:r>
-            <a:r>
-              <a:rPr/>
-              <a:t> shoots up.</a:t>
-            </a:r>
-          </a:p>
         </p:txBody>
       </p:sp>
       <p:sp>
@@ -1861,35 +1934,31 @@
             </a:pPr>
             <a:r>
               <a:rPr/>
-              <a:t>Target: 1:46. Real MOEAs use polynomial mutation and simulated binary crossover. Gaussian + clamp is the simplest thing that works and makes the mechanism transparent. Step size 0.1 is small enough to refine, large enough to escape local clusters.</a:t>
-            </a:r>
-          </a:p>
-          <a:p>
-            <a:pPr lvl="0" indent="0" marL="0">
-              <a:buNone/>
-            </a:pPr>
-          </a:p>
-          <a:p>
-            <a:pPr lvl="0" indent="0" marL="0">
-              <a:buNone/>
-            </a:pPr>
+              <a:t>Target: 1:45. ZDT1 is one of the Zitzler–Deb–Thiele benchmark problems. The front is convex; algorithms have to find the whole thin red curve from </a:t>
+            </a:r>
             <a:r>
               <a:rPr/>
-              <a:t>Target: 1:48. The trick: ε-dominance reduces to ordinary dominance on rounded coordinates. Two short functions.</a:t>
-            </a:r>
-          </a:p>
-          <a:p>
-            <a:pPr lvl="0" indent="0" marL="0">
-              <a:buNone/>
-            </a:pPr>
-          </a:p>
-          <a:p>
-            <a:pPr lvl="0" indent="0" marL="0">
-              <a:buNone/>
-            </a:pPr>
+              <a:t>(0,1)</a:t>
+            </a:r>
             <a:r>
               <a:rPr/>
-              <a:t>Target: 1:50. Three cases: same box → keep the one closer to the corner; existing member dominates candidate → reject; candidate dominates existing → mark for removal. Tie-breaking by corner distance gives clean coverage.</a:t>
+              <a:t> to </a:t>
+            </a:r>
+            <a:r>
+              <a:rPr/>
+              <a:t>(1,0)</a:t>
+            </a:r>
+            <a:r>
+              <a:rPr/>
+              <a:t>. Off the front, </a:t>
+            </a:r>
+            <a:r>
+              <a:rPr/>
+              <a:t>f_2</a:t>
+            </a:r>
+            <a:r>
+              <a:rPr/>
+              <a:t> shoots up.</a:t>
             </a:r>
           </a:p>
         </p:txBody>
@@ -5006,6 +5075,1694 @@
         <mc:Choice xmlns:a14="http://schemas.microsoft.com/office/drawing/2010/main" Requires="a14">
           <p:sp>
             <p:nvSpPr>
+              <p:cNvPr id="3" name="Text Placeholder 2"/>
+              <p:cNvSpPr>
+                <a:spLocks noGrp="1"/>
+              </p:cNvSpPr>
+              <p:nvPr>
+                <p:ph idx="1" type="body"/>
+              </p:nvPr>
+            </p:nvSpPr>
+            <p:spPr/>
+            <p:txBody>
+              <a:bodyPr/>
+              <a:lstStyle/>
+              <a:p>
+                <a:pPr lvl="0" indent="0" marL="0">
+                  <a:buNone/>
+                </a:pPr>
+                <a:r>
+                  <a:rPr/>
+                  <a:t>A standard MOO benchmark with two decision variables </a:t>
+                </a:r>
+                <a14:m>
+                  <m:oMath xmlns:m="http://schemas.openxmlformats.org/officeDocument/2006/math">
+                    <m:sSub>
+                      <m:e>
+                        <m:r>
+                          <m:t>x</m:t>
+                        </m:r>
+                      </m:e>
+                      <m:sub>
+                        <m:r>
+                          <m:t>1</m:t>
+                        </m:r>
+                      </m:sub>
+                    </m:sSub>
+                    <m:r>
+                      <m:rPr>
+                        <m:sty m:val="p"/>
+                      </m:rPr>
+                      <m:t>,</m:t>
+                    </m:r>
+                    <m:sSub>
+                      <m:e>
+                        <m:r>
+                          <m:t>x</m:t>
+                        </m:r>
+                      </m:e>
+                      <m:sub>
+                        <m:r>
+                          <m:t>2</m:t>
+                        </m:r>
+                      </m:sub>
+                    </m:sSub>
+                    <m:r>
+                      <m:rPr>
+                        <m:sty m:val="p"/>
+                      </m:rPr>
+                      <m:t>∈</m:t>
+                    </m:r>
+                    <m:r>
+                      <m:rPr>
+                        <m:sty m:val="p"/>
+                      </m:rPr>
+                      <m:t>[</m:t>
+                    </m:r>
+                    <m:r>
+                      <m:t>0</m:t>
+                    </m:r>
+                    <m:r>
+                      <m:rPr>
+                        <m:sty m:val="p"/>
+                      </m:rPr>
+                      <m:t>,</m:t>
+                    </m:r>
+                    <m:r>
+                      <m:t>1</m:t>
+                    </m:r>
+                    <m:r>
+                      <m:rPr>
+                        <m:sty m:val="p"/>
+                      </m:rPr>
+                      <m:t>]</m:t>
+                    </m:r>
+                  </m:oMath>
+                </a14:m>
+                <a:r>
+                  <a:rPr/>
+                  <a:t> and two objectives (both minimized):</a:t>
+                </a:r>
+              </a:p>
+              <a:p>
+                <a:pPr lvl="0" indent="0" marL="0">
+                  <a:buNone/>
+                </a:pPr>
+                <a14:m>
+                  <m:oMathPara xmlns:m="http://schemas.openxmlformats.org/officeDocument/2006/math">
+                    <m:oMathParaPr>
+                      <m:jc m:val="center"/>
+                    </m:oMathParaPr>
+                    <m:oMath>
+                      <m:eqArr>
+                        <m:e>
+                          <m:sSub>
+                            <m:e>
+                              <m:r>
+                                <m:t>f</m:t>
+                              </m:r>
+                            </m:e>
+                            <m:sub>
+                              <m:r>
+                                <m:t>1</m:t>
+                              </m:r>
+                            </m:sub>
+                          </m:sSub>
+                          <m:r>
+                            <m:t>&amp;</m:t>
+                          </m:r>
+                          <m:r>
+                            <m:rPr>
+                              <m:sty m:val="p"/>
+                            </m:rPr>
+                            <m:t>=</m:t>
+                          </m:r>
+                          <m:sSub>
+                            <m:e>
+                              <m:r>
+                                <m:t>x</m:t>
+                              </m:r>
+                            </m:e>
+                            <m:sub>
+                              <m:r>
+                                <m:t>1</m:t>
+                              </m:r>
+                            </m:sub>
+                          </m:sSub>
+                        </m:e>
+                        <m:e>
+                          <m:sSub>
+                            <m:e>
+                              <m:r>
+                                <m:t>f</m:t>
+                              </m:r>
+                            </m:e>
+                            <m:sub>
+                              <m:r>
+                                <m:t>2</m:t>
+                              </m:r>
+                            </m:sub>
+                          </m:sSub>
+                          <m:r>
+                            <m:t>&amp;</m:t>
+                          </m:r>
+                          <m:r>
+                            <m:rPr>
+                              <m:sty m:val="p"/>
+                            </m:rPr>
+                            <m:t>=</m:t>
+                          </m:r>
+                          <m:r>
+                            <m:t>g</m:t>
+                          </m:r>
+                          <m:r>
+                            <m:rPr>
+                              <m:sty m:val="p"/>
+                            </m:rPr>
+                            <m:t>(</m:t>
+                          </m:r>
+                          <m:sSub>
+                            <m:e>
+                              <m:r>
+                                <m:t>x</m:t>
+                              </m:r>
+                            </m:e>
+                            <m:sub>
+                              <m:r>
+                                <m:t>2</m:t>
+                              </m:r>
+                            </m:sub>
+                          </m:sSub>
+                          <m:r>
+                            <m:rPr>
+                              <m:sty m:val="p"/>
+                            </m:rPr>
+                            <m:t>)</m:t>
+                          </m:r>
+                          <m:d>
+                            <m:dPr>
+                              <m:begChr m:val="("/>
+                              <m:sepChr m:val=""/>
+                              <m:endChr m:val=")"/>
+                              <m:grow/>
+                            </m:dPr>
+                            <m:e>
+                              <m:r>
+                                <m:t>1</m:t>
+                              </m:r>
+                              <m:r>
+                                <m:rPr>
+                                  <m:sty m:val="p"/>
+                                </m:rPr>
+                                <m:t>−</m:t>
+                              </m:r>
+                              <m:rad>
+                                <m:radPr>
+                                  <m:degHide m:val="on"/>
+                                </m:radPr>
+                                <m:deg/>
+                                <m:e>
+                                  <m:sSub>
+                                    <m:e>
+                                      <m:r>
+                                        <m:t>f</m:t>
+                                      </m:r>
+                                    </m:e>
+                                    <m:sub>
+                                      <m:r>
+                                        <m:t>1</m:t>
+                                      </m:r>
+                                    </m:sub>
+                                  </m:sSub>
+                                  <m:r>
+                                    <m:rPr>
+                                      <m:sty m:val="p"/>
+                                    </m:rPr>
+                                    <m:t>/</m:t>
+                                  </m:r>
+                                  <m:r>
+                                    <m:t>g</m:t>
+                                  </m:r>
+                                  <m:r>
+                                    <m:rPr>
+                                      <m:sty m:val="p"/>
+                                    </m:rPr>
+                                    <m:t>(</m:t>
+                                  </m:r>
+                                  <m:sSub>
+                                    <m:e>
+                                      <m:r>
+                                        <m:t>x</m:t>
+                                      </m:r>
+                                    </m:e>
+                                    <m:sub>
+                                      <m:r>
+                                        <m:t>2</m:t>
+                                      </m:r>
+                                    </m:sub>
+                                  </m:sSub>
+                                  <m:r>
+                                    <m:rPr>
+                                      <m:sty m:val="p"/>
+                                    </m:rPr>
+                                    <m:t>)</m:t>
+                                  </m:r>
+                                </m:e>
+                              </m:rad>
+                            </m:e>
+                          </m:d>
+                        </m:e>
+                        <m:e>
+                          <m:r>
+                            <m:t>g</m:t>
+                          </m:r>
+                          <m:r>
+                            <m:rPr>
+                              <m:sty m:val="p"/>
+                            </m:rPr>
+                            <m:t>(</m:t>
+                          </m:r>
+                          <m:sSub>
+                            <m:e>
+                              <m:r>
+                                <m:t>x</m:t>
+                              </m:r>
+                            </m:e>
+                            <m:sub>
+                              <m:r>
+                                <m:t>2</m:t>
+                              </m:r>
+                            </m:sub>
+                          </m:sSub>
+                          <m:r>
+                            <m:rPr>
+                              <m:sty m:val="p"/>
+                            </m:rPr>
+                            <m:t>)</m:t>
+                          </m:r>
+                          <m:r>
+                            <m:t>&amp;</m:t>
+                          </m:r>
+                          <m:r>
+                            <m:rPr>
+                              <m:sty m:val="p"/>
+                            </m:rPr>
+                            <m:t>=</m:t>
+                          </m:r>
+                          <m:r>
+                            <m:t>1</m:t>
+                          </m:r>
+                          <m:r>
+                            <m:rPr>
+                              <m:sty m:val="p"/>
+                            </m:rPr>
+                            <m:t>+</m:t>
+                          </m:r>
+                          <m:r>
+                            <m:t>9</m:t>
+                          </m:r>
+                          <m:sSub>
+                            <m:e>
+                              <m:r>
+                                <m:t>x</m:t>
+                              </m:r>
+                            </m:e>
+                            <m:sub>
+                              <m:r>
+                                <m:t>2</m:t>
+                              </m:r>
+                            </m:sub>
+                          </m:sSub>
+                        </m:e>
+                      </m:eqArr>
+                    </m:oMath>
+                  </m:oMathPara>
+                </a14:m>
+              </a:p>
+              <a:p>
+                <a:pPr lvl="0" indent="0" marL="0">
+                  <a:buNone/>
+                </a:pPr>
+                <a:r>
+                  <a:rPr/>
+                  <a:t>The analytical Pareto front is </a:t>
+                </a:r>
+                <a14:m>
+                  <m:oMath xmlns:m="http://schemas.openxmlformats.org/officeDocument/2006/math">
+                    <m:sSub>
+                      <m:e>
+                        <m:r>
+                          <m:t>x</m:t>
+                        </m:r>
+                      </m:e>
+                      <m:sub>
+                        <m:r>
+                          <m:t>2</m:t>
+                        </m:r>
+                      </m:sub>
+                    </m:sSub>
+                    <m:r>
+                      <m:rPr>
+                        <m:sty m:val="p"/>
+                      </m:rPr>
+                      <m:t>=</m:t>
+                    </m:r>
+                    <m:r>
+                      <m:t>0</m:t>
+                    </m:r>
+                  </m:oMath>
+                </a14:m>
+                <a:r>
+                  <a:rPr/>
+                  <a:t>, giving </a:t>
+                </a:r>
+                <a14:m>
+                  <m:oMath xmlns:m="http://schemas.openxmlformats.org/officeDocument/2006/math">
+                    <m:sSub>
+                      <m:e>
+                        <m:r>
+                          <m:t>f</m:t>
+                        </m:r>
+                      </m:e>
+                      <m:sub>
+                        <m:r>
+                          <m:t>2</m:t>
+                        </m:r>
+                      </m:sub>
+                    </m:sSub>
+                    <m:r>
+                      <m:rPr>
+                        <m:sty m:val="p"/>
+                      </m:rPr>
+                      <m:t>=</m:t>
+                    </m:r>
+                    <m:r>
+                      <m:t>1</m:t>
+                    </m:r>
+                    <m:r>
+                      <m:rPr>
+                        <m:sty m:val="p"/>
+                      </m:rPr>
+                      <m:t>−</m:t>
+                    </m:r>
+                    <m:rad>
+                      <m:radPr>
+                        <m:degHide m:val="on"/>
+                      </m:radPr>
+                      <m:deg/>
+                      <m:e>
+                        <m:sSub>
+                          <m:e>
+                            <m:r>
+                              <m:t>f</m:t>
+                            </m:r>
+                          </m:e>
+                          <m:sub>
+                            <m:r>
+                              <m:t>1</m:t>
+                            </m:r>
+                          </m:sub>
+                        </m:sSub>
+                      </m:e>
+                    </m:rad>
+                  </m:oMath>
+                </a14:m>
+                <a:r>
+                  <a:rPr/>
+                  <a:t> on </a:t>
+                </a:r>
+                <a14:m>
+                  <m:oMath xmlns:m="http://schemas.openxmlformats.org/officeDocument/2006/math">
+                    <m:sSub>
+                      <m:e>
+                        <m:r>
+                          <m:t>f</m:t>
+                        </m:r>
+                      </m:e>
+                      <m:sub>
+                        <m:r>
+                          <m:t>1</m:t>
+                        </m:r>
+                      </m:sub>
+                    </m:sSub>
+                    <m:r>
+                      <m:rPr>
+                        <m:sty m:val="p"/>
+                      </m:rPr>
+                      <m:t>∈</m:t>
+                    </m:r>
+                    <m:r>
+                      <m:rPr>
+                        <m:sty m:val="p"/>
+                      </m:rPr>
+                      <m:t>[</m:t>
+                    </m:r>
+                    <m:r>
+                      <m:t>0</m:t>
+                    </m:r>
+                    <m:r>
+                      <m:rPr>
+                        <m:sty m:val="p"/>
+                      </m:rPr>
+                      <m:t>,</m:t>
+                    </m:r>
+                    <m:r>
+                      <m:t>1</m:t>
+                    </m:r>
+                    <m:r>
+                      <m:rPr>
+                        <m:sty m:val="p"/>
+                      </m:rPr>
+                      <m:t>]</m:t>
+                    </m:r>
+                  </m:oMath>
+                </a14:m>
+                <a:r>
+                  <a:rPr/>
+                  <a:t>.</a:t>
+                </a:r>
+              </a:p>
+            </p:txBody>
+          </p:sp>
+        </mc:Choice>
+      </mc:AlternateContent>
+      <p:sp>
+        <p:nvSpPr>
+          <p:cNvPr id="5" name="Text Placeholder 4"/>
+          <p:cNvSpPr>
+            <a:spLocks noGrp="1"/>
+          </p:cNvSpPr>
+          <p:nvPr>
+            <p:ph idx="3" sz="quarter" type="body"/>
+          </p:nvPr>
+        </p:nvSpPr>
+        <p:spPr/>
+        <p:txBody>
+          <a:bodyPr/>
+          <a:lstStyle/>
+          <a:p>
+            <a:pPr lvl="0" indent="0">
+              <a:buNone/>
+            </a:pPr>
+            <a:r>
+              <a:rPr>
+                <a:solidFill>
+                  <a:srgbClr val="00769E"/>
+                </a:solidFill>
+                <a:latin typeface="Courier"/>
+              </a:rPr>
+              <a:t>using</a:t>
+            </a:r>
+            <a:r>
+              <a:rPr>
+                <a:solidFill>
+                  <a:srgbClr val="003B4F"/>
+                </a:solidFill>
+                <a:latin typeface="Courier"/>
+              </a:rPr>
+              <a:t> Random</a:t>
+            </a:r>
+            <a:br/>
+            <a:r>
+              <a:rPr>
+                <a:solidFill>
+                  <a:srgbClr val="003B4F"/>
+                </a:solidFill>
+                <a:latin typeface="Courier"/>
+              </a:rPr>
+              <a:t>Random.</a:t>
+            </a:r>
+            <a:r>
+              <a:rPr>
+                <a:solidFill>
+                  <a:srgbClr val="4758AB"/>
+                </a:solidFill>
+                <a:latin typeface="Courier"/>
+              </a:rPr>
+              <a:t>seed!</a:t>
+            </a:r>
+            <a:r>
+              <a:rPr>
+                <a:solidFill>
+                  <a:srgbClr val="003B4F"/>
+                </a:solidFill>
+                <a:latin typeface="Courier"/>
+              </a:rPr>
+              <a:t>(</a:t>
+            </a:r>
+            <a:r>
+              <a:rPr>
+                <a:solidFill>
+                  <a:srgbClr val="AD0000"/>
+                </a:solidFill>
+                <a:latin typeface="Courier"/>
+              </a:rPr>
+              <a:t>1</a:t>
+            </a:r>
+            <a:r>
+              <a:rPr>
+                <a:solidFill>
+                  <a:srgbClr val="003B4F"/>
+                </a:solidFill>
+                <a:latin typeface="Courier"/>
+              </a:rPr>
+              <a:t>)</a:t>
+            </a:r>
+            <a:br/>
+            <a:br/>
+            <a:r>
+              <a:rPr b="1">
+                <a:solidFill>
+                  <a:srgbClr val="003B4F"/>
+                </a:solidFill>
+                <a:latin typeface="Courier"/>
+              </a:rPr>
+              <a:t>function</a:t>
+            </a:r>
+            <a:r>
+              <a:rPr>
+                <a:solidFill>
+                  <a:srgbClr val="003B4F"/>
+                </a:solidFill>
+                <a:latin typeface="Courier"/>
+              </a:rPr>
+              <a:t> </a:t>
+            </a:r>
+            <a:r>
+              <a:rPr>
+                <a:solidFill>
+                  <a:srgbClr val="4758AB"/>
+                </a:solidFill>
+                <a:latin typeface="Courier"/>
+              </a:rPr>
+              <a:t>zdt1</a:t>
+            </a:r>
+            <a:r>
+              <a:rPr>
+                <a:solidFill>
+                  <a:srgbClr val="003B4F"/>
+                </a:solidFill>
+                <a:latin typeface="Courier"/>
+              </a:rPr>
+              <a:t>(x)</a:t>
+            </a:r>
+            <a:br/>
+            <a:r>
+              <a:rPr>
+                <a:solidFill>
+                  <a:srgbClr val="003B4F"/>
+                </a:solidFill>
+                <a:latin typeface="Courier"/>
+              </a:rPr>
+              <a:t>    f1 </a:t>
+            </a:r>
+            <a:r>
+              <a:rPr>
+                <a:solidFill>
+                  <a:srgbClr val="5E5E5E"/>
+                </a:solidFill>
+                <a:latin typeface="Courier"/>
+              </a:rPr>
+              <a:t>=</a:t>
+            </a:r>
+            <a:r>
+              <a:rPr>
+                <a:solidFill>
+                  <a:srgbClr val="003B4F"/>
+                </a:solidFill>
+                <a:latin typeface="Courier"/>
+              </a:rPr>
+              <a:t> x[</a:t>
+            </a:r>
+            <a:r>
+              <a:rPr>
+                <a:solidFill>
+                  <a:srgbClr val="AD0000"/>
+                </a:solidFill>
+                <a:latin typeface="Courier"/>
+              </a:rPr>
+              <a:t>1</a:t>
+            </a:r>
+            <a:r>
+              <a:rPr>
+                <a:solidFill>
+                  <a:srgbClr val="003B4F"/>
+                </a:solidFill>
+                <a:latin typeface="Courier"/>
+              </a:rPr>
+              <a:t>]</a:t>
+            </a:r>
+            <a:br/>
+            <a:r>
+              <a:rPr>
+                <a:solidFill>
+                  <a:srgbClr val="003B4F"/>
+                </a:solidFill>
+                <a:latin typeface="Courier"/>
+              </a:rPr>
+              <a:t>    g </a:t>
+            </a:r>
+            <a:r>
+              <a:rPr>
+                <a:solidFill>
+                  <a:srgbClr val="5E5E5E"/>
+                </a:solidFill>
+                <a:latin typeface="Courier"/>
+              </a:rPr>
+              <a:t>=</a:t>
+            </a:r>
+            <a:r>
+              <a:rPr>
+                <a:solidFill>
+                  <a:srgbClr val="003B4F"/>
+                </a:solidFill>
+                <a:latin typeface="Courier"/>
+              </a:rPr>
+              <a:t> </a:t>
+            </a:r>
+            <a:r>
+              <a:rPr>
+                <a:solidFill>
+                  <a:srgbClr val="AD0000"/>
+                </a:solidFill>
+                <a:latin typeface="Courier"/>
+              </a:rPr>
+              <a:t>1</a:t>
+            </a:r>
+            <a:r>
+              <a:rPr>
+                <a:solidFill>
+                  <a:srgbClr val="003B4F"/>
+                </a:solidFill>
+                <a:latin typeface="Courier"/>
+              </a:rPr>
+              <a:t> </a:t>
+            </a:r>
+            <a:r>
+              <a:rPr>
+                <a:solidFill>
+                  <a:srgbClr val="5E5E5E"/>
+                </a:solidFill>
+                <a:latin typeface="Courier"/>
+              </a:rPr>
+              <a:t>+</a:t>
+            </a:r>
+            <a:r>
+              <a:rPr>
+                <a:solidFill>
+                  <a:srgbClr val="003B4F"/>
+                </a:solidFill>
+                <a:latin typeface="Courier"/>
+              </a:rPr>
+              <a:t> </a:t>
+            </a:r>
+            <a:r>
+              <a:rPr>
+                <a:solidFill>
+                  <a:srgbClr val="AD0000"/>
+                </a:solidFill>
+                <a:latin typeface="Courier"/>
+              </a:rPr>
+              <a:t>9</a:t>
+            </a:r>
+            <a:r>
+              <a:rPr>
+                <a:solidFill>
+                  <a:srgbClr val="003B4F"/>
+                </a:solidFill>
+                <a:latin typeface="Courier"/>
+              </a:rPr>
+              <a:t> </a:t>
+            </a:r>
+            <a:r>
+              <a:rPr>
+                <a:solidFill>
+                  <a:srgbClr val="5E5E5E"/>
+                </a:solidFill>
+                <a:latin typeface="Courier"/>
+              </a:rPr>
+              <a:t>*</a:t>
+            </a:r>
+            <a:r>
+              <a:rPr>
+                <a:solidFill>
+                  <a:srgbClr val="003B4F"/>
+                </a:solidFill>
+                <a:latin typeface="Courier"/>
+              </a:rPr>
+              <a:t> x[</a:t>
+            </a:r>
+            <a:r>
+              <a:rPr>
+                <a:solidFill>
+                  <a:srgbClr val="AD0000"/>
+                </a:solidFill>
+                <a:latin typeface="Courier"/>
+              </a:rPr>
+              <a:t>2</a:t>
+            </a:r>
+            <a:r>
+              <a:rPr>
+                <a:solidFill>
+                  <a:srgbClr val="003B4F"/>
+                </a:solidFill>
+                <a:latin typeface="Courier"/>
+              </a:rPr>
+              <a:t>]</a:t>
+            </a:r>
+            <a:br/>
+            <a:r>
+              <a:rPr>
+                <a:solidFill>
+                  <a:srgbClr val="003B4F"/>
+                </a:solidFill>
+                <a:latin typeface="Courier"/>
+              </a:rPr>
+              <a:t>    f2 </a:t>
+            </a:r>
+            <a:r>
+              <a:rPr>
+                <a:solidFill>
+                  <a:srgbClr val="5E5E5E"/>
+                </a:solidFill>
+                <a:latin typeface="Courier"/>
+              </a:rPr>
+              <a:t>=</a:t>
+            </a:r>
+            <a:r>
+              <a:rPr>
+                <a:solidFill>
+                  <a:srgbClr val="003B4F"/>
+                </a:solidFill>
+                <a:latin typeface="Courier"/>
+              </a:rPr>
+              <a:t> g </a:t>
+            </a:r>
+            <a:r>
+              <a:rPr>
+                <a:solidFill>
+                  <a:srgbClr val="5E5E5E"/>
+                </a:solidFill>
+                <a:latin typeface="Courier"/>
+              </a:rPr>
+              <a:t>*</a:t>
+            </a:r>
+            <a:r>
+              <a:rPr>
+                <a:solidFill>
+                  <a:srgbClr val="003B4F"/>
+                </a:solidFill>
+                <a:latin typeface="Courier"/>
+              </a:rPr>
+              <a:t> (</a:t>
+            </a:r>
+            <a:r>
+              <a:rPr>
+                <a:solidFill>
+                  <a:srgbClr val="AD0000"/>
+                </a:solidFill>
+                <a:latin typeface="Courier"/>
+              </a:rPr>
+              <a:t>1</a:t>
+            </a:r>
+            <a:r>
+              <a:rPr>
+                <a:solidFill>
+                  <a:srgbClr val="003B4F"/>
+                </a:solidFill>
+                <a:latin typeface="Courier"/>
+              </a:rPr>
+              <a:t> </a:t>
+            </a:r>
+            <a:r>
+              <a:rPr>
+                <a:solidFill>
+                  <a:srgbClr val="5E5E5E"/>
+                </a:solidFill>
+                <a:latin typeface="Courier"/>
+              </a:rPr>
+              <a:t>-</a:t>
+            </a:r>
+            <a:r>
+              <a:rPr>
+                <a:solidFill>
+                  <a:srgbClr val="003B4F"/>
+                </a:solidFill>
+                <a:latin typeface="Courier"/>
+              </a:rPr>
+              <a:t> </a:t>
+            </a:r>
+            <a:r>
+              <a:rPr>
+                <a:solidFill>
+                  <a:srgbClr val="4758AB"/>
+                </a:solidFill>
+                <a:latin typeface="Courier"/>
+              </a:rPr>
+              <a:t>sqrt</a:t>
+            </a:r>
+            <a:r>
+              <a:rPr>
+                <a:solidFill>
+                  <a:srgbClr val="003B4F"/>
+                </a:solidFill>
+                <a:latin typeface="Courier"/>
+              </a:rPr>
+              <a:t>(f1 </a:t>
+            </a:r>
+            <a:r>
+              <a:rPr>
+                <a:solidFill>
+                  <a:srgbClr val="5E5E5E"/>
+                </a:solidFill>
+                <a:latin typeface="Courier"/>
+              </a:rPr>
+              <a:t>/</a:t>
+            </a:r>
+            <a:r>
+              <a:rPr>
+                <a:solidFill>
+                  <a:srgbClr val="003B4F"/>
+                </a:solidFill>
+                <a:latin typeface="Courier"/>
+              </a:rPr>
+              <a:t> g))</a:t>
+            </a:r>
+            <a:br/>
+            <a:r>
+              <a:rPr>
+                <a:solidFill>
+                  <a:srgbClr val="003B4F"/>
+                </a:solidFill>
+                <a:latin typeface="Courier"/>
+              </a:rPr>
+              <a:t>    </a:t>
+            </a:r>
+            <a:r>
+              <a:rPr b="1">
+                <a:solidFill>
+                  <a:srgbClr val="003B4F"/>
+                </a:solidFill>
+                <a:latin typeface="Courier"/>
+              </a:rPr>
+              <a:t>return</a:t>
+            </a:r>
+            <a:r>
+              <a:rPr>
+                <a:solidFill>
+                  <a:srgbClr val="003B4F"/>
+                </a:solidFill>
+                <a:latin typeface="Courier"/>
+              </a:rPr>
+              <a:t> [f1, f2]</a:t>
+            </a:r>
+            <a:br/>
+            <a:r>
+              <a:rPr b="1">
+                <a:solidFill>
+                  <a:srgbClr val="003B4F"/>
+                </a:solidFill>
+                <a:latin typeface="Courier"/>
+              </a:rPr>
+              <a:t>end</a:t>
+            </a:r>
+            <a:br/>
+            <a:br/>
+            <a:r>
+              <a:rPr b="1">
+                <a:solidFill>
+                  <a:srgbClr val="003B4F"/>
+                </a:solidFill>
+                <a:latin typeface="Courier"/>
+              </a:rPr>
+              <a:t>let</a:t>
+            </a:r>
+            <a:br/>
+            <a:r>
+              <a:rPr>
+                <a:solidFill>
+                  <a:srgbClr val="003B4F"/>
+                </a:solidFill>
+                <a:latin typeface="Courier"/>
+              </a:rPr>
+              <a:t>    fs </a:t>
+            </a:r>
+            <a:r>
+              <a:rPr>
+                <a:solidFill>
+                  <a:srgbClr val="5E5E5E"/>
+                </a:solidFill>
+                <a:latin typeface="Courier"/>
+              </a:rPr>
+              <a:t>=</a:t>
+            </a:r>
+            <a:r>
+              <a:rPr>
+                <a:solidFill>
+                  <a:srgbClr val="003B4F"/>
+                </a:solidFill>
+                <a:latin typeface="Courier"/>
+              </a:rPr>
+              <a:t> </a:t>
+            </a:r>
+            <a:r>
+              <a:rPr>
+                <a:solidFill>
+                  <a:srgbClr val="AD0000"/>
+                </a:solidFill>
+                <a:latin typeface="Courier"/>
+              </a:rPr>
+              <a:t>0.0</a:t>
+            </a:r>
+            <a:r>
+              <a:rPr>
+                <a:solidFill>
+                  <a:srgbClr val="5E5E5E"/>
+                </a:solidFill>
+                <a:latin typeface="Courier"/>
+              </a:rPr>
+              <a:t>:</a:t>
+            </a:r>
+            <a:r>
+              <a:rPr>
+                <a:solidFill>
+                  <a:srgbClr val="AD0000"/>
+                </a:solidFill>
+                <a:latin typeface="Courier"/>
+              </a:rPr>
+              <a:t>0.005</a:t>
+            </a:r>
+            <a:r>
+              <a:rPr>
+                <a:solidFill>
+                  <a:srgbClr val="5E5E5E"/>
+                </a:solidFill>
+                <a:latin typeface="Courier"/>
+              </a:rPr>
+              <a:t>:</a:t>
+            </a:r>
+            <a:r>
+              <a:rPr>
+                <a:solidFill>
+                  <a:srgbClr val="AD0000"/>
+                </a:solidFill>
+                <a:latin typeface="Courier"/>
+              </a:rPr>
+              <a:t>1.0</a:t>
+            </a:r>
+            <a:br/>
+            <a:r>
+              <a:rPr>
+                <a:solidFill>
+                  <a:srgbClr val="003B4F"/>
+                </a:solidFill>
+                <a:latin typeface="Courier"/>
+              </a:rPr>
+              <a:t>    fig </a:t>
+            </a:r>
+            <a:r>
+              <a:rPr>
+                <a:solidFill>
+                  <a:srgbClr val="5E5E5E"/>
+                </a:solidFill>
+                <a:latin typeface="Courier"/>
+              </a:rPr>
+              <a:t>=</a:t>
+            </a:r>
+            <a:r>
+              <a:rPr>
+                <a:solidFill>
+                  <a:srgbClr val="003B4F"/>
+                </a:solidFill>
+                <a:latin typeface="Courier"/>
+              </a:rPr>
+              <a:t> </a:t>
+            </a:r>
+            <a:r>
+              <a:rPr>
+                <a:solidFill>
+                  <a:srgbClr val="4758AB"/>
+                </a:solidFill>
+                <a:latin typeface="Courier"/>
+              </a:rPr>
+              <a:t>Figure</a:t>
+            </a:r>
+            <a:r>
+              <a:rPr>
+                <a:solidFill>
+                  <a:srgbClr val="003B4F"/>
+                </a:solidFill>
+                <a:latin typeface="Courier"/>
+              </a:rPr>
+              <a:t>(; size</a:t>
+            </a:r>
+            <a:r>
+              <a:rPr>
+                <a:solidFill>
+                  <a:srgbClr val="5E5E5E"/>
+                </a:solidFill>
+                <a:latin typeface="Courier"/>
+              </a:rPr>
+              <a:t>=</a:t>
+            </a:r>
+            <a:r>
+              <a:rPr>
+                <a:solidFill>
+                  <a:srgbClr val="003B4F"/>
+                </a:solidFill>
+                <a:latin typeface="Courier"/>
+              </a:rPr>
+              <a:t>(</a:t>
+            </a:r>
+            <a:r>
+              <a:rPr>
+                <a:solidFill>
+                  <a:srgbClr val="AD0000"/>
+                </a:solidFill>
+                <a:latin typeface="Courier"/>
+              </a:rPr>
+              <a:t>520</a:t>
+            </a:r>
+            <a:r>
+              <a:rPr>
+                <a:solidFill>
+                  <a:srgbClr val="003B4F"/>
+                </a:solidFill>
+                <a:latin typeface="Courier"/>
+              </a:rPr>
+              <a:t>, </a:t>
+            </a:r>
+            <a:r>
+              <a:rPr>
+                <a:solidFill>
+                  <a:srgbClr val="AD0000"/>
+                </a:solidFill>
+                <a:latin typeface="Courier"/>
+              </a:rPr>
+              <a:t>340</a:t>
+            </a:r>
+            <a:r>
+              <a:rPr>
+                <a:solidFill>
+                  <a:srgbClr val="003B4F"/>
+                </a:solidFill>
+                <a:latin typeface="Courier"/>
+              </a:rPr>
+              <a:t>))</a:t>
+            </a:r>
+            <a:br/>
+            <a:r>
+              <a:rPr>
+                <a:solidFill>
+                  <a:srgbClr val="003B4F"/>
+                </a:solidFill>
+                <a:latin typeface="Courier"/>
+              </a:rPr>
+              <a:t>    ax </a:t>
+            </a:r>
+            <a:r>
+              <a:rPr>
+                <a:solidFill>
+                  <a:srgbClr val="5E5E5E"/>
+                </a:solidFill>
+                <a:latin typeface="Courier"/>
+              </a:rPr>
+              <a:t>=</a:t>
+            </a:r>
+            <a:r>
+              <a:rPr>
+                <a:solidFill>
+                  <a:srgbClr val="003B4F"/>
+                </a:solidFill>
+                <a:latin typeface="Courier"/>
+              </a:rPr>
+              <a:t> </a:t>
+            </a:r>
+            <a:r>
+              <a:rPr>
+                <a:solidFill>
+                  <a:srgbClr val="4758AB"/>
+                </a:solidFill>
+                <a:latin typeface="Courier"/>
+              </a:rPr>
+              <a:t>Axis</a:t>
+            </a:r>
+            <a:r>
+              <a:rPr>
+                <a:solidFill>
+                  <a:srgbClr val="003B4F"/>
+                </a:solidFill>
+                <a:latin typeface="Courier"/>
+              </a:rPr>
+              <a:t>(fig[</a:t>
+            </a:r>
+            <a:r>
+              <a:rPr>
+                <a:solidFill>
+                  <a:srgbClr val="AD0000"/>
+                </a:solidFill>
+                <a:latin typeface="Courier"/>
+              </a:rPr>
+              <a:t>1</a:t>
+            </a:r>
+            <a:r>
+              <a:rPr>
+                <a:solidFill>
+                  <a:srgbClr val="003B4F"/>
+                </a:solidFill>
+                <a:latin typeface="Courier"/>
+              </a:rPr>
+              <a:t>, </a:t>
+            </a:r>
+            <a:r>
+              <a:rPr>
+                <a:solidFill>
+                  <a:srgbClr val="AD0000"/>
+                </a:solidFill>
+                <a:latin typeface="Courier"/>
+              </a:rPr>
+              <a:t>1</a:t>
+            </a:r>
+            <a:r>
+              <a:rPr>
+                <a:solidFill>
+                  <a:srgbClr val="003B4F"/>
+                </a:solidFill>
+                <a:latin typeface="Courier"/>
+              </a:rPr>
+              <a:t>]; xlabel</a:t>
+            </a:r>
+            <a:r>
+              <a:rPr>
+                <a:solidFill>
+                  <a:srgbClr val="5E5E5E"/>
+                </a:solidFill>
+                <a:latin typeface="Courier"/>
+              </a:rPr>
+              <a:t>=</a:t>
+            </a:r>
+            <a:r>
+              <a:rPr>
+                <a:solidFill>
+                  <a:srgbClr val="003B4F"/>
+                </a:solidFill>
+                <a:latin typeface="Courier"/>
+              </a:rPr>
+              <a:t>L</a:t>
+            </a:r>
+            <a:r>
+              <a:rPr>
+                <a:solidFill>
+                  <a:srgbClr val="20794D"/>
+                </a:solidFill>
+                <a:latin typeface="Courier"/>
+              </a:rPr>
+              <a:t>"f_1"</a:t>
+            </a:r>
+            <a:r>
+              <a:rPr>
+                <a:solidFill>
+                  <a:srgbClr val="003B4F"/>
+                </a:solidFill>
+                <a:latin typeface="Courier"/>
+              </a:rPr>
+              <a:t>, ylabel</a:t>
+            </a:r>
+            <a:r>
+              <a:rPr>
+                <a:solidFill>
+                  <a:srgbClr val="5E5E5E"/>
+                </a:solidFill>
+                <a:latin typeface="Courier"/>
+              </a:rPr>
+              <a:t>=</a:t>
+            </a:r>
+            <a:r>
+              <a:rPr>
+                <a:solidFill>
+                  <a:srgbClr val="003B4F"/>
+                </a:solidFill>
+                <a:latin typeface="Courier"/>
+              </a:rPr>
+              <a:t>L</a:t>
+            </a:r>
+            <a:r>
+              <a:rPr>
+                <a:solidFill>
+                  <a:srgbClr val="20794D"/>
+                </a:solidFill>
+                <a:latin typeface="Courier"/>
+              </a:rPr>
+              <a:t>"f_2"</a:t>
+            </a:r>
+            <a:r>
+              <a:rPr>
+                <a:solidFill>
+                  <a:srgbClr val="003B4F"/>
+                </a:solidFill>
+                <a:latin typeface="Courier"/>
+              </a:rPr>
+              <a:t>,</a:t>
+            </a:r>
+            <a:br/>
+            <a:r>
+              <a:rPr>
+                <a:solidFill>
+                  <a:srgbClr val="003B4F"/>
+                </a:solidFill>
+                <a:latin typeface="Courier"/>
+              </a:rPr>
+              <a:t>        limits</a:t>
+            </a:r>
+            <a:r>
+              <a:rPr>
+                <a:solidFill>
+                  <a:srgbClr val="5E5E5E"/>
+                </a:solidFill>
+                <a:latin typeface="Courier"/>
+              </a:rPr>
+              <a:t>=</a:t>
+            </a:r>
+            <a:r>
+              <a:rPr>
+                <a:solidFill>
+                  <a:srgbClr val="003B4F"/>
+                </a:solidFill>
+                <a:latin typeface="Courier"/>
+              </a:rPr>
+              <a:t>(</a:t>
+            </a:r>
+            <a:r>
+              <a:rPr>
+                <a:solidFill>
+                  <a:srgbClr val="5E5E5E"/>
+                </a:solidFill>
+                <a:latin typeface="Courier"/>
+              </a:rPr>
+              <a:t>-</a:t>
+            </a:r>
+            <a:r>
+              <a:rPr>
+                <a:solidFill>
+                  <a:srgbClr val="AD0000"/>
+                </a:solidFill>
+                <a:latin typeface="Courier"/>
+              </a:rPr>
+              <a:t>0.05</a:t>
+            </a:r>
+            <a:r>
+              <a:rPr>
+                <a:solidFill>
+                  <a:srgbClr val="003B4F"/>
+                </a:solidFill>
+                <a:latin typeface="Courier"/>
+              </a:rPr>
+              <a:t>, </a:t>
+            </a:r>
+            <a:r>
+              <a:rPr>
+                <a:solidFill>
+                  <a:srgbClr val="AD0000"/>
+                </a:solidFill>
+                <a:latin typeface="Courier"/>
+              </a:rPr>
+              <a:t>1.05</a:t>
+            </a:r>
+            <a:r>
+              <a:rPr>
+                <a:solidFill>
+                  <a:srgbClr val="003B4F"/>
+                </a:solidFill>
+                <a:latin typeface="Courier"/>
+              </a:rPr>
+              <a:t>, </a:t>
+            </a:r>
+            <a:r>
+              <a:rPr>
+                <a:solidFill>
+                  <a:srgbClr val="5E5E5E"/>
+                </a:solidFill>
+                <a:latin typeface="Courier"/>
+              </a:rPr>
+              <a:t>-</a:t>
+            </a:r>
+            <a:r>
+              <a:rPr>
+                <a:solidFill>
+                  <a:srgbClr val="AD0000"/>
+                </a:solidFill>
+                <a:latin typeface="Courier"/>
+              </a:rPr>
+              <a:t>0.05</a:t>
+            </a:r>
+            <a:r>
+              <a:rPr>
+                <a:solidFill>
+                  <a:srgbClr val="003B4F"/>
+                </a:solidFill>
+                <a:latin typeface="Courier"/>
+              </a:rPr>
+              <a:t>, </a:t>
+            </a:r>
+            <a:r>
+              <a:rPr>
+                <a:solidFill>
+                  <a:srgbClr val="AD0000"/>
+                </a:solidFill>
+                <a:latin typeface="Courier"/>
+              </a:rPr>
+              <a:t>1.1</a:t>
+            </a:r>
+            <a:r>
+              <a:rPr>
+                <a:solidFill>
+                  <a:srgbClr val="003B4F"/>
+                </a:solidFill>
+                <a:latin typeface="Courier"/>
+              </a:rPr>
+              <a:t>))</a:t>
+            </a:r>
+            <a:br/>
+            <a:r>
+              <a:rPr>
+                <a:solidFill>
+                  <a:srgbClr val="003B4F"/>
+                </a:solidFill>
+                <a:latin typeface="Courier"/>
+              </a:rPr>
+              <a:t>    </a:t>
+            </a:r>
+            <a:r>
+              <a:rPr>
+                <a:solidFill>
+                  <a:srgbClr val="4758AB"/>
+                </a:solidFill>
+                <a:latin typeface="Courier"/>
+              </a:rPr>
+              <a:t>lines!</a:t>
+            </a:r>
+            <a:r>
+              <a:rPr>
+                <a:solidFill>
+                  <a:srgbClr val="003B4F"/>
+                </a:solidFill>
+                <a:latin typeface="Courier"/>
+              </a:rPr>
+              <a:t>(ax, fs, </a:t>
+            </a:r>
+            <a:r>
+              <a:rPr>
+                <a:solidFill>
+                  <a:srgbClr val="AD0000"/>
+                </a:solidFill>
+                <a:latin typeface="Courier"/>
+              </a:rPr>
+              <a:t>1</a:t>
+            </a:r>
+            <a:r>
+              <a:rPr>
+                <a:solidFill>
+                  <a:srgbClr val="003B4F"/>
+                </a:solidFill>
+                <a:latin typeface="Courier"/>
+              </a:rPr>
+              <a:t> </a:t>
+            </a:r>
+            <a:r>
+              <a:rPr>
+                <a:solidFill>
+                  <a:srgbClr val="5E5E5E"/>
+                </a:solidFill>
+                <a:latin typeface="Courier"/>
+              </a:rPr>
+              <a:t>.-</a:t>
+            </a:r>
+            <a:r>
+              <a:rPr>
+                <a:solidFill>
+                  <a:srgbClr val="003B4F"/>
+                </a:solidFill>
+                <a:latin typeface="Courier"/>
+              </a:rPr>
+              <a:t> </a:t>
+            </a:r>
+            <a:r>
+              <a:rPr>
+                <a:solidFill>
+                  <a:srgbClr val="4758AB"/>
+                </a:solidFill>
+                <a:latin typeface="Courier"/>
+              </a:rPr>
+              <a:t>sqrt</a:t>
+            </a:r>
+            <a:r>
+              <a:rPr>
+                <a:solidFill>
+                  <a:srgbClr val="003B4F"/>
+                </a:solidFill>
+                <a:latin typeface="Courier"/>
+              </a:rPr>
+              <a:t>.(fs); color</a:t>
+            </a:r>
+            <a:r>
+              <a:rPr>
+                <a:solidFill>
+                  <a:srgbClr val="5E5E5E"/>
+                </a:solidFill>
+                <a:latin typeface="Courier"/>
+              </a:rPr>
+              <a:t>=:</a:t>
+            </a:r>
+            <a:r>
+              <a:rPr>
+                <a:solidFill>
+                  <a:srgbClr val="003B4F"/>
+                </a:solidFill>
+                <a:latin typeface="Courier"/>
+              </a:rPr>
+              <a:t>tomato, linewidth</a:t>
+            </a:r>
+            <a:r>
+              <a:rPr>
+                <a:solidFill>
+                  <a:srgbClr val="5E5E5E"/>
+                </a:solidFill>
+                <a:latin typeface="Courier"/>
+              </a:rPr>
+              <a:t>=</a:t>
+            </a:r>
+            <a:r>
+              <a:rPr>
+                <a:solidFill>
+                  <a:srgbClr val="AD0000"/>
+                </a:solidFill>
+                <a:latin typeface="Courier"/>
+              </a:rPr>
+              <a:t>3</a:t>
+            </a:r>
+            <a:r>
+              <a:rPr>
+                <a:solidFill>
+                  <a:srgbClr val="003B4F"/>
+                </a:solidFill>
+                <a:latin typeface="Courier"/>
+              </a:rPr>
+              <a:t>,</a:t>
+            </a:r>
+            <a:br/>
+            <a:r>
+              <a:rPr>
+                <a:solidFill>
+                  <a:srgbClr val="003B4F"/>
+                </a:solidFill>
+                <a:latin typeface="Courier"/>
+              </a:rPr>
+              <a:t>        label</a:t>
+            </a:r>
+            <a:r>
+              <a:rPr>
+                <a:solidFill>
+                  <a:srgbClr val="5E5E5E"/>
+                </a:solidFill>
+                <a:latin typeface="Courier"/>
+              </a:rPr>
+              <a:t>=</a:t>
+            </a:r>
+            <a:r>
+              <a:rPr>
+                <a:solidFill>
+                  <a:srgbClr val="20794D"/>
+                </a:solidFill>
+                <a:latin typeface="Courier"/>
+              </a:rPr>
+              <a:t>"Pareto front"</a:t>
+            </a:r>
+            <a:r>
+              <a:rPr>
+                <a:solidFill>
+                  <a:srgbClr val="003B4F"/>
+                </a:solidFill>
+                <a:latin typeface="Courier"/>
+              </a:rPr>
+              <a:t>)</a:t>
+            </a:r>
+            <a:br/>
+            <a:r>
+              <a:rPr>
+                <a:solidFill>
+                  <a:srgbClr val="003B4F"/>
+                </a:solidFill>
+                <a:latin typeface="Courier"/>
+              </a:rPr>
+              <a:t>    </a:t>
+            </a:r>
+            <a:r>
+              <a:rPr>
+                <a:solidFill>
+                  <a:srgbClr val="4758AB"/>
+                </a:solidFill>
+                <a:latin typeface="Courier"/>
+              </a:rPr>
+              <a:t>axislegend</a:t>
+            </a:r>
+            <a:r>
+              <a:rPr>
+                <a:solidFill>
+                  <a:srgbClr val="003B4F"/>
+                </a:solidFill>
+                <a:latin typeface="Courier"/>
+              </a:rPr>
+              <a:t>(ax; position</a:t>
+            </a:r>
+            <a:r>
+              <a:rPr>
+                <a:solidFill>
+                  <a:srgbClr val="5E5E5E"/>
+                </a:solidFill>
+                <a:latin typeface="Courier"/>
+              </a:rPr>
+              <a:t>=:</a:t>
+            </a:r>
+            <a:r>
+              <a:rPr>
+                <a:solidFill>
+                  <a:srgbClr val="003B4F"/>
+                </a:solidFill>
+                <a:latin typeface="Courier"/>
+              </a:rPr>
+              <a:t>rt)</a:t>
+            </a:r>
+            <a:br/>
+            <a:r>
+              <a:rPr>
+                <a:solidFill>
+                  <a:srgbClr val="003B4F"/>
+                </a:solidFill>
+                <a:latin typeface="Courier"/>
+              </a:rPr>
+              <a:t>    fig</a:t>
+            </a:r>
+            <a:br/>
+            <a:r>
+              <a:rPr b="1">
+                <a:solidFill>
+                  <a:srgbClr val="003B4F"/>
+                </a:solidFill>
+                <a:latin typeface="Courier"/>
+              </a:rPr>
+              <a:t>end</a:t>
+            </a:r>
+          </a:p>
+        </p:txBody>
+      </p:sp>
+      <p:pic>
+        <p:nvPicPr>
+          <p:cNvPr descr="index_files/figure-pptx/fig-zdt1-output-1.png" id="0" name="Picture 1"/>
+          <p:cNvPicPr>
+            <a:picLocks noGrp="1" noChangeAspect="1"/>
+          </p:cNvPicPr>
+          <p:nvPr/>
+        </p:nvPicPr>
+        <p:blipFill>
+          <a:blip r:embed="rId3"/>
+          <a:stretch>
+            <a:fillRect/>
+          </a:stretch>
+        </p:blipFill>
+        <p:spPr bwMode="auto">
+          <a:xfrm>
+            <a:off x="4775200" y="1625600"/>
+            <a:ext cx="3746500" cy="2451100"/>
+          </a:xfrm>
+          <a:prstGeom prst="rect">
+            <a:avLst/>
+          </a:prstGeom>
+          <a:noFill/>
+          <a:ln w="9525">
+            <a:noFill/>
+            <a:headEnd/>
+            <a:tailEnd/>
+          </a:ln>
+        </p:spPr>
+      </p:pic>
+      <p:sp>
+        <p:nvSpPr>
+          <p:cNvPr id="1" name="TextBox 3"/>
+          <p:cNvSpPr txBox="1"/>
+          <p:nvPr>
+            <p:ph idx="1"/>
+          </p:nvPr>
+        </p:nvSpPr>
+        <p:spPr>
+          <a:xfrm>
+            <a:off x="4635500" y="4076700"/>
+            <a:ext cx="4038600" cy="508000"/>
+          </a:xfrm>
+          <a:prstGeom prst="rect">
+            <a:avLst/>
+          </a:prstGeom>
+          <a:noFill/>
+        </p:spPr>
+        <p:txBody>
+          <a:bodyPr/>
+          <a:lstStyle/>
+          <a:p>
+            <a:pPr lvl="0" indent="0" marL="0" algn="ctr">
+              <a:buNone/>
+            </a:pPr>
+            <a:r>
+              <a:rPr/>
+              <a:t>Figure 4: Canonical visualization of ZDT1: the analytical Pareto front in objective space.</a:t>
+            </a:r>
+          </a:p>
+        </p:txBody>
+      </p:sp>
+    </p:spTree>
+  </p:cSld>
+</p:sld>
+</file>
+
+<file path=ppt/slides/slide11.xml><?xml version="1.0" encoding="utf-8"?>
+<p:sld xmlns:a="http://schemas.openxmlformats.org/drawingml/2006/main" xmlns:r="http://schemas.openxmlformats.org/officeDocument/2006/relationships" xmlns:p="http://schemas.openxmlformats.org/presentationml/2006/main">
+  <p:cSld>
+    <p:spTree>
+      <p:nvGrpSpPr>
+        <p:cNvPr id="1" name=""/>
+        <p:cNvGrpSpPr/>
+        <p:nvPr/>
+      </p:nvGrpSpPr>
+      <p:grpSpPr>
+        <a:xfrm>
+          <a:off x="0" y="0"/>
+          <a:ext cx="0" cy="0"/>
+          <a:chOff x="0" y="0"/>
+          <a:chExt cx="0" cy="0"/>
+        </a:xfrm>
+      </p:grpSpPr>
+      <mc:AlternateContent xmlns:mc="http://schemas.openxmlformats.org/markup-compatibility/2006">
+        <mc:Choice xmlns:a14="http://schemas.microsoft.com/office/drawing/2010/main" Requires="a14">
+          <p:sp>
+            <p:nvSpPr>
               <p:cNvPr id="3" name="Content Placeholder 2"/>
               <p:cNvSpPr>
                 <a:spLocks noGrp="1"/>
@@ -5226,15 +6983,6 @@
               </a:p>
               <a:p>
                 <a:pPr lvl="0" indent="0" marL="0">
-                  <a:buNone/>
-                </a:pPr>
-                <a:r>
-                  <a:rPr/>
-                  <a:t>That’s it. Local exploration around a parent.</a:t>
-                </a:r>
-              </a:p>
-              <a:p>
-                <a:pPr lvl="0" indent="0" marL="0">
                   <a:spcBef>
                     <a:spcPts val="3000"/>
                   </a:spcBef>
@@ -6571,7 +8319,7 @@
 </p:sld>
 </file>
 
-<file path=ppt/slides/slide11.xml><?xml version="1.0" encoding="utf-8"?>
+<file path=ppt/slides/slide12.xml><?xml version="1.0" encoding="utf-8"?>
 <p:sld xmlns:a="http://schemas.openxmlformats.org/drawingml/2006/main" xmlns:r="http://schemas.openxmlformats.org/officeDocument/2006/relationships" xmlns:p="http://schemas.openxmlformats.org/presentationml/2006/main">
   <p:cSld>
     <p:spTree>
@@ -7101,17 +8849,6 @@
                 <a:latin typeface="Courier"/>
               </a:rPr>
               <a:t>(archive)</a:t>
-            </a:r>
-          </a:p>
-          <a:p>
-            <a:pPr lvl="0" indent="0">
-              <a:buNone/>
-            </a:pPr>
-            <a:r>
-              <a:rPr>
-                <a:latin typeface="Courier"/>
-              </a:rPr>
-              <a:t>4</a:t>
             </a:r>
           </a:p>
         </p:txBody>
@@ -7183,7 +8920,7 @@
 </p:sld>
 </file>
 
-<file path=ppt/slides/slide12.xml><?xml version="1.0" encoding="utf-8"?>
+<file path=ppt/slides/slide13.xml><?xml version="1.0" encoding="utf-8"?>
 <p:sld xmlns:a="http://schemas.openxmlformats.org/drawingml/2006/main" xmlns:r="http://schemas.openxmlformats.org/officeDocument/2006/relationships" xmlns:p="http://schemas.openxmlformats.org/presentationml/2006/main">
   <p:cSld>
     <p:spTree>
@@ -7223,7 +8960,7 @@
             </a:pPr>
             <a:r>
               <a:rPr b="1"/>
-              <a:t>One Generation at a Time</a:t>
+              <a:t>Running the Model</a:t>
             </a:r>
           </a:p>
           <a:p>
@@ -8053,17 +9790,6 @@
                 <a:latin typeface="Courier"/>
               </a:rPr>
               <a:t>end</a:t>
-            </a:r>
-          </a:p>
-          <a:p>
-            <a:pPr lvl="0" indent="0">
-              <a:buNone/>
-            </a:pPr>
-            <a:r>
-              <a:rPr>
-                <a:latin typeface="Courier"/>
-              </a:rPr>
-              <a:t>step! (generic function with 1 method)</a:t>
             </a:r>
           </a:p>
           <a:p>
@@ -8524,7 +10250,7 @@
 </p:sld>
 </file>
 
-<file path=ppt/slides/slide13.xml><?xml version="1.0" encoding="utf-8"?>
+<file path=ppt/slides/slide14.xml><?xml version="1.0" encoding="utf-8"?>
 <p:sld xmlns:a="http://schemas.openxmlformats.org/drawingml/2006/main" xmlns:r="http://schemas.openxmlformats.org/officeDocument/2006/relationships" xmlns:p="http://schemas.openxmlformats.org/presentationml/2006/main">
   <p:cSld>
     <p:spTree>
@@ -8599,7 +10325,7 @@
 </p:sld>
 </file>
 
-<file path=ppt/slides/slide14.xml><?xml version="1.0" encoding="utf-8"?>
+<file path=ppt/slides/slide15.xml><?xml version="1.0" encoding="utf-8"?>
 <p:sld xmlns:a="http://schemas.openxmlformats.org/drawingml/2006/main" xmlns:r="http://schemas.openxmlformats.org/officeDocument/2006/relationships" xmlns:p="http://schemas.openxmlformats.org/presentationml/2006/main">
   <p:cSld>
     <p:spTree>
@@ -8730,7 +10456,7 @@
 </p:sld>
 </file>
 
-<file path=ppt/slides/slide15.xml><?xml version="1.0" encoding="utf-8"?>
+<file path=ppt/slides/slide16.xml><?xml version="1.0" encoding="utf-8"?>
 <p:sld xmlns:a="http://schemas.openxmlformats.org/drawingml/2006/main" xmlns:r="http://schemas.openxmlformats.org/officeDocument/2006/relationships" xmlns:p="http://schemas.openxmlformats.org/presentationml/2006/main">
   <p:cSld>
     <p:spTree>
@@ -8912,7 +10638,7 @@
 </p:sld>
 </file>
 
-<file path=ppt/slides/slide16.xml><?xml version="1.0" encoding="utf-8"?>
+<file path=ppt/slides/slide17.xml><?xml version="1.0" encoding="utf-8"?>
 <p:sld xmlns:a="http://schemas.openxmlformats.org/drawingml/2006/main" xmlns:r="http://schemas.openxmlformats.org/officeDocument/2006/relationships" xmlns:p="http://schemas.openxmlformats.org/presentationml/2006/main">
   <p:cSld>
     <p:spTree>
@@ -9314,7 +11040,7 @@
             </a:r>
             <a:r>
               <a:rPr/>
-              <a:t> objectives matter and we refuse to collapse them into one number.</a:t>
+              <a:t> objectives matter, without collapsing them into one number.</a:t>
             </a:r>
           </a:p>
           <a:p>
@@ -12686,7 +14412,7 @@
                 </a:pPr>
                 <a:r>
                   <a:rPr/>
-                  <a:t>The population is what makes GAs natural for MOO: we carry many trade-off points at once.</a:t>
+                  <a:t>The population is what makes GAs natural for MOO: many trade-off points evolve at once.</a:t>
                 </a:r>
               </a:p>
               <a:p>
@@ -13211,12 +14937,7 @@
             <p:ph type="title"/>
           </p:nvPr>
         </p:nvSpPr>
-        <p:spPr>
-          <a:xfrm>
-            <a:off x="457201" y="204787"/>
-            <a:ext cx="3008313" cy="871538"/>
-          </a:xfrm>
-        </p:spPr>
+        <p:spPr/>
         <p:txBody>
           <a:bodyPr/>
           <a:lstStyle/>
@@ -13231,1665 +14952,30 @@
           </a:p>
         </p:txBody>
       </p:sp>
-      <mc:AlternateContent xmlns:mc="http://schemas.openxmlformats.org/markup-compatibility/2006">
-        <mc:Choice xmlns:a14="http://schemas.microsoft.com/office/drawing/2010/main" Requires="a14">
-          <p:sp>
-            <p:nvSpPr>
-              <p:cNvPr id="4" name="Text Placeholder 3"/>
-              <p:cNvSpPr>
-                <a:spLocks noGrp="1"/>
-              </p:cNvSpPr>
-              <p:nvPr>
-                <p:ph idx="2" sz="half" type="body"/>
-              </p:nvPr>
-            </p:nvSpPr>
-            <p:spPr/>
-            <p:txBody>
-              <a:bodyPr/>
-              <a:lstStyle/>
-              <a:p>
-                <a:pPr lvl="0" indent="0" marL="0">
-                  <a:spcBef>
-                    <a:spcPts val="3000"/>
-                  </a:spcBef>
-                  <a:buNone/>
-                </a:pPr>
-                <a:r>
-                  <a:rPr b="1"/>
-                  <a:t>ZDT1: A Test Problem</a:t>
-                </a:r>
-              </a:p>
-              <a:p>
-                <a:pPr lvl="0" indent="0" marL="0">
-                  <a:buNone/>
-                </a:pPr>
-                <a:r>
-                  <a:rPr/>
-                  <a:t>A standard MOO benchmark with two decision variables </a:t>
-                </a:r>
-                <a14:m>
-                  <m:oMath xmlns:m="http://schemas.openxmlformats.org/officeDocument/2006/math">
-                    <m:sSub>
-                      <m:e>
-                        <m:r>
-                          <m:t>x</m:t>
-                        </m:r>
-                      </m:e>
-                      <m:sub>
-                        <m:r>
-                          <m:t>1</m:t>
-                        </m:r>
-                      </m:sub>
-                    </m:sSub>
-                    <m:r>
-                      <m:rPr>
-                        <m:sty m:val="p"/>
-                      </m:rPr>
-                      <m:t>,</m:t>
-                    </m:r>
-                    <m:sSub>
-                      <m:e>
-                        <m:r>
-                          <m:t>x</m:t>
-                        </m:r>
-                      </m:e>
-                      <m:sub>
-                        <m:r>
-                          <m:t>2</m:t>
-                        </m:r>
-                      </m:sub>
-                    </m:sSub>
-                    <m:r>
-                      <m:rPr>
-                        <m:sty m:val="p"/>
-                      </m:rPr>
-                      <m:t>∈</m:t>
-                    </m:r>
-                    <m:r>
-                      <m:rPr>
-                        <m:sty m:val="p"/>
-                      </m:rPr>
-                      <m:t>[</m:t>
-                    </m:r>
-                    <m:r>
-                      <m:t>0</m:t>
-                    </m:r>
-                    <m:r>
-                      <m:rPr>
-                        <m:sty m:val="p"/>
-                      </m:rPr>
-                      <m:t>,</m:t>
-                    </m:r>
-                    <m:r>
-                      <m:t>1</m:t>
-                    </m:r>
-                    <m:r>
-                      <m:rPr>
-                        <m:sty m:val="p"/>
-                      </m:rPr>
-                      <m:t>]</m:t>
-                    </m:r>
-                  </m:oMath>
-                </a14:m>
-                <a:r>
-                  <a:rPr/>
-                  <a:t> and two objectives (both minimized):</a:t>
-                </a:r>
-              </a:p>
-              <a:p>
-                <a:pPr lvl="0" indent="0" marL="0">
-                  <a:buNone/>
-                </a:pPr>
-                <a14:m>
-                  <m:oMathPara xmlns:m="http://schemas.openxmlformats.org/officeDocument/2006/math">
-                    <m:oMathParaPr>
-                      <m:jc m:val="center"/>
-                    </m:oMathParaPr>
-                    <m:oMath>
-                      <m:sSub>
-                        <m:e>
-                          <m:r>
-                            <m:t>f</m:t>
-                          </m:r>
-                        </m:e>
-                        <m:sub>
-                          <m:r>
-                            <m:t>1</m:t>
-                          </m:r>
-                        </m:sub>
-                      </m:sSub>
-                      <m:r>
-                        <m:rPr>
-                          <m:sty m:val="p"/>
-                        </m:rPr>
-                        <m:t>=</m:t>
-                      </m:r>
-                      <m:sSub>
-                        <m:e>
-                          <m:r>
-                            <m:t>x</m:t>
-                          </m:r>
-                        </m:e>
-                        <m:sub>
-                          <m:r>
-                            <m:t>1</m:t>
-                          </m:r>
-                        </m:sub>
-                      </m:sSub>
-                      <m:r>
-                        <m:rPr>
-                          <m:sty m:val="p"/>
-                        </m:rPr>
-                        <m:t>,</m:t>
-                      </m:r>
-                      <m:r>
-                        <m:t>  </m:t>
-                      </m:r>
-                      <m:sSub>
-                        <m:e>
-                          <m:r>
-                            <m:t>f</m:t>
-                          </m:r>
-                        </m:e>
-                        <m:sub>
-                          <m:r>
-                            <m:t>2</m:t>
-                          </m:r>
-                        </m:sub>
-                      </m:sSub>
-                      <m:r>
-                        <m:rPr>
-                          <m:sty m:val="p"/>
-                        </m:rPr>
-                        <m:t>=</m:t>
-                      </m:r>
-                      <m:r>
-                        <m:t>g</m:t>
-                      </m:r>
-                      <m:r>
-                        <m:rPr>
-                          <m:sty m:val="p"/>
-                        </m:rPr>
-                        <m:t>(</m:t>
-                      </m:r>
-                      <m:sSub>
-                        <m:e>
-                          <m:r>
-                            <m:t>x</m:t>
-                          </m:r>
-                        </m:e>
-                        <m:sub>
-                          <m:r>
-                            <m:t>2</m:t>
-                          </m:r>
-                        </m:sub>
-                      </m:sSub>
-                      <m:r>
-                        <m:rPr>
-                          <m:sty m:val="p"/>
-                        </m:rPr>
-                        <m:t>)</m:t>
-                      </m:r>
-                      <m:d>
-                        <m:dPr>
-                          <m:begChr m:val="("/>
-                          <m:sepChr m:val=""/>
-                          <m:endChr m:val=")"/>
-                          <m:grow/>
-                        </m:dPr>
-                        <m:e>
-                          <m:r>
-                            <m:t>1</m:t>
-                          </m:r>
-                          <m:r>
-                            <m:rPr>
-                              <m:sty m:val="p"/>
-                            </m:rPr>
-                            <m:t>−</m:t>
-                          </m:r>
-                          <m:rad>
-                            <m:radPr>
-                              <m:degHide m:val="on"/>
-                            </m:radPr>
-                            <m:deg/>
-                            <m:e>
-                              <m:sSub>
-                                <m:e>
-                                  <m:r>
-                                    <m:t>f</m:t>
-                                  </m:r>
-                                </m:e>
-                                <m:sub>
-                                  <m:r>
-                                    <m:t>1</m:t>
-                                  </m:r>
-                                </m:sub>
-                              </m:sSub>
-                              <m:r>
-                                <m:rPr>
-                                  <m:sty m:val="p"/>
-                                </m:rPr>
-                                <m:t>/</m:t>
-                              </m:r>
-                              <m:r>
-                                <m:t>g</m:t>
-                              </m:r>
-                              <m:r>
-                                <m:rPr>
-                                  <m:sty m:val="p"/>
-                                </m:rPr>
-                                <m:t>(</m:t>
-                              </m:r>
-                              <m:sSub>
-                                <m:e>
-                                  <m:r>
-                                    <m:t>x</m:t>
-                                  </m:r>
-                                </m:e>
-                                <m:sub>
-                                  <m:r>
-                                    <m:t>2</m:t>
-                                  </m:r>
-                                </m:sub>
-                              </m:sSub>
-                              <m:r>
-                                <m:rPr>
-                                  <m:sty m:val="p"/>
-                                </m:rPr>
-                                <m:t>)</m:t>
-                              </m:r>
-                            </m:e>
-                          </m:rad>
-                        </m:e>
-                      </m:d>
-                      <m:r>
-                        <m:rPr>
-                          <m:sty m:val="p"/>
-                        </m:rPr>
-                        <m:t>,</m:t>
-                      </m:r>
-                      <m:r>
-                        <m:t>  </m:t>
-                      </m:r>
-                      <m:r>
-                        <m:t>g</m:t>
-                      </m:r>
-                      <m:r>
-                        <m:rPr>
-                          <m:sty m:val="p"/>
-                        </m:rPr>
-                        <m:t>(</m:t>
-                      </m:r>
-                      <m:sSub>
-                        <m:e>
-                          <m:r>
-                            <m:t>x</m:t>
-                          </m:r>
-                        </m:e>
-                        <m:sub>
-                          <m:r>
-                            <m:t>2</m:t>
-                          </m:r>
-                        </m:sub>
-                      </m:sSub>
-                      <m:r>
-                        <m:rPr>
-                          <m:sty m:val="p"/>
-                        </m:rPr>
-                        <m:t>)</m:t>
-                      </m:r>
-                      <m:r>
-                        <m:rPr>
-                          <m:sty m:val="p"/>
-                        </m:rPr>
-                        <m:t>=</m:t>
-                      </m:r>
-                      <m:r>
-                        <m:t>1</m:t>
-                      </m:r>
-                      <m:r>
-                        <m:rPr>
-                          <m:sty m:val="p"/>
-                        </m:rPr>
-                        <m:t>+</m:t>
-                      </m:r>
-                      <m:r>
-                        <m:t>9</m:t>
-                      </m:r>
-                      <m:sSub>
-                        <m:e>
-                          <m:r>
-                            <m:t>x</m:t>
-                          </m:r>
-                        </m:e>
-                        <m:sub>
-                          <m:r>
-                            <m:t>2</m:t>
-                          </m:r>
-                        </m:sub>
-                      </m:sSub>
-                    </m:oMath>
-                  </m:oMathPara>
-                </a14:m>
-              </a:p>
-              <a:p>
-                <a:pPr lvl="0" indent="0" marL="0">
-                  <a:buNone/>
-                </a:pPr>
-                <a:r>
-                  <a:rPr/>
-                  <a:t>The analytical Pareto front is </a:t>
-                </a:r>
-                <a14:m>
-                  <m:oMath xmlns:m="http://schemas.openxmlformats.org/officeDocument/2006/math">
-                    <m:sSub>
-                      <m:e>
-                        <m:r>
-                          <m:t>x</m:t>
-                        </m:r>
-                      </m:e>
-                      <m:sub>
-                        <m:r>
-                          <m:t>2</m:t>
-                        </m:r>
-                      </m:sub>
-                    </m:sSub>
-                    <m:r>
-                      <m:rPr>
-                        <m:sty m:val="p"/>
-                      </m:rPr>
-                      <m:t>=</m:t>
-                    </m:r>
-                    <m:r>
-                      <m:t>0</m:t>
-                    </m:r>
-                  </m:oMath>
-                </a14:m>
-                <a:r>
-                  <a:rPr/>
-                  <a:t>, giving </a:t>
-                </a:r>
-                <a14:m>
-                  <m:oMath xmlns:m="http://schemas.openxmlformats.org/officeDocument/2006/math">
-                    <m:sSub>
-                      <m:e>
-                        <m:r>
-                          <m:t>f</m:t>
-                        </m:r>
-                      </m:e>
-                      <m:sub>
-                        <m:r>
-                          <m:t>2</m:t>
-                        </m:r>
-                      </m:sub>
-                    </m:sSub>
-                    <m:r>
-                      <m:rPr>
-                        <m:sty m:val="p"/>
-                      </m:rPr>
-                      <m:t>=</m:t>
-                    </m:r>
-                    <m:r>
-                      <m:t>1</m:t>
-                    </m:r>
-                    <m:r>
-                      <m:rPr>
-                        <m:sty m:val="p"/>
-                      </m:rPr>
-                      <m:t>−</m:t>
-                    </m:r>
-                    <m:rad>
-                      <m:radPr>
-                        <m:degHide m:val="on"/>
-                      </m:radPr>
-                      <m:deg/>
-                      <m:e>
-                        <m:sSub>
-                          <m:e>
-                            <m:r>
-                              <m:t>f</m:t>
-                            </m:r>
-                          </m:e>
-                          <m:sub>
-                            <m:r>
-                              <m:t>1</m:t>
-                            </m:r>
-                          </m:sub>
-                        </m:sSub>
-                      </m:e>
-                    </m:rad>
-                  </m:oMath>
-                </a14:m>
-                <a:r>
-                  <a:rPr/>
-                  <a:t> on </a:t>
-                </a:r>
-                <a14:m>
-                  <m:oMath xmlns:m="http://schemas.openxmlformats.org/officeDocument/2006/math">
-                    <m:sSub>
-                      <m:e>
-                        <m:r>
-                          <m:t>f</m:t>
-                        </m:r>
-                      </m:e>
-                      <m:sub>
-                        <m:r>
-                          <m:t>1</m:t>
-                        </m:r>
-                      </m:sub>
-                    </m:sSub>
-                    <m:r>
-                      <m:rPr>
-                        <m:sty m:val="p"/>
-                      </m:rPr>
-                      <m:t>∈</m:t>
-                    </m:r>
-                    <m:r>
-                      <m:rPr>
-                        <m:sty m:val="p"/>
-                      </m:rPr>
-                      <m:t>[</m:t>
-                    </m:r>
-                    <m:r>
-                      <m:t>0</m:t>
-                    </m:r>
-                    <m:r>
-                      <m:rPr>
-                        <m:sty m:val="p"/>
-                      </m:rPr>
-                      <m:t>,</m:t>
-                    </m:r>
-                    <m:r>
-                      <m:t>1</m:t>
-                    </m:r>
-                    <m:r>
-                      <m:rPr>
-                        <m:sty m:val="p"/>
-                      </m:rPr>
-                      <m:t>]</m:t>
-                    </m:r>
-                  </m:oMath>
-                </a14:m>
-                <a:r>
-                  <a:rPr/>
-                  <a:t> — a convex curve.</a:t>
-                </a:r>
-              </a:p>
-              <a:p>
-                <a:pPr lvl="0" indent="0">
-                  <a:buNone/>
-                </a:pPr>
-                <a:r>
-                  <a:rPr>
-                    <a:solidFill>
-                      <a:srgbClr val="00769E"/>
-                    </a:solidFill>
-                    <a:latin typeface="Courier"/>
-                  </a:rPr>
-                  <a:t>using</a:t>
-                </a:r>
-                <a:r>
-                  <a:rPr>
-                    <a:solidFill>
-                      <a:srgbClr val="003B4F"/>
-                    </a:solidFill>
-                    <a:latin typeface="Courier"/>
-                  </a:rPr>
-                  <a:t> Random</a:t>
-                </a:r>
-                <a:br/>
-                <a:r>
-                  <a:rPr>
-                    <a:solidFill>
-                      <a:srgbClr val="003B4F"/>
-                    </a:solidFill>
-                    <a:latin typeface="Courier"/>
-                  </a:rPr>
-                  <a:t>Random.</a:t>
-                </a:r>
-                <a:r>
-                  <a:rPr>
-                    <a:solidFill>
-                      <a:srgbClr val="4758AB"/>
-                    </a:solidFill>
-                    <a:latin typeface="Courier"/>
-                  </a:rPr>
-                  <a:t>seed!</a:t>
-                </a:r>
-                <a:r>
-                  <a:rPr>
-                    <a:solidFill>
-                      <a:srgbClr val="003B4F"/>
-                    </a:solidFill>
-                    <a:latin typeface="Courier"/>
-                  </a:rPr>
-                  <a:t>(</a:t>
-                </a:r>
-                <a:r>
-                  <a:rPr>
-                    <a:solidFill>
-                      <a:srgbClr val="AD0000"/>
-                    </a:solidFill>
-                    <a:latin typeface="Courier"/>
-                  </a:rPr>
-                  <a:t>1</a:t>
-                </a:r>
-                <a:r>
-                  <a:rPr>
-                    <a:solidFill>
-                      <a:srgbClr val="003B4F"/>
-                    </a:solidFill>
-                    <a:latin typeface="Courier"/>
-                  </a:rPr>
-                  <a:t>)</a:t>
-                </a:r>
-                <a:br/>
-                <a:br/>
-                <a:r>
-                  <a:rPr b="1">
-                    <a:solidFill>
-                      <a:srgbClr val="003B4F"/>
-                    </a:solidFill>
-                    <a:latin typeface="Courier"/>
-                  </a:rPr>
-                  <a:t>function</a:t>
-                </a:r>
-                <a:r>
-                  <a:rPr>
-                    <a:solidFill>
-                      <a:srgbClr val="003B4F"/>
-                    </a:solidFill>
-                    <a:latin typeface="Courier"/>
-                  </a:rPr>
-                  <a:t> </a:t>
-                </a:r>
-                <a:r>
-                  <a:rPr>
-                    <a:solidFill>
-                      <a:srgbClr val="4758AB"/>
-                    </a:solidFill>
-                    <a:latin typeface="Courier"/>
-                  </a:rPr>
-                  <a:t>zdt1</a:t>
-                </a:r>
-                <a:r>
-                  <a:rPr>
-                    <a:solidFill>
-                      <a:srgbClr val="003B4F"/>
-                    </a:solidFill>
-                    <a:latin typeface="Courier"/>
-                  </a:rPr>
-                  <a:t>(x)</a:t>
-                </a:r>
-                <a:br/>
-                <a:r>
-                  <a:rPr>
-                    <a:solidFill>
-                      <a:srgbClr val="003B4F"/>
-                    </a:solidFill>
-                    <a:latin typeface="Courier"/>
-                  </a:rPr>
-                  <a:t>    f1 </a:t>
-                </a:r>
-                <a:r>
-                  <a:rPr>
-                    <a:solidFill>
-                      <a:srgbClr val="5E5E5E"/>
-                    </a:solidFill>
-                    <a:latin typeface="Courier"/>
-                  </a:rPr>
-                  <a:t>=</a:t>
-                </a:r>
-                <a:r>
-                  <a:rPr>
-                    <a:solidFill>
-                      <a:srgbClr val="003B4F"/>
-                    </a:solidFill>
-                    <a:latin typeface="Courier"/>
-                  </a:rPr>
-                  <a:t> x[</a:t>
-                </a:r>
-                <a:r>
-                  <a:rPr>
-                    <a:solidFill>
-                      <a:srgbClr val="AD0000"/>
-                    </a:solidFill>
-                    <a:latin typeface="Courier"/>
-                  </a:rPr>
-                  <a:t>1</a:t>
-                </a:r>
-                <a:r>
-                  <a:rPr>
-                    <a:solidFill>
-                      <a:srgbClr val="003B4F"/>
-                    </a:solidFill>
-                    <a:latin typeface="Courier"/>
-                  </a:rPr>
-                  <a:t>]</a:t>
-                </a:r>
-                <a:br/>
-                <a:r>
-                  <a:rPr>
-                    <a:solidFill>
-                      <a:srgbClr val="003B4F"/>
-                    </a:solidFill>
-                    <a:latin typeface="Courier"/>
-                  </a:rPr>
-                  <a:t>    g </a:t>
-                </a:r>
-                <a:r>
-                  <a:rPr>
-                    <a:solidFill>
-                      <a:srgbClr val="5E5E5E"/>
-                    </a:solidFill>
-                    <a:latin typeface="Courier"/>
-                  </a:rPr>
-                  <a:t>=</a:t>
-                </a:r>
-                <a:r>
-                  <a:rPr>
-                    <a:solidFill>
-                      <a:srgbClr val="003B4F"/>
-                    </a:solidFill>
-                    <a:latin typeface="Courier"/>
-                  </a:rPr>
-                  <a:t> </a:t>
-                </a:r>
-                <a:r>
-                  <a:rPr>
-                    <a:solidFill>
-                      <a:srgbClr val="AD0000"/>
-                    </a:solidFill>
-                    <a:latin typeface="Courier"/>
-                  </a:rPr>
-                  <a:t>1</a:t>
-                </a:r>
-                <a:r>
-                  <a:rPr>
-                    <a:solidFill>
-                      <a:srgbClr val="003B4F"/>
-                    </a:solidFill>
-                    <a:latin typeface="Courier"/>
-                  </a:rPr>
-                  <a:t> </a:t>
-                </a:r>
-                <a:r>
-                  <a:rPr>
-                    <a:solidFill>
-                      <a:srgbClr val="5E5E5E"/>
-                    </a:solidFill>
-                    <a:latin typeface="Courier"/>
-                  </a:rPr>
-                  <a:t>+</a:t>
-                </a:r>
-                <a:r>
-                  <a:rPr>
-                    <a:solidFill>
-                      <a:srgbClr val="003B4F"/>
-                    </a:solidFill>
-                    <a:latin typeface="Courier"/>
-                  </a:rPr>
-                  <a:t> </a:t>
-                </a:r>
-                <a:r>
-                  <a:rPr>
-                    <a:solidFill>
-                      <a:srgbClr val="AD0000"/>
-                    </a:solidFill>
-                    <a:latin typeface="Courier"/>
-                  </a:rPr>
-                  <a:t>9</a:t>
-                </a:r>
-                <a:r>
-                  <a:rPr>
-                    <a:solidFill>
-                      <a:srgbClr val="003B4F"/>
-                    </a:solidFill>
-                    <a:latin typeface="Courier"/>
-                  </a:rPr>
-                  <a:t> </a:t>
-                </a:r>
-                <a:r>
-                  <a:rPr>
-                    <a:solidFill>
-                      <a:srgbClr val="5E5E5E"/>
-                    </a:solidFill>
-                    <a:latin typeface="Courier"/>
-                  </a:rPr>
-                  <a:t>*</a:t>
-                </a:r>
-                <a:r>
-                  <a:rPr>
-                    <a:solidFill>
-                      <a:srgbClr val="003B4F"/>
-                    </a:solidFill>
-                    <a:latin typeface="Courier"/>
-                  </a:rPr>
-                  <a:t> x[</a:t>
-                </a:r>
-                <a:r>
-                  <a:rPr>
-                    <a:solidFill>
-                      <a:srgbClr val="AD0000"/>
-                    </a:solidFill>
-                    <a:latin typeface="Courier"/>
-                  </a:rPr>
-                  <a:t>2</a:t>
-                </a:r>
-                <a:r>
-                  <a:rPr>
-                    <a:solidFill>
-                      <a:srgbClr val="003B4F"/>
-                    </a:solidFill>
-                    <a:latin typeface="Courier"/>
-                  </a:rPr>
-                  <a:t>]</a:t>
-                </a:r>
-                <a:br/>
-                <a:r>
-                  <a:rPr>
-                    <a:solidFill>
-                      <a:srgbClr val="003B4F"/>
-                    </a:solidFill>
-                    <a:latin typeface="Courier"/>
-                  </a:rPr>
-                  <a:t>    f2 </a:t>
-                </a:r>
-                <a:r>
-                  <a:rPr>
-                    <a:solidFill>
-                      <a:srgbClr val="5E5E5E"/>
-                    </a:solidFill>
-                    <a:latin typeface="Courier"/>
-                  </a:rPr>
-                  <a:t>=</a:t>
-                </a:r>
-                <a:r>
-                  <a:rPr>
-                    <a:solidFill>
-                      <a:srgbClr val="003B4F"/>
-                    </a:solidFill>
-                    <a:latin typeface="Courier"/>
-                  </a:rPr>
-                  <a:t> g </a:t>
-                </a:r>
-                <a:r>
-                  <a:rPr>
-                    <a:solidFill>
-                      <a:srgbClr val="5E5E5E"/>
-                    </a:solidFill>
-                    <a:latin typeface="Courier"/>
-                  </a:rPr>
-                  <a:t>*</a:t>
-                </a:r>
-                <a:r>
-                  <a:rPr>
-                    <a:solidFill>
-                      <a:srgbClr val="003B4F"/>
-                    </a:solidFill>
-                    <a:latin typeface="Courier"/>
-                  </a:rPr>
-                  <a:t> (</a:t>
-                </a:r>
-                <a:r>
-                  <a:rPr>
-                    <a:solidFill>
-                      <a:srgbClr val="AD0000"/>
-                    </a:solidFill>
-                    <a:latin typeface="Courier"/>
-                  </a:rPr>
-                  <a:t>1</a:t>
-                </a:r>
-                <a:r>
-                  <a:rPr>
-                    <a:solidFill>
-                      <a:srgbClr val="003B4F"/>
-                    </a:solidFill>
-                    <a:latin typeface="Courier"/>
-                  </a:rPr>
-                  <a:t> </a:t>
-                </a:r>
-                <a:r>
-                  <a:rPr>
-                    <a:solidFill>
-                      <a:srgbClr val="5E5E5E"/>
-                    </a:solidFill>
-                    <a:latin typeface="Courier"/>
-                  </a:rPr>
-                  <a:t>-</a:t>
-                </a:r>
-                <a:r>
-                  <a:rPr>
-                    <a:solidFill>
-                      <a:srgbClr val="003B4F"/>
-                    </a:solidFill>
-                    <a:latin typeface="Courier"/>
-                  </a:rPr>
-                  <a:t> </a:t>
-                </a:r>
-                <a:r>
-                  <a:rPr>
-                    <a:solidFill>
-                      <a:srgbClr val="4758AB"/>
-                    </a:solidFill>
-                    <a:latin typeface="Courier"/>
-                  </a:rPr>
-                  <a:t>sqrt</a:t>
-                </a:r>
-                <a:r>
-                  <a:rPr>
-                    <a:solidFill>
-                      <a:srgbClr val="003B4F"/>
-                    </a:solidFill>
-                    <a:latin typeface="Courier"/>
-                  </a:rPr>
-                  <a:t>(f1 </a:t>
-                </a:r>
-                <a:r>
-                  <a:rPr>
-                    <a:solidFill>
-                      <a:srgbClr val="5E5E5E"/>
-                    </a:solidFill>
-                    <a:latin typeface="Courier"/>
-                  </a:rPr>
-                  <a:t>/</a:t>
-                </a:r>
-                <a:r>
-                  <a:rPr>
-                    <a:solidFill>
-                      <a:srgbClr val="003B4F"/>
-                    </a:solidFill>
-                    <a:latin typeface="Courier"/>
-                  </a:rPr>
-                  <a:t> g))</a:t>
-                </a:r>
-                <a:br/>
-                <a:r>
-                  <a:rPr>
-                    <a:solidFill>
-                      <a:srgbClr val="003B4F"/>
-                    </a:solidFill>
-                    <a:latin typeface="Courier"/>
-                  </a:rPr>
-                  <a:t>    </a:t>
-                </a:r>
-                <a:r>
-                  <a:rPr b="1">
-                    <a:solidFill>
-                      <a:srgbClr val="003B4F"/>
-                    </a:solidFill>
-                    <a:latin typeface="Courier"/>
-                  </a:rPr>
-                  <a:t>return</a:t>
-                </a:r>
-                <a:r>
-                  <a:rPr>
-                    <a:solidFill>
-                      <a:srgbClr val="003B4F"/>
-                    </a:solidFill>
-                    <a:latin typeface="Courier"/>
-                  </a:rPr>
-                  <a:t> [f1, f2]</a:t>
-                </a:r>
-                <a:br/>
-                <a:r>
-                  <a:rPr b="1">
-                    <a:solidFill>
-                      <a:srgbClr val="003B4F"/>
-                    </a:solidFill>
-                    <a:latin typeface="Courier"/>
-                  </a:rPr>
-                  <a:t>end</a:t>
-                </a:r>
-                <a:br/>
-                <a:br/>
-                <a:r>
-                  <a:rPr b="1">
-                    <a:solidFill>
-                      <a:srgbClr val="003B4F"/>
-                    </a:solidFill>
-                    <a:latin typeface="Courier"/>
-                  </a:rPr>
-                  <a:t>let</a:t>
-                </a:r>
-                <a:br/>
-                <a:r>
-                  <a:rPr>
-                    <a:solidFill>
-                      <a:srgbClr val="003B4F"/>
-                    </a:solidFill>
-                    <a:latin typeface="Courier"/>
-                  </a:rPr>
-                  <a:t>    fs </a:t>
-                </a:r>
-                <a:r>
-                  <a:rPr>
-                    <a:solidFill>
-                      <a:srgbClr val="5E5E5E"/>
-                    </a:solidFill>
-                    <a:latin typeface="Courier"/>
-                  </a:rPr>
-                  <a:t>=</a:t>
-                </a:r>
-                <a:r>
-                  <a:rPr>
-                    <a:solidFill>
-                      <a:srgbClr val="003B4F"/>
-                    </a:solidFill>
-                    <a:latin typeface="Courier"/>
-                  </a:rPr>
-                  <a:t> </a:t>
-                </a:r>
-                <a:r>
-                  <a:rPr>
-                    <a:solidFill>
-                      <a:srgbClr val="AD0000"/>
-                    </a:solidFill>
-                    <a:latin typeface="Courier"/>
-                  </a:rPr>
-                  <a:t>0.0</a:t>
-                </a:r>
-                <a:r>
-                  <a:rPr>
-                    <a:solidFill>
-                      <a:srgbClr val="5E5E5E"/>
-                    </a:solidFill>
-                    <a:latin typeface="Courier"/>
-                  </a:rPr>
-                  <a:t>:</a:t>
-                </a:r>
-                <a:r>
-                  <a:rPr>
-                    <a:solidFill>
-                      <a:srgbClr val="AD0000"/>
-                    </a:solidFill>
-                    <a:latin typeface="Courier"/>
-                  </a:rPr>
-                  <a:t>0.005</a:t>
-                </a:r>
-                <a:r>
-                  <a:rPr>
-                    <a:solidFill>
-                      <a:srgbClr val="5E5E5E"/>
-                    </a:solidFill>
-                    <a:latin typeface="Courier"/>
-                  </a:rPr>
-                  <a:t>:</a:t>
-                </a:r>
-                <a:r>
-                  <a:rPr>
-                    <a:solidFill>
-                      <a:srgbClr val="AD0000"/>
-                    </a:solidFill>
-                    <a:latin typeface="Courier"/>
-                  </a:rPr>
-                  <a:t>1.0</a:t>
-                </a:r>
-                <a:br/>
-                <a:r>
-                  <a:rPr>
-                    <a:solidFill>
-                      <a:srgbClr val="003B4F"/>
-                    </a:solidFill>
-                    <a:latin typeface="Courier"/>
-                  </a:rPr>
-                  <a:t>    fig </a:t>
-                </a:r>
-                <a:r>
-                  <a:rPr>
-                    <a:solidFill>
-                      <a:srgbClr val="5E5E5E"/>
-                    </a:solidFill>
-                    <a:latin typeface="Courier"/>
-                  </a:rPr>
-                  <a:t>=</a:t>
-                </a:r>
-                <a:r>
-                  <a:rPr>
-                    <a:solidFill>
-                      <a:srgbClr val="003B4F"/>
-                    </a:solidFill>
-                    <a:latin typeface="Courier"/>
-                  </a:rPr>
-                  <a:t> </a:t>
-                </a:r>
-                <a:r>
-                  <a:rPr>
-                    <a:solidFill>
-                      <a:srgbClr val="4758AB"/>
-                    </a:solidFill>
-                    <a:latin typeface="Courier"/>
-                  </a:rPr>
-                  <a:t>Figure</a:t>
-                </a:r>
-                <a:r>
-                  <a:rPr>
-                    <a:solidFill>
-                      <a:srgbClr val="003B4F"/>
-                    </a:solidFill>
-                    <a:latin typeface="Courier"/>
-                  </a:rPr>
-                  <a:t>(; size</a:t>
-                </a:r>
-                <a:r>
-                  <a:rPr>
-                    <a:solidFill>
-                      <a:srgbClr val="5E5E5E"/>
-                    </a:solidFill>
-                    <a:latin typeface="Courier"/>
-                  </a:rPr>
-                  <a:t>=</a:t>
-                </a:r>
-                <a:r>
-                  <a:rPr>
-                    <a:solidFill>
-                      <a:srgbClr val="003B4F"/>
-                    </a:solidFill>
-                    <a:latin typeface="Courier"/>
-                  </a:rPr>
-                  <a:t>(</a:t>
-                </a:r>
-                <a:r>
-                  <a:rPr>
-                    <a:solidFill>
-                      <a:srgbClr val="AD0000"/>
-                    </a:solidFill>
-                    <a:latin typeface="Courier"/>
-                  </a:rPr>
-                  <a:t>520</a:t>
-                </a:r>
-                <a:r>
-                  <a:rPr>
-                    <a:solidFill>
-                      <a:srgbClr val="003B4F"/>
-                    </a:solidFill>
-                    <a:latin typeface="Courier"/>
-                  </a:rPr>
-                  <a:t>, </a:t>
-                </a:r>
-                <a:r>
-                  <a:rPr>
-                    <a:solidFill>
-                      <a:srgbClr val="AD0000"/>
-                    </a:solidFill>
-                    <a:latin typeface="Courier"/>
-                  </a:rPr>
-                  <a:t>340</a:t>
-                </a:r>
-                <a:r>
-                  <a:rPr>
-                    <a:solidFill>
-                      <a:srgbClr val="003B4F"/>
-                    </a:solidFill>
-                    <a:latin typeface="Courier"/>
-                  </a:rPr>
-                  <a:t>))</a:t>
-                </a:r>
-                <a:br/>
-                <a:r>
-                  <a:rPr>
-                    <a:solidFill>
-                      <a:srgbClr val="003B4F"/>
-                    </a:solidFill>
-                    <a:latin typeface="Courier"/>
-                  </a:rPr>
-                  <a:t>    ax </a:t>
-                </a:r>
-                <a:r>
-                  <a:rPr>
-                    <a:solidFill>
-                      <a:srgbClr val="5E5E5E"/>
-                    </a:solidFill>
-                    <a:latin typeface="Courier"/>
-                  </a:rPr>
-                  <a:t>=</a:t>
-                </a:r>
-                <a:r>
-                  <a:rPr>
-                    <a:solidFill>
-                      <a:srgbClr val="003B4F"/>
-                    </a:solidFill>
-                    <a:latin typeface="Courier"/>
-                  </a:rPr>
-                  <a:t> </a:t>
-                </a:r>
-                <a:r>
-                  <a:rPr>
-                    <a:solidFill>
-                      <a:srgbClr val="4758AB"/>
-                    </a:solidFill>
-                    <a:latin typeface="Courier"/>
-                  </a:rPr>
-                  <a:t>Axis</a:t>
-                </a:r>
-                <a:r>
-                  <a:rPr>
-                    <a:solidFill>
-                      <a:srgbClr val="003B4F"/>
-                    </a:solidFill>
-                    <a:latin typeface="Courier"/>
-                  </a:rPr>
-                  <a:t>(fig[</a:t>
-                </a:r>
-                <a:r>
-                  <a:rPr>
-                    <a:solidFill>
-                      <a:srgbClr val="AD0000"/>
-                    </a:solidFill>
-                    <a:latin typeface="Courier"/>
-                  </a:rPr>
-                  <a:t>1</a:t>
-                </a:r>
-                <a:r>
-                  <a:rPr>
-                    <a:solidFill>
-                      <a:srgbClr val="003B4F"/>
-                    </a:solidFill>
-                    <a:latin typeface="Courier"/>
-                  </a:rPr>
-                  <a:t>, </a:t>
-                </a:r>
-                <a:r>
-                  <a:rPr>
-                    <a:solidFill>
-                      <a:srgbClr val="AD0000"/>
-                    </a:solidFill>
-                    <a:latin typeface="Courier"/>
-                  </a:rPr>
-                  <a:t>1</a:t>
-                </a:r>
-                <a:r>
-                  <a:rPr>
-                    <a:solidFill>
-                      <a:srgbClr val="003B4F"/>
-                    </a:solidFill>
-                    <a:latin typeface="Courier"/>
-                  </a:rPr>
-                  <a:t>]; xlabel</a:t>
-                </a:r>
-                <a:r>
-                  <a:rPr>
-                    <a:solidFill>
-                      <a:srgbClr val="5E5E5E"/>
-                    </a:solidFill>
-                    <a:latin typeface="Courier"/>
-                  </a:rPr>
-                  <a:t>=</a:t>
-                </a:r>
-                <a:r>
-                  <a:rPr>
-                    <a:solidFill>
-                      <a:srgbClr val="003B4F"/>
-                    </a:solidFill>
-                    <a:latin typeface="Courier"/>
-                  </a:rPr>
-                  <a:t>L</a:t>
-                </a:r>
-                <a:r>
-                  <a:rPr>
-                    <a:solidFill>
-                      <a:srgbClr val="20794D"/>
-                    </a:solidFill>
-                    <a:latin typeface="Courier"/>
-                  </a:rPr>
-                  <a:t>"f_1"</a:t>
-                </a:r>
-                <a:r>
-                  <a:rPr>
-                    <a:solidFill>
-                      <a:srgbClr val="003B4F"/>
-                    </a:solidFill>
-                    <a:latin typeface="Courier"/>
-                  </a:rPr>
-                  <a:t>, ylabel</a:t>
-                </a:r>
-                <a:r>
-                  <a:rPr>
-                    <a:solidFill>
-                      <a:srgbClr val="5E5E5E"/>
-                    </a:solidFill>
-                    <a:latin typeface="Courier"/>
-                  </a:rPr>
-                  <a:t>=</a:t>
-                </a:r>
-                <a:r>
-                  <a:rPr>
-                    <a:solidFill>
-                      <a:srgbClr val="003B4F"/>
-                    </a:solidFill>
-                    <a:latin typeface="Courier"/>
-                  </a:rPr>
-                  <a:t>L</a:t>
-                </a:r>
-                <a:r>
-                  <a:rPr>
-                    <a:solidFill>
-                      <a:srgbClr val="20794D"/>
-                    </a:solidFill>
-                    <a:latin typeface="Courier"/>
-                  </a:rPr>
-                  <a:t>"f_2"</a:t>
-                </a:r>
-                <a:r>
-                  <a:rPr>
-                    <a:solidFill>
-                      <a:srgbClr val="003B4F"/>
-                    </a:solidFill>
-                    <a:latin typeface="Courier"/>
-                  </a:rPr>
-                  <a:t>,</a:t>
-                </a:r>
-                <a:br/>
-                <a:r>
-                  <a:rPr>
-                    <a:solidFill>
-                      <a:srgbClr val="003B4F"/>
-                    </a:solidFill>
-                    <a:latin typeface="Courier"/>
-                  </a:rPr>
-                  <a:t>        limits</a:t>
-                </a:r>
-                <a:r>
-                  <a:rPr>
-                    <a:solidFill>
-                      <a:srgbClr val="5E5E5E"/>
-                    </a:solidFill>
-                    <a:latin typeface="Courier"/>
-                  </a:rPr>
-                  <a:t>=</a:t>
-                </a:r>
-                <a:r>
-                  <a:rPr>
-                    <a:solidFill>
-                      <a:srgbClr val="003B4F"/>
-                    </a:solidFill>
-                    <a:latin typeface="Courier"/>
-                  </a:rPr>
-                  <a:t>(</a:t>
-                </a:r>
-                <a:r>
-                  <a:rPr>
-                    <a:solidFill>
-                      <a:srgbClr val="5E5E5E"/>
-                    </a:solidFill>
-                    <a:latin typeface="Courier"/>
-                  </a:rPr>
-                  <a:t>-</a:t>
-                </a:r>
-                <a:r>
-                  <a:rPr>
-                    <a:solidFill>
-                      <a:srgbClr val="AD0000"/>
-                    </a:solidFill>
-                    <a:latin typeface="Courier"/>
-                  </a:rPr>
-                  <a:t>0.05</a:t>
-                </a:r>
-                <a:r>
-                  <a:rPr>
-                    <a:solidFill>
-                      <a:srgbClr val="003B4F"/>
-                    </a:solidFill>
-                    <a:latin typeface="Courier"/>
-                  </a:rPr>
-                  <a:t>, </a:t>
-                </a:r>
-                <a:r>
-                  <a:rPr>
-                    <a:solidFill>
-                      <a:srgbClr val="AD0000"/>
-                    </a:solidFill>
-                    <a:latin typeface="Courier"/>
-                  </a:rPr>
-                  <a:t>1.05</a:t>
-                </a:r>
-                <a:r>
-                  <a:rPr>
-                    <a:solidFill>
-                      <a:srgbClr val="003B4F"/>
-                    </a:solidFill>
-                    <a:latin typeface="Courier"/>
-                  </a:rPr>
-                  <a:t>, </a:t>
-                </a:r>
-                <a:r>
-                  <a:rPr>
-                    <a:solidFill>
-                      <a:srgbClr val="5E5E5E"/>
-                    </a:solidFill>
-                    <a:latin typeface="Courier"/>
-                  </a:rPr>
-                  <a:t>-</a:t>
-                </a:r>
-                <a:r>
-                  <a:rPr>
-                    <a:solidFill>
-                      <a:srgbClr val="AD0000"/>
-                    </a:solidFill>
-                    <a:latin typeface="Courier"/>
-                  </a:rPr>
-                  <a:t>0.05</a:t>
-                </a:r>
-                <a:r>
-                  <a:rPr>
-                    <a:solidFill>
-                      <a:srgbClr val="003B4F"/>
-                    </a:solidFill>
-                    <a:latin typeface="Courier"/>
-                  </a:rPr>
-                  <a:t>, </a:t>
-                </a:r>
-                <a:r>
-                  <a:rPr>
-                    <a:solidFill>
-                      <a:srgbClr val="AD0000"/>
-                    </a:solidFill>
-                    <a:latin typeface="Courier"/>
-                  </a:rPr>
-                  <a:t>1.1</a:t>
-                </a:r>
-                <a:r>
-                  <a:rPr>
-                    <a:solidFill>
-                      <a:srgbClr val="003B4F"/>
-                    </a:solidFill>
-                    <a:latin typeface="Courier"/>
-                  </a:rPr>
-                  <a:t>))</a:t>
-                </a:r>
-                <a:br/>
-                <a:r>
-                  <a:rPr>
-                    <a:solidFill>
-                      <a:srgbClr val="003B4F"/>
-                    </a:solidFill>
-                    <a:latin typeface="Courier"/>
-                  </a:rPr>
-                  <a:t>    </a:t>
-                </a:r>
-                <a:r>
-                  <a:rPr>
-                    <a:solidFill>
-                      <a:srgbClr val="4758AB"/>
-                    </a:solidFill>
-                    <a:latin typeface="Courier"/>
-                  </a:rPr>
-                  <a:t>lines!</a:t>
-                </a:r>
-                <a:r>
-                  <a:rPr>
-                    <a:solidFill>
-                      <a:srgbClr val="003B4F"/>
-                    </a:solidFill>
-                    <a:latin typeface="Courier"/>
-                  </a:rPr>
-                  <a:t>(ax, fs, </a:t>
-                </a:r>
-                <a:r>
-                  <a:rPr>
-                    <a:solidFill>
-                      <a:srgbClr val="AD0000"/>
-                    </a:solidFill>
-                    <a:latin typeface="Courier"/>
-                  </a:rPr>
-                  <a:t>1</a:t>
-                </a:r>
-                <a:r>
-                  <a:rPr>
-                    <a:solidFill>
-                      <a:srgbClr val="003B4F"/>
-                    </a:solidFill>
-                    <a:latin typeface="Courier"/>
-                  </a:rPr>
-                  <a:t> </a:t>
-                </a:r>
-                <a:r>
-                  <a:rPr>
-                    <a:solidFill>
-                      <a:srgbClr val="5E5E5E"/>
-                    </a:solidFill>
-                    <a:latin typeface="Courier"/>
-                  </a:rPr>
-                  <a:t>.-</a:t>
-                </a:r>
-                <a:r>
-                  <a:rPr>
-                    <a:solidFill>
-                      <a:srgbClr val="003B4F"/>
-                    </a:solidFill>
-                    <a:latin typeface="Courier"/>
-                  </a:rPr>
-                  <a:t> </a:t>
-                </a:r>
-                <a:r>
-                  <a:rPr>
-                    <a:solidFill>
-                      <a:srgbClr val="4758AB"/>
-                    </a:solidFill>
-                    <a:latin typeface="Courier"/>
-                  </a:rPr>
-                  <a:t>sqrt</a:t>
-                </a:r>
-                <a:r>
-                  <a:rPr>
-                    <a:solidFill>
-                      <a:srgbClr val="003B4F"/>
-                    </a:solidFill>
-                    <a:latin typeface="Courier"/>
-                  </a:rPr>
-                  <a:t>.(fs); color</a:t>
-                </a:r>
-                <a:r>
-                  <a:rPr>
-                    <a:solidFill>
-                      <a:srgbClr val="5E5E5E"/>
-                    </a:solidFill>
-                    <a:latin typeface="Courier"/>
-                  </a:rPr>
-                  <a:t>=:</a:t>
-                </a:r>
-                <a:r>
-                  <a:rPr>
-                    <a:solidFill>
-                      <a:srgbClr val="003B4F"/>
-                    </a:solidFill>
-                    <a:latin typeface="Courier"/>
-                  </a:rPr>
-                  <a:t>tomato, linewidth</a:t>
-                </a:r>
-                <a:r>
-                  <a:rPr>
-                    <a:solidFill>
-                      <a:srgbClr val="5E5E5E"/>
-                    </a:solidFill>
-                    <a:latin typeface="Courier"/>
-                  </a:rPr>
-                  <a:t>=</a:t>
-                </a:r>
-                <a:r>
-                  <a:rPr>
-                    <a:solidFill>
-                      <a:srgbClr val="AD0000"/>
-                    </a:solidFill>
-                    <a:latin typeface="Courier"/>
-                  </a:rPr>
-                  <a:t>3</a:t>
-                </a:r>
-                <a:r>
-                  <a:rPr>
-                    <a:solidFill>
-                      <a:srgbClr val="003B4F"/>
-                    </a:solidFill>
-                    <a:latin typeface="Courier"/>
-                  </a:rPr>
-                  <a:t>,</a:t>
-                </a:r>
-                <a:br/>
-                <a:r>
-                  <a:rPr>
-                    <a:solidFill>
-                      <a:srgbClr val="003B4F"/>
-                    </a:solidFill>
-                    <a:latin typeface="Courier"/>
-                  </a:rPr>
-                  <a:t>        label</a:t>
-                </a:r>
-                <a:r>
-                  <a:rPr>
-                    <a:solidFill>
-                      <a:srgbClr val="5E5E5E"/>
-                    </a:solidFill>
-                    <a:latin typeface="Courier"/>
-                  </a:rPr>
-                  <a:t>=</a:t>
-                </a:r>
-                <a:r>
-                  <a:rPr>
-                    <a:solidFill>
-                      <a:srgbClr val="20794D"/>
-                    </a:solidFill>
-                    <a:latin typeface="Courier"/>
-                  </a:rPr>
-                  <a:t>"Pareto front"</a:t>
-                </a:r>
-                <a:r>
-                  <a:rPr>
-                    <a:solidFill>
-                      <a:srgbClr val="003B4F"/>
-                    </a:solidFill>
-                    <a:latin typeface="Courier"/>
-                  </a:rPr>
-                  <a:t>)</a:t>
-                </a:r>
-                <a:br/>
-                <a:r>
-                  <a:rPr>
-                    <a:solidFill>
-                      <a:srgbClr val="003B4F"/>
-                    </a:solidFill>
-                    <a:latin typeface="Courier"/>
-                  </a:rPr>
-                  <a:t>    </a:t>
-                </a:r>
-                <a:r>
-                  <a:rPr>
-                    <a:solidFill>
-                      <a:srgbClr val="4758AB"/>
-                    </a:solidFill>
-                    <a:latin typeface="Courier"/>
-                  </a:rPr>
-                  <a:t>axislegend</a:t>
-                </a:r>
-                <a:r>
-                  <a:rPr>
-                    <a:solidFill>
-                      <a:srgbClr val="003B4F"/>
-                    </a:solidFill>
-                    <a:latin typeface="Courier"/>
-                  </a:rPr>
-                  <a:t>(ax; position</a:t>
-                </a:r>
-                <a:r>
-                  <a:rPr>
-                    <a:solidFill>
-                      <a:srgbClr val="5E5E5E"/>
-                    </a:solidFill>
-                    <a:latin typeface="Courier"/>
-                  </a:rPr>
-                  <a:t>=:</a:t>
-                </a:r>
-                <a:r>
-                  <a:rPr>
-                    <a:solidFill>
-                      <a:srgbClr val="003B4F"/>
-                    </a:solidFill>
-                    <a:latin typeface="Courier"/>
-                  </a:rPr>
-                  <a:t>rt)</a:t>
-                </a:r>
-                <a:br/>
-                <a:r>
-                  <a:rPr>
-                    <a:solidFill>
-                      <a:srgbClr val="003B4F"/>
-                    </a:solidFill>
-                    <a:latin typeface="Courier"/>
-                  </a:rPr>
-                  <a:t>    fig</a:t>
-                </a:r>
-                <a:br/>
-                <a:r>
-                  <a:rPr b="1">
-                    <a:solidFill>
-                      <a:srgbClr val="003B4F"/>
-                    </a:solidFill>
-                    <a:latin typeface="Courier"/>
-                  </a:rPr>
-                  <a:t>end</a:t>
-                </a:r>
-              </a:p>
-            </p:txBody>
-          </p:sp>
-        </mc:Choice>
-      </mc:AlternateContent>
-      <p:pic>
-        <p:nvPicPr>
-          <p:cNvPr descr="index_files/figure-pptx/fig-zdt1-output-1.png" id="0" name="Picture 1"/>
-          <p:cNvPicPr>
-            <a:picLocks noGrp="1" noChangeAspect="1"/>
-          </p:cNvPicPr>
-          <p:nvPr/>
-        </p:nvPicPr>
-        <p:blipFill>
-          <a:blip r:embed="rId3"/>
-          <a:stretch>
-            <a:fillRect/>
-          </a:stretch>
-        </p:blipFill>
-        <p:spPr bwMode="auto">
-          <a:xfrm>
-            <a:off x="3568700" y="469900"/>
-            <a:ext cx="5105400" cy="3340100"/>
-          </a:xfrm>
-          <a:prstGeom prst="rect">
-            <a:avLst/>
-          </a:prstGeom>
-          <a:noFill/>
-          <a:ln w="9525">
-            <a:noFill/>
-            <a:headEnd/>
-            <a:tailEnd/>
-          </a:ln>
-        </p:spPr>
-      </p:pic>
       <p:sp>
         <p:nvSpPr>
-          <p:cNvPr id="1" name="TextBox 3"/>
-          <p:cNvSpPr txBox="1"/>
+          <p:cNvPr id="3" name="Content Placeholder 2"/>
+          <p:cNvSpPr>
+            <a:spLocks noGrp="1"/>
+          </p:cNvSpPr>
           <p:nvPr>
             <p:ph idx="1"/>
           </p:nvPr>
         </p:nvSpPr>
-        <p:spPr>
-          <a:xfrm>
-            <a:off x="3568700" y="4076700"/>
-            <a:ext cx="5105400" cy="508000"/>
-          </a:xfrm>
-          <a:prstGeom prst="rect">
-            <a:avLst/>
-          </a:prstGeom>
-          <a:noFill/>
-        </p:spPr>
+        <p:spPr/>
         <p:txBody>
           <a:bodyPr/>
           <a:lstStyle/>
           <a:p>
-            <a:pPr lvl="0" indent="0" marL="0" algn="ctr">
+            <a:pPr lvl="0" indent="0" marL="0">
+              <a:spcBef>
+                <a:spcPts val="3000"/>
+              </a:spcBef>
               <a:buNone/>
             </a:pPr>
             <a:r>
-              <a:rPr/>
-              <a:t>Figure 4: Canonical visualization of ZDT1: the analytical Pareto front in objective space.</a:t>
+              <a:rPr b="1"/>
+              <a:t>ZDT1: A Test Problem</a:t>
             </a:r>
           </a:p>
         </p:txBody>
